--- a/Древний_Египет.pptx
+++ b/Древний_Египет.pptx
@@ -957,6 +957,7 @@
             <a:r>
               <a:rPr lang="en-US" dirty="0"/>
               <a:t>Мумифицировали не только людей, но и животных: кошек, ибисов, крокодилов — миллионы мумий.
+Осирис — бог загробного мира и судья умерших. Маат — богиня правды и порядка, её символ — страусиное перо. Амат (Аммит) — чудовище из «Книги мёртвых»: если сердце оказывалось тяжелее пера, Амат съедала его, и душа исчезала навсегда.
 Фото: The Cleveland Museum of Art, Unsplash.</a:t>
             </a:r>
             <a:endParaRPr lang="en-US" dirty="0"/>
@@ -1045,7 +1046,7 @@
           <a:p>
             <a:r>
               <a:rPr lang="en-US" dirty="0"/>
-              <a:t>Гробницу Тутанхамона в Долине царей нашёл археолог Говард Картер в ноябре 1922 года. Почти все другие царские гробницы разграбили ещё в древности.
+              <a:t>Тутанхамон правил около 1332–1323 гг. до н. э. Он вернул почитание старых богов, которых отменил его отец Эхнатон. Гробницу в Долине царей нашёл археолог Говард Картер в ноябре 1922 года: её вход скрывали обломки, оставшиеся после строительства соседней гробницы Рамсеса VI. Почти все остальные царские гробницы разграбили ещё в древности. Внутренний гроб фараона сделан из золота и весит около 110 кг.
 Фото: Suzi Kim, Unsplash.</a:t>
             </a:r>
             <a:endParaRPr lang="en-US" dirty="0"/>
@@ -1312,7 +1313,8 @@
           <a:p>
             <a:r>
               <a:rPr lang="en-US" dirty="0"/>
-              <a:t>Последние мамонты жили на острове Врангеля примерно до 2000 г. до н. э., а пирамиду Хеопса построили около 2560 г. до н. э. Клеопатра умерла в 30 г. до н. э.: от пирамиды её отделяют около 2500 лет, а от полёта на Луну в 1969 году — около 2000. Рисунки Сфинкса без носа сделал датский путешественник Фредерик Норден в 1737 году, Наполеон пришёл в Египет в 1798-м. Краску «мумия коричневая» продавали до XX века. В 1890 году около 19 тонн кошачьих мумий привезли в Англию и продали как удобрение.
+              <a:t>Нос Сфинкса. По легенде, его отстрелили из пушки французские солдаты Наполеона во время Египетского похода 1798 года. Но датский капитан Фредерик Норден зарисовал Сфинкса ещё в 1737 году, и носа на рисунках уже нет. Египетский историк аль-Макризи (XV век) писал, что в 1378 году лицо статуи изуродовал суфий Мухаммад Саим ад-Дахр: его возмущало, что крестьяне приносят Сфинксу дары, чтобы получить хороший урожай. Египтолог Марк Лернер нашёл на лице следы стержней и зубил, которыми нос отбивали намеренно.
+Мамонты на острове Врангеля жили примерно до 2000 г. до н. э., а пирамиду Хеопса построили около 2560 г. до н. э. Клеопатра умерла в 30 г. до н. э.: от пирамиды её отделяют около 2500 лет, от полёта на Луну в 1969 году — около 2000. Краску «мумия коричневая» продавали до XX века, а в 1890 году около 19 тонн кошачьих мумий привезли в Англию и продали как удобрение.
 Фото: Dmitrii Zhodzishskii, Unsplash.</a:t>
             </a:r>
             <a:endParaRPr lang="en-US" dirty="0"/>
@@ -1937,7 +1939,7 @@
                 <a:ea typeface="Calibri" pitchFamily="34" charset="-122"/>
                 <a:cs typeface="Calibri" pitchFamily="34" charset="-120"/>
               </a:rPr>
-              <a:t>Пирамиды, мумии, иероглифы — и три тайны, о которых молчат учебники</a:t>
+              <a:t>Пирамиды, мумии, иероглифы и удивительные факты о стране фараонов</a:t>
             </a:r>
             <a:endParaRPr lang="en-US" sz="1800" dirty="0"/>
           </a:p>
@@ -2124,7 +2126,7 @@
         </p:blipFill>
         <p:spPr>
           <a:xfrm>
-            <a:off x="4297680" y="868680"/>
+            <a:off x="4297680" y="1188720"/>
             <a:ext cx="548640" cy="548640"/>
           </a:xfrm>
           <a:prstGeom prst="rect">
@@ -2140,7 +2142,7 @@
         </p:nvSpPr>
         <p:spPr>
           <a:xfrm>
-            <a:off x="457200" y="1554480"/>
+            <a:off x="457200" y="1874520"/>
             <a:ext cx="8229600" cy="868680"/>
           </a:xfrm>
           <a:prstGeom prst="rect">
@@ -2186,7 +2188,7 @@
         </p:nvSpPr>
         <p:spPr>
           <a:xfrm>
-            <a:off x="914400" y="2468880"/>
+            <a:off x="914400" y="2788920"/>
             <a:ext cx="7315200" cy="411480"/>
           </a:xfrm>
           <a:prstGeom prst="rect">
@@ -2221,52 +2223,6 @@
               <a:t>Древний Египет хранит ещё тысячи тайн — ищите их сами!</a:t>
             </a:r>
             <a:endParaRPr lang="en-US" sz="1800" dirty="0"/>
-          </a:p>
-        </p:txBody>
-      </p:sp>
-      <p:sp>
-        <p:nvSpPr>
-          <p:cNvPr id="7" name="Text 2"/>
-          <p:cNvSpPr txBox="1"/>
-          <p:nvPr/>
-        </p:nvSpPr>
-        <p:spPr>
-          <a:xfrm>
-            <a:off x="914400" y="3429000"/>
-            <a:ext cx="7315200" cy="457200"/>
-          </a:xfrm>
-          <a:prstGeom prst="rect">
-            <a:avLst/>
-          </a:prstGeom>
-          <a:noFill/>
-          <a:ln/>
-          <a:effectLst>
-            <a:outerShdw sx="100000" sy="100000" kx="0" ky="0" algn="bl" rotWithShape="0" blurRad="63500" dist="25400" dir="5400000">
-              <a:srgbClr val="000000">
-                <a:alpha val="55000"/>
-              </a:srgbClr>
-            </a:outerShdw>
-          </a:effectLst>
-        </p:spPr>
-        <p:txBody>
-          <a:bodyPr wrap="square" lIns="0" tIns="0" rIns="0" bIns="0" rtlCol="0" anchor="ctr"/>
-          <a:lstStyle/>
-          <a:p>
-            <a:pPr algn="ctr" indent="0" marL="0">
-              <a:buNone/>
-            </a:pPr>
-            <a:r>
-              <a:rPr lang="en-US" sz="2400" b="1" spc="400" kern="0" dirty="0">
-                <a:solidFill>
-                  <a:srgbClr val="E3BE5C"/>
-                </a:solidFill>
-                <a:latin typeface="Cambria" pitchFamily="34" charset="0"/>
-                <a:ea typeface="Cambria" pitchFamily="34" charset="-122"/>
-                <a:cs typeface="Cambria" pitchFamily="34" charset="-120"/>
-              </a:rPr>
-              <a:t>Made by Heinrich Studio</a:t>
-            </a:r>
-            <a:endParaRPr lang="en-US" sz="2400" dirty="0"/>
           </a:p>
         </p:txBody>
       </p:sp>
@@ -4589,8 +4545,8 @@
         </p:nvSpPr>
         <p:spPr>
           <a:xfrm>
-            <a:off x="3566160" y="1545336"/>
-            <a:ext cx="329184" cy="329184"/>
+            <a:off x="3566160" y="1481328"/>
+            <a:ext cx="310896" cy="310896"/>
           </a:xfrm>
           <a:prstGeom prst="ellipse">
             <a:avLst/>
@@ -4612,7 +4568,7 @@
               <a:buNone/>
             </a:pPr>
             <a:r>
-              <a:rPr lang="en-US" sz="1300" b="1" dirty="0">
+              <a:rPr lang="en-US" sz="1250" b="1" dirty="0">
                 <a:solidFill>
                   <a:srgbClr val="FFFFFF"/>
                 </a:solidFill>
@@ -4622,7 +4578,7 @@
               </a:rPr>
               <a:t>1</a:t>
             </a:r>
-            <a:endParaRPr lang="en-US" sz="1300" dirty="0"/>
+            <a:endParaRPr lang="en-US" sz="1250" dirty="0"/>
           </a:p>
         </p:txBody>
       </p:sp>
@@ -4634,8 +4590,8 @@
         </p:nvSpPr>
         <p:spPr>
           <a:xfrm>
-            <a:off x="4041648" y="1472184"/>
-            <a:ext cx="4645152" cy="475488"/>
+            <a:off x="4023360" y="1417320"/>
+            <a:ext cx="4663440" cy="438912"/>
           </a:xfrm>
           <a:prstGeom prst="rect">
             <a:avLst/>
@@ -4651,7 +4607,7 @@
               <a:buNone/>
             </a:pPr>
             <a:r>
-              <a:rPr lang="en-US" sz="1250" dirty="0">
+              <a:rPr lang="en-US" sz="1200" dirty="0">
                 <a:solidFill>
                   <a:srgbClr val="2A1E12"/>
                 </a:solidFill>
@@ -4661,7 +4617,7 @@
               </a:rPr>
               <a:t>Мозг доставали через нос длинным крючком — его считали ненужным.</a:t>
             </a:r>
-            <a:endParaRPr lang="en-US" sz="1250" dirty="0"/>
+            <a:endParaRPr lang="en-US" sz="1200" dirty="0"/>
           </a:p>
         </p:txBody>
       </p:sp>
@@ -4673,8 +4629,8 @@
         </p:nvSpPr>
         <p:spPr>
           <a:xfrm>
-            <a:off x="3566160" y="2093976"/>
-            <a:ext cx="329184" cy="329184"/>
+            <a:off x="3566160" y="1938528"/>
+            <a:ext cx="310896" cy="310896"/>
           </a:xfrm>
           <a:prstGeom prst="ellipse">
             <a:avLst/>
@@ -4696,7 +4652,7 @@
               <a:buNone/>
             </a:pPr>
             <a:r>
-              <a:rPr lang="en-US" sz="1300" b="1" dirty="0">
+              <a:rPr lang="en-US" sz="1250" b="1" dirty="0">
                 <a:solidFill>
                   <a:srgbClr val="FFFFFF"/>
                 </a:solidFill>
@@ -4706,7 +4662,7 @@
               </a:rPr>
               <a:t>2</a:t>
             </a:r>
-            <a:endParaRPr lang="en-US" sz="1300" dirty="0"/>
+            <a:endParaRPr lang="en-US" sz="1250" dirty="0"/>
           </a:p>
         </p:txBody>
       </p:sp>
@@ -4718,8 +4674,8 @@
         </p:nvSpPr>
         <p:spPr>
           <a:xfrm>
-            <a:off x="4041648" y="2020824"/>
-            <a:ext cx="4645152" cy="475488"/>
+            <a:off x="4023360" y="1874520"/>
+            <a:ext cx="4663440" cy="438912"/>
           </a:xfrm>
           <a:prstGeom prst="rect">
             <a:avLst/>
@@ -4735,7 +4691,7 @@
               <a:buNone/>
             </a:pPr>
             <a:r>
-              <a:rPr lang="en-US" sz="1250" dirty="0">
+              <a:rPr lang="en-US" sz="1200" dirty="0">
                 <a:solidFill>
                   <a:srgbClr val="2A1E12"/>
                 </a:solidFill>
@@ -4745,7 +4701,7 @@
               </a:rPr>
               <a:t>Печень, лёгкие, желудок и кишечник клали в 4 сосуда-канопы. Сердце оставляли в теле.</a:t>
             </a:r>
-            <a:endParaRPr lang="en-US" sz="1250" dirty="0"/>
+            <a:endParaRPr lang="en-US" sz="1200" dirty="0"/>
           </a:p>
         </p:txBody>
       </p:sp>
@@ -4757,8 +4713,8 @@
         </p:nvSpPr>
         <p:spPr>
           <a:xfrm>
-            <a:off x="3566160" y="2642616"/>
-            <a:ext cx="329184" cy="329184"/>
+            <a:off x="3566160" y="2395728"/>
+            <a:ext cx="310896" cy="310896"/>
           </a:xfrm>
           <a:prstGeom prst="ellipse">
             <a:avLst/>
@@ -4780,7 +4736,7 @@
               <a:buNone/>
             </a:pPr>
             <a:r>
-              <a:rPr lang="en-US" sz="1300" b="1" dirty="0">
+              <a:rPr lang="en-US" sz="1250" b="1" dirty="0">
                 <a:solidFill>
                   <a:srgbClr val="FFFFFF"/>
                 </a:solidFill>
@@ -4790,7 +4746,7 @@
               </a:rPr>
               <a:t>3</a:t>
             </a:r>
-            <a:endParaRPr lang="en-US" sz="1300" dirty="0"/>
+            <a:endParaRPr lang="en-US" sz="1250" dirty="0"/>
           </a:p>
         </p:txBody>
       </p:sp>
@@ -4802,8 +4758,8 @@
         </p:nvSpPr>
         <p:spPr>
           <a:xfrm>
-            <a:off x="4041648" y="2569464"/>
-            <a:ext cx="4645152" cy="475488"/>
+            <a:off x="4023360" y="2331720"/>
+            <a:ext cx="4663440" cy="438912"/>
           </a:xfrm>
           <a:prstGeom prst="rect">
             <a:avLst/>
@@ -4819,7 +4775,7 @@
               <a:buNone/>
             </a:pPr>
             <a:r>
-              <a:rPr lang="en-US" sz="1250" dirty="0">
+              <a:rPr lang="en-US" sz="1200" dirty="0">
                 <a:solidFill>
                   <a:srgbClr val="2A1E12"/>
                 </a:solidFill>
@@ -4829,7 +4785,7 @@
               </a:rPr>
               <a:t>40 дней тело сушили в соли натрон.</a:t>
             </a:r>
-            <a:endParaRPr lang="en-US" sz="1250" dirty="0"/>
+            <a:endParaRPr lang="en-US" sz="1200" dirty="0"/>
           </a:p>
         </p:txBody>
       </p:sp>
@@ -4841,8 +4797,8 @@
         </p:nvSpPr>
         <p:spPr>
           <a:xfrm>
-            <a:off x="3566160" y="3191256"/>
-            <a:ext cx="329184" cy="329184"/>
+            <a:off x="3566160" y="2852928"/>
+            <a:ext cx="310896" cy="310896"/>
           </a:xfrm>
           <a:prstGeom prst="ellipse">
             <a:avLst/>
@@ -4864,7 +4820,7 @@
               <a:buNone/>
             </a:pPr>
             <a:r>
-              <a:rPr lang="en-US" sz="1300" b="1" dirty="0">
+              <a:rPr lang="en-US" sz="1250" b="1" dirty="0">
                 <a:solidFill>
                   <a:srgbClr val="FFFFFF"/>
                 </a:solidFill>
@@ -4874,7 +4830,7 @@
               </a:rPr>
               <a:t>4</a:t>
             </a:r>
-            <a:endParaRPr lang="en-US" sz="1300" dirty="0"/>
+            <a:endParaRPr lang="en-US" sz="1250" dirty="0"/>
           </a:p>
         </p:txBody>
       </p:sp>
@@ -4886,8 +4842,8 @@
         </p:nvSpPr>
         <p:spPr>
           <a:xfrm>
-            <a:off x="4041648" y="3118104"/>
-            <a:ext cx="4645152" cy="475488"/>
+            <a:off x="4023360" y="2788920"/>
+            <a:ext cx="4663440" cy="438912"/>
           </a:xfrm>
           <a:prstGeom prst="rect">
             <a:avLst/>
@@ -4903,7 +4859,7 @@
               <a:buNone/>
             </a:pPr>
             <a:r>
-              <a:rPr lang="en-US" sz="1250" dirty="0">
+              <a:rPr lang="en-US" sz="1200" dirty="0">
                 <a:solidFill>
                   <a:srgbClr val="2A1E12"/>
                 </a:solidFill>
@@ -4913,7 +4869,7 @@
               </a:rPr>
               <a:t>Обматывали льняными бинтами, а между слоями клали амулеты.</a:t>
             </a:r>
-            <a:endParaRPr lang="en-US" sz="1250" dirty="0"/>
+            <a:endParaRPr lang="en-US" sz="1200" dirty="0"/>
           </a:p>
         </p:txBody>
       </p:sp>
@@ -4925,12 +4881,12 @@
         </p:nvSpPr>
         <p:spPr>
           <a:xfrm>
-            <a:off x="3566160" y="3794760"/>
-            <a:ext cx="5120640" cy="868680"/>
+            <a:off x="3566160" y="3310128"/>
+            <a:ext cx="5120640" cy="1371600"/>
           </a:xfrm>
           <a:prstGeom prst="roundRect">
             <a:avLst>
-              <a:gd name="adj" fmla="val 10526"/>
+              <a:gd name="adj" fmla="val 6667"/>
             </a:avLst>
           </a:prstGeom>
           <a:solidFill>
@@ -4953,7 +4909,7 @@
       </p:sp>
       <p:pic>
         <p:nvPicPr>
-          <p:cNvPr id="17" name="Image 1" descr="/tmp/claude-0/-home-user-heinrich-mario/e7688653-8e48-5480-a009-7b18c0e4f8cc/scratchpad/egypt_build/assets/ic_feather_gold.png">    </p:cNvPr>
+          <p:cNvPr id="17" name="Image 1" descr="/tmp/claude-0/-home-user-heinrich-mario/e7688653-8e48-5480-a009-7b18c0e4f8cc/scratchpad/egypt_build/assets/ic_scales_gold.png">    </p:cNvPr>
           <p:cNvPicPr>
             <a:picLocks noChangeAspect="1"/>
           </p:cNvPicPr>
@@ -4967,8 +4923,8 @@
         </p:blipFill>
         <p:spPr>
           <a:xfrm>
-            <a:off x="3730752" y="3986784"/>
-            <a:ext cx="457200" cy="457200"/>
+            <a:off x="3749040" y="3465576"/>
+            <a:ext cx="438912" cy="438912"/>
           </a:xfrm>
           <a:prstGeom prst="rect">
             <a:avLst/>
@@ -4983,8 +4939,8 @@
         </p:nvSpPr>
         <p:spPr>
           <a:xfrm>
-            <a:off x="4343400" y="3840480"/>
-            <a:ext cx="4206240" cy="777240"/>
+            <a:off x="4343400" y="3401568"/>
+            <a:ext cx="4206240" cy="658368"/>
           </a:xfrm>
           <a:prstGeom prst="rect">
             <a:avLst/>
@@ -5000,7 +4956,7 @@
               <a:buNone/>
             </a:pPr>
             <a:r>
-              <a:rPr lang="en-US" sz="1200" b="1" dirty="0">
+              <a:rPr lang="en-US" sz="1150" b="1" dirty="0">
                 <a:solidFill>
                   <a:srgbClr val="E3BE5C"/>
                 </a:solidFill>
@@ -5014,7 +4970,7 @@
               <a:buNone/>
             </a:pPr>
             <a:r>
-              <a:rPr lang="en-US" sz="1200" dirty="0">
+              <a:rPr lang="en-US" sz="1150" dirty="0">
                 <a:solidFill>
                   <a:srgbClr val="F3E9D6"/>
                 </a:solidFill>
@@ -5022,15 +4978,92 @@
                 <a:ea typeface="Calibri" pitchFamily="34" charset="-122"/>
                 <a:cs typeface="Calibri" pitchFamily="34" charset="-120"/>
               </a:rPr>
-              <a:t>Сердце взвешивали против пера богини истины Маат. Если оно оказывалось тяжелее, его съедало чудовище Амат.</a:t>
-            </a:r>
-            <a:endParaRPr lang="en-US" sz="1200" dirty="0"/>
-          </a:p>
-        </p:txBody>
-      </p:sp>
-      <p:sp>
-        <p:nvSpPr>
-          <p:cNvPr id="19" name="Text 15"/>
+              <a:t>Бог загробного мира Осирис взвешивал сердце умершего против пера богини правды Маат. Если сердце было лёгким, человек попадал в загробный рай.</a:t>
+            </a:r>
+            <a:endParaRPr lang="en-US" sz="1150" dirty="0"/>
+          </a:p>
+        </p:txBody>
+      </p:sp>
+      <p:pic>
+        <p:nvPicPr>
+          <p:cNvPr id="19" name="Image 2" descr="/tmp/claude-0/-home-user-heinrich-mario/e7688653-8e48-5480-a009-7b18c0e4f8cc/scratchpad/egypt_build/assets/ic_croc_gold.png">    </p:cNvPr>
+          <p:cNvPicPr>
+            <a:picLocks noChangeAspect="1"/>
+          </p:cNvPicPr>
+          <p:nvPr/>
+        </p:nvPicPr>
+        <p:blipFill>
+          <a:blip r:embed="rId4"/>
+          <a:stretch>
+            <a:fillRect/>
+          </a:stretch>
+        </p:blipFill>
+        <p:spPr>
+          <a:xfrm>
+            <a:off x="3767328" y="4160520"/>
+            <a:ext cx="402336" cy="402336"/>
+          </a:xfrm>
+          <a:prstGeom prst="rect">
+            <a:avLst/>
+          </a:prstGeom>
+        </p:spPr>
+      </p:pic>
+      <p:sp>
+        <p:nvSpPr>
+          <p:cNvPr id="20" name="Text 15"/>
+          <p:cNvSpPr txBox="1"/>
+          <p:nvPr/>
+        </p:nvSpPr>
+        <p:spPr>
+          <a:xfrm>
+            <a:off x="4343400" y="4059936"/>
+            <a:ext cx="4206240" cy="566928"/>
+          </a:xfrm>
+          <a:prstGeom prst="rect">
+            <a:avLst/>
+          </a:prstGeom>
+          <a:noFill/>
+          <a:ln/>
+        </p:spPr>
+        <p:txBody>
+          <a:bodyPr wrap="square" lIns="0" tIns="0" rIns="0" bIns="0" rtlCol="0" anchor="ctr"/>
+          <a:lstStyle/>
+          <a:p>
+            <a:pPr indent="0" marL="0">
+              <a:buNone/>
+            </a:pPr>
+            <a:r>
+              <a:rPr lang="en-US" sz="1150" b="1" dirty="0">
+                <a:solidFill>
+                  <a:srgbClr val="E3BE5C"/>
+                </a:solidFill>
+                <a:latin typeface="Calibri" pitchFamily="34" charset="0"/>
+                <a:ea typeface="Calibri" pitchFamily="34" charset="-122"/>
+                <a:cs typeface="Calibri" pitchFamily="34" charset="-120"/>
+              </a:rPr>
+              <a:t>Амат</a:t>
+            </a:r>
+            <a:pPr indent="0" marL="0">
+              <a:buNone/>
+            </a:pPr>
+            <a:r>
+              <a:rPr lang="en-US" sz="1150" dirty="0">
+                <a:solidFill>
+                  <a:srgbClr val="F3E9D6"/>
+                </a:solidFill>
+                <a:latin typeface="Calibri" pitchFamily="34" charset="0"/>
+                <a:ea typeface="Calibri" pitchFamily="34" charset="-122"/>
+                <a:cs typeface="Calibri" pitchFamily="34" charset="-120"/>
+              </a:rPr>
+              <a:t> — чудовище «пожирательница мёртвых»: пасть крокодила, тело льва и задние ноги бегемота. Тяжёлое сердце грешника она съедала.</a:t>
+            </a:r>
+            <a:endParaRPr lang="en-US" sz="1150" dirty="0"/>
+          </a:p>
+        </p:txBody>
+      </p:sp>
+      <p:sp>
+        <p:nvSpPr>
+          <p:cNvPr id="21" name="Text 16"/>
           <p:cNvSpPr txBox="1"/>
           <p:nvPr/>
         </p:nvSpPr>
@@ -5170,6 +5203,86 @@
         </p:nvSpPr>
         <p:spPr>
           <a:xfrm>
+            <a:off x="457200" y="4041648"/>
+            <a:ext cx="4023360" cy="621792"/>
+          </a:xfrm>
+          <a:prstGeom prst="rect">
+            <a:avLst/>
+          </a:prstGeom>
+          <a:solidFill>
+            <a:srgbClr val="0F1A2B">
+              <a:alpha val="80000"/>
+            </a:srgbClr>
+          </a:solidFill>
+          <a:ln w="12700">
+            <a:solidFill>
+              <a:srgbClr val="0F1A2B"/>
+            </a:solidFill>
+            <a:prstDash val="solid"/>
+          </a:ln>
+        </p:spPr>
+      </p:sp>
+      <p:sp>
+        <p:nvSpPr>
+          <p:cNvPr id="5" name="Text 2"/>
+          <p:cNvSpPr txBox="1"/>
+          <p:nvPr/>
+        </p:nvSpPr>
+        <p:spPr>
+          <a:xfrm>
+            <a:off x="621792" y="4078224"/>
+            <a:ext cx="3703320" cy="548640"/>
+          </a:xfrm>
+          <a:prstGeom prst="rect">
+            <a:avLst/>
+          </a:prstGeom>
+          <a:noFill/>
+          <a:ln/>
+        </p:spPr>
+        <p:txBody>
+          <a:bodyPr wrap="square" lIns="0" tIns="0" rIns="0" bIns="0" rtlCol="0" anchor="ctr"/>
+          <a:lstStyle/>
+          <a:p>
+            <a:pPr indent="0" marL="0">
+              <a:buNone/>
+            </a:pPr>
+            <a:r>
+              <a:rPr lang="en-US" sz="1100" b="1" dirty="0">
+                <a:solidFill>
+                  <a:srgbClr val="E3BE5C"/>
+                </a:solidFill>
+                <a:latin typeface="Calibri" pitchFamily="34" charset="0"/>
+                <a:ea typeface="Calibri" pitchFamily="34" charset="-122"/>
+                <a:cs typeface="Calibri" pitchFamily="34" charset="-120"/>
+              </a:rPr>
+              <a:t>На фото: </a:t>
+            </a:r>
+            <a:pPr indent="0" marL="0">
+              <a:buNone/>
+            </a:pPr>
+            <a:r>
+              <a:rPr lang="en-US" sz="1100" dirty="0">
+                <a:solidFill>
+                  <a:srgbClr val="F3E9D6"/>
+                </a:solidFill>
+                <a:latin typeface="Calibri" pitchFamily="34" charset="0"/>
+                <a:ea typeface="Calibri" pitchFamily="34" charset="-122"/>
+                <a:cs typeface="Calibri" pitchFamily="34" charset="-120"/>
+              </a:rPr>
+              <a:t>золотая погребальная маска Тутанхамона. Большой Египетский музей, Каир.</a:t>
+            </a:r>
+            <a:endParaRPr lang="en-US" sz="1100" dirty="0"/>
+          </a:p>
+        </p:txBody>
+      </p:sp>
+      <p:sp>
+        <p:nvSpPr>
+          <p:cNvPr id="6" name="Shape 3"/>
+          <p:cNvSpPr/>
+          <p:nvPr/>
+        </p:nvSpPr>
+        <p:spPr>
+          <a:xfrm>
             <a:off x="4846320" y="457200"/>
             <a:ext cx="1947672" cy="274320"/>
           </a:xfrm>
@@ -5191,7 +5304,7 @@
       </p:sp>
       <p:sp>
         <p:nvSpPr>
-          <p:cNvPr id="5" name="Shape 2"/>
+          <p:cNvPr id="7" name="Shape 4"/>
           <p:cNvSpPr/>
           <p:nvPr/>
         </p:nvSpPr>
@@ -5216,7 +5329,7 @@
       </p:sp>
       <p:sp>
         <p:nvSpPr>
-          <p:cNvPr id="6" name="Text 3"/>
+          <p:cNvPr id="8" name="Text 5"/>
           <p:cNvSpPr txBox="1"/>
           <p:nvPr/>
         </p:nvSpPr>
@@ -5255,7 +5368,7 @@
       </p:sp>
       <p:sp>
         <p:nvSpPr>
-          <p:cNvPr id="7" name="Text 4"/>
+          <p:cNvPr id="9" name="Text 6"/>
           <p:cNvSpPr txBox="1"/>
           <p:nvPr/>
         </p:nvSpPr>
@@ -5294,30 +5407,79 @@
       </p:sp>
       <p:sp>
         <p:nvSpPr>
-          <p:cNvPr id="8" name="Text 5"/>
-          <p:cNvSpPr txBox="1"/>
-          <p:nvPr/>
-        </p:nvSpPr>
-        <p:spPr>
-          <a:xfrm>
-            <a:off x="4846320" y="1417320"/>
-            <a:ext cx="3840480" cy="594360"/>
-          </a:xfrm>
-          <a:prstGeom prst="rect">
-            <a:avLst/>
-          </a:prstGeom>
-          <a:noFill/>
-          <a:ln/>
-        </p:spPr>
-        <p:txBody>
-          <a:bodyPr wrap="square" lIns="0" tIns="0" rIns="0" bIns="0" rtlCol="0" anchor="t"/>
+          <p:cNvPr id="10" name="Shape 7"/>
+          <p:cNvSpPr/>
+          <p:nvPr/>
+        </p:nvSpPr>
+        <p:spPr>
+          <a:xfrm>
+            <a:off x="4846320" y="1517904"/>
+            <a:ext cx="365760" cy="365760"/>
+          </a:xfrm>
+          <a:prstGeom prst="ellipse">
+            <a:avLst/>
+          </a:prstGeom>
+          <a:solidFill>
+            <a:srgbClr val="0F1A2B"/>
+          </a:solidFill>
+          <a:ln w="12700">
+            <a:solidFill>
+              <a:srgbClr val="0F1A2B"/>
+            </a:solidFill>
+            <a:prstDash val="solid"/>
+          </a:ln>
+        </p:spPr>
+      </p:sp>
+      <p:pic>
+        <p:nvPicPr>
+          <p:cNvPr id="11" name="Image 1" descr="/tmp/claude-0/-home-user-heinrich-mario/e7688653-8e48-5480-a009-7b18c0e4f8cc/scratchpad/egypt_build/assets/ic_crown_gold.png">    </p:cNvPr>
+          <p:cNvPicPr>
+            <a:picLocks noChangeAspect="1"/>
+          </p:cNvPicPr>
+          <p:nvPr/>
+        </p:nvPicPr>
+        <p:blipFill>
+          <a:blip r:embed="rId3"/>
+          <a:stretch>
+            <a:fillRect/>
+          </a:stretch>
+        </p:blipFill>
+        <p:spPr>
+          <a:xfrm>
+            <a:off x="4926787" y="1598371"/>
+            <a:ext cx="204826" cy="204826"/>
+          </a:xfrm>
+          <a:prstGeom prst="rect">
+            <a:avLst/>
+          </a:prstGeom>
+        </p:spPr>
+      </p:pic>
+      <p:sp>
+        <p:nvSpPr>
+          <p:cNvPr id="12" name="Text 8"/>
+          <p:cNvSpPr txBox="1"/>
+          <p:nvPr/>
+        </p:nvSpPr>
+        <p:spPr>
+          <a:xfrm>
+            <a:off x="5349240" y="1444752"/>
+            <a:ext cx="3337560" cy="512064"/>
+          </a:xfrm>
+          <a:prstGeom prst="rect">
+            <a:avLst/>
+          </a:prstGeom>
+          <a:noFill/>
+          <a:ln/>
+        </p:spPr>
+        <p:txBody>
+          <a:bodyPr wrap="square" lIns="0" tIns="0" rIns="0" bIns="0" rtlCol="0" anchor="ctr"/>
           <a:lstStyle/>
           <a:p>
             <a:pPr indent="0" marL="0">
               <a:buNone/>
             </a:pPr>
             <a:r>
-              <a:rPr lang="en-US" sz="1300" dirty="0">
+              <a:rPr lang="en-US" sz="1200" dirty="0">
                 <a:solidFill>
                   <a:srgbClr val="2A1E12"/>
                 </a:solidFill>
@@ -5325,26 +5487,202 @@
                 <a:ea typeface="Calibri" pitchFamily="34" charset="-122"/>
                 <a:cs typeface="Calibri" pitchFamily="34" charset="-120"/>
               </a:rPr>
-              <a:t>Стал фараоном примерно в 9 лет и умер около 19. Прославился не походами, а своей гробницей.</a:t>
-            </a:r>
-            <a:endParaRPr lang="en-US" sz="1300" dirty="0"/>
-          </a:p>
-        </p:txBody>
-      </p:sp>
-      <p:sp>
-        <p:nvSpPr>
-          <p:cNvPr id="9" name="Shape 6"/>
+              <a:t>Стал фараоном примерно в 9 лет, поэтому страной за него правили советники.</a:t>
+            </a:r>
+            <a:endParaRPr lang="en-US" sz="1200" dirty="0"/>
+          </a:p>
+        </p:txBody>
+      </p:sp>
+      <p:sp>
+        <p:nvSpPr>
+          <p:cNvPr id="13" name="Shape 9"/>
           <p:cNvSpPr/>
           <p:nvPr/>
         </p:nvSpPr>
         <p:spPr>
           <a:xfrm>
-            <a:off x="4846320" y="2194560"/>
-            <a:ext cx="1865376" cy="1115568"/>
+            <a:off x="4846320" y="2084832"/>
+            <a:ext cx="365760" cy="365760"/>
+          </a:xfrm>
+          <a:prstGeom prst="ellipse">
+            <a:avLst/>
+          </a:prstGeom>
+          <a:solidFill>
+            <a:srgbClr val="0F1A2B"/>
+          </a:solidFill>
+          <a:ln w="12700">
+            <a:solidFill>
+              <a:srgbClr val="0F1A2B"/>
+            </a:solidFill>
+            <a:prstDash val="solid"/>
+          </a:ln>
+        </p:spPr>
+      </p:sp>
+      <p:pic>
+        <p:nvPicPr>
+          <p:cNvPr id="14" name="Image 2" descr="/tmp/claude-0/-home-user-heinrich-mario/e7688653-8e48-5480-a009-7b18c0e4f8cc/scratchpad/egypt_build/assets/ic_scarab_gold.png">    </p:cNvPr>
+          <p:cNvPicPr>
+            <a:picLocks noChangeAspect="1"/>
+          </p:cNvPicPr>
+          <p:nvPr/>
+        </p:nvPicPr>
+        <p:blipFill>
+          <a:blip r:embed="rId4"/>
+          <a:stretch>
+            <a:fillRect/>
+          </a:stretch>
+        </p:blipFill>
+        <p:spPr>
+          <a:xfrm>
+            <a:off x="4926787" y="2165299"/>
+            <a:ext cx="204826" cy="204826"/>
+          </a:xfrm>
+          <a:prstGeom prst="rect">
+            <a:avLst/>
+          </a:prstGeom>
+        </p:spPr>
+      </p:pic>
+      <p:sp>
+        <p:nvSpPr>
+          <p:cNvPr id="15" name="Text 10"/>
+          <p:cNvSpPr txBox="1"/>
+          <p:nvPr/>
+        </p:nvSpPr>
+        <p:spPr>
+          <a:xfrm>
+            <a:off x="5349240" y="2011680"/>
+            <a:ext cx="3337560" cy="512064"/>
+          </a:xfrm>
+          <a:prstGeom prst="rect">
+            <a:avLst/>
+          </a:prstGeom>
+          <a:noFill/>
+          <a:ln/>
+        </p:spPr>
+        <p:txBody>
+          <a:bodyPr wrap="square" lIns="0" tIns="0" rIns="0" bIns="0" rtlCol="0" anchor="ctr"/>
+          <a:lstStyle/>
+          <a:p>
+            <a:pPr indent="0" marL="0">
+              <a:buNone/>
+            </a:pPr>
+            <a:r>
+              <a:rPr lang="en-US" sz="1200" dirty="0">
+                <a:solidFill>
+                  <a:srgbClr val="2A1E12"/>
+                </a:solidFill>
+                <a:latin typeface="Calibri" pitchFamily="34" charset="0"/>
+                <a:ea typeface="Calibri" pitchFamily="34" charset="-122"/>
+                <a:cs typeface="Calibri" pitchFamily="34" charset="-120"/>
+              </a:rPr>
+              <a:t>Умер около 19 лет. Почему так рано, учёные спорят до сих пор.</a:t>
+            </a:r>
+            <a:endParaRPr lang="en-US" sz="1200" dirty="0"/>
+          </a:p>
+        </p:txBody>
+      </p:sp>
+      <p:sp>
+        <p:nvSpPr>
+          <p:cNvPr id="16" name="Shape 11"/>
+          <p:cNvSpPr/>
+          <p:nvPr/>
+        </p:nvSpPr>
+        <p:spPr>
+          <a:xfrm>
+            <a:off x="4846320" y="2651760"/>
+            <a:ext cx="365760" cy="365760"/>
+          </a:xfrm>
+          <a:prstGeom prst="ellipse">
+            <a:avLst/>
+          </a:prstGeom>
+          <a:solidFill>
+            <a:srgbClr val="0F1A2B"/>
+          </a:solidFill>
+          <a:ln w="12700">
+            <a:solidFill>
+              <a:srgbClr val="0F1A2B"/>
+            </a:solidFill>
+            <a:prstDash val="solid"/>
+          </a:ln>
+        </p:spPr>
+      </p:sp>
+      <p:pic>
+        <p:nvPicPr>
+          <p:cNvPr id="17" name="Image 3" descr="/tmp/claude-0/-home-user-heinrich-mario/e7688653-8e48-5480-a009-7b18c0e4f8cc/scratchpad/egypt_build/assets/ic_stone_gold.png">    </p:cNvPr>
+          <p:cNvPicPr>
+            <a:picLocks noChangeAspect="1"/>
+          </p:cNvPicPr>
+          <p:nvPr/>
+        </p:nvPicPr>
+        <p:blipFill>
+          <a:blip r:embed="rId5"/>
+          <a:stretch>
+            <a:fillRect/>
+          </a:stretch>
+        </p:blipFill>
+        <p:spPr>
+          <a:xfrm>
+            <a:off x="4926787" y="2732227"/>
+            <a:ext cx="204826" cy="204826"/>
+          </a:xfrm>
+          <a:prstGeom prst="rect">
+            <a:avLst/>
+          </a:prstGeom>
+        </p:spPr>
+      </p:pic>
+      <p:sp>
+        <p:nvSpPr>
+          <p:cNvPr id="18" name="Text 12"/>
+          <p:cNvSpPr txBox="1"/>
+          <p:nvPr/>
+        </p:nvSpPr>
+        <p:spPr>
+          <a:xfrm>
+            <a:off x="5349240" y="2578608"/>
+            <a:ext cx="3337560" cy="512064"/>
+          </a:xfrm>
+          <a:prstGeom prst="rect">
+            <a:avLst/>
+          </a:prstGeom>
+          <a:noFill/>
+          <a:ln/>
+        </p:spPr>
+        <p:txBody>
+          <a:bodyPr wrap="square" lIns="0" tIns="0" rIns="0" bIns="0" rtlCol="0" anchor="ctr"/>
+          <a:lstStyle/>
+          <a:p>
+            <a:pPr indent="0" marL="0">
+              <a:buNone/>
+            </a:pPr>
+            <a:r>
+              <a:rPr lang="en-US" sz="1200" dirty="0">
+                <a:solidFill>
+                  <a:srgbClr val="2A1E12"/>
+                </a:solidFill>
+                <a:latin typeface="Calibri" pitchFamily="34" charset="0"/>
+                <a:ea typeface="Calibri" pitchFamily="34" charset="-122"/>
+                <a:cs typeface="Calibri" pitchFamily="34" charset="-120"/>
+              </a:rPr>
+              <a:t>Вход в гробницу завалило камнями при строительстве соседней — поэтому грабители её не нашли.</a:t>
+            </a:r>
+            <a:endParaRPr lang="en-US" sz="1200" dirty="0"/>
+          </a:p>
+        </p:txBody>
+      </p:sp>
+      <p:sp>
+        <p:nvSpPr>
+          <p:cNvPr id="19" name="Shape 13"/>
+          <p:cNvSpPr/>
+          <p:nvPr/>
+        </p:nvSpPr>
+        <p:spPr>
+          <a:xfrm>
+            <a:off x="4846320" y="3364992"/>
+            <a:ext cx="1207008" cy="1261872"/>
           </a:xfrm>
           <a:prstGeom prst="roundRect">
             <a:avLst>
-              <a:gd name="adj" fmla="val 8197"/>
+              <a:gd name="adj" fmla="val 7576"/>
             </a:avLst>
           </a:prstGeom>
           <a:solidFill>
@@ -5367,14 +5705,14 @@
       </p:sp>
       <p:sp>
         <p:nvSpPr>
-          <p:cNvPr id="10" name="Text 7"/>
-          <p:cNvSpPr txBox="1"/>
-          <p:nvPr/>
-        </p:nvSpPr>
-        <p:spPr>
-          <a:xfrm>
-            <a:off x="4983480" y="2286000"/>
-            <a:ext cx="1591056" cy="457200"/>
+          <p:cNvPr id="20" name="Text 14"/>
+          <p:cNvSpPr txBox="1"/>
+          <p:nvPr/>
+        </p:nvSpPr>
+        <p:spPr>
+          <a:xfrm>
+            <a:off x="4956048" y="3474720"/>
+            <a:ext cx="987552" cy="411480"/>
           </a:xfrm>
           <a:prstGeom prst="rect">
             <a:avLst/>
@@ -5390,7 +5728,7 @@
               <a:buNone/>
             </a:pPr>
             <a:r>
-              <a:rPr lang="en-US" sz="2400" b="1" dirty="0">
+              <a:rPr lang="en-US" sz="2100" b="1" dirty="0">
                 <a:solidFill>
                   <a:srgbClr val="A8432A"/>
                 </a:solidFill>
@@ -5400,20 +5738,20 @@
               </a:rPr>
               <a:t>1922</a:t>
             </a:r>
-            <a:endParaRPr lang="en-US" sz="2400" dirty="0"/>
-          </a:p>
-        </p:txBody>
-      </p:sp>
-      <p:sp>
-        <p:nvSpPr>
-          <p:cNvPr id="11" name="Text 8"/>
-          <p:cNvSpPr txBox="1"/>
-          <p:nvPr/>
-        </p:nvSpPr>
-        <p:spPr>
-          <a:xfrm>
-            <a:off x="4983480" y="2761488"/>
-            <a:ext cx="1591056" cy="475488"/>
+            <a:endParaRPr lang="en-US" sz="2100" dirty="0"/>
+          </a:p>
+        </p:txBody>
+      </p:sp>
+      <p:sp>
+        <p:nvSpPr>
+          <p:cNvPr id="21" name="Text 15"/>
+          <p:cNvSpPr txBox="1"/>
+          <p:nvPr/>
+        </p:nvSpPr>
+        <p:spPr>
+          <a:xfrm>
+            <a:off x="4956048" y="3931920"/>
+            <a:ext cx="1024128" cy="621792"/>
           </a:xfrm>
           <a:prstGeom prst="rect">
             <a:avLst/>
@@ -5429,7 +5767,7 @@
               <a:buNone/>
             </a:pPr>
             <a:r>
-              <a:rPr lang="en-US" sz="1100" dirty="0">
+              <a:rPr lang="en-US" sz="1050" dirty="0">
                 <a:solidFill>
                   <a:srgbClr val="6E5B45"/>
                 </a:solidFill>
@@ -5437,26 +5775,26 @@
                 <a:ea typeface="Calibri" pitchFamily="34" charset="-122"/>
                 <a:cs typeface="Calibri" pitchFamily="34" charset="-120"/>
               </a:rPr>
-              <a:t>Говард Картер нашёл гробницу почти нетронутой</a:t>
-            </a:r>
-            <a:endParaRPr lang="en-US" sz="1100" dirty="0"/>
-          </a:p>
-        </p:txBody>
-      </p:sp>
-      <p:sp>
-        <p:nvSpPr>
-          <p:cNvPr id="12" name="Shape 9"/>
+              <a:t>Говард Картер открыл гробницу</a:t>
+            </a:r>
+            <a:endParaRPr lang="en-US" sz="1050" dirty="0"/>
+          </a:p>
+        </p:txBody>
+      </p:sp>
+      <p:sp>
+        <p:nvSpPr>
+          <p:cNvPr id="22" name="Shape 16"/>
           <p:cNvSpPr/>
           <p:nvPr/>
         </p:nvSpPr>
         <p:spPr>
           <a:xfrm>
-            <a:off x="6803136" y="2194560"/>
-            <a:ext cx="1865376" cy="1115568"/>
+            <a:off x="6163056" y="3364992"/>
+            <a:ext cx="1207008" cy="1261872"/>
           </a:xfrm>
           <a:prstGeom prst="roundRect">
             <a:avLst>
-              <a:gd name="adj" fmla="val 8197"/>
+              <a:gd name="adj" fmla="val 7576"/>
             </a:avLst>
           </a:prstGeom>
           <a:solidFill>
@@ -5479,14 +5817,14 @@
       </p:sp>
       <p:sp>
         <p:nvSpPr>
-          <p:cNvPr id="13" name="Text 10"/>
-          <p:cNvSpPr txBox="1"/>
-          <p:nvPr/>
-        </p:nvSpPr>
-        <p:spPr>
-          <a:xfrm>
-            <a:off x="6940296" y="2286000"/>
-            <a:ext cx="1591056" cy="457200"/>
+          <p:cNvPr id="23" name="Text 17"/>
+          <p:cNvSpPr txBox="1"/>
+          <p:nvPr/>
+        </p:nvSpPr>
+        <p:spPr>
+          <a:xfrm>
+            <a:off x="6272784" y="3474720"/>
+            <a:ext cx="987552" cy="411480"/>
           </a:xfrm>
           <a:prstGeom prst="rect">
             <a:avLst/>
@@ -5502,7 +5840,7 @@
               <a:buNone/>
             </a:pPr>
             <a:r>
-              <a:rPr lang="en-US" sz="2400" b="1" dirty="0">
+              <a:rPr lang="en-US" sz="2100" b="1" dirty="0">
                 <a:solidFill>
                   <a:srgbClr val="A8432A"/>
                 </a:solidFill>
@@ -5512,20 +5850,20 @@
               </a:rPr>
               <a:t>5000+</a:t>
             </a:r>
-            <a:endParaRPr lang="en-US" sz="2400" dirty="0"/>
-          </a:p>
-        </p:txBody>
-      </p:sp>
-      <p:sp>
-        <p:nvSpPr>
-          <p:cNvPr id="14" name="Text 11"/>
-          <p:cNvSpPr txBox="1"/>
-          <p:nvPr/>
-        </p:nvSpPr>
-        <p:spPr>
-          <a:xfrm>
-            <a:off x="6940296" y="2761488"/>
-            <a:ext cx="1591056" cy="475488"/>
+            <a:endParaRPr lang="en-US" sz="2100" dirty="0"/>
+          </a:p>
+        </p:txBody>
+      </p:sp>
+      <p:sp>
+        <p:nvSpPr>
+          <p:cNvPr id="24" name="Text 18"/>
+          <p:cNvSpPr txBox="1"/>
+          <p:nvPr/>
+        </p:nvSpPr>
+        <p:spPr>
+          <a:xfrm>
+            <a:off x="6272784" y="3931920"/>
+            <a:ext cx="1024128" cy="621792"/>
           </a:xfrm>
           <a:prstGeom prst="rect">
             <a:avLst/>
@@ -5541,7 +5879,7 @@
               <a:buNone/>
             </a:pPr>
             <a:r>
-              <a:rPr lang="en-US" sz="1100" dirty="0">
+              <a:rPr lang="en-US" sz="1050" dirty="0">
                 <a:solidFill>
                   <a:srgbClr val="6E5B45"/>
                 </a:solidFill>
@@ -5549,26 +5887,26 @@
                 <a:ea typeface="Calibri" pitchFamily="34" charset="-122"/>
                 <a:cs typeface="Calibri" pitchFamily="34" charset="-120"/>
               </a:rPr>
-              <a:t>предметов было в гробнице</a:t>
-            </a:r>
-            <a:endParaRPr lang="en-US" sz="1100" dirty="0"/>
-          </a:p>
-        </p:txBody>
-      </p:sp>
-      <p:sp>
-        <p:nvSpPr>
-          <p:cNvPr id="15" name="Shape 12"/>
+              <a:t>предметов нашли внутри</a:t>
+            </a:r>
+            <a:endParaRPr lang="en-US" sz="1050" dirty="0"/>
+          </a:p>
+        </p:txBody>
+      </p:sp>
+      <p:sp>
+        <p:nvSpPr>
+          <p:cNvPr id="25" name="Shape 19"/>
           <p:cNvSpPr/>
           <p:nvPr/>
         </p:nvSpPr>
         <p:spPr>
           <a:xfrm>
-            <a:off x="4846320" y="3438144"/>
-            <a:ext cx="1865376" cy="1115568"/>
+            <a:off x="7479792" y="3364992"/>
+            <a:ext cx="1207008" cy="1261872"/>
           </a:xfrm>
           <a:prstGeom prst="roundRect">
             <a:avLst>
-              <a:gd name="adj" fmla="val 8197"/>
+              <a:gd name="adj" fmla="val 7576"/>
             </a:avLst>
           </a:prstGeom>
           <a:solidFill>
@@ -5591,14 +5929,14 @@
       </p:sp>
       <p:sp>
         <p:nvSpPr>
-          <p:cNvPr id="16" name="Text 13"/>
-          <p:cNvSpPr txBox="1"/>
-          <p:nvPr/>
-        </p:nvSpPr>
-        <p:spPr>
-          <a:xfrm>
-            <a:off x="4983480" y="3529584"/>
-            <a:ext cx="1591056" cy="457200"/>
+          <p:cNvPr id="26" name="Text 20"/>
+          <p:cNvSpPr txBox="1"/>
+          <p:nvPr/>
+        </p:nvSpPr>
+        <p:spPr>
+          <a:xfrm>
+            <a:off x="7589520" y="3474720"/>
+            <a:ext cx="987552" cy="411480"/>
           </a:xfrm>
           <a:prstGeom prst="rect">
             <a:avLst/>
@@ -5614,7 +5952,7 @@
               <a:buNone/>
             </a:pPr>
             <a:r>
-              <a:rPr lang="en-US" sz="2400" b="1" dirty="0">
+              <a:rPr lang="en-US" sz="2100" b="1" dirty="0">
                 <a:solidFill>
                   <a:srgbClr val="A8432A"/>
                 </a:solidFill>
@@ -5624,20 +5962,20 @@
               </a:rPr>
               <a:t>10 кг</a:t>
             </a:r>
-            <a:endParaRPr lang="en-US" sz="2400" dirty="0"/>
-          </a:p>
-        </p:txBody>
-      </p:sp>
-      <p:sp>
-        <p:nvSpPr>
-          <p:cNvPr id="17" name="Text 14"/>
-          <p:cNvSpPr txBox="1"/>
-          <p:nvPr/>
-        </p:nvSpPr>
-        <p:spPr>
-          <a:xfrm>
-            <a:off x="4983480" y="4005072"/>
-            <a:ext cx="1591056" cy="475488"/>
+            <a:endParaRPr lang="en-US" sz="2100" dirty="0"/>
+          </a:p>
+        </p:txBody>
+      </p:sp>
+      <p:sp>
+        <p:nvSpPr>
+          <p:cNvPr id="27" name="Text 21"/>
+          <p:cNvSpPr txBox="1"/>
+          <p:nvPr/>
+        </p:nvSpPr>
+        <p:spPr>
+          <a:xfrm>
+            <a:off x="7589520" y="3931920"/>
+            <a:ext cx="1024128" cy="621792"/>
           </a:xfrm>
           <a:prstGeom prst="rect">
             <a:avLst/>
@@ -5653,7 +5991,7 @@
               <a:buNone/>
             </a:pPr>
             <a:r>
-              <a:rPr lang="en-US" sz="1100" dirty="0">
+              <a:rPr lang="en-US" sz="1050" dirty="0">
                 <a:solidFill>
                   <a:srgbClr val="6E5B45"/>
                 </a:solidFill>
@@ -5661,127 +5999,15 @@
                 <a:ea typeface="Calibri" pitchFamily="34" charset="-122"/>
                 <a:cs typeface="Calibri" pitchFamily="34" charset="-120"/>
               </a:rPr>
-              <a:t>чистого золота в погребальной маске</a:t>
-            </a:r>
-            <a:endParaRPr lang="en-US" sz="1100" dirty="0"/>
-          </a:p>
-        </p:txBody>
-      </p:sp>
-      <p:sp>
-        <p:nvSpPr>
-          <p:cNvPr id="18" name="Shape 15"/>
-          <p:cNvSpPr/>
-          <p:nvPr/>
-        </p:nvSpPr>
-        <p:spPr>
-          <a:xfrm>
-            <a:off x="6803136" y="3438144"/>
-            <a:ext cx="1865376" cy="1115568"/>
-          </a:xfrm>
-          <a:prstGeom prst="roundRect">
-            <a:avLst>
-              <a:gd name="adj" fmla="val 8197"/>
-            </a:avLst>
-          </a:prstGeom>
-          <a:solidFill>
-            <a:srgbClr val="FFFCF6"/>
-          </a:solidFill>
-          <a:ln w="12700">
-            <a:solidFill>
-              <a:srgbClr val="FFFCF6"/>
-            </a:solidFill>
-            <a:prstDash val="solid"/>
-          </a:ln>
-          <a:effectLst>
-            <a:outerShdw sx="100000" sy="100000" kx="0" ky="0" algn="bl" rotWithShape="0" blurRad="101600" dist="25400" dir="5400000">
-              <a:srgbClr val="4A3418">
-                <a:alpha val="16000"/>
-              </a:srgbClr>
-            </a:outerShdw>
-          </a:effectLst>
-        </p:spPr>
-      </p:sp>
-      <p:sp>
-        <p:nvSpPr>
-          <p:cNvPr id="19" name="Text 16"/>
-          <p:cNvSpPr txBox="1"/>
-          <p:nvPr/>
-        </p:nvSpPr>
-        <p:spPr>
-          <a:xfrm>
-            <a:off x="6940296" y="3529584"/>
-            <a:ext cx="1591056" cy="457200"/>
-          </a:xfrm>
-          <a:prstGeom prst="rect">
-            <a:avLst/>
-          </a:prstGeom>
-          <a:noFill/>
-          <a:ln/>
-        </p:spPr>
-        <p:txBody>
-          <a:bodyPr wrap="square" lIns="0" tIns="0" rIns="0" bIns="0" rtlCol="0" anchor="ctr"/>
-          <a:lstStyle/>
-          <a:p>
-            <a:pPr indent="0" marL="0">
-              <a:buNone/>
-            </a:pPr>
-            <a:r>
-              <a:rPr lang="en-US" sz="2400" b="1" dirty="0">
-                <a:solidFill>
-                  <a:srgbClr val="A8432A"/>
-                </a:solidFill>
-                <a:latin typeface="Cambria" pitchFamily="34" charset="0"/>
-                <a:ea typeface="Cambria" pitchFamily="34" charset="-122"/>
-                <a:cs typeface="Cambria" pitchFamily="34" charset="-120"/>
-              </a:rPr>
-              <a:t>110 кг</a:t>
-            </a:r>
-            <a:endParaRPr lang="en-US" sz="2400" dirty="0"/>
-          </a:p>
-        </p:txBody>
-      </p:sp>
-      <p:sp>
-        <p:nvSpPr>
-          <p:cNvPr id="20" name="Text 17"/>
-          <p:cNvSpPr txBox="1"/>
-          <p:nvPr/>
-        </p:nvSpPr>
-        <p:spPr>
-          <a:xfrm>
-            <a:off x="6940296" y="4005072"/>
-            <a:ext cx="1591056" cy="475488"/>
-          </a:xfrm>
-          <a:prstGeom prst="rect">
-            <a:avLst/>
-          </a:prstGeom>
-          <a:noFill/>
-          <a:ln/>
-        </p:spPr>
-        <p:txBody>
-          <a:bodyPr wrap="square" lIns="0" tIns="0" rIns="0" bIns="0" rtlCol="0" anchor="t"/>
-          <a:lstStyle/>
-          <a:p>
-            <a:pPr indent="0" marL="0">
-              <a:buNone/>
-            </a:pPr>
-            <a:r>
-              <a:rPr lang="en-US" sz="1100" dirty="0">
-                <a:solidFill>
-                  <a:srgbClr val="6E5B45"/>
-                </a:solidFill>
-                <a:latin typeface="Calibri" pitchFamily="34" charset="0"/>
-                <a:ea typeface="Calibri" pitchFamily="34" charset="-122"/>
-                <a:cs typeface="Calibri" pitchFamily="34" charset="-120"/>
-              </a:rPr>
-              <a:t>весит внутренний гроб из золота</a:t>
-            </a:r>
-            <a:endParaRPr lang="en-US" sz="1100" dirty="0"/>
-          </a:p>
-        </p:txBody>
-      </p:sp>
-      <p:sp>
-        <p:nvSpPr>
-          <p:cNvPr id="21" name="Text 18"/>
+              <a:t>золота в этой маске</a:t>
+            </a:r>
+            <a:endParaRPr lang="en-US" sz="1050" dirty="0"/>
+          </a:p>
+        </p:txBody>
+      </p:sp>
+      <p:sp>
+        <p:nvSpPr>
+          <p:cNvPr id="28" name="Text 22"/>
           <p:cNvSpPr txBox="1"/>
           <p:nvPr/>
         </p:nvSpPr>
@@ -5890,7 +6116,7 @@
         <p:spPr>
           <a:xfrm>
             <a:off x="548640" y="457200"/>
-            <a:ext cx="1742846" cy="274320"/>
+            <a:ext cx="2664562" cy="274320"/>
           </a:xfrm>
           <a:prstGeom prst="roundRect">
             <a:avLst>
@@ -5898,9 +6124,7 @@
             </a:avLst>
           </a:prstGeom>
           <a:solidFill>
-            <a:srgbClr val="0F1A2B">
-              <a:alpha val="70000"/>
-            </a:srgbClr>
+            <a:srgbClr val="FFFCF6"/>
           </a:solidFill>
           <a:ln w="15875">
             <a:solidFill>
@@ -5918,7 +6142,7 @@
         </p:nvSpPr>
         <p:spPr>
           <a:xfrm>
-            <a:off x="2337206" y="457200"/>
+            <a:off x="3258922" y="457200"/>
             <a:ext cx="45720" cy="274320"/>
           </a:xfrm>
           <a:prstGeom prst="rect">
@@ -5944,7 +6168,7 @@
         <p:spPr>
           <a:xfrm>
             <a:off x="548640" y="457200"/>
-            <a:ext cx="1742846" cy="274320"/>
+            <a:ext cx="2664562" cy="274320"/>
           </a:xfrm>
           <a:prstGeom prst="rect">
             <a:avLst/>
@@ -5962,13 +6186,13 @@
             <a:r>
               <a:rPr lang="en-US" sz="1000" b="1" spc="300" kern="0" dirty="0">
                 <a:solidFill>
-                  <a:srgbClr val="E3BE5C"/>
+                  <a:srgbClr val="A8432A"/>
                 </a:solidFill>
                 <a:latin typeface="Calibri" pitchFamily="34" charset="0"/>
                 <a:ea typeface="Calibri" pitchFamily="34" charset="-122"/>
                 <a:cs typeface="Calibri" pitchFamily="34" charset="-120"/>
               </a:rPr>
-              <a:t>СЕКРЕТ 1 ИЗ 3</a:t>
+              <a:t>06 · СТРОИТЕЛИ ПИРАМИД</a:t>
             </a:r>
             <a:endParaRPr lang="en-US" sz="1000" dirty="0"/>
           </a:p>
@@ -5981,54 +6205,9 @@
           <p:nvPr/>
         </p:nvSpPr>
         <p:spPr>
-          <a:xfrm rot="-240000">
-            <a:off x="2611526" y="438912"/>
-            <a:ext cx="1600200" cy="292608"/>
-          </a:xfrm>
-          <a:prstGeom prst="rect">
-            <a:avLst/>
-          </a:prstGeom>
-          <a:solidFill>
-            <a:srgbClr val="A8432A"/>
-          </a:solidFill>
-          <a:ln w="12700">
-            <a:solidFill>
-              <a:srgbClr val="E7B8A6"/>
-            </a:solidFill>
-          </a:ln>
-        </p:spPr>
-        <p:txBody>
-          <a:bodyPr wrap="square" lIns="0" tIns="0" rIns="0" bIns="0" rtlCol="0" anchor="ctr"/>
-          <a:lstStyle/>
-          <a:p>
-            <a:pPr algn="ctr" indent="0" marL="0">
-              <a:buNone/>
-            </a:pPr>
-            <a:r>
-              <a:rPr lang="en-US" sz="1050" b="1" spc="200" kern="0" dirty="0">
-                <a:solidFill>
-                  <a:srgbClr val="FFFFFF"/>
-                </a:solidFill>
-                <a:latin typeface="Calibri" pitchFamily="34" charset="0"/>
-                <a:ea typeface="Calibri" pitchFamily="34" charset="-122"/>
-                <a:cs typeface="Calibri" pitchFamily="34" charset="-120"/>
-              </a:rPr>
-              <a:t>НЕ В УЧЕБНИКЕ</a:t>
-            </a:r>
-            <a:endParaRPr lang="en-US" sz="1050" dirty="0"/>
-          </a:p>
-        </p:txBody>
-      </p:sp>
-      <p:sp>
-        <p:nvSpPr>
-          <p:cNvPr id="7" name="Text 4"/>
-          <p:cNvSpPr txBox="1"/>
-          <p:nvPr/>
-        </p:nvSpPr>
-        <p:spPr>
-          <a:xfrm>
-            <a:off x="548640" y="868680"/>
-            <a:ext cx="4572000" cy="777240"/>
+          <a:xfrm>
+            <a:off x="548640" y="841248"/>
+            <a:ext cx="4572000" cy="804672"/>
           </a:xfrm>
           <a:prstGeom prst="rect">
             <a:avLst/>
@@ -6047,9 +6226,9 @@
               <a:buNone/>
             </a:pPr>
             <a:r>
-              <a:rPr lang="en-US" sz="2400" b="1" dirty="0">
-                <a:solidFill>
-                  <a:srgbClr val="FFFFFF"/>
+              <a:rPr lang="en-US" sz="2600" b="1" dirty="0">
+                <a:solidFill>
+                  <a:srgbClr val="2A1E12"/>
                 </a:solidFill>
                 <a:latin typeface="Cambria" pitchFamily="34" charset="0"/>
                 <a:ea typeface="Cambria" pitchFamily="34" charset="-122"/>
@@ -6057,7 +6236,7 @@
               </a:rPr>
               <a:t>Пирамиды строили</a:t>
             </a:r>
-            <a:endParaRPr lang="en-US" sz="2400" dirty="0"/>
+            <a:endParaRPr lang="en-US" sz="2600" dirty="0"/>
           </a:p>
           <a:p>
             <a:pPr indent="0" marL="0">
@@ -6067,9 +6246,9 @@
               <a:buNone/>
             </a:pPr>
             <a:r>
-              <a:rPr lang="en-US" sz="2400" b="1" dirty="0">
-                <a:solidFill>
-                  <a:srgbClr val="FFFFFF"/>
+              <a:rPr lang="en-US" sz="2600" b="1" dirty="0">
+                <a:solidFill>
+                  <a:srgbClr val="2A1E12"/>
                 </a:solidFill>
                 <a:latin typeface="Cambria" pitchFamily="34" charset="0"/>
                 <a:ea typeface="Cambria" pitchFamily="34" charset="-122"/>
@@ -6077,13 +6256,13 @@
               </a:rPr>
               <a:t>не рабы</a:t>
             </a:r>
-            <a:endParaRPr lang="en-US" sz="2400" dirty="0"/>
-          </a:p>
-        </p:txBody>
-      </p:sp>
-      <p:sp>
-        <p:nvSpPr>
-          <p:cNvPr id="8" name="Shape 5"/>
+            <a:endParaRPr lang="en-US" sz="2600" dirty="0"/>
+          </a:p>
+        </p:txBody>
+      </p:sp>
+      <p:sp>
+        <p:nvSpPr>
+          <p:cNvPr id="7" name="Shape 4"/>
           <p:cNvSpPr/>
           <p:nvPr/>
         </p:nvSpPr>
@@ -6096,11 +6275,11 @@
             <a:avLst/>
           </a:prstGeom>
           <a:solidFill>
-            <a:srgbClr val="D4A537"/>
+            <a:srgbClr val="0F1A2B"/>
           </a:solidFill>
           <a:ln w="12700">
             <a:solidFill>
-              <a:srgbClr val="D4A537"/>
+              <a:srgbClr val="0F1A2B"/>
             </a:solidFill>
             <a:prstDash val="solid"/>
           </a:ln>
@@ -6108,7 +6287,7 @@
       </p:sp>
       <p:pic>
         <p:nvPicPr>
-          <p:cNvPr id="9" name="Image 1" descr="/tmp/claude-0/-home-user-heinrich-mario/e7688653-8e48-5480-a009-7b18c0e4f8cc/scratchpad/egypt_build/assets/ic_temple_night.png">    </p:cNvPr>
+          <p:cNvPr id="8" name="Image 1" descr="/tmp/claude-0/-home-user-heinrich-mario/e7688653-8e48-5480-a009-7b18c0e4f8cc/scratchpad/egypt_build/assets/ic_temple_gold.png">    </p:cNvPr>
           <p:cNvPicPr>
             <a:picLocks noChangeAspect="1"/>
           </p:cNvPicPr>
@@ -6132,7 +6311,7 @@
       </p:pic>
       <p:sp>
         <p:nvSpPr>
-          <p:cNvPr id="10" name="Text 6"/>
+          <p:cNvPr id="9" name="Text 5"/>
           <p:cNvSpPr txBox="1"/>
           <p:nvPr/>
         </p:nvSpPr>
@@ -6157,7 +6336,7 @@
             <a:r>
               <a:rPr lang="en-US" sz="1200" dirty="0">
                 <a:solidFill>
-                  <a:srgbClr val="F3E9D6"/>
+                  <a:srgbClr val="2A1E12"/>
                 </a:solidFill>
                 <a:latin typeface="Calibri" pitchFamily="34" charset="0"/>
                 <a:ea typeface="Calibri" pitchFamily="34" charset="-122"/>
@@ -6171,7 +6350,7 @@
       </p:sp>
       <p:sp>
         <p:nvSpPr>
-          <p:cNvPr id="11" name="Shape 7"/>
+          <p:cNvPr id="10" name="Shape 6"/>
           <p:cNvSpPr/>
           <p:nvPr/>
         </p:nvSpPr>
@@ -6184,11 +6363,11 @@
             <a:avLst/>
           </a:prstGeom>
           <a:solidFill>
-            <a:srgbClr val="D4A537"/>
+            <a:srgbClr val="0F1A2B"/>
           </a:solidFill>
           <a:ln w="12700">
             <a:solidFill>
-              <a:srgbClr val="D4A537"/>
+              <a:srgbClr val="0F1A2B"/>
             </a:solidFill>
             <a:prstDash val="solid"/>
           </a:ln>
@@ -6196,7 +6375,7 @@
       </p:sp>
       <p:pic>
         <p:nvPicPr>
-          <p:cNvPr id="12" name="Image 2" descr="/tmp/claude-0/-home-user-heinrich-mario/e7688653-8e48-5480-a009-7b18c0e4f8cc/scratchpad/egypt_build/assets/ic_bread_night.png">    </p:cNvPr>
+          <p:cNvPr id="11" name="Image 2" descr="/tmp/claude-0/-home-user-heinrich-mario/e7688653-8e48-5480-a009-7b18c0e4f8cc/scratchpad/egypt_build/assets/ic_bread_gold.png">    </p:cNvPr>
           <p:cNvPicPr>
             <a:picLocks noChangeAspect="1"/>
           </p:cNvPicPr>
@@ -6220,7 +6399,7 @@
       </p:pic>
       <p:sp>
         <p:nvSpPr>
-          <p:cNvPr id="13" name="Text 8"/>
+          <p:cNvPr id="12" name="Text 7"/>
           <p:cNvSpPr txBox="1"/>
           <p:nvPr/>
         </p:nvSpPr>
@@ -6245,7 +6424,7 @@
             <a:r>
               <a:rPr lang="en-US" sz="1200" dirty="0">
                 <a:solidFill>
-                  <a:srgbClr val="F3E9D6"/>
+                  <a:srgbClr val="2A1E12"/>
                 </a:solidFill>
                 <a:latin typeface="Calibri" pitchFamily="34" charset="0"/>
                 <a:ea typeface="Calibri" pitchFamily="34" charset="-122"/>
@@ -6259,7 +6438,7 @@
       </p:sp>
       <p:sp>
         <p:nvSpPr>
-          <p:cNvPr id="14" name="Shape 9"/>
+          <p:cNvPr id="13" name="Shape 8"/>
           <p:cNvSpPr/>
           <p:nvPr/>
         </p:nvSpPr>
@@ -6272,11 +6451,11 @@
             <a:avLst/>
           </a:prstGeom>
           <a:solidFill>
-            <a:srgbClr val="D4A537"/>
+            <a:srgbClr val="0F1A2B"/>
           </a:solidFill>
           <a:ln w="12700">
             <a:solidFill>
-              <a:srgbClr val="D4A537"/>
+              <a:srgbClr val="0F1A2B"/>
             </a:solidFill>
             <a:prstDash val="solid"/>
           </a:ln>
@@ -6284,7 +6463,7 @@
       </p:sp>
       <p:pic>
         <p:nvPicPr>
-          <p:cNvPr id="15" name="Image 3" descr="/tmp/claude-0/-home-user-heinrich-mario/e7688653-8e48-5480-a009-7b18c0e4f8cc/scratchpad/egypt_build/assets/ic_beer_night.png">    </p:cNvPr>
+          <p:cNvPr id="14" name="Image 3" descr="/tmp/claude-0/-home-user-heinrich-mario/e7688653-8e48-5480-a009-7b18c0e4f8cc/scratchpad/egypt_build/assets/ic_beer_gold.png">    </p:cNvPr>
           <p:cNvPicPr>
             <a:picLocks noChangeAspect="1"/>
           </p:cNvPicPr>
@@ -6308,7 +6487,7 @@
       </p:pic>
       <p:sp>
         <p:nvSpPr>
-          <p:cNvPr id="16" name="Text 10"/>
+          <p:cNvPr id="15" name="Text 9"/>
           <p:cNvSpPr txBox="1"/>
           <p:nvPr/>
         </p:nvSpPr>
@@ -6333,7 +6512,7 @@
             <a:r>
               <a:rPr lang="en-US" sz="1200" dirty="0">
                 <a:solidFill>
-                  <a:srgbClr val="F3E9D6"/>
+                  <a:srgbClr val="2A1E12"/>
                 </a:solidFill>
                 <a:latin typeface="Calibri" pitchFamily="34" charset="0"/>
                 <a:ea typeface="Calibri" pitchFamily="34" charset="-122"/>
@@ -6347,7 +6526,7 @@
       </p:sp>
       <p:sp>
         <p:nvSpPr>
-          <p:cNvPr id="17" name="Shape 11"/>
+          <p:cNvPr id="16" name="Shape 10"/>
           <p:cNvSpPr/>
           <p:nvPr/>
         </p:nvSpPr>
@@ -6360,11 +6539,11 @@
             <a:avLst/>
           </a:prstGeom>
           <a:solidFill>
-            <a:srgbClr val="D4A537"/>
+            <a:srgbClr val="0F1A2B"/>
           </a:solidFill>
           <a:ln w="12700">
             <a:solidFill>
-              <a:srgbClr val="D4A537"/>
+              <a:srgbClr val="0F1A2B"/>
             </a:solidFill>
             <a:prstDash val="solid"/>
           </a:ln>
@@ -6372,7 +6551,7 @@
       </p:sp>
       <p:pic>
         <p:nvPicPr>
-          <p:cNvPr id="18" name="Image 4" descr="/tmp/claude-0/-home-user-heinrich-mario/e7688653-8e48-5480-a009-7b18c0e4f8cc/scratchpad/egypt_build/assets/ic_papyrus_night.png">    </p:cNvPr>
+          <p:cNvPr id="17" name="Image 4" descr="/tmp/claude-0/-home-user-heinrich-mario/e7688653-8e48-5480-a009-7b18c0e4f8cc/scratchpad/egypt_build/assets/ic_papyrus_gold.png">    </p:cNvPr>
           <p:cNvPicPr>
             <a:picLocks noChangeAspect="1"/>
           </p:cNvPicPr>
@@ -6396,7 +6575,7 @@
       </p:pic>
       <p:sp>
         <p:nvSpPr>
-          <p:cNvPr id="19" name="Text 12"/>
+          <p:cNvPr id="18" name="Text 11"/>
           <p:cNvSpPr txBox="1"/>
           <p:nvPr/>
         </p:nvSpPr>
@@ -6421,7 +6600,7 @@
             <a:r>
               <a:rPr lang="en-US" sz="1200" dirty="0">
                 <a:solidFill>
-                  <a:srgbClr val="F3E9D6"/>
+                  <a:srgbClr val="2A1E12"/>
                 </a:solidFill>
                 <a:latin typeface="Calibri" pitchFamily="34" charset="0"/>
                 <a:ea typeface="Calibri" pitchFamily="34" charset="-122"/>
@@ -6435,7 +6614,7 @@
       </p:sp>
       <p:sp>
         <p:nvSpPr>
-          <p:cNvPr id="20" name="Text 13"/>
+          <p:cNvPr id="19" name="Text 12"/>
           <p:cNvSpPr txBox="1"/>
           <p:nvPr/>
         </p:nvSpPr>
@@ -6449,13 +6628,6 @@
           </a:prstGeom>
           <a:noFill/>
           <a:ln/>
-          <a:effectLst>
-            <a:outerShdw sx="100000" sy="100000" kx="0" ky="0" algn="bl" rotWithShape="0" blurRad="63500" dist="25400" dir="5400000">
-              <a:srgbClr val="000000">
-                <a:alpha val="55000"/>
-              </a:srgbClr>
-            </a:outerShdw>
-          </a:effectLst>
         </p:spPr>
         <p:txBody>
           <a:bodyPr wrap="square" lIns="0" tIns="0" rIns="0" bIns="0" rtlCol="0" anchor="b"/>
@@ -6467,7 +6639,7 @@
             <a:r>
               <a:rPr lang="en-US" sz="900" i="1" spc="100" kern="0" dirty="0">
                 <a:solidFill>
-                  <a:srgbClr val="D8CBAE"/>
+                  <a:srgbClr val="8A7356"/>
                 </a:solidFill>
                 <a:latin typeface="Calibri" pitchFamily="34" charset="0"/>
                 <a:ea typeface="Calibri" pitchFamily="34" charset="-122"/>
@@ -6551,7 +6723,7 @@
         <p:spPr>
           <a:xfrm>
             <a:off x="4297680" y="457200"/>
-            <a:ext cx="1742846" cy="274320"/>
+            <a:ext cx="2664562" cy="274320"/>
           </a:xfrm>
           <a:prstGeom prst="roundRect">
             <a:avLst>
@@ -6559,9 +6731,7 @@
             </a:avLst>
           </a:prstGeom>
           <a:solidFill>
-            <a:srgbClr val="0F1A2B">
-              <a:alpha val="70000"/>
-            </a:srgbClr>
+            <a:srgbClr val="FFFCF6"/>
           </a:solidFill>
           <a:ln w="15875">
             <a:solidFill>
@@ -6579,7 +6749,7 @@
         </p:nvSpPr>
         <p:spPr>
           <a:xfrm>
-            <a:off x="6086246" y="457200"/>
+            <a:off x="7007962" y="457200"/>
             <a:ext cx="45720" cy="274320"/>
           </a:xfrm>
           <a:prstGeom prst="rect">
@@ -6605,7 +6775,7 @@
         <p:spPr>
           <a:xfrm>
             <a:off x="4297680" y="457200"/>
-            <a:ext cx="1742846" cy="274320"/>
+            <a:ext cx="2664562" cy="274320"/>
           </a:xfrm>
           <a:prstGeom prst="rect">
             <a:avLst/>
@@ -6623,13 +6793,13 @@
             <a:r>
               <a:rPr lang="en-US" sz="1000" b="1" spc="300" kern="0" dirty="0">
                 <a:solidFill>
-                  <a:srgbClr val="E3BE5C"/>
+                  <a:srgbClr val="A8432A"/>
                 </a:solidFill>
                 <a:latin typeface="Calibri" pitchFamily="34" charset="0"/>
                 <a:ea typeface="Calibri" pitchFamily="34" charset="-122"/>
                 <a:cs typeface="Calibri" pitchFamily="34" charset="-120"/>
               </a:rPr>
-              <a:t>СЕКРЕТ 2 ИЗ 3</a:t>
+              <a:t>07 · СТРОИТЕЛИ ГРОБНИЦ</a:t>
             </a:r>
             <a:endParaRPr lang="en-US" sz="1000" dirty="0"/>
           </a:p>
@@ -6642,54 +6812,9 @@
           <p:nvPr/>
         </p:nvSpPr>
         <p:spPr>
-          <a:xfrm rot="-240000">
-            <a:off x="6360566" y="438912"/>
-            <a:ext cx="1600200" cy="292608"/>
-          </a:xfrm>
-          <a:prstGeom prst="rect">
-            <a:avLst/>
-          </a:prstGeom>
-          <a:solidFill>
-            <a:srgbClr val="A8432A"/>
-          </a:solidFill>
-          <a:ln w="12700">
-            <a:solidFill>
-              <a:srgbClr val="E7B8A6"/>
-            </a:solidFill>
-          </a:ln>
-        </p:spPr>
-        <p:txBody>
-          <a:bodyPr wrap="square" lIns="0" tIns="0" rIns="0" bIns="0" rtlCol="0" anchor="ctr"/>
-          <a:lstStyle/>
-          <a:p>
-            <a:pPr algn="ctr" indent="0" marL="0">
-              <a:buNone/>
-            </a:pPr>
-            <a:r>
-              <a:rPr lang="en-US" sz="1050" b="1" spc="200" kern="0" dirty="0">
-                <a:solidFill>
-                  <a:srgbClr val="FFFFFF"/>
-                </a:solidFill>
-                <a:latin typeface="Calibri" pitchFamily="34" charset="0"/>
-                <a:ea typeface="Calibri" pitchFamily="34" charset="-122"/>
-                <a:cs typeface="Calibri" pitchFamily="34" charset="-120"/>
-              </a:rPr>
-              <a:t>НЕ В УЧЕБНИКЕ</a:t>
-            </a:r>
-            <a:endParaRPr lang="en-US" sz="1050" dirty="0"/>
-          </a:p>
-        </p:txBody>
-      </p:sp>
-      <p:sp>
-        <p:nvSpPr>
-          <p:cNvPr id="7" name="Text 4"/>
-          <p:cNvSpPr txBox="1"/>
-          <p:nvPr/>
-        </p:nvSpPr>
-        <p:spPr>
-          <a:xfrm>
-            <a:off x="4297680" y="868680"/>
-            <a:ext cx="4389120" cy="777240"/>
+          <a:xfrm>
+            <a:off x="4297680" y="841248"/>
+            <a:ext cx="4389120" cy="804672"/>
           </a:xfrm>
           <a:prstGeom prst="rect">
             <a:avLst/>
@@ -6708,9 +6833,9 @@
               <a:buNone/>
             </a:pPr>
             <a:r>
-              <a:rPr lang="en-US" sz="2400" b="1" dirty="0">
-                <a:solidFill>
-                  <a:srgbClr val="FFFFFF"/>
+              <a:rPr lang="en-US" sz="2600" b="1" dirty="0">
+                <a:solidFill>
+                  <a:srgbClr val="2A1E12"/>
                 </a:solidFill>
                 <a:latin typeface="Cambria" pitchFamily="34" charset="0"/>
                 <a:ea typeface="Cambria" pitchFamily="34" charset="-122"/>
@@ -6718,7 +6843,7 @@
               </a:rPr>
               <a:t>Первая забастовка</a:t>
             </a:r>
-            <a:endParaRPr lang="en-US" sz="2400" dirty="0"/>
+            <a:endParaRPr lang="en-US" sz="2600" dirty="0"/>
           </a:p>
           <a:p>
             <a:pPr indent="0" marL="0">
@@ -6728,9 +6853,9 @@
               <a:buNone/>
             </a:pPr>
             <a:r>
-              <a:rPr lang="en-US" sz="2400" b="1" dirty="0">
-                <a:solidFill>
-                  <a:srgbClr val="FFFFFF"/>
+              <a:rPr lang="en-US" sz="2600" b="1" dirty="0">
+                <a:solidFill>
+                  <a:srgbClr val="2A1E12"/>
                 </a:solidFill>
                 <a:latin typeface="Cambria" pitchFamily="34" charset="0"/>
                 <a:ea typeface="Cambria" pitchFamily="34" charset="-122"/>
@@ -6738,13 +6863,13 @@
               </a:rPr>
               <a:t>в истории</a:t>
             </a:r>
-            <a:endParaRPr lang="en-US" sz="2400" dirty="0"/>
-          </a:p>
-        </p:txBody>
-      </p:sp>
-      <p:sp>
-        <p:nvSpPr>
-          <p:cNvPr id="8" name="Text 5"/>
+            <a:endParaRPr lang="en-US" sz="2600" dirty="0"/>
+          </a:p>
+        </p:txBody>
+      </p:sp>
+      <p:sp>
+        <p:nvSpPr>
+          <p:cNvPr id="7" name="Text 4"/>
           <p:cNvSpPr txBox="1"/>
           <p:nvPr/>
         </p:nvSpPr>
@@ -6769,7 +6894,7 @@
             <a:r>
               <a:rPr lang="en-US" sz="1250" b="1" dirty="0">
                 <a:solidFill>
-                  <a:srgbClr val="E3BE5C"/>
+                  <a:srgbClr val="A8432A"/>
                 </a:solidFill>
                 <a:latin typeface="Calibri" pitchFamily="34" charset="0"/>
                 <a:ea typeface="Calibri" pitchFamily="34" charset="-122"/>
@@ -6783,7 +6908,7 @@
             <a:r>
               <a:rPr lang="en-US" sz="1250" dirty="0">
                 <a:solidFill>
-                  <a:srgbClr val="F3E9D6"/>
+                  <a:srgbClr val="2A1E12"/>
                 </a:solidFill>
                 <a:latin typeface="Calibri" pitchFamily="34" charset="0"/>
                 <a:ea typeface="Calibri" pitchFamily="34" charset="-122"/>
@@ -6797,7 +6922,7 @@
       </p:sp>
       <p:sp>
         <p:nvSpPr>
-          <p:cNvPr id="9" name="Text 6"/>
+          <p:cNvPr id="8" name="Text 5"/>
           <p:cNvSpPr txBox="1"/>
           <p:nvPr/>
         </p:nvSpPr>
@@ -6822,7 +6947,7 @@
             <a:r>
               <a:rPr lang="en-US" sz="1000" b="1" spc="200" kern="0" dirty="0">
                 <a:solidFill>
-                  <a:srgbClr val="E3BE5C"/>
+                  <a:srgbClr val="6E5B45"/>
                 </a:solidFill>
                 <a:latin typeface="Calibri" pitchFamily="34" charset="0"/>
                 <a:ea typeface="Calibri" pitchFamily="34" charset="-122"/>
@@ -6836,7 +6961,7 @@
       </p:sp>
       <p:sp>
         <p:nvSpPr>
-          <p:cNvPr id="10" name="Shape 7"/>
+          <p:cNvPr id="9" name="Shape 6"/>
           <p:cNvSpPr/>
           <p:nvPr/>
         </p:nvSpPr>
@@ -6851,7 +6976,7 @@
             </a:avLst>
           </a:prstGeom>
           <a:solidFill>
-            <a:srgbClr val="1A2C48"/>
+            <a:srgbClr val="FFFCF6"/>
           </a:solidFill>
           <a:ln w="12700">
             <a:solidFill>
@@ -6863,7 +6988,7 @@
       </p:sp>
       <p:pic>
         <p:nvPicPr>
-          <p:cNvPr id="11" name="Image 1" descr="/tmp/claude-0/-home-user-heinrich-mario/e7688653-8e48-5480-a009-7b18c0e4f8cc/scratchpad/egypt_build/assets/ic_beer_gold.png">    </p:cNvPr>
+          <p:cNvPr id="10" name="Image 1" descr="/tmp/claude-0/-home-user-heinrich-mario/e7688653-8e48-5480-a009-7b18c0e4f8cc/scratchpad/egypt_build/assets/ic_beer_night.png">    </p:cNvPr>
           <p:cNvPicPr>
             <a:picLocks noChangeAspect="1"/>
           </p:cNvPicPr>
@@ -6887,7 +7012,7 @@
       </p:pic>
       <p:sp>
         <p:nvSpPr>
-          <p:cNvPr id="12" name="Text 8"/>
+          <p:cNvPr id="11" name="Text 7"/>
           <p:cNvSpPr txBox="1"/>
           <p:nvPr/>
         </p:nvSpPr>
@@ -6912,7 +7037,7 @@
             <a:r>
               <a:rPr lang="en-US" sz="1150" i="1" dirty="0">
                 <a:solidFill>
-                  <a:srgbClr val="F3E9D6"/>
+                  <a:srgbClr val="2A1E12"/>
                 </a:solidFill>
                 <a:latin typeface="Calibri" pitchFamily="34" charset="0"/>
                 <a:ea typeface="Calibri" pitchFamily="34" charset="-122"/>
@@ -6926,7 +7051,7 @@
       </p:sp>
       <p:sp>
         <p:nvSpPr>
-          <p:cNvPr id="13" name="Shape 9"/>
+          <p:cNvPr id="12" name="Shape 8"/>
           <p:cNvSpPr/>
           <p:nvPr/>
         </p:nvSpPr>
@@ -6941,7 +7066,7 @@
             </a:avLst>
           </a:prstGeom>
           <a:solidFill>
-            <a:srgbClr val="1A2C48"/>
+            <a:srgbClr val="FFFCF6"/>
           </a:solidFill>
           <a:ln w="12700">
             <a:solidFill>
@@ -6953,7 +7078,7 @@
       </p:sp>
       <p:pic>
         <p:nvPicPr>
-          <p:cNvPr id="14" name="Image 2" descr="/tmp/claude-0/-home-user-heinrich-mario/e7688653-8e48-5480-a009-7b18c0e4f8cc/scratchpad/egypt_build/assets/ic_scorpion_gold.png">    </p:cNvPr>
+          <p:cNvPr id="13" name="Image 2" descr="/tmp/claude-0/-home-user-heinrich-mario/e7688653-8e48-5480-a009-7b18c0e4f8cc/scratchpad/egypt_build/assets/ic_scorpion_night.png">    </p:cNvPr>
           <p:cNvPicPr>
             <a:picLocks noChangeAspect="1"/>
           </p:cNvPicPr>
@@ -6977,7 +7102,7 @@
       </p:pic>
       <p:sp>
         <p:nvSpPr>
-          <p:cNvPr id="15" name="Text 10"/>
+          <p:cNvPr id="14" name="Text 9"/>
           <p:cNvSpPr txBox="1"/>
           <p:nvPr/>
         </p:nvSpPr>
@@ -7002,7 +7127,7 @@
             <a:r>
               <a:rPr lang="en-US" sz="1150" i="1" dirty="0">
                 <a:solidFill>
-                  <a:srgbClr val="F3E9D6"/>
+                  <a:srgbClr val="2A1E12"/>
                 </a:solidFill>
                 <a:latin typeface="Calibri" pitchFamily="34" charset="0"/>
                 <a:ea typeface="Calibri" pitchFamily="34" charset="-122"/>
@@ -7016,7 +7141,7 @@
       </p:sp>
       <p:sp>
         <p:nvSpPr>
-          <p:cNvPr id="16" name="Shape 11"/>
+          <p:cNvPr id="15" name="Shape 10"/>
           <p:cNvSpPr/>
           <p:nvPr/>
         </p:nvSpPr>
@@ -7031,7 +7156,7 @@
             </a:avLst>
           </a:prstGeom>
           <a:solidFill>
-            <a:srgbClr val="1A2C48"/>
+            <a:srgbClr val="FFFCF6"/>
           </a:solidFill>
           <a:ln w="12700">
             <a:solidFill>
@@ -7043,7 +7168,7 @@
       </p:sp>
       <p:pic>
         <p:nvPicPr>
-          <p:cNvPr id="17" name="Image 3" descr="/tmp/claude-0/-home-user-heinrich-mario/e7688653-8e48-5480-a009-7b18c0e4f8cc/scratchpad/egypt_build/assets/ic_eye_gold.png">    </p:cNvPr>
+          <p:cNvPr id="16" name="Image 3" descr="/tmp/claude-0/-home-user-heinrich-mario/e7688653-8e48-5480-a009-7b18c0e4f8cc/scratchpad/egypt_build/assets/ic_eye_night.png">    </p:cNvPr>
           <p:cNvPicPr>
             <a:picLocks noChangeAspect="1"/>
           </p:cNvPicPr>
@@ -7067,7 +7192,7 @@
       </p:pic>
       <p:sp>
         <p:nvSpPr>
-          <p:cNvPr id="18" name="Text 12"/>
+          <p:cNvPr id="17" name="Text 11"/>
           <p:cNvSpPr txBox="1"/>
           <p:nvPr/>
         </p:nvSpPr>
@@ -7092,7 +7217,7 @@
             <a:r>
               <a:rPr lang="en-US" sz="1150" i="1" dirty="0">
                 <a:solidFill>
-                  <a:srgbClr val="F3E9D6"/>
+                  <a:srgbClr val="2A1E12"/>
                 </a:solidFill>
                 <a:latin typeface="Calibri" pitchFamily="34" charset="0"/>
                 <a:ea typeface="Calibri" pitchFamily="34" charset="-122"/>
@@ -7106,7 +7231,7 @@
       </p:sp>
       <p:sp>
         <p:nvSpPr>
-          <p:cNvPr id="19" name="Shape 13"/>
+          <p:cNvPr id="18" name="Shape 12"/>
           <p:cNvSpPr/>
           <p:nvPr/>
         </p:nvSpPr>
@@ -7121,7 +7246,7 @@
             </a:avLst>
           </a:prstGeom>
           <a:solidFill>
-            <a:srgbClr val="1A2C48"/>
+            <a:srgbClr val="FFFCF6"/>
           </a:solidFill>
           <a:ln w="12700">
             <a:solidFill>
@@ -7133,7 +7258,7 @@
       </p:sp>
       <p:pic>
         <p:nvPicPr>
-          <p:cNvPr id="20" name="Image 4" descr="/tmp/claude-0/-home-user-heinrich-mario/e7688653-8e48-5480-a009-7b18c0e4f8cc/scratchpad/egypt_build/assets/ic_mummy_gold.png">    </p:cNvPr>
+          <p:cNvPr id="19" name="Image 4" descr="/tmp/claude-0/-home-user-heinrich-mario/e7688653-8e48-5480-a009-7b18c0e4f8cc/scratchpad/egypt_build/assets/ic_mummy_night.png">    </p:cNvPr>
           <p:cNvPicPr>
             <a:picLocks noChangeAspect="1"/>
           </p:cNvPicPr>
@@ -7157,7 +7282,7 @@
       </p:pic>
       <p:sp>
         <p:nvSpPr>
-          <p:cNvPr id="21" name="Text 14"/>
+          <p:cNvPr id="20" name="Text 13"/>
           <p:cNvSpPr txBox="1"/>
           <p:nvPr/>
         </p:nvSpPr>
@@ -7182,7 +7307,7 @@
             <a:r>
               <a:rPr lang="en-US" sz="1150" i="1" dirty="0">
                 <a:solidFill>
-                  <a:srgbClr val="F3E9D6"/>
+                  <a:srgbClr val="2A1E12"/>
                 </a:solidFill>
                 <a:latin typeface="Calibri" pitchFamily="34" charset="0"/>
                 <a:ea typeface="Calibri" pitchFamily="34" charset="-122"/>
@@ -7196,7 +7321,7 @@
       </p:sp>
       <p:pic>
         <p:nvPicPr>
-          <p:cNvPr id="22" name="Image 5" descr="/tmp/claude-0/-home-user-heinrich-mario/e7688653-8e48-5480-a009-7b18c0e4f8cc/scratchpad/egypt_build/assets/ic_calendar_gold.png">    </p:cNvPr>
+          <p:cNvPr id="21" name="Image 5" descr="/tmp/claude-0/-home-user-heinrich-mario/e7688653-8e48-5480-a009-7b18c0e4f8cc/scratchpad/egypt_build/assets/ic_calendar_night.png">    </p:cNvPr>
           <p:cNvPicPr>
             <a:picLocks noChangeAspect="1"/>
           </p:cNvPicPr>
@@ -7220,7 +7345,7 @@
       </p:pic>
       <p:sp>
         <p:nvSpPr>
-          <p:cNvPr id="23" name="Text 15"/>
+          <p:cNvPr id="22" name="Text 14"/>
           <p:cNvSpPr txBox="1"/>
           <p:nvPr/>
         </p:nvSpPr>
@@ -7245,7 +7370,7 @@
             <a:r>
               <a:rPr lang="en-US" sz="1250" dirty="0">
                 <a:solidFill>
-                  <a:srgbClr val="F3E9D6"/>
+                  <a:srgbClr val="2A1E12"/>
                 </a:solidFill>
                 <a:latin typeface="Calibri" pitchFamily="34" charset="0"/>
                 <a:ea typeface="Calibri" pitchFamily="34" charset="-122"/>
@@ -7259,7 +7384,7 @@
       </p:sp>
       <p:sp>
         <p:nvSpPr>
-          <p:cNvPr id="24" name="Text 16"/>
+          <p:cNvPr id="23" name="Text 15"/>
           <p:cNvSpPr txBox="1"/>
           <p:nvPr/>
         </p:nvSpPr>
@@ -7407,7 +7532,7 @@
         <p:spPr>
           <a:xfrm>
             <a:off x="3611880" y="457200"/>
-            <a:ext cx="1742846" cy="274320"/>
+            <a:ext cx="1538021" cy="274320"/>
           </a:xfrm>
           <a:prstGeom prst="roundRect">
             <a:avLst>
@@ -7415,9 +7540,7 @@
             </a:avLst>
           </a:prstGeom>
           <a:solidFill>
-            <a:srgbClr val="0F1A2B">
-              <a:alpha val="70000"/>
-            </a:srgbClr>
+            <a:srgbClr val="FFFCF6"/>
           </a:solidFill>
           <a:ln w="15875">
             <a:solidFill>
@@ -7435,7 +7558,7 @@
         </p:nvSpPr>
         <p:spPr>
           <a:xfrm>
-            <a:off x="5400446" y="457200"/>
+            <a:off x="5195621" y="457200"/>
             <a:ext cx="45720" cy="274320"/>
           </a:xfrm>
           <a:prstGeom prst="rect">
@@ -7461,7 +7584,7 @@
         <p:spPr>
           <a:xfrm>
             <a:off x="3611880" y="457200"/>
-            <a:ext cx="1742846" cy="274320"/>
+            <a:ext cx="1538021" cy="274320"/>
           </a:xfrm>
           <a:prstGeom prst="rect">
             <a:avLst/>
@@ -7479,13 +7602,13 @@
             <a:r>
               <a:rPr lang="en-US" sz="1000" b="1" spc="300" kern="0" dirty="0">
                 <a:solidFill>
-                  <a:srgbClr val="E3BE5C"/>
+                  <a:srgbClr val="A8432A"/>
                 </a:solidFill>
                 <a:latin typeface="Calibri" pitchFamily="34" charset="0"/>
                 <a:ea typeface="Calibri" pitchFamily="34" charset="-122"/>
                 <a:cs typeface="Calibri" pitchFamily="34" charset="-120"/>
               </a:rPr>
-              <a:t>СЕКРЕТ 3 ИЗ 3</a:t>
+              <a:t>08 · СФИНКС</a:t>
             </a:r>
             <a:endParaRPr lang="en-US" sz="1000" dirty="0"/>
           </a:p>
@@ -7498,136 +7621,75 @@
           <p:nvPr/>
         </p:nvSpPr>
         <p:spPr>
-          <a:xfrm rot="-240000">
-            <a:off x="5674766" y="438912"/>
-            <a:ext cx="1600200" cy="292608"/>
-          </a:xfrm>
-          <a:prstGeom prst="rect">
-            <a:avLst/>
+          <a:xfrm>
+            <a:off x="3611880" y="804672"/>
+            <a:ext cx="5074920" cy="594360"/>
+          </a:xfrm>
+          <a:prstGeom prst="rect">
+            <a:avLst/>
+          </a:prstGeom>
+          <a:noFill/>
+          <a:ln/>
+        </p:spPr>
+        <p:txBody>
+          <a:bodyPr wrap="square" lIns="0" tIns="0" rIns="0" bIns="0" rtlCol="0" anchor="ctr"/>
+          <a:lstStyle/>
+          <a:p>
+            <a:pPr indent="0" marL="0">
+              <a:buNone/>
+            </a:pPr>
+            <a:r>
+              <a:rPr lang="en-US" sz="2600" b="1" dirty="0">
+                <a:solidFill>
+                  <a:srgbClr val="2A1E12"/>
+                </a:solidFill>
+                <a:latin typeface="Cambria" pitchFamily="34" charset="0"/>
+                <a:ea typeface="Cambria" pitchFamily="34" charset="-122"/>
+                <a:cs typeface="Cambria" pitchFamily="34" charset="-120"/>
+              </a:rPr>
+              <a:t>Кто отбил нос Сфинксу?</a:t>
+            </a:r>
+            <a:endParaRPr lang="en-US" sz="2600" dirty="0"/>
+          </a:p>
+        </p:txBody>
+      </p:sp>
+      <p:sp>
+        <p:nvSpPr>
+          <p:cNvPr id="8" name="Shape 5"/>
+          <p:cNvSpPr/>
+          <p:nvPr/>
+        </p:nvSpPr>
+        <p:spPr>
+          <a:xfrm>
+            <a:off x="3611880" y="1463040"/>
+            <a:ext cx="5074920" cy="1865376"/>
+          </a:xfrm>
+          <a:prstGeom prst="roundRect">
+            <a:avLst>
+              <a:gd name="adj" fmla="val 4902"/>
+            </a:avLst>
           </a:prstGeom>
           <a:solidFill>
-            <a:srgbClr val="A8432A"/>
+            <a:srgbClr val="FFFCF6"/>
           </a:solidFill>
           <a:ln w="12700">
             <a:solidFill>
-              <a:srgbClr val="E7B8A6"/>
-            </a:solidFill>
-          </a:ln>
-        </p:spPr>
-        <p:txBody>
-          <a:bodyPr wrap="square" lIns="0" tIns="0" rIns="0" bIns="0" rtlCol="0" anchor="ctr"/>
-          <a:lstStyle/>
-          <a:p>
-            <a:pPr algn="ctr" indent="0" marL="0">
-              <a:buNone/>
-            </a:pPr>
-            <a:r>
-              <a:rPr lang="en-US" sz="1050" b="1" spc="200" kern="0" dirty="0">
-                <a:solidFill>
-                  <a:srgbClr val="FFFFFF"/>
-                </a:solidFill>
-                <a:latin typeface="Calibri" pitchFamily="34" charset="0"/>
-                <a:ea typeface="Calibri" pitchFamily="34" charset="-122"/>
-                <a:cs typeface="Calibri" pitchFamily="34" charset="-120"/>
-              </a:rPr>
-              <a:t>НЕ В УЧЕБНИКЕ</a:t>
-            </a:r>
-            <a:endParaRPr lang="en-US" sz="1050" dirty="0"/>
-          </a:p>
-        </p:txBody>
-      </p:sp>
-      <p:sp>
-        <p:nvSpPr>
-          <p:cNvPr id="8" name="Text 5"/>
-          <p:cNvSpPr txBox="1"/>
-          <p:nvPr/>
-        </p:nvSpPr>
-        <p:spPr>
-          <a:xfrm>
-            <a:off x="3611880" y="868680"/>
-            <a:ext cx="5074920" cy="777240"/>
-          </a:xfrm>
-          <a:prstGeom prst="rect">
-            <a:avLst/>
-          </a:prstGeom>
-          <a:noFill/>
-          <a:ln/>
-        </p:spPr>
-        <p:txBody>
-          <a:bodyPr wrap="square" lIns="0" tIns="0" rIns="0" bIns="0" rtlCol="0" anchor="ctr"/>
-          <a:lstStyle/>
-          <a:p>
-            <a:pPr indent="0" marL="0">
-              <a:lnSpc>
-                <a:spcPct val="95000"/>
-              </a:lnSpc>
-              <a:buNone/>
-            </a:pPr>
-            <a:r>
-              <a:rPr lang="en-US" sz="2400" b="1" dirty="0">
-                <a:solidFill>
-                  <a:srgbClr val="FFFFFF"/>
-                </a:solidFill>
-                <a:latin typeface="Cambria" pitchFamily="34" charset="0"/>
-                <a:ea typeface="Cambria" pitchFamily="34" charset="-122"/>
-                <a:cs typeface="Cambria" pitchFamily="34" charset="-120"/>
-              </a:rPr>
-              <a:t>Мамонты, Клеопатра</a:t>
-            </a:r>
-            <a:endParaRPr lang="en-US" sz="2400" dirty="0"/>
-          </a:p>
-          <a:p>
-            <a:pPr indent="0" marL="0">
-              <a:lnSpc>
-                <a:spcPct val="95000"/>
-              </a:lnSpc>
-              <a:buNone/>
-            </a:pPr>
-            <a:r>
-              <a:rPr lang="en-US" sz="2400" b="1" dirty="0">
-                <a:solidFill>
-                  <a:srgbClr val="FFFFFF"/>
-                </a:solidFill>
-                <a:latin typeface="Cambria" pitchFamily="34" charset="0"/>
-                <a:ea typeface="Cambria" pitchFamily="34" charset="-122"/>
-                <a:cs typeface="Cambria" pitchFamily="34" charset="-120"/>
-              </a:rPr>
-              <a:t>и нос Сфинкса</a:t>
-            </a:r>
-            <a:endParaRPr lang="en-US" sz="2400" dirty="0"/>
-          </a:p>
-        </p:txBody>
-      </p:sp>
-      <p:sp>
-        <p:nvSpPr>
-          <p:cNvPr id="9" name="Shape 6"/>
-          <p:cNvSpPr/>
-          <p:nvPr/>
-        </p:nvSpPr>
-        <p:spPr>
-          <a:xfrm>
-            <a:off x="3611880" y="1810512"/>
-            <a:ext cx="2487168" cy="1353312"/>
-          </a:xfrm>
-          <a:prstGeom prst="roundRect">
-            <a:avLst>
-              <a:gd name="adj" fmla="val 6757"/>
-            </a:avLst>
-          </a:prstGeom>
-          <a:solidFill>
-            <a:srgbClr val="1A2C48"/>
-          </a:solidFill>
-          <a:ln w="9525">
-            <a:solidFill>
-              <a:srgbClr val="3A5175"/>
+              <a:srgbClr val="FFFCF6"/>
             </a:solidFill>
             <a:prstDash val="solid"/>
           </a:ln>
+          <a:effectLst>
+            <a:outerShdw sx="100000" sy="100000" kx="0" ky="0" algn="bl" rotWithShape="0" blurRad="101600" dist="25400" dir="5400000">
+              <a:srgbClr val="4A3418">
+                <a:alpha val="16000"/>
+              </a:srgbClr>
+            </a:outerShdw>
+          </a:effectLst>
         </p:spPr>
       </p:sp>
       <p:pic>
         <p:nvPicPr>
-          <p:cNvPr id="10" name="Image 1" descr="/tmp/claude-0/-home-user-heinrich-mario/e7688653-8e48-5480-a009-7b18c0e4f8cc/scratchpad/egypt_build/assets/ic_mammoth_gold.png">    </p:cNvPr>
+          <p:cNvPr id="9" name="Image 1" descr="/tmp/claude-0/-home-user-heinrich-mario/e7688653-8e48-5480-a009-7b18c0e4f8cc/scratchpad/egypt_build/assets/ic_cannon_night.png">    </p:cNvPr>
           <p:cNvPicPr>
             <a:picLocks noChangeAspect="1"/>
           </p:cNvPicPr>
@@ -7641,8 +7703,8 @@
         </p:blipFill>
         <p:spPr>
           <a:xfrm>
-            <a:off x="3749040" y="1938528"/>
-            <a:ext cx="347472" cy="347472"/>
+            <a:off x="3749040" y="1636776"/>
+            <a:ext cx="274320" cy="274320"/>
           </a:xfrm>
           <a:prstGeom prst="rect">
             <a:avLst/>
@@ -7651,53 +7713,53 @@
       </p:pic>
       <p:sp>
         <p:nvSpPr>
-          <p:cNvPr id="11" name="Text 7"/>
-          <p:cNvSpPr txBox="1"/>
-          <p:nvPr/>
-        </p:nvSpPr>
-        <p:spPr>
-          <a:xfrm>
-            <a:off x="4160520" y="1938528"/>
-            <a:ext cx="1865376" cy="347472"/>
-          </a:xfrm>
-          <a:prstGeom prst="rect">
-            <a:avLst/>
-          </a:prstGeom>
-          <a:noFill/>
-          <a:ln/>
-        </p:spPr>
-        <p:txBody>
-          <a:bodyPr wrap="square" lIns="0" tIns="0" rIns="0" bIns="0" rtlCol="0" anchor="ctr"/>
+          <p:cNvPr id="10" name="Text 6"/>
+          <p:cNvSpPr txBox="1"/>
+          <p:nvPr/>
+        </p:nvSpPr>
+        <p:spPr>
+          <a:xfrm>
+            <a:off x="4087368" y="1581912"/>
+            <a:ext cx="868680" cy="329184"/>
+          </a:xfrm>
+          <a:prstGeom prst="rect">
+            <a:avLst/>
+          </a:prstGeom>
+          <a:noFill/>
+          <a:ln/>
+        </p:spPr>
+        <p:txBody>
+          <a:bodyPr wrap="square" lIns="0" tIns="0" rIns="0" bIns="0" rtlCol="0" anchor="t"/>
           <a:lstStyle/>
           <a:p>
             <a:pPr indent="0" marL="0">
               <a:buNone/>
             </a:pPr>
             <a:r>
-              <a:rPr lang="en-US" sz="1250" b="1" dirty="0">
-                <a:solidFill>
-                  <a:srgbClr val="E3BE5C"/>
+              <a:rPr lang="en-US" sz="1200" b="1" dirty="0">
+                <a:solidFill>
+                  <a:srgbClr val="A8432A"/>
                 </a:solidFill>
                 <a:latin typeface="Cambria" pitchFamily="34" charset="0"/>
                 <a:ea typeface="Cambria" pitchFamily="34" charset="-122"/>
                 <a:cs typeface="Cambria" pitchFamily="34" charset="-120"/>
               </a:rPr>
-              <a:t>Мамонты</a:t>
-            </a:r>
-            <a:endParaRPr lang="en-US" sz="1250" dirty="0"/>
-          </a:p>
-        </p:txBody>
-      </p:sp>
-      <p:sp>
-        <p:nvSpPr>
-          <p:cNvPr id="12" name="Text 8"/>
-          <p:cNvSpPr txBox="1"/>
-          <p:nvPr/>
-        </p:nvSpPr>
-        <p:spPr>
-          <a:xfrm>
-            <a:off x="3749040" y="2359152"/>
-            <a:ext cx="2212848" cy="749808"/>
+              <a:t>Легенда</a:t>
+            </a:r>
+            <a:endParaRPr lang="en-US" sz="1200" dirty="0"/>
+          </a:p>
+        </p:txBody>
+      </p:sp>
+      <p:sp>
+        <p:nvSpPr>
+          <p:cNvPr id="11" name="Text 7"/>
+          <p:cNvSpPr txBox="1"/>
+          <p:nvPr/>
+        </p:nvSpPr>
+        <p:spPr>
+          <a:xfrm>
+            <a:off x="4983480" y="1600200"/>
+            <a:ext cx="3593592" cy="402336"/>
           </a:xfrm>
           <a:prstGeom prst="rect">
             <a:avLst/>
@@ -7715,48 +7777,21 @@
             <a:r>
               <a:rPr lang="en-US" sz="1100" dirty="0">
                 <a:solidFill>
-                  <a:srgbClr val="F3E9D6"/>
+                  <a:srgbClr val="2A1E12"/>
                 </a:solidFill>
                 <a:latin typeface="Calibri" pitchFamily="34" charset="0"/>
                 <a:ea typeface="Calibri" pitchFamily="34" charset="-122"/>
                 <a:cs typeface="Calibri" pitchFamily="34" charset="-120"/>
               </a:rPr>
-              <a:t>Когда строили пирамиду Хеопса, на острове Врангеля ещё жили мамонты.</a:t>
+              <a:t>Будто бы нос отстрелили из пушки солдаты Наполеона, когда его армия пришла в Египет в 1798 году.</a:t>
             </a:r>
             <a:endParaRPr lang="en-US" sz="1100" dirty="0"/>
           </a:p>
         </p:txBody>
-      </p:sp>
-      <p:sp>
-        <p:nvSpPr>
-          <p:cNvPr id="13" name="Shape 9"/>
-          <p:cNvSpPr/>
-          <p:nvPr/>
-        </p:nvSpPr>
-        <p:spPr>
-          <a:xfrm>
-            <a:off x="6199632" y="1810512"/>
-            <a:ext cx="2487168" cy="1353312"/>
-          </a:xfrm>
-          <a:prstGeom prst="roundRect">
-            <a:avLst>
-              <a:gd name="adj" fmla="val 6757"/>
-            </a:avLst>
-          </a:prstGeom>
-          <a:solidFill>
-            <a:srgbClr val="1A2C48"/>
-          </a:solidFill>
-          <a:ln w="9525">
-            <a:solidFill>
-              <a:srgbClr val="3A5175"/>
-            </a:solidFill>
-            <a:prstDash val="solid"/>
-          </a:ln>
-        </p:spPr>
       </p:sp>
       <p:pic>
         <p:nvPicPr>
-          <p:cNvPr id="14" name="Image 2" descr="/tmp/claude-0/-home-user-heinrich-mario/e7688653-8e48-5480-a009-7b18c0e4f8cc/scratchpad/egypt_build/assets/ic_crown_gold.png">    </p:cNvPr>
+          <p:cNvPr id="12" name="Image 2" descr="/tmp/claude-0/-home-user-heinrich-mario/e7688653-8e48-5480-a009-7b18c0e4f8cc/scratchpad/egypt_build/assets/ic_drawing_night.png">    </p:cNvPr>
           <p:cNvPicPr>
             <a:picLocks noChangeAspect="1"/>
           </p:cNvPicPr>
@@ -7770,8 +7805,8 @@
         </p:blipFill>
         <p:spPr>
           <a:xfrm>
-            <a:off x="6336792" y="1938528"/>
-            <a:ext cx="347472" cy="347472"/>
+            <a:off x="3749040" y="2130552"/>
+            <a:ext cx="274320" cy="274320"/>
           </a:xfrm>
           <a:prstGeom prst="rect">
             <a:avLst/>
@@ -7780,53 +7815,53 @@
       </p:pic>
       <p:sp>
         <p:nvSpPr>
-          <p:cNvPr id="15" name="Text 10"/>
-          <p:cNvSpPr txBox="1"/>
-          <p:nvPr/>
-        </p:nvSpPr>
-        <p:spPr>
-          <a:xfrm>
-            <a:off x="6748272" y="1938528"/>
-            <a:ext cx="1865376" cy="347472"/>
-          </a:xfrm>
-          <a:prstGeom prst="rect">
-            <a:avLst/>
-          </a:prstGeom>
-          <a:noFill/>
-          <a:ln/>
-        </p:spPr>
-        <p:txBody>
-          <a:bodyPr wrap="square" lIns="0" tIns="0" rIns="0" bIns="0" rtlCol="0" anchor="ctr"/>
+          <p:cNvPr id="13" name="Text 8"/>
+          <p:cNvSpPr txBox="1"/>
+          <p:nvPr/>
+        </p:nvSpPr>
+        <p:spPr>
+          <a:xfrm>
+            <a:off x="4087368" y="2075688"/>
+            <a:ext cx="868680" cy="329184"/>
+          </a:xfrm>
+          <a:prstGeom prst="rect">
+            <a:avLst/>
+          </a:prstGeom>
+          <a:noFill/>
+          <a:ln/>
+        </p:spPr>
+        <p:txBody>
+          <a:bodyPr wrap="square" lIns="0" tIns="0" rIns="0" bIns="0" rtlCol="0" anchor="t"/>
           <a:lstStyle/>
           <a:p>
             <a:pPr indent="0" marL="0">
               <a:buNone/>
             </a:pPr>
             <a:r>
-              <a:rPr lang="en-US" sz="1250" b="1" dirty="0">
-                <a:solidFill>
-                  <a:srgbClr val="E3BE5C"/>
+              <a:rPr lang="en-US" sz="1200" b="1" dirty="0">
+                <a:solidFill>
+                  <a:srgbClr val="A8432A"/>
                 </a:solidFill>
                 <a:latin typeface="Cambria" pitchFamily="34" charset="0"/>
                 <a:ea typeface="Cambria" pitchFamily="34" charset="-122"/>
                 <a:cs typeface="Cambria" pitchFamily="34" charset="-120"/>
               </a:rPr>
-              <a:t>Клеопатра</a:t>
-            </a:r>
-            <a:endParaRPr lang="en-US" sz="1250" dirty="0"/>
-          </a:p>
-        </p:txBody>
-      </p:sp>
-      <p:sp>
-        <p:nvSpPr>
-          <p:cNvPr id="16" name="Text 11"/>
-          <p:cNvSpPr txBox="1"/>
-          <p:nvPr/>
-        </p:nvSpPr>
-        <p:spPr>
-          <a:xfrm>
-            <a:off x="6336792" y="2359152"/>
-            <a:ext cx="2212848" cy="749808"/>
+              <a:t>Но</a:t>
+            </a:r>
+            <a:endParaRPr lang="en-US" sz="1200" dirty="0"/>
+          </a:p>
+        </p:txBody>
+      </p:sp>
+      <p:sp>
+        <p:nvSpPr>
+          <p:cNvPr id="14" name="Text 9"/>
+          <p:cNvSpPr txBox="1"/>
+          <p:nvPr/>
+        </p:nvSpPr>
+        <p:spPr>
+          <a:xfrm>
+            <a:off x="4983480" y="2093976"/>
+            <a:ext cx="3593592" cy="402336"/>
           </a:xfrm>
           <a:prstGeom prst="rect">
             <a:avLst/>
@@ -7844,48 +7879,21 @@
             <a:r>
               <a:rPr lang="en-US" sz="1100" dirty="0">
                 <a:solidFill>
-                  <a:srgbClr val="F3E9D6"/>
+                  <a:srgbClr val="2A1E12"/>
                 </a:solidFill>
                 <a:latin typeface="Calibri" pitchFamily="34" charset="0"/>
                 <a:ea typeface="Calibri" pitchFamily="34" charset="-122"/>
                 <a:cs typeface="Calibri" pitchFamily="34" charset="-120"/>
               </a:rPr>
-              <a:t>Жила ближе к полёту на Луну, чем к постройке пирамид. И по происхождению была гречанкой.</a:t>
+              <a:t>Датский путешественник Норден нарисовал Сфинкса в 1737 году — уже без носа. Это за 60 лет до Наполеона.</a:t>
             </a:r>
             <a:endParaRPr lang="en-US" sz="1100" dirty="0"/>
           </a:p>
         </p:txBody>
-      </p:sp>
-      <p:sp>
-        <p:nvSpPr>
-          <p:cNvPr id="17" name="Shape 12"/>
-          <p:cNvSpPr/>
-          <p:nvPr/>
-        </p:nvSpPr>
-        <p:spPr>
-          <a:xfrm>
-            <a:off x="3611880" y="3273552"/>
-            <a:ext cx="2487168" cy="1353312"/>
-          </a:xfrm>
-          <a:prstGeom prst="roundRect">
-            <a:avLst>
-              <a:gd name="adj" fmla="val 6757"/>
-            </a:avLst>
-          </a:prstGeom>
-          <a:solidFill>
-            <a:srgbClr val="1A2C48"/>
-          </a:solidFill>
-          <a:ln w="9525">
-            <a:solidFill>
-              <a:srgbClr val="3A5175"/>
-            </a:solidFill>
-            <a:prstDash val="solid"/>
-          </a:ln>
-        </p:spPr>
       </p:sp>
       <p:pic>
         <p:nvPicPr>
-          <p:cNvPr id="18" name="Image 3" descr="/tmp/claude-0/-home-user-heinrich-mario/e7688653-8e48-5480-a009-7b18c0e4f8cc/scratchpad/egypt_build/assets/ic_sphinx_gold.png">    </p:cNvPr>
+          <p:cNvPr id="15" name="Image 3" descr="/tmp/claude-0/-home-user-heinrich-mario/e7688653-8e48-5480-a009-7b18c0e4f8cc/scratchpad/egypt_build/assets/ic_chisel_night.png">    </p:cNvPr>
           <p:cNvPicPr>
             <a:picLocks noChangeAspect="1"/>
           </p:cNvPicPr>
@@ -7899,8 +7907,8 @@
         </p:blipFill>
         <p:spPr>
           <a:xfrm>
-            <a:off x="3749040" y="3401568"/>
-            <a:ext cx="347472" cy="347472"/>
+            <a:off x="3749040" y="2624328"/>
+            <a:ext cx="274320" cy="274320"/>
           </a:xfrm>
           <a:prstGeom prst="rect">
             <a:avLst/>
@@ -7909,53 +7917,53 @@
       </p:pic>
       <p:sp>
         <p:nvSpPr>
-          <p:cNvPr id="19" name="Text 13"/>
-          <p:cNvSpPr txBox="1"/>
-          <p:nvPr/>
-        </p:nvSpPr>
-        <p:spPr>
-          <a:xfrm>
-            <a:off x="4160520" y="3401568"/>
-            <a:ext cx="1865376" cy="347472"/>
-          </a:xfrm>
-          <a:prstGeom prst="rect">
-            <a:avLst/>
-          </a:prstGeom>
-          <a:noFill/>
-          <a:ln/>
-        </p:spPr>
-        <p:txBody>
-          <a:bodyPr wrap="square" lIns="0" tIns="0" rIns="0" bIns="0" rtlCol="0" anchor="ctr"/>
+          <p:cNvPr id="16" name="Text 10"/>
+          <p:cNvSpPr txBox="1"/>
+          <p:nvPr/>
+        </p:nvSpPr>
+        <p:spPr>
+          <a:xfrm>
+            <a:off x="4087368" y="2569464"/>
+            <a:ext cx="868680" cy="329184"/>
+          </a:xfrm>
+          <a:prstGeom prst="rect">
+            <a:avLst/>
+          </a:prstGeom>
+          <a:noFill/>
+          <a:ln/>
+        </p:spPr>
+        <p:txBody>
+          <a:bodyPr wrap="square" lIns="0" tIns="0" rIns="0" bIns="0" rtlCol="0" anchor="t"/>
           <a:lstStyle/>
           <a:p>
             <a:pPr indent="0" marL="0">
               <a:buNone/>
             </a:pPr>
             <a:r>
-              <a:rPr lang="en-US" sz="1250" b="1" dirty="0">
-                <a:solidFill>
-                  <a:srgbClr val="E3BE5C"/>
+              <a:rPr lang="en-US" sz="1200" b="1" dirty="0">
+                <a:solidFill>
+                  <a:srgbClr val="A8432A"/>
                 </a:solidFill>
                 <a:latin typeface="Cambria" pitchFamily="34" charset="0"/>
                 <a:ea typeface="Cambria" pitchFamily="34" charset="-122"/>
                 <a:cs typeface="Cambria" pitchFamily="34" charset="-120"/>
               </a:rPr>
-              <a:t>Нос Сфинкса</a:t>
-            </a:r>
-            <a:endParaRPr lang="en-US" sz="1250" dirty="0"/>
-          </a:p>
-        </p:txBody>
-      </p:sp>
-      <p:sp>
-        <p:nvSpPr>
-          <p:cNvPr id="20" name="Text 14"/>
-          <p:cNvSpPr txBox="1"/>
-          <p:nvPr/>
-        </p:nvSpPr>
-        <p:spPr>
-          <a:xfrm>
-            <a:off x="3749040" y="3822192"/>
-            <a:ext cx="2212848" cy="749808"/>
+              <a:t>Правда</a:t>
+            </a:r>
+            <a:endParaRPr lang="en-US" sz="1200" dirty="0"/>
+          </a:p>
+        </p:txBody>
+      </p:sp>
+      <p:sp>
+        <p:nvSpPr>
+          <p:cNvPr id="17" name="Text 11"/>
+          <p:cNvSpPr txBox="1"/>
+          <p:nvPr/>
+        </p:nvSpPr>
+        <p:spPr>
+          <a:xfrm>
+            <a:off x="4983480" y="2587752"/>
+            <a:ext cx="3593592" cy="585216"/>
           </a:xfrm>
           <a:prstGeom prst="rect">
             <a:avLst/>
@@ -7973,13 +7981,13 @@
             <a:r>
               <a:rPr lang="en-US" sz="1100" dirty="0">
                 <a:solidFill>
-                  <a:srgbClr val="F3E9D6"/>
+                  <a:srgbClr val="2A1E12"/>
                 </a:solidFill>
                 <a:latin typeface="Calibri" pitchFamily="34" charset="0"/>
                 <a:ea typeface="Calibri" pitchFamily="34" charset="-122"/>
                 <a:cs typeface="Calibri" pitchFamily="34" charset="-120"/>
               </a:rPr>
-              <a:t>Его отбил не Наполеон: на рисунках 1737 года носа уже нет.</a:t>
+              <a:t>Историк аль-Макризи писал: в 1378 году лицо изуродовал фанатик Мухаммад Саим ад-Дахр — его злило, что Сфинксу приносили дары. Следы зубил видны до сих пор.</a:t>
             </a:r>
             <a:endParaRPr lang="en-US" sz="1100" dirty="0"/>
           </a:p>
@@ -7987,34 +7995,41 @@
       </p:sp>
       <p:sp>
         <p:nvSpPr>
-          <p:cNvPr id="21" name="Shape 15"/>
+          <p:cNvPr id="18" name="Shape 12"/>
           <p:cNvSpPr/>
           <p:nvPr/>
         </p:nvSpPr>
         <p:spPr>
           <a:xfrm>
-            <a:off x="6199632" y="3273552"/>
-            <a:ext cx="2487168" cy="1353312"/>
+            <a:off x="3611880" y="3474720"/>
+            <a:ext cx="1636776" cy="1188720"/>
           </a:xfrm>
           <a:prstGeom prst="roundRect">
             <a:avLst>
-              <a:gd name="adj" fmla="val 6757"/>
+              <a:gd name="adj" fmla="val 7692"/>
             </a:avLst>
           </a:prstGeom>
           <a:solidFill>
-            <a:srgbClr val="1A2C48"/>
+            <a:srgbClr val="FFFCF6"/>
           </a:solidFill>
-          <a:ln w="9525">
+          <a:ln w="12700">
             <a:solidFill>
-              <a:srgbClr val="3A5175"/>
+              <a:srgbClr val="FFFCF6"/>
             </a:solidFill>
             <a:prstDash val="solid"/>
           </a:ln>
+          <a:effectLst>
+            <a:outerShdw sx="100000" sy="100000" kx="0" ky="0" algn="bl" rotWithShape="0" blurRad="101600" dist="25400" dir="5400000">
+              <a:srgbClr val="4A3418">
+                <a:alpha val="16000"/>
+              </a:srgbClr>
+            </a:outerShdw>
+          </a:effectLst>
         </p:spPr>
       </p:sp>
       <p:pic>
         <p:nvPicPr>
-          <p:cNvPr id="22" name="Image 4" descr="/tmp/claude-0/-home-user-heinrich-mario/e7688653-8e48-5480-a009-7b18c0e4f8cc/scratchpad/egypt_build/assets/ic_paint_gold.png">    </p:cNvPr>
+          <p:cNvPr id="19" name="Image 4" descr="/tmp/claude-0/-home-user-heinrich-mario/e7688653-8e48-5480-a009-7b18c0e4f8cc/scratchpad/egypt_build/assets/ic_mammoth_gold.png">    </p:cNvPr>
           <p:cNvPicPr>
             <a:picLocks noChangeAspect="1"/>
           </p:cNvPicPr>
@@ -8028,8 +8043,8 @@
         </p:blipFill>
         <p:spPr>
           <a:xfrm>
-            <a:off x="6336792" y="3401568"/>
-            <a:ext cx="347472" cy="347472"/>
+            <a:off x="3721608" y="3575304"/>
+            <a:ext cx="292608" cy="292608"/>
           </a:xfrm>
           <a:prstGeom prst="rect">
             <a:avLst/>
@@ -8038,14 +8053,14 @@
       </p:pic>
       <p:sp>
         <p:nvSpPr>
-          <p:cNvPr id="23" name="Text 16"/>
-          <p:cNvSpPr txBox="1"/>
-          <p:nvPr/>
-        </p:nvSpPr>
-        <p:spPr>
-          <a:xfrm>
-            <a:off x="6748272" y="3401568"/>
-            <a:ext cx="1865376" cy="347472"/>
+          <p:cNvPr id="20" name="Text 13"/>
+          <p:cNvSpPr txBox="1"/>
+          <p:nvPr/>
+        </p:nvSpPr>
+        <p:spPr>
+          <a:xfrm>
+            <a:off x="4069080" y="3566160"/>
+            <a:ext cx="1133856" cy="310896"/>
           </a:xfrm>
           <a:prstGeom prst="rect">
             <a:avLst/>
@@ -8061,30 +8076,30 @@
               <a:buNone/>
             </a:pPr>
             <a:r>
-              <a:rPr lang="en-US" sz="1250" b="1" dirty="0">
-                <a:solidFill>
-                  <a:srgbClr val="E3BE5C"/>
+              <a:rPr lang="en-US" sz="1200" b="1" dirty="0">
+                <a:solidFill>
+                  <a:srgbClr val="A8432A"/>
                 </a:solidFill>
                 <a:latin typeface="Cambria" pitchFamily="34" charset="0"/>
                 <a:ea typeface="Cambria" pitchFamily="34" charset="-122"/>
                 <a:cs typeface="Cambria" pitchFamily="34" charset="-120"/>
               </a:rPr>
-              <a:t>Мумии на продажу</a:t>
-            </a:r>
-            <a:endParaRPr lang="en-US" sz="1250" dirty="0"/>
-          </a:p>
-        </p:txBody>
-      </p:sp>
-      <p:sp>
-        <p:nvSpPr>
-          <p:cNvPr id="24" name="Text 17"/>
-          <p:cNvSpPr txBox="1"/>
-          <p:nvPr/>
-        </p:nvSpPr>
-        <p:spPr>
-          <a:xfrm>
-            <a:off x="6336792" y="3822192"/>
-            <a:ext cx="2212848" cy="749808"/>
+              <a:t>Мамонты</a:t>
+            </a:r>
+            <a:endParaRPr lang="en-US" sz="1200" dirty="0"/>
+          </a:p>
+        </p:txBody>
+      </p:sp>
+      <p:sp>
+        <p:nvSpPr>
+          <p:cNvPr id="21" name="Text 14"/>
+          <p:cNvSpPr txBox="1"/>
+          <p:nvPr/>
+        </p:nvSpPr>
+        <p:spPr>
+          <a:xfrm>
+            <a:off x="3721608" y="3931920"/>
+            <a:ext cx="1435608" cy="658368"/>
           </a:xfrm>
           <a:prstGeom prst="rect">
             <a:avLst/>
@@ -8100,44 +8115,309 @@
               <a:buNone/>
             </a:pPr>
             <a:r>
-              <a:rPr lang="en-US" sz="1100" dirty="0">
-                <a:solidFill>
-                  <a:srgbClr val="F3E9D6"/>
+              <a:rPr lang="en-US" sz="1050" dirty="0">
+                <a:solidFill>
+                  <a:srgbClr val="2A1E12"/>
                 </a:solidFill>
                 <a:latin typeface="Calibri" pitchFamily="34" charset="0"/>
                 <a:ea typeface="Calibri" pitchFamily="34" charset="-122"/>
                 <a:cs typeface="Calibri" pitchFamily="34" charset="-120"/>
               </a:rPr>
-              <a:t>В Европе из мумий делали лекарства и краску, а 19 тонн кошачьих мумий пустили на удобрение.</a:t>
-            </a:r>
-            <a:endParaRPr lang="en-US" sz="1100" dirty="0"/>
-          </a:p>
-        </p:txBody>
-      </p:sp>
-      <p:sp>
-        <p:nvSpPr>
-          <p:cNvPr id="25" name="Text 18"/>
-          <p:cNvSpPr txBox="1"/>
-          <p:nvPr/>
-        </p:nvSpPr>
-        <p:spPr>
-          <a:xfrm>
-            <a:off x="320040" y="4846320"/>
-            <a:ext cx="3657600" cy="201168"/>
-          </a:xfrm>
-          <a:prstGeom prst="rect">
-            <a:avLst/>
-          </a:prstGeom>
-          <a:noFill/>
-          <a:ln/>
+              <a:t>Ещё жили на острове Врангеля, когда строили пирамиду Хеопса.</a:t>
+            </a:r>
+            <a:endParaRPr lang="en-US" sz="1050" dirty="0"/>
+          </a:p>
+        </p:txBody>
+      </p:sp>
+      <p:sp>
+        <p:nvSpPr>
+          <p:cNvPr id="22" name="Shape 15"/>
+          <p:cNvSpPr/>
+          <p:nvPr/>
+        </p:nvSpPr>
+        <p:spPr>
+          <a:xfrm>
+            <a:off x="5330952" y="3474720"/>
+            <a:ext cx="1636776" cy="1188720"/>
+          </a:xfrm>
+          <a:prstGeom prst="roundRect">
+            <a:avLst>
+              <a:gd name="adj" fmla="val 7692"/>
+            </a:avLst>
+          </a:prstGeom>
+          <a:solidFill>
+            <a:srgbClr val="FFFCF6"/>
+          </a:solidFill>
+          <a:ln w="12700">
+            <a:solidFill>
+              <a:srgbClr val="FFFCF6"/>
+            </a:solidFill>
+            <a:prstDash val="solid"/>
+          </a:ln>
           <a:effectLst>
-            <a:outerShdw sx="100000" sy="100000" kx="0" ky="0" algn="bl" rotWithShape="0" blurRad="63500" dist="25400" dir="5400000">
-              <a:srgbClr val="000000">
-                <a:alpha val="55000"/>
+            <a:outerShdw sx="100000" sy="100000" kx="0" ky="0" algn="bl" rotWithShape="0" blurRad="101600" dist="25400" dir="5400000">
+              <a:srgbClr val="4A3418">
+                <a:alpha val="16000"/>
               </a:srgbClr>
             </a:outerShdw>
           </a:effectLst>
         </p:spPr>
+      </p:sp>
+      <p:pic>
+        <p:nvPicPr>
+          <p:cNvPr id="23" name="Image 5" descr="/tmp/claude-0/-home-user-heinrich-mario/e7688653-8e48-5480-a009-7b18c0e4f8cc/scratchpad/egypt_build/assets/ic_crown_gold.png">    </p:cNvPr>
+          <p:cNvPicPr>
+            <a:picLocks noChangeAspect="1"/>
+          </p:cNvPicPr>
+          <p:nvPr/>
+        </p:nvPicPr>
+        <p:blipFill>
+          <a:blip r:embed="rId7"/>
+          <a:stretch>
+            <a:fillRect/>
+          </a:stretch>
+        </p:blipFill>
+        <p:spPr>
+          <a:xfrm>
+            <a:off x="5440680" y="3575304"/>
+            <a:ext cx="292608" cy="292608"/>
+          </a:xfrm>
+          <a:prstGeom prst="rect">
+            <a:avLst/>
+          </a:prstGeom>
+        </p:spPr>
+      </p:pic>
+      <p:sp>
+        <p:nvSpPr>
+          <p:cNvPr id="24" name="Text 16"/>
+          <p:cNvSpPr txBox="1"/>
+          <p:nvPr/>
+        </p:nvSpPr>
+        <p:spPr>
+          <a:xfrm>
+            <a:off x="5788152" y="3566160"/>
+            <a:ext cx="1133856" cy="310896"/>
+          </a:xfrm>
+          <a:prstGeom prst="rect">
+            <a:avLst/>
+          </a:prstGeom>
+          <a:noFill/>
+          <a:ln/>
+        </p:spPr>
+        <p:txBody>
+          <a:bodyPr wrap="square" lIns="0" tIns="0" rIns="0" bIns="0" rtlCol="0" anchor="ctr"/>
+          <a:lstStyle/>
+          <a:p>
+            <a:pPr indent="0" marL="0">
+              <a:buNone/>
+            </a:pPr>
+            <a:r>
+              <a:rPr lang="en-US" sz="1200" b="1" dirty="0">
+                <a:solidFill>
+                  <a:srgbClr val="A8432A"/>
+                </a:solidFill>
+                <a:latin typeface="Cambria" pitchFamily="34" charset="0"/>
+                <a:ea typeface="Cambria" pitchFamily="34" charset="-122"/>
+                <a:cs typeface="Cambria" pitchFamily="34" charset="-120"/>
+              </a:rPr>
+              <a:t>Клеопатра</a:t>
+            </a:r>
+            <a:endParaRPr lang="en-US" sz="1200" dirty="0"/>
+          </a:p>
+        </p:txBody>
+      </p:sp>
+      <p:sp>
+        <p:nvSpPr>
+          <p:cNvPr id="25" name="Text 17"/>
+          <p:cNvSpPr txBox="1"/>
+          <p:nvPr/>
+        </p:nvSpPr>
+        <p:spPr>
+          <a:xfrm>
+            <a:off x="5440680" y="3931920"/>
+            <a:ext cx="1435608" cy="658368"/>
+          </a:xfrm>
+          <a:prstGeom prst="rect">
+            <a:avLst/>
+          </a:prstGeom>
+          <a:noFill/>
+          <a:ln/>
+        </p:spPr>
+        <p:txBody>
+          <a:bodyPr wrap="square" lIns="0" tIns="0" rIns="0" bIns="0" rtlCol="0" anchor="t"/>
+          <a:lstStyle/>
+          <a:p>
+            <a:pPr indent="0" marL="0">
+              <a:buNone/>
+            </a:pPr>
+            <a:r>
+              <a:rPr lang="en-US" sz="1050" dirty="0">
+                <a:solidFill>
+                  <a:srgbClr val="2A1E12"/>
+                </a:solidFill>
+                <a:latin typeface="Calibri" pitchFamily="34" charset="0"/>
+                <a:ea typeface="Calibri" pitchFamily="34" charset="-122"/>
+                <a:cs typeface="Calibri" pitchFamily="34" charset="-120"/>
+              </a:rPr>
+              <a:t>Жила ближе к полёту на Луну, чем к постройке пирамид.</a:t>
+            </a:r>
+            <a:endParaRPr lang="en-US" sz="1050" dirty="0"/>
+          </a:p>
+        </p:txBody>
+      </p:sp>
+      <p:sp>
+        <p:nvSpPr>
+          <p:cNvPr id="26" name="Shape 18"/>
+          <p:cNvSpPr/>
+          <p:nvPr/>
+        </p:nvSpPr>
+        <p:spPr>
+          <a:xfrm>
+            <a:off x="7050024" y="3474720"/>
+            <a:ext cx="1636776" cy="1188720"/>
+          </a:xfrm>
+          <a:prstGeom prst="roundRect">
+            <a:avLst>
+              <a:gd name="adj" fmla="val 7692"/>
+            </a:avLst>
+          </a:prstGeom>
+          <a:solidFill>
+            <a:srgbClr val="FFFCF6"/>
+          </a:solidFill>
+          <a:ln w="12700">
+            <a:solidFill>
+              <a:srgbClr val="FFFCF6"/>
+            </a:solidFill>
+            <a:prstDash val="solid"/>
+          </a:ln>
+          <a:effectLst>
+            <a:outerShdw sx="100000" sy="100000" kx="0" ky="0" algn="bl" rotWithShape="0" blurRad="101600" dist="25400" dir="5400000">
+              <a:srgbClr val="4A3418">
+                <a:alpha val="16000"/>
+              </a:srgbClr>
+            </a:outerShdw>
+          </a:effectLst>
+        </p:spPr>
+      </p:sp>
+      <p:pic>
+        <p:nvPicPr>
+          <p:cNvPr id="27" name="Image 6" descr="/tmp/claude-0/-home-user-heinrich-mario/e7688653-8e48-5480-a009-7b18c0e4f8cc/scratchpad/egypt_build/assets/ic_paint_gold.png">    </p:cNvPr>
+          <p:cNvPicPr>
+            <a:picLocks noChangeAspect="1"/>
+          </p:cNvPicPr>
+          <p:nvPr/>
+        </p:nvPicPr>
+        <p:blipFill>
+          <a:blip r:embed="rId8"/>
+          <a:stretch>
+            <a:fillRect/>
+          </a:stretch>
+        </p:blipFill>
+        <p:spPr>
+          <a:xfrm>
+            <a:off x="7159752" y="3575304"/>
+            <a:ext cx="292608" cy="292608"/>
+          </a:xfrm>
+          <a:prstGeom prst="rect">
+            <a:avLst/>
+          </a:prstGeom>
+        </p:spPr>
+      </p:pic>
+      <p:sp>
+        <p:nvSpPr>
+          <p:cNvPr id="28" name="Text 19"/>
+          <p:cNvSpPr txBox="1"/>
+          <p:nvPr/>
+        </p:nvSpPr>
+        <p:spPr>
+          <a:xfrm>
+            <a:off x="7507224" y="3566160"/>
+            <a:ext cx="1133856" cy="310896"/>
+          </a:xfrm>
+          <a:prstGeom prst="rect">
+            <a:avLst/>
+          </a:prstGeom>
+          <a:noFill/>
+          <a:ln/>
+        </p:spPr>
+        <p:txBody>
+          <a:bodyPr wrap="square" lIns="0" tIns="0" rIns="0" bIns="0" rtlCol="0" anchor="ctr"/>
+          <a:lstStyle/>
+          <a:p>
+            <a:pPr indent="0" marL="0">
+              <a:buNone/>
+            </a:pPr>
+            <a:r>
+              <a:rPr lang="en-US" sz="1200" b="1" dirty="0">
+                <a:solidFill>
+                  <a:srgbClr val="A8432A"/>
+                </a:solidFill>
+                <a:latin typeface="Cambria" pitchFamily="34" charset="0"/>
+                <a:ea typeface="Cambria" pitchFamily="34" charset="-122"/>
+                <a:cs typeface="Cambria" pitchFamily="34" charset="-120"/>
+              </a:rPr>
+              <a:t>Мумии</a:t>
+            </a:r>
+            <a:endParaRPr lang="en-US" sz="1200" dirty="0"/>
+          </a:p>
+        </p:txBody>
+      </p:sp>
+      <p:sp>
+        <p:nvSpPr>
+          <p:cNvPr id="29" name="Text 20"/>
+          <p:cNvSpPr txBox="1"/>
+          <p:nvPr/>
+        </p:nvSpPr>
+        <p:spPr>
+          <a:xfrm>
+            <a:off x="7159752" y="3931920"/>
+            <a:ext cx="1435608" cy="658368"/>
+          </a:xfrm>
+          <a:prstGeom prst="rect">
+            <a:avLst/>
+          </a:prstGeom>
+          <a:noFill/>
+          <a:ln/>
+        </p:spPr>
+        <p:txBody>
+          <a:bodyPr wrap="square" lIns="0" tIns="0" rIns="0" bIns="0" rtlCol="0" anchor="t"/>
+          <a:lstStyle/>
+          <a:p>
+            <a:pPr indent="0" marL="0">
+              <a:buNone/>
+            </a:pPr>
+            <a:r>
+              <a:rPr lang="en-US" sz="1050" dirty="0">
+                <a:solidFill>
+                  <a:srgbClr val="2A1E12"/>
+                </a:solidFill>
+                <a:latin typeface="Calibri" pitchFamily="34" charset="0"/>
+                <a:ea typeface="Calibri" pitchFamily="34" charset="-122"/>
+                <a:cs typeface="Calibri" pitchFamily="34" charset="-120"/>
+              </a:rPr>
+              <a:t>В Европе из них делали лекарства и коричневую краску.</a:t>
+            </a:r>
+            <a:endParaRPr lang="en-US" sz="1050" dirty="0"/>
+          </a:p>
+        </p:txBody>
+      </p:sp>
+      <p:sp>
+        <p:nvSpPr>
+          <p:cNvPr id="30" name="Text 21"/>
+          <p:cNvSpPr txBox="1"/>
+          <p:nvPr/>
+        </p:nvSpPr>
+        <p:spPr>
+          <a:xfrm>
+            <a:off x="320040" y="4846320"/>
+            <a:ext cx="3657600" cy="201168"/>
+          </a:xfrm>
+          <a:prstGeom prst="rect">
+            <a:avLst/>
+          </a:prstGeom>
+          <a:noFill/>
+          <a:ln/>
+        </p:spPr>
         <p:txBody>
           <a:bodyPr wrap="square" lIns="0" tIns="0" rIns="0" bIns="0" rtlCol="0" anchor="b"/>
           <a:lstStyle/>
@@ -8148,7 +8428,7 @@
             <a:r>
               <a:rPr lang="en-US" sz="900" i="1" spc="100" kern="0" dirty="0">
                 <a:solidFill>
-                  <a:srgbClr val="D8CBAE"/>
+                  <a:srgbClr val="8A7356"/>
                 </a:solidFill>
                 <a:latin typeface="Calibri" pitchFamily="34" charset="0"/>
                 <a:ea typeface="Calibri" pitchFamily="34" charset="-122"/>

--- a/Древний_Египет.pptx
+++ b/Древний_Египет.pptx
@@ -1313,8 +1313,8 @@
           <a:p>
             <a:r>
               <a:rPr lang="en-US" dirty="0"/>
-              <a:t>Нос Сфинкса. По легенде, его отстрелили из пушки французские солдаты Наполеона во время Египетского похода 1798 года. Но датский капитан Фредерик Норден зарисовал Сфинкса ещё в 1737 году, и носа на рисунках уже нет. Египетский историк аль-Макризи (XV век) писал, что в 1378 году лицо статуи изуродовал суфий Мухаммад Саим ад-Дахр: его возмущало, что крестьяне приносят Сфинксу дары, чтобы получить хороший урожай. Египтолог Марк Лернер нашёл на лице следы стержней и зубил, которыми нос отбивали намеренно.
-Мамонты на острове Врангеля жили примерно до 2000 г. до н. э., а пирамиду Хеопса построили около 2560 г. до н. э. Клеопатра умерла в 30 г. до н. э.: от пирамиды её отделяют около 2500 лет, от полёта на Луну в 1969 году — около 2000. Краску «мумия коричневая» продавали до XX века, а в 1890 году около 19 тонн кошачьих мумий привезли в Англию и продали как удобрение.
+              <a:t>Нос Сфинкса. Египетский историк аль-Макризи (XV век) писал, что в 1378 году лицо статуи изуродовал суфий Мухаммад Саим ад-Дахр: его возмущало, что крестьяне приносят Сфинксу дары, чтобы получить хороший урожай. Египтолог Марк Лернер нашёл на лице следы стержней и зубил, которыми нос отбивали намеренно.
+Краска «мумия» (Mummy brown). Её ценили за тёплый прозрачный коричневый оттенок. Художник Эдвард Бёрн-Джонс, узнав её происхождение, похоронил тюбик в саду — это видел его племянник, писатель Редьярд Киплинг. Лондонская фирма C. Roberson прекратила выпуск в 1960-х, когда у неё закончились мумии. Сейчас под этим названием продают синтетический пигмент.
 Фото: Dmitrii Zhodzishskii, Unsplash.</a:t>
             </a:r>
             <a:endParaRPr lang="en-US" dirty="0"/>
@@ -7532,7 +7532,7 @@
         <p:spPr>
           <a:xfrm>
             <a:off x="3611880" y="457200"/>
-            <a:ext cx="1538021" cy="274320"/>
+            <a:ext cx="2766974" cy="274320"/>
           </a:xfrm>
           <a:prstGeom prst="roundRect">
             <a:avLst>
@@ -7558,7 +7558,7 @@
         </p:nvSpPr>
         <p:spPr>
           <a:xfrm>
-            <a:off x="5195621" y="457200"/>
+            <a:off x="6424574" y="457200"/>
             <a:ext cx="45720" cy="274320"/>
           </a:xfrm>
           <a:prstGeom prst="rect">
@@ -7584,7 +7584,7 @@
         <p:spPr>
           <a:xfrm>
             <a:off x="3611880" y="457200"/>
-            <a:ext cx="1538021" cy="274320"/>
+            <a:ext cx="2766974" cy="274320"/>
           </a:xfrm>
           <a:prstGeom prst="rect">
             <a:avLst/>
@@ -7608,7 +7608,7 @@
                 <a:ea typeface="Calibri" pitchFamily="34" charset="-122"/>
                 <a:cs typeface="Calibri" pitchFamily="34" charset="-120"/>
               </a:rPr>
-              <a:t>08 · СФИНКС</a:t>
+              <a:t>08 · УДИВИТЕЛЬНЫЕ ФАКТЫ</a:t>
             </a:r>
             <a:endParaRPr lang="en-US" sz="1000" dirty="0"/>
           </a:p>
@@ -7662,11 +7662,11 @@
         <p:spPr>
           <a:xfrm>
             <a:off x="3611880" y="1463040"/>
-            <a:ext cx="5074920" cy="1865376"/>
+            <a:ext cx="5074920" cy="914400"/>
           </a:xfrm>
           <a:prstGeom prst="roundRect">
             <a:avLst>
-              <a:gd name="adj" fmla="val 4902"/>
+              <a:gd name="adj" fmla="val 10000"/>
             </a:avLst>
           </a:prstGeom>
           <a:solidFill>
@@ -7689,7 +7689,7 @@
       </p:sp>
       <p:pic>
         <p:nvPicPr>
-          <p:cNvPr id="9" name="Image 1" descr="/tmp/claude-0/-home-user-heinrich-mario/e7688653-8e48-5480-a009-7b18c0e4f8cc/scratchpad/egypt_build/assets/ic_cannon_night.png">    </p:cNvPr>
+          <p:cNvPr id="9" name="Image 1" descr="/tmp/claude-0/-home-user-heinrich-mario/e7688653-8e48-5480-a009-7b18c0e4f8cc/scratchpad/egypt_build/assets/ic_chisel_night.png">    </p:cNvPr>
           <p:cNvPicPr>
             <a:picLocks noChangeAspect="1"/>
           </p:cNvPicPr>
@@ -7703,8 +7703,8 @@
         </p:blipFill>
         <p:spPr>
           <a:xfrm>
-            <a:off x="3749040" y="1636776"/>
-            <a:ext cx="274320" cy="274320"/>
+            <a:off x="3776472" y="1737360"/>
+            <a:ext cx="365760" cy="365760"/>
           </a:xfrm>
           <a:prstGeom prst="rect">
             <a:avLst/>
@@ -7719,8 +7719,8 @@
         </p:nvSpPr>
         <p:spPr>
           <a:xfrm>
-            <a:off x="4087368" y="1581912"/>
-            <a:ext cx="868680" cy="329184"/>
+            <a:off x="4297680" y="1536192"/>
+            <a:ext cx="4251960" cy="768096"/>
           </a:xfrm>
           <a:prstGeom prst="rect">
             <a:avLst/>
@@ -7729,155 +7729,28 @@
           <a:ln/>
         </p:spPr>
         <p:txBody>
-          <a:bodyPr wrap="square" lIns="0" tIns="0" rIns="0" bIns="0" rtlCol="0" anchor="t"/>
+          <a:bodyPr wrap="square" lIns="0" tIns="0" rIns="0" bIns="0" rtlCol="0" anchor="ctr"/>
           <a:lstStyle/>
           <a:p>
             <a:pPr indent="0" marL="0">
               <a:buNone/>
             </a:pPr>
             <a:r>
-              <a:rPr lang="en-US" sz="1200" b="1" dirty="0">
+              <a:rPr lang="en-US" sz="1150" b="1" dirty="0">
                 <a:solidFill>
                   <a:srgbClr val="A8432A"/>
-                </a:solidFill>
-                <a:latin typeface="Cambria" pitchFamily="34" charset="0"/>
-                <a:ea typeface="Cambria" pitchFamily="34" charset="-122"/>
-                <a:cs typeface="Cambria" pitchFamily="34" charset="-120"/>
-              </a:rPr>
-              <a:t>Легенда</a:t>
-            </a:r>
-            <a:endParaRPr lang="en-US" sz="1200" dirty="0"/>
-          </a:p>
-        </p:txBody>
-      </p:sp>
-      <p:sp>
-        <p:nvSpPr>
-          <p:cNvPr id="11" name="Text 7"/>
-          <p:cNvSpPr txBox="1"/>
-          <p:nvPr/>
-        </p:nvSpPr>
-        <p:spPr>
-          <a:xfrm>
-            <a:off x="4983480" y="1600200"/>
-            <a:ext cx="3593592" cy="402336"/>
-          </a:xfrm>
-          <a:prstGeom prst="rect">
-            <a:avLst/>
-          </a:prstGeom>
-          <a:noFill/>
-          <a:ln/>
-        </p:spPr>
-        <p:txBody>
-          <a:bodyPr wrap="square" lIns="0" tIns="0" rIns="0" bIns="0" rtlCol="0" anchor="t"/>
-          <a:lstStyle/>
-          <a:p>
-            <a:pPr indent="0" marL="0">
-              <a:buNone/>
-            </a:pPr>
-            <a:r>
-              <a:rPr lang="en-US" sz="1100" dirty="0">
-                <a:solidFill>
-                  <a:srgbClr val="2A1E12"/>
                 </a:solidFill>
                 <a:latin typeface="Calibri" pitchFamily="34" charset="0"/>
                 <a:ea typeface="Calibri" pitchFamily="34" charset="-122"/>
                 <a:cs typeface="Calibri" pitchFamily="34" charset="-120"/>
               </a:rPr>
-              <a:t>Будто бы нос отстрелили из пушки солдаты Наполеона, когда его армия пришла в Египет в 1798 году.</a:t>
-            </a:r>
-            <a:endParaRPr lang="en-US" sz="1100" dirty="0"/>
-          </a:p>
-        </p:txBody>
-      </p:sp>
-      <p:pic>
-        <p:nvPicPr>
-          <p:cNvPr id="12" name="Image 2" descr="/tmp/claude-0/-home-user-heinrich-mario/e7688653-8e48-5480-a009-7b18c0e4f8cc/scratchpad/egypt_build/assets/ic_drawing_night.png">    </p:cNvPr>
-          <p:cNvPicPr>
-            <a:picLocks noChangeAspect="1"/>
-          </p:cNvPicPr>
-          <p:nvPr/>
-        </p:nvPicPr>
-        <p:blipFill>
-          <a:blip r:embed="rId4"/>
-          <a:stretch>
-            <a:fillRect/>
-          </a:stretch>
-        </p:blipFill>
-        <p:spPr>
-          <a:xfrm>
-            <a:off x="3749040" y="2130552"/>
-            <a:ext cx="274320" cy="274320"/>
-          </a:xfrm>
-          <a:prstGeom prst="rect">
-            <a:avLst/>
-          </a:prstGeom>
-        </p:spPr>
-      </p:pic>
-      <p:sp>
-        <p:nvSpPr>
-          <p:cNvPr id="13" name="Text 8"/>
-          <p:cNvSpPr txBox="1"/>
-          <p:nvPr/>
-        </p:nvSpPr>
-        <p:spPr>
-          <a:xfrm>
-            <a:off x="4087368" y="2075688"/>
-            <a:ext cx="868680" cy="329184"/>
-          </a:xfrm>
-          <a:prstGeom prst="rect">
-            <a:avLst/>
-          </a:prstGeom>
-          <a:noFill/>
-          <a:ln/>
-        </p:spPr>
-        <p:txBody>
-          <a:bodyPr wrap="square" lIns="0" tIns="0" rIns="0" bIns="0" rtlCol="0" anchor="t"/>
-          <a:lstStyle/>
-          <a:p>
+              <a:t>В 1378 году </a:t>
+            </a:r>
             <a:pPr indent="0" marL="0">
               <a:buNone/>
             </a:pPr>
             <a:r>
-              <a:rPr lang="en-US" sz="1200" b="1" dirty="0">
-                <a:solidFill>
-                  <a:srgbClr val="A8432A"/>
-                </a:solidFill>
-                <a:latin typeface="Cambria" pitchFamily="34" charset="0"/>
-                <a:ea typeface="Cambria" pitchFamily="34" charset="-122"/>
-                <a:cs typeface="Cambria" pitchFamily="34" charset="-120"/>
-              </a:rPr>
-              <a:t>Но</a:t>
-            </a:r>
-            <a:endParaRPr lang="en-US" sz="1200" dirty="0"/>
-          </a:p>
-        </p:txBody>
-      </p:sp>
-      <p:sp>
-        <p:nvSpPr>
-          <p:cNvPr id="14" name="Text 9"/>
-          <p:cNvSpPr txBox="1"/>
-          <p:nvPr/>
-        </p:nvSpPr>
-        <p:spPr>
-          <a:xfrm>
-            <a:off x="4983480" y="2093976"/>
-            <a:ext cx="3593592" cy="402336"/>
-          </a:xfrm>
-          <a:prstGeom prst="rect">
-            <a:avLst/>
-          </a:prstGeom>
-          <a:noFill/>
-          <a:ln/>
-        </p:spPr>
-        <p:txBody>
-          <a:bodyPr wrap="square" lIns="0" tIns="0" rIns="0" bIns="0" rtlCol="0" anchor="t"/>
-          <a:lstStyle/>
-          <a:p>
-            <a:pPr indent="0" marL="0">
-              <a:buNone/>
-            </a:pPr>
-            <a:r>
-              <a:rPr lang="en-US" sz="1100" dirty="0">
+              <a:rPr lang="en-US" sz="1150" dirty="0">
                 <a:solidFill>
                   <a:srgbClr val="2A1E12"/>
                 </a:solidFill>
@@ -7885,128 +7758,26 @@
                 <a:ea typeface="Calibri" pitchFamily="34" charset="-122"/>
                 <a:cs typeface="Calibri" pitchFamily="34" charset="-120"/>
               </a:rPr>
-              <a:t>Датский путешественник Норден нарисовал Сфинкса в 1737 году — уже без носа. Это за 60 лет до Наполеона.</a:t>
-            </a:r>
-            <a:endParaRPr lang="en-US" sz="1100" dirty="0"/>
-          </a:p>
-        </p:txBody>
-      </p:sp>
-      <p:pic>
-        <p:nvPicPr>
-          <p:cNvPr id="15" name="Image 3" descr="/tmp/claude-0/-home-user-heinrich-mario/e7688653-8e48-5480-a009-7b18c0e4f8cc/scratchpad/egypt_build/assets/ic_chisel_night.png">    </p:cNvPr>
-          <p:cNvPicPr>
-            <a:picLocks noChangeAspect="1"/>
-          </p:cNvPicPr>
-          <p:nvPr/>
-        </p:nvPicPr>
-        <p:blipFill>
-          <a:blip r:embed="rId5"/>
-          <a:stretch>
-            <a:fillRect/>
-          </a:stretch>
-        </p:blipFill>
-        <p:spPr>
-          <a:xfrm>
-            <a:off x="3749040" y="2624328"/>
-            <a:ext cx="274320" cy="274320"/>
-          </a:xfrm>
-          <a:prstGeom prst="rect">
-            <a:avLst/>
-          </a:prstGeom>
-        </p:spPr>
-      </p:pic>
-      <p:sp>
-        <p:nvSpPr>
-          <p:cNvPr id="16" name="Text 10"/>
-          <p:cNvSpPr txBox="1"/>
-          <p:nvPr/>
-        </p:nvSpPr>
-        <p:spPr>
-          <a:xfrm>
-            <a:off x="4087368" y="2569464"/>
-            <a:ext cx="868680" cy="329184"/>
-          </a:xfrm>
-          <a:prstGeom prst="rect">
-            <a:avLst/>
-          </a:prstGeom>
-          <a:noFill/>
-          <a:ln/>
-        </p:spPr>
-        <p:txBody>
-          <a:bodyPr wrap="square" lIns="0" tIns="0" rIns="0" bIns="0" rtlCol="0" anchor="t"/>
-          <a:lstStyle/>
-          <a:p>
-            <a:pPr indent="0" marL="0">
-              <a:buNone/>
-            </a:pPr>
-            <a:r>
-              <a:rPr lang="en-US" sz="1200" b="1" dirty="0">
-                <a:solidFill>
-                  <a:srgbClr val="A8432A"/>
-                </a:solidFill>
-                <a:latin typeface="Cambria" pitchFamily="34" charset="0"/>
-                <a:ea typeface="Cambria" pitchFamily="34" charset="-122"/>
-                <a:cs typeface="Cambria" pitchFamily="34" charset="-120"/>
-              </a:rPr>
-              <a:t>Правда</a:t>
-            </a:r>
-            <a:endParaRPr lang="en-US" sz="1200" dirty="0"/>
-          </a:p>
-        </p:txBody>
-      </p:sp>
-      <p:sp>
-        <p:nvSpPr>
-          <p:cNvPr id="17" name="Text 11"/>
-          <p:cNvSpPr txBox="1"/>
-          <p:nvPr/>
-        </p:nvSpPr>
-        <p:spPr>
-          <a:xfrm>
-            <a:off x="4983480" y="2587752"/>
-            <a:ext cx="3593592" cy="585216"/>
-          </a:xfrm>
-          <a:prstGeom prst="rect">
-            <a:avLst/>
-          </a:prstGeom>
-          <a:noFill/>
-          <a:ln/>
-        </p:spPr>
-        <p:txBody>
-          <a:bodyPr wrap="square" lIns="0" tIns="0" rIns="0" bIns="0" rtlCol="0" anchor="t"/>
-          <a:lstStyle/>
-          <a:p>
-            <a:pPr indent="0" marL="0">
-              <a:buNone/>
-            </a:pPr>
-            <a:r>
-              <a:rPr lang="en-US" sz="1100" dirty="0">
-                <a:solidFill>
-                  <a:srgbClr val="2A1E12"/>
-                </a:solidFill>
-                <a:latin typeface="Calibri" pitchFamily="34" charset="0"/>
-                <a:ea typeface="Calibri" pitchFamily="34" charset="-122"/>
-                <a:cs typeface="Calibri" pitchFamily="34" charset="-120"/>
-              </a:rPr>
-              <a:t>Историк аль-Макризи писал: в 1378 году лицо изуродовал фанатик Мухаммад Саим ад-Дахр — его злило, что Сфинксу приносили дары. Следы зубил видны до сих пор.</a:t>
-            </a:r>
-            <a:endParaRPr lang="en-US" sz="1100" dirty="0"/>
-          </a:p>
-        </p:txBody>
-      </p:sp>
-      <p:sp>
-        <p:nvSpPr>
-          <p:cNvPr id="18" name="Shape 12"/>
+              <a:t>лицо статуи изуродовал фанатик Мухаммад Саим ад-Дахр — так писал историк аль-Макризи. Фанатика злило, что Сфинксу приносили дары. Следы зубил видны до сих пор.</a:t>
+            </a:r>
+            <a:endParaRPr lang="en-US" sz="1150" dirty="0"/>
+          </a:p>
+        </p:txBody>
+      </p:sp>
+      <p:sp>
+        <p:nvSpPr>
+          <p:cNvPr id="11" name="Shape 7"/>
           <p:cNvSpPr/>
           <p:nvPr/>
         </p:nvSpPr>
         <p:spPr>
           <a:xfrm>
-            <a:off x="3611880" y="3474720"/>
-            <a:ext cx="1636776" cy="1188720"/>
+            <a:off x="3611880" y="2542032"/>
+            <a:ext cx="5074920" cy="2121408"/>
           </a:xfrm>
           <a:prstGeom prst="roundRect">
             <a:avLst>
-              <a:gd name="adj" fmla="val 7692"/>
+              <a:gd name="adj" fmla="val 4310"/>
             </a:avLst>
           </a:prstGeom>
           <a:solidFill>
@@ -8029,22 +7800,22 @@
       </p:sp>
       <p:pic>
         <p:nvPicPr>
-          <p:cNvPr id="19" name="Image 4" descr="/tmp/claude-0/-home-user-heinrich-mario/e7688653-8e48-5480-a009-7b18c0e4f8cc/scratchpad/egypt_build/assets/ic_mammoth_gold.png">    </p:cNvPr>
+          <p:cNvPr id="12" name="Image 2" descr="/tmp/claude-0/-home-user-heinrich-mario/e7688653-8e48-5480-a009-7b18c0e4f8cc/scratchpad/egypt_build/assets/ic_paint_gold.png">    </p:cNvPr>
           <p:cNvPicPr>
             <a:picLocks noChangeAspect="1"/>
           </p:cNvPicPr>
           <p:nvPr/>
         </p:nvPicPr>
         <p:blipFill>
-          <a:blip r:embed="rId6"/>
+          <a:blip r:embed="rId4"/>
           <a:stretch>
             <a:fillRect/>
           </a:stretch>
         </p:blipFill>
         <p:spPr>
           <a:xfrm>
-            <a:off x="3721608" y="3575304"/>
-            <a:ext cx="292608" cy="292608"/>
+            <a:off x="3758184" y="2660904"/>
+            <a:ext cx="329184" cy="329184"/>
           </a:xfrm>
           <a:prstGeom prst="rect">
             <a:avLst/>
@@ -8053,14 +7824,14 @@
       </p:pic>
       <p:sp>
         <p:nvSpPr>
-          <p:cNvPr id="20" name="Text 13"/>
-          <p:cNvSpPr txBox="1"/>
-          <p:nvPr/>
-        </p:nvSpPr>
-        <p:spPr>
-          <a:xfrm>
-            <a:off x="4069080" y="3566160"/>
-            <a:ext cx="1133856" cy="310896"/>
+          <p:cNvPr id="13" name="Text 8"/>
+          <p:cNvSpPr txBox="1"/>
+          <p:nvPr/>
+        </p:nvSpPr>
+        <p:spPr>
+          <a:xfrm>
+            <a:off x="4178808" y="2651760"/>
+            <a:ext cx="4389120" cy="347472"/>
           </a:xfrm>
           <a:prstGeom prst="rect">
             <a:avLst/>
@@ -8076,7 +7847,7 @@
               <a:buNone/>
             </a:pPr>
             <a:r>
-              <a:rPr lang="en-US" sz="1200" b="1" dirty="0">
+              <a:rPr lang="en-US" sz="1350" b="1" dirty="0">
                 <a:solidFill>
                   <a:srgbClr val="A8432A"/>
                 </a:solidFill>
@@ -8084,22 +7855,22 @@
                 <a:ea typeface="Cambria" pitchFamily="34" charset="-122"/>
                 <a:cs typeface="Cambria" pitchFamily="34" charset="-120"/>
               </a:rPr>
-              <a:t>Мамонты</a:t>
-            </a:r>
-            <a:endParaRPr lang="en-US" sz="1200" dirty="0"/>
-          </a:p>
-        </p:txBody>
-      </p:sp>
-      <p:sp>
-        <p:nvSpPr>
-          <p:cNvPr id="21" name="Text 14"/>
-          <p:cNvSpPr txBox="1"/>
-          <p:nvPr/>
-        </p:nvSpPr>
-        <p:spPr>
-          <a:xfrm>
-            <a:off x="3721608" y="3931920"/>
-            <a:ext cx="1435608" cy="658368"/>
+              <a:t>Краска из мумий</a:t>
+            </a:r>
+            <a:endParaRPr lang="en-US" sz="1350" dirty="0"/>
+          </a:p>
+        </p:txBody>
+      </p:sp>
+      <p:sp>
+        <p:nvSpPr>
+          <p:cNvPr id="14" name="Text 9"/>
+          <p:cNvSpPr txBox="1"/>
+          <p:nvPr/>
+        </p:nvSpPr>
+        <p:spPr>
+          <a:xfrm>
+            <a:off x="3794760" y="3108960"/>
+            <a:ext cx="4709160" cy="1435608"/>
           </a:xfrm>
           <a:prstGeom prst="rect">
             <a:avLst/>
@@ -8108,14 +7879,18 @@
           <a:ln/>
         </p:spPr>
         <p:txBody>
-          <a:bodyPr wrap="square" lIns="0" tIns="0" rIns="0" bIns="0" rtlCol="0" anchor="t"/>
-          <a:lstStyle/>
-          <a:p>
-            <a:pPr indent="0" marL="0">
-              <a:buNone/>
-            </a:pPr>
-            <a:r>
-              <a:rPr lang="en-US" sz="1050" dirty="0">
+          <a:bodyPr wrap="square" lIns="0" tIns="0" rIns="0" bIns="0" rtlCol="0" anchor="ctr"/>
+          <a:lstStyle/>
+          <a:p>
+            <a:pPr marL="152400" indent="-152400">
+              <a:spcAft>
+                <a:spcPts val="600"/>
+              </a:spcAft>
+              <a:buSzPct val="100000"/>
+              <a:buChar char="•"/>
+            </a:pPr>
+            <a:r>
+              <a:rPr lang="en-US" sz="1200" dirty="0">
                 <a:solidFill>
                   <a:srgbClr val="2A1E12"/>
                 </a:solidFill>
@@ -8123,135 +7898,20 @@
                 <a:ea typeface="Calibri" pitchFamily="34" charset="-122"/>
                 <a:cs typeface="Calibri" pitchFamily="34" charset="-120"/>
               </a:rPr>
-              <a:t>Ещё жили на острове Врангеля, когда строили пирамиду Хеопса.</a:t>
-            </a:r>
-            <a:endParaRPr lang="en-US" sz="1050" dirty="0"/>
-          </a:p>
-        </p:txBody>
-      </p:sp>
-      <p:sp>
-        <p:nvSpPr>
-          <p:cNvPr id="22" name="Shape 15"/>
-          <p:cNvSpPr/>
-          <p:nvPr/>
-        </p:nvSpPr>
-        <p:spPr>
-          <a:xfrm>
-            <a:off x="5330952" y="3474720"/>
-            <a:ext cx="1636776" cy="1188720"/>
-          </a:xfrm>
-          <a:prstGeom prst="roundRect">
-            <a:avLst>
-              <a:gd name="adj" fmla="val 7692"/>
-            </a:avLst>
-          </a:prstGeom>
-          <a:solidFill>
-            <a:srgbClr val="FFFCF6"/>
-          </a:solidFill>
-          <a:ln w="12700">
-            <a:solidFill>
-              <a:srgbClr val="FFFCF6"/>
-            </a:solidFill>
-            <a:prstDash val="solid"/>
-          </a:ln>
-          <a:effectLst>
-            <a:outerShdw sx="100000" sy="100000" kx="0" ky="0" algn="bl" rotWithShape="0" blurRad="101600" dist="25400" dir="5400000">
-              <a:srgbClr val="4A3418">
-                <a:alpha val="16000"/>
-              </a:srgbClr>
-            </a:outerShdw>
-          </a:effectLst>
-        </p:spPr>
-      </p:sp>
-      <p:pic>
-        <p:nvPicPr>
-          <p:cNvPr id="23" name="Image 5" descr="/tmp/claude-0/-home-user-heinrich-mario/e7688653-8e48-5480-a009-7b18c0e4f8cc/scratchpad/egypt_build/assets/ic_crown_gold.png">    </p:cNvPr>
-          <p:cNvPicPr>
-            <a:picLocks noChangeAspect="1"/>
-          </p:cNvPicPr>
-          <p:nvPr/>
-        </p:nvPicPr>
-        <p:blipFill>
-          <a:blip r:embed="rId7"/>
-          <a:stretch>
-            <a:fillRect/>
-          </a:stretch>
-        </p:blipFill>
-        <p:spPr>
-          <a:xfrm>
-            <a:off x="5440680" y="3575304"/>
-            <a:ext cx="292608" cy="292608"/>
-          </a:xfrm>
-          <a:prstGeom prst="rect">
-            <a:avLst/>
-          </a:prstGeom>
-        </p:spPr>
-      </p:pic>
-      <p:sp>
-        <p:nvSpPr>
-          <p:cNvPr id="24" name="Text 16"/>
-          <p:cNvSpPr txBox="1"/>
-          <p:nvPr/>
-        </p:nvSpPr>
-        <p:spPr>
-          <a:xfrm>
-            <a:off x="5788152" y="3566160"/>
-            <a:ext cx="1133856" cy="310896"/>
-          </a:xfrm>
-          <a:prstGeom prst="rect">
-            <a:avLst/>
-          </a:prstGeom>
-          <a:noFill/>
-          <a:ln/>
-        </p:spPr>
-        <p:txBody>
-          <a:bodyPr wrap="square" lIns="0" tIns="0" rIns="0" bIns="0" rtlCol="0" anchor="ctr"/>
-          <a:lstStyle/>
-          <a:p>
-            <a:pPr indent="0" marL="0">
-              <a:buNone/>
-            </a:pPr>
-            <a:r>
-              <a:rPr lang="en-US" sz="1200" b="1" dirty="0">
-                <a:solidFill>
-                  <a:srgbClr val="A8432A"/>
-                </a:solidFill>
-                <a:latin typeface="Cambria" pitchFamily="34" charset="0"/>
-                <a:ea typeface="Cambria" pitchFamily="34" charset="-122"/>
-                <a:cs typeface="Cambria" pitchFamily="34" charset="-120"/>
-              </a:rPr>
-              <a:t>Клеопатра</a:t>
+              <a:t>С XVI–XVII века художники Европы писали картины коричневой краской «мумия».</a:t>
             </a:r>
             <a:endParaRPr lang="en-US" sz="1200" dirty="0"/>
           </a:p>
-        </p:txBody>
-      </p:sp>
-      <p:sp>
-        <p:nvSpPr>
-          <p:cNvPr id="25" name="Text 17"/>
-          <p:cNvSpPr txBox="1"/>
-          <p:nvPr/>
-        </p:nvSpPr>
-        <p:spPr>
-          <a:xfrm>
-            <a:off x="5440680" y="3931920"/>
-            <a:ext cx="1435608" cy="658368"/>
-          </a:xfrm>
-          <a:prstGeom prst="rect">
-            <a:avLst/>
-          </a:prstGeom>
-          <a:noFill/>
-          <a:ln/>
-        </p:spPr>
-        <p:txBody>
-          <a:bodyPr wrap="square" lIns="0" tIns="0" rIns="0" bIns="0" rtlCol="0" anchor="t"/>
-          <a:lstStyle/>
-          <a:p>
-            <a:pPr indent="0" marL="0">
-              <a:buNone/>
-            </a:pPr>
-            <a:r>
-              <a:rPr lang="en-US" sz="1050" dirty="0">
+          <a:p>
+            <a:pPr marL="152400" indent="-152400">
+              <a:spcAft>
+                <a:spcPts val="600"/>
+              </a:spcAft>
+              <a:buSzPct val="100000"/>
+              <a:buChar char="•"/>
+            </a:pPr>
+            <a:r>
+              <a:rPr lang="en-US" sz="1200" dirty="0">
                 <a:solidFill>
                   <a:srgbClr val="2A1E12"/>
                 </a:solidFill>
@@ -8259,135 +7919,20 @@
                 <a:ea typeface="Calibri" pitchFamily="34" charset="-122"/>
                 <a:cs typeface="Calibri" pitchFamily="34" charset="-120"/>
               </a:rPr>
-              <a:t>Жила ближе к полёту на Луну, чем к постройке пирамид.</a:t>
-            </a:r>
-            <a:endParaRPr lang="en-US" sz="1050" dirty="0"/>
-          </a:p>
-        </p:txBody>
-      </p:sp>
-      <p:sp>
-        <p:nvSpPr>
-          <p:cNvPr id="26" name="Shape 18"/>
-          <p:cNvSpPr/>
-          <p:nvPr/>
-        </p:nvSpPr>
-        <p:spPr>
-          <a:xfrm>
-            <a:off x="7050024" y="3474720"/>
-            <a:ext cx="1636776" cy="1188720"/>
-          </a:xfrm>
-          <a:prstGeom prst="roundRect">
-            <a:avLst>
-              <a:gd name="adj" fmla="val 7692"/>
-            </a:avLst>
-          </a:prstGeom>
-          <a:solidFill>
-            <a:srgbClr val="FFFCF6"/>
-          </a:solidFill>
-          <a:ln w="12700">
-            <a:solidFill>
-              <a:srgbClr val="FFFCF6"/>
-            </a:solidFill>
-            <a:prstDash val="solid"/>
-          </a:ln>
-          <a:effectLst>
-            <a:outerShdw sx="100000" sy="100000" kx="0" ky="0" algn="bl" rotWithShape="0" blurRad="101600" dist="25400" dir="5400000">
-              <a:srgbClr val="4A3418">
-                <a:alpha val="16000"/>
-              </a:srgbClr>
-            </a:outerShdw>
-          </a:effectLst>
-        </p:spPr>
-      </p:sp>
-      <p:pic>
-        <p:nvPicPr>
-          <p:cNvPr id="27" name="Image 6" descr="/tmp/claude-0/-home-user-heinrich-mario/e7688653-8e48-5480-a009-7b18c0e4f8cc/scratchpad/egypt_build/assets/ic_paint_gold.png">    </p:cNvPr>
-          <p:cNvPicPr>
-            <a:picLocks noChangeAspect="1"/>
-          </p:cNvPicPr>
-          <p:nvPr/>
-        </p:nvPicPr>
-        <p:blipFill>
-          <a:blip r:embed="rId8"/>
-          <a:stretch>
-            <a:fillRect/>
-          </a:stretch>
-        </p:blipFill>
-        <p:spPr>
-          <a:xfrm>
-            <a:off x="7159752" y="3575304"/>
-            <a:ext cx="292608" cy="292608"/>
-          </a:xfrm>
-          <a:prstGeom prst="rect">
-            <a:avLst/>
-          </a:prstGeom>
-        </p:spPr>
-      </p:pic>
-      <p:sp>
-        <p:nvSpPr>
-          <p:cNvPr id="28" name="Text 19"/>
-          <p:cNvSpPr txBox="1"/>
-          <p:nvPr/>
-        </p:nvSpPr>
-        <p:spPr>
-          <a:xfrm>
-            <a:off x="7507224" y="3566160"/>
-            <a:ext cx="1133856" cy="310896"/>
-          </a:xfrm>
-          <a:prstGeom prst="rect">
-            <a:avLst/>
-          </a:prstGeom>
-          <a:noFill/>
-          <a:ln/>
-        </p:spPr>
-        <p:txBody>
-          <a:bodyPr wrap="square" lIns="0" tIns="0" rIns="0" bIns="0" rtlCol="0" anchor="ctr"/>
-          <a:lstStyle/>
-          <a:p>
-            <a:pPr indent="0" marL="0">
-              <a:buNone/>
-            </a:pPr>
-            <a:r>
-              <a:rPr lang="en-US" sz="1200" b="1" dirty="0">
-                <a:solidFill>
-                  <a:srgbClr val="A8432A"/>
-                </a:solidFill>
-                <a:latin typeface="Cambria" pitchFamily="34" charset="0"/>
-                <a:ea typeface="Cambria" pitchFamily="34" charset="-122"/>
-                <a:cs typeface="Cambria" pitchFamily="34" charset="-120"/>
-              </a:rPr>
-              <a:t>Мумии</a:t>
+              <a:t>Её делали из перемолотых египетских мумий, смешанных со смолой и миррой.</a:t>
             </a:r>
             <a:endParaRPr lang="en-US" sz="1200" dirty="0"/>
           </a:p>
-        </p:txBody>
-      </p:sp>
-      <p:sp>
-        <p:nvSpPr>
-          <p:cNvPr id="29" name="Text 20"/>
-          <p:cNvSpPr txBox="1"/>
-          <p:nvPr/>
-        </p:nvSpPr>
-        <p:spPr>
-          <a:xfrm>
-            <a:off x="7159752" y="3931920"/>
-            <a:ext cx="1435608" cy="658368"/>
-          </a:xfrm>
-          <a:prstGeom prst="rect">
-            <a:avLst/>
-          </a:prstGeom>
-          <a:noFill/>
-          <a:ln/>
-        </p:spPr>
-        <p:txBody>
-          <a:bodyPr wrap="square" lIns="0" tIns="0" rIns="0" bIns="0" rtlCol="0" anchor="t"/>
-          <a:lstStyle/>
-          <a:p>
-            <a:pPr indent="0" marL="0">
-              <a:buNone/>
-            </a:pPr>
-            <a:r>
-              <a:rPr lang="en-US" sz="1050" dirty="0">
+          <a:p>
+            <a:pPr marL="152400" indent="-152400">
+              <a:spcAft>
+                <a:spcPts val="600"/>
+              </a:spcAft>
+              <a:buSzPct val="100000"/>
+              <a:buChar char="•"/>
+            </a:pPr>
+            <a:r>
+              <a:rPr lang="en-US" sz="1200" dirty="0">
                 <a:solidFill>
                   <a:srgbClr val="2A1E12"/>
                 </a:solidFill>
@@ -8395,15 +7940,36 @@
                 <a:ea typeface="Calibri" pitchFamily="34" charset="-122"/>
                 <a:cs typeface="Calibri" pitchFamily="34" charset="-120"/>
               </a:rPr>
-              <a:t>В Европе из них делали лекарства и коричневую краску.</a:t>
-            </a:r>
-            <a:endParaRPr lang="en-US" sz="1050" dirty="0"/>
-          </a:p>
-        </p:txBody>
-      </p:sp>
-      <p:sp>
-        <p:nvSpPr>
-          <p:cNvPr id="30" name="Text 21"/>
+              <a:t>Художник Бёрн-Джонс, узнав об этом, закопал свой тюбик в саду.</a:t>
+            </a:r>
+            <a:endParaRPr lang="en-US" sz="1200" dirty="0"/>
+          </a:p>
+          <a:p>
+            <a:pPr marL="152400" indent="-152400">
+              <a:spcAft>
+                <a:spcPts val="600"/>
+              </a:spcAft>
+              <a:buSzPct val="100000"/>
+              <a:buChar char="•"/>
+            </a:pPr>
+            <a:r>
+              <a:rPr lang="en-US" sz="1200" dirty="0">
+                <a:solidFill>
+                  <a:srgbClr val="2A1E12"/>
+                </a:solidFill>
+                <a:latin typeface="Calibri" pitchFamily="34" charset="0"/>
+                <a:ea typeface="Calibri" pitchFamily="34" charset="-122"/>
+                <a:cs typeface="Calibri" pitchFamily="34" charset="-120"/>
+              </a:rPr>
+              <a:t>Последняя фирма перестала её выпускать в 1960-х годах: кончились мумии.</a:t>
+            </a:r>
+            <a:endParaRPr lang="en-US" sz="1200" dirty="0"/>
+          </a:p>
+        </p:txBody>
+      </p:sp>
+      <p:sp>
+        <p:nvSpPr>
+          <p:cNvPr id="15" name="Text 10"/>
           <p:cNvSpPr txBox="1"/>
           <p:nvPr/>
         </p:nvSpPr>

--- a/Древний_Египет.pptx
+++ b/Древний_Египет.pptx
@@ -15,9 +15,11 @@
     <p:sldId id="263" r:id="rId9"/>
     <p:sldId id="264" r:id="rId10"/>
     <p:sldId id="265" r:id="rId11"/>
+    <p:sldId id="266" r:id="rId12"/>
+    <p:sldId id="267" r:id="rId13"/>
   </p:sldIdLst>
   <p:notesMasterIdLst>
-    <p:notesMasterId r:id="rId12"/>
+    <p:notesMasterId r:id="rId14"/>
   </p:notesMasterIdLst>
   <p:sldSz cx="9144000" cy="5143500"/>
   <p:notesSz cx="5143500" cy="9144000"/>
@@ -600,8 +602,9 @@
           <a:p>
             <a:r>
               <a:rPr lang="en-US" dirty="0"/>
-              <a:t>Финал. На фото — храм Рамсеса II в Абу-Симбеле.
-Фото: Xiaoqian Shen, Unsplash.</a:t>
+              <a:t>Викторина. Задайте вопрос, дайте ответить, затем щёлкните мышью — появится правильный ответ. Каждый щелчок открывает ответ на следующий вопрос.
+Ответы: 1) Ахет — разлив, Перет — посев и всходы, Шему — урожай; 2) 146 метров (сейчас — около 138 м); 3) Более 700 знаков; 4) Перо богини правды Маат.
+Фото: Sandip Roy, Unsplash.</a:t>
             </a:r>
             <a:endParaRPr lang="en-US" dirty="0"/>
           </a:p>
@@ -625,6 +628,185 @@
             <a:fld id="{F7021451-1387-4CA6-816F-3879F97B5CBC}" type="slidenum">
               <a:rPr lang="en-US"/>
               <a:t>10</a:t>
+            </a:fld>
+            <a:endParaRPr lang="en-US"/>
+          </a:p>
+        </p:txBody>
+      </p:sp>
+    </p:spTree>
+    <p:extLst>
+      <p:ext uri="{BB962C8B-B14F-4D97-AF65-F5344CB8AC3E}">
+        <p14:creationId xmlns:p14="http://schemas.microsoft.com/office/powerpoint/2010/main" val="1024086991"/>
+      </p:ext>
+    </p:extLst>
+  </p:cSld>
+  <p:clrMapOvr>
+    <a:masterClrMapping/>
+  </p:clrMapOvr>
+</p:notes>
+</file>
+
+<file path=ppt/notesSlides/notesSlide11.xml><?xml version="1.0" encoding="utf-8"?>
+<p:notes xmlns:a="http://schemas.openxmlformats.org/drawingml/2006/main" xmlns:r="http://schemas.openxmlformats.org/officeDocument/2006/relationships" xmlns:p="http://schemas.openxmlformats.org/presentationml/2006/main">
+  <p:cSld>
+    <p:spTree>
+      <p:nvGrpSpPr>
+        <p:cNvPr id="1" name=""/>
+        <p:cNvGrpSpPr/>
+        <p:nvPr/>
+      </p:nvGrpSpPr>
+      <p:grpSpPr>
+        <a:xfrm>
+          <a:off x="0" y="0"/>
+          <a:ext cx="0" cy="0"/>
+          <a:chOff x="0" y="0"/>
+          <a:chExt cx="0" cy="0"/>
+        </a:xfrm>
+      </p:grpSpPr>
+      <p:sp>
+        <p:nvSpPr>
+          <p:cNvPr id="2" name="Slide Image Placeholder 1"/>
+          <p:cNvSpPr>
+            <a:spLocks noGrp="1" noRot="1" noChangeAspect="1"/>
+          </p:cNvSpPr>
+          <p:nvPr>
+            <p:ph type="sldImg"/>
+          </p:nvPr>
+        </p:nvSpPr>
+        <p:spPr/>
+      </p:sp>
+      <p:sp>
+        <p:nvSpPr>
+          <p:cNvPr id="3" name="Notes Placeholder 2"/>
+          <p:cNvSpPr>
+            <a:spLocks noGrp="1"/>
+          </p:cNvSpPr>
+          <p:nvPr>
+            <p:ph type="body" idx="1"/>
+          </p:nvPr>
+        </p:nvSpPr>
+        <p:spPr/>
+        <p:txBody>
+          <a:bodyPr/>
+          <a:lstStyle/>
+          <a:p>
+            <a:r>
+              <a:rPr lang="en-US" dirty="0"/>
+              <a:t>Викторина. Задайте вопрос, дайте ответить, затем щёлкните мышью — появится правильный ответ. Каждый щелчок открывает ответ на следующий вопрос.
+Ответы: 5) Около 19 лет; 6) Хлебом, пивом и мясом; 7) 10 дней; 8) Закопал свой тюбик с краской в саду.
+Фото: Fatih Beki, Unsplash.</a:t>
+            </a:r>
+            <a:endParaRPr lang="en-US" dirty="0"/>
+          </a:p>
+        </p:txBody>
+      </p:sp>
+      <p:sp>
+        <p:nvSpPr>
+          <p:cNvPr id="4" name="Slide Number Placeholder 3"/>
+          <p:cNvSpPr>
+            <a:spLocks noGrp="1"/>
+          </p:cNvSpPr>
+          <p:nvPr>
+            <p:ph type="sldNum" sz="quarter" idx="10"/>
+          </p:nvPr>
+        </p:nvSpPr>
+        <p:spPr/>
+        <p:txBody>
+          <a:bodyPr/>
+          <a:lstStyle/>
+          <a:p>
+            <a:fld id="{F7021451-1387-4CA6-816F-3879F97B5CBC}" type="slidenum">
+              <a:rPr lang="en-US"/>
+              <a:t>11</a:t>
+            </a:fld>
+            <a:endParaRPr lang="en-US"/>
+          </a:p>
+        </p:txBody>
+      </p:sp>
+    </p:spTree>
+    <p:extLst>
+      <p:ext uri="{BB962C8B-B14F-4D97-AF65-F5344CB8AC3E}">
+        <p14:creationId xmlns:p14="http://schemas.microsoft.com/office/powerpoint/2010/main" val="1024086991"/>
+      </p:ext>
+    </p:extLst>
+  </p:cSld>
+  <p:clrMapOvr>
+    <a:masterClrMapping/>
+  </p:clrMapOvr>
+</p:notes>
+</file>
+
+<file path=ppt/notesSlides/notesSlide12.xml><?xml version="1.0" encoding="utf-8"?>
+<p:notes xmlns:a="http://schemas.openxmlformats.org/drawingml/2006/main" xmlns:r="http://schemas.openxmlformats.org/officeDocument/2006/relationships" xmlns:p="http://schemas.openxmlformats.org/presentationml/2006/main">
+  <p:cSld>
+    <p:spTree>
+      <p:nvGrpSpPr>
+        <p:cNvPr id="1" name=""/>
+        <p:cNvGrpSpPr/>
+        <p:nvPr/>
+      </p:nvGrpSpPr>
+      <p:grpSpPr>
+        <a:xfrm>
+          <a:off x="0" y="0"/>
+          <a:ext cx="0" cy="0"/>
+          <a:chOff x="0" y="0"/>
+          <a:chExt cx="0" cy="0"/>
+        </a:xfrm>
+      </p:grpSpPr>
+      <p:sp>
+        <p:nvSpPr>
+          <p:cNvPr id="2" name="Slide Image Placeholder 1"/>
+          <p:cNvSpPr>
+            <a:spLocks noGrp="1" noRot="1" noChangeAspect="1"/>
+          </p:cNvSpPr>
+          <p:nvPr>
+            <p:ph type="sldImg"/>
+          </p:nvPr>
+        </p:nvSpPr>
+        <p:spPr/>
+      </p:sp>
+      <p:sp>
+        <p:nvSpPr>
+          <p:cNvPr id="3" name="Notes Placeholder 2"/>
+          <p:cNvSpPr>
+            <a:spLocks noGrp="1"/>
+          </p:cNvSpPr>
+          <p:nvPr>
+            <p:ph type="body" idx="1"/>
+          </p:nvPr>
+        </p:nvSpPr>
+        <p:spPr/>
+        <p:txBody>
+          <a:bodyPr/>
+          <a:lstStyle/>
+          <a:p>
+            <a:r>
+              <a:rPr lang="en-US" dirty="0"/>
+              <a:t>Финал. На фото — храм Рамсеса II в Абу-Симбеле.
+Фото: Xiaoqian Shen, Unsplash.</a:t>
+            </a:r>
+            <a:endParaRPr lang="en-US" dirty="0"/>
+          </a:p>
+        </p:txBody>
+      </p:sp>
+      <p:sp>
+        <p:nvSpPr>
+          <p:cNvPr id="4" name="Slide Number Placeholder 3"/>
+          <p:cNvSpPr>
+            <a:spLocks noGrp="1"/>
+          </p:cNvSpPr>
+          <p:nvPr>
+            <p:ph type="sldNum" sz="quarter" idx="10"/>
+          </p:nvPr>
+        </p:nvSpPr>
+        <p:spPr/>
+        <p:txBody>
+          <a:bodyPr/>
+          <a:lstStyle/>
+          <a:p>
+            <a:fld id="{F7021451-1387-4CA6-816F-3879F97B5CBC}" type="slidenum">
+              <a:rPr lang="en-US"/>
+              <a:t>12</a:t>
             </a:fld>
             <a:endParaRPr lang="en-US"/>
           </a:p>
@@ -2043,6 +2225,2350 @@
   <p:cSld name="Slide 10">
     <p:bg>
       <p:bgPr>
+        <a:blipFill dpi="0" rotWithShape="1">
+          <a:blip r:embed="rId1">
+            <a:lum/>
+          </a:blip>
+          <a:srcRect/>
+          <a:stretch>
+            <a:fillRect/>
+          </a:stretch>
+        </a:blipFill>
+        <a:effectLst/>
+      </p:bgPr>
+    </p:bg>
+    <p:spTree>
+      <p:nvGrpSpPr>
+        <p:cNvPr id="1" name=""/>
+        <p:cNvGrpSpPr/>
+        <p:nvPr/>
+      </p:nvGrpSpPr>
+      <p:grpSpPr>
+        <a:xfrm>
+          <a:off x="0" y="0"/>
+          <a:ext cx="0" cy="0"/>
+          <a:chOff x="0" y="0"/>
+          <a:chExt cx="0" cy="0"/>
+        </a:xfrm>
+      </p:grpSpPr>
+      <p:sp>
+        <p:nvSpPr>
+          <p:cNvPr id="2" name="Shape 0"/>
+          <p:cNvSpPr/>
+          <p:nvPr/>
+        </p:nvSpPr>
+        <p:spPr>
+          <a:xfrm>
+            <a:off x="402336" y="402336"/>
+            <a:ext cx="2578608" cy="4315968"/>
+          </a:xfrm>
+          <a:prstGeom prst="rect">
+            <a:avLst/>
+          </a:prstGeom>
+          <a:solidFill>
+            <a:srgbClr val="D4A537"/>
+          </a:solidFill>
+          <a:ln w="12700">
+            <a:solidFill>
+              <a:srgbClr val="D4A537"/>
+            </a:solidFill>
+            <a:prstDash val="solid"/>
+          </a:ln>
+          <a:effectLst>
+            <a:outerShdw sx="100000" sy="100000" kx="0" ky="0" algn="bl" rotWithShape="0" blurRad="127000" dist="38100" dir="5400000">
+              <a:srgbClr val="000000">
+                <a:alpha val="30000"/>
+              </a:srgbClr>
+            </a:outerShdw>
+          </a:effectLst>
+        </p:spPr>
+      </p:sp>
+      <p:pic>
+        <p:nvPicPr>
+          <p:cNvPr id="3" name="Image 0" descr="/tmp/claude-0/-home-user-heinrich-mario/e7688653-8e48-5480-a009-7b18c0e4f8cc/scratchpad/egypt_build/assets/quiz_tomb_wall.jpg">    </p:cNvPr>
+          <p:cNvPicPr>
+            <a:picLocks noChangeAspect="1"/>
+          </p:cNvPicPr>
+          <p:nvPr/>
+        </p:nvPicPr>
+        <p:blipFill>
+          <a:blip r:embed="rId2"/>
+          <a:stretch>
+            <a:fillRect/>
+          </a:stretch>
+        </p:blipFill>
+        <p:spPr>
+          <a:xfrm>
+            <a:off x="457200" y="457200"/>
+            <a:ext cx="2468880" cy="4206240"/>
+          </a:xfrm>
+          <a:prstGeom prst="rect">
+            <a:avLst/>
+          </a:prstGeom>
+        </p:spPr>
+      </p:pic>
+      <p:sp>
+        <p:nvSpPr>
+          <p:cNvPr id="4" name="Shape 1"/>
+          <p:cNvSpPr/>
+          <p:nvPr/>
+        </p:nvSpPr>
+        <p:spPr>
+          <a:xfrm>
+            <a:off x="3337560" y="457200"/>
+            <a:ext cx="2357323" cy="274320"/>
+          </a:xfrm>
+          <a:prstGeom prst="roundRect">
+            <a:avLst>
+              <a:gd name="adj" fmla="val 50000"/>
+            </a:avLst>
+          </a:prstGeom>
+          <a:solidFill>
+            <a:srgbClr val="FFFCF6"/>
+          </a:solidFill>
+          <a:ln w="15875">
+            <a:solidFill>
+              <a:srgbClr val="D4A537"/>
+            </a:solidFill>
+            <a:prstDash val="solid"/>
+          </a:ln>
+        </p:spPr>
+      </p:sp>
+      <p:sp>
+        <p:nvSpPr>
+          <p:cNvPr id="5" name="Shape 2"/>
+          <p:cNvSpPr/>
+          <p:nvPr/>
+        </p:nvSpPr>
+        <p:spPr>
+          <a:xfrm>
+            <a:off x="5740603" y="457200"/>
+            <a:ext cx="45720" cy="274320"/>
+          </a:xfrm>
+          <a:prstGeom prst="rect">
+            <a:avLst/>
+          </a:prstGeom>
+          <a:solidFill>
+            <a:srgbClr val="D4A537"/>
+          </a:solidFill>
+          <a:ln w="12700">
+            <a:solidFill>
+              <a:srgbClr val="D4A537"/>
+            </a:solidFill>
+            <a:prstDash val="solid"/>
+          </a:ln>
+        </p:spPr>
+      </p:sp>
+      <p:sp>
+        <p:nvSpPr>
+          <p:cNvPr id="6" name="Text 3"/>
+          <p:cNvSpPr txBox="1"/>
+          <p:nvPr/>
+        </p:nvSpPr>
+        <p:spPr>
+          <a:xfrm>
+            <a:off x="3337560" y="457200"/>
+            <a:ext cx="2357323" cy="274320"/>
+          </a:xfrm>
+          <a:prstGeom prst="rect">
+            <a:avLst/>
+          </a:prstGeom>
+          <a:noFill/>
+          <a:ln/>
+        </p:spPr>
+        <p:txBody>
+          <a:bodyPr wrap="square" lIns="0" tIns="0" rIns="0" bIns="0" rtlCol="0" anchor="ctr"/>
+          <a:lstStyle/>
+          <a:p>
+            <a:pPr algn="ctr" indent="0" marL="0">
+              <a:buNone/>
+            </a:pPr>
+            <a:r>
+              <a:rPr lang="en-US" sz="1000" b="1" spc="300" kern="0" dirty="0">
+                <a:solidFill>
+                  <a:srgbClr val="A8432A"/>
+                </a:solidFill>
+                <a:latin typeface="Calibri" pitchFamily="34" charset="0"/>
+                <a:ea typeface="Calibri" pitchFamily="34" charset="-122"/>
+                <a:cs typeface="Calibri" pitchFamily="34" charset="-120"/>
+              </a:rPr>
+              <a:t>ВИКТОРИНА · ЧАСТЬ 1</a:t>
+            </a:r>
+            <a:endParaRPr lang="en-US" sz="1000" dirty="0"/>
+          </a:p>
+        </p:txBody>
+      </p:sp>
+      <p:sp>
+        <p:nvSpPr>
+          <p:cNvPr id="7" name="Text 4"/>
+          <p:cNvSpPr txBox="1"/>
+          <p:nvPr/>
+        </p:nvSpPr>
+        <p:spPr>
+          <a:xfrm>
+            <a:off x="3337560" y="804672"/>
+            <a:ext cx="5349240" cy="594360"/>
+          </a:xfrm>
+          <a:prstGeom prst="rect">
+            <a:avLst/>
+          </a:prstGeom>
+          <a:noFill/>
+          <a:ln/>
+        </p:spPr>
+        <p:txBody>
+          <a:bodyPr wrap="square" lIns="0" tIns="0" rIns="0" bIns="0" rtlCol="0" anchor="ctr"/>
+          <a:lstStyle/>
+          <a:p>
+            <a:pPr indent="0" marL="0">
+              <a:buNone/>
+            </a:pPr>
+            <a:r>
+              <a:rPr lang="en-US" sz="2800" b="1" dirty="0">
+                <a:solidFill>
+                  <a:srgbClr val="2A1E12"/>
+                </a:solidFill>
+                <a:latin typeface="Cambria" pitchFamily="34" charset="0"/>
+                <a:ea typeface="Cambria" pitchFamily="34" charset="-122"/>
+                <a:cs typeface="Cambria" pitchFamily="34" charset="-120"/>
+              </a:rPr>
+              <a:t>Проверь себя!</a:t>
+            </a:r>
+            <a:endParaRPr lang="en-US" sz="2800" dirty="0"/>
+          </a:p>
+        </p:txBody>
+      </p:sp>
+      <p:sp>
+        <p:nvSpPr>
+          <p:cNvPr id="8" name="Shape 5"/>
+          <p:cNvSpPr/>
+          <p:nvPr/>
+        </p:nvSpPr>
+        <p:spPr>
+          <a:xfrm>
+            <a:off x="3337560" y="1463040"/>
+            <a:ext cx="5349240" cy="731520"/>
+          </a:xfrm>
+          <a:prstGeom prst="roundRect">
+            <a:avLst>
+              <a:gd name="adj" fmla="val 12500"/>
+            </a:avLst>
+          </a:prstGeom>
+          <a:solidFill>
+            <a:srgbClr val="FFFCF6"/>
+          </a:solidFill>
+          <a:ln w="12700">
+            <a:solidFill>
+              <a:srgbClr val="FFFCF6"/>
+            </a:solidFill>
+            <a:prstDash val="solid"/>
+          </a:ln>
+          <a:effectLst>
+            <a:outerShdw sx="100000" sy="100000" kx="0" ky="0" algn="bl" rotWithShape="0" blurRad="101600" dist="25400" dir="5400000">
+              <a:srgbClr val="4A3418">
+                <a:alpha val="16000"/>
+              </a:srgbClr>
+            </a:outerShdw>
+          </a:effectLst>
+        </p:spPr>
+      </p:sp>
+      <p:sp>
+        <p:nvSpPr>
+          <p:cNvPr id="9" name="Text 6"/>
+          <p:cNvSpPr txBox="1"/>
+          <p:nvPr/>
+        </p:nvSpPr>
+        <p:spPr>
+          <a:xfrm>
+            <a:off x="3474720" y="1554480"/>
+            <a:ext cx="329184" cy="329184"/>
+          </a:xfrm>
+          <a:prstGeom prst="ellipse">
+            <a:avLst/>
+          </a:prstGeom>
+          <a:solidFill>
+            <a:srgbClr val="A8432A"/>
+          </a:solidFill>
+          <a:ln>
+            <a:solidFill>
+              <a:srgbClr val="A8432A"/>
+            </a:solidFill>
+          </a:ln>
+        </p:spPr>
+        <p:txBody>
+          <a:bodyPr wrap="square" lIns="0" tIns="0" rIns="0" bIns="0" rtlCol="0" anchor="ctr"/>
+          <a:lstStyle/>
+          <a:p>
+            <a:pPr algn="ctr" indent="0" marL="0">
+              <a:buNone/>
+            </a:pPr>
+            <a:r>
+              <a:rPr lang="en-US" sz="1300" b="1" dirty="0">
+                <a:solidFill>
+                  <a:srgbClr val="FFFFFF"/>
+                </a:solidFill>
+                <a:latin typeface="Calibri" pitchFamily="34" charset="0"/>
+                <a:ea typeface="Calibri" pitchFamily="34" charset="-122"/>
+                <a:cs typeface="Calibri" pitchFamily="34" charset="-120"/>
+              </a:rPr>
+              <a:t>1</a:t>
+            </a:r>
+            <a:endParaRPr lang="en-US" sz="1300" dirty="0"/>
+          </a:p>
+        </p:txBody>
+      </p:sp>
+      <p:sp>
+        <p:nvSpPr>
+          <p:cNvPr id="10" name="Text 7"/>
+          <p:cNvSpPr txBox="1"/>
+          <p:nvPr/>
+        </p:nvSpPr>
+        <p:spPr>
+          <a:xfrm>
+            <a:off x="3931920" y="1517904"/>
+            <a:ext cx="4617720" cy="329184"/>
+          </a:xfrm>
+          <a:prstGeom prst="rect">
+            <a:avLst/>
+          </a:prstGeom>
+          <a:noFill/>
+          <a:ln/>
+        </p:spPr>
+        <p:txBody>
+          <a:bodyPr wrap="square" lIns="0" tIns="0" rIns="0" bIns="0" rtlCol="0" anchor="ctr"/>
+          <a:lstStyle/>
+          <a:p>
+            <a:pPr indent="0" marL="0">
+              <a:buNone/>
+            </a:pPr>
+            <a:r>
+              <a:rPr lang="en-US" sz="1250" b="1" dirty="0">
+                <a:solidFill>
+                  <a:srgbClr val="2A1E12"/>
+                </a:solidFill>
+                <a:latin typeface="Calibri" pitchFamily="34" charset="0"/>
+                <a:ea typeface="Calibri" pitchFamily="34" charset="-122"/>
+                <a:cs typeface="Calibri" pitchFamily="34" charset="-120"/>
+              </a:rPr>
+              <a:t>Как назывались три времени года и что в них происходило?</a:t>
+            </a:r>
+            <a:endParaRPr lang="en-US" sz="1250" dirty="0"/>
+          </a:p>
+        </p:txBody>
+      </p:sp>
+      <p:sp>
+        <p:nvSpPr>
+          <p:cNvPr id="11" name="ANS_1"/>
+          <p:cNvSpPr txBox="1"/>
+          <p:nvPr/>
+        </p:nvSpPr>
+        <p:spPr>
+          <a:xfrm>
+            <a:off x="3931920" y="1865376"/>
+            <a:ext cx="4617720" cy="274320"/>
+          </a:xfrm>
+          <a:prstGeom prst="roundRect">
+            <a:avLst>
+              <a:gd name="adj" fmla="val 50000"/>
+            </a:avLst>
+          </a:prstGeom>
+          <a:solidFill>
+            <a:srgbClr val="F6E6B8"/>
+          </a:solidFill>
+          <a:ln w="12700">
+            <a:solidFill>
+              <a:srgbClr val="D4A537"/>
+            </a:solidFill>
+          </a:ln>
+        </p:spPr>
+        <p:txBody>
+          <a:bodyPr wrap="square" lIns="0" tIns="0" rIns="0" bIns="0" rtlCol="0" anchor="ctr"/>
+          <a:lstStyle/>
+          <a:p>
+            <a:pPr algn="ctr" indent="0" marL="0">
+              <a:buNone/>
+            </a:pPr>
+            <a:r>
+              <a:rPr lang="en-US" sz="1150" b="1" dirty="0">
+                <a:solidFill>
+                  <a:srgbClr val="A8432A"/>
+                </a:solidFill>
+                <a:latin typeface="Calibri" pitchFamily="34" charset="0"/>
+                <a:ea typeface="Calibri" pitchFamily="34" charset="-122"/>
+                <a:cs typeface="Calibri" pitchFamily="34" charset="-120"/>
+              </a:rPr>
+              <a:t>Ахет — разлив, Перет — посев и всходы, Шему — урожай</a:t>
+            </a:r>
+            <a:endParaRPr lang="en-US" sz="1150" dirty="0"/>
+          </a:p>
+        </p:txBody>
+      </p:sp>
+      <p:sp>
+        <p:nvSpPr>
+          <p:cNvPr id="12" name="Shape 9"/>
+          <p:cNvSpPr/>
+          <p:nvPr/>
+        </p:nvSpPr>
+        <p:spPr>
+          <a:xfrm>
+            <a:off x="3337560" y="2276856"/>
+            <a:ext cx="5349240" cy="731520"/>
+          </a:xfrm>
+          <a:prstGeom prst="roundRect">
+            <a:avLst>
+              <a:gd name="adj" fmla="val 12500"/>
+            </a:avLst>
+          </a:prstGeom>
+          <a:solidFill>
+            <a:srgbClr val="FFFCF6"/>
+          </a:solidFill>
+          <a:ln w="12700">
+            <a:solidFill>
+              <a:srgbClr val="FFFCF6"/>
+            </a:solidFill>
+            <a:prstDash val="solid"/>
+          </a:ln>
+          <a:effectLst>
+            <a:outerShdw sx="100000" sy="100000" kx="0" ky="0" algn="bl" rotWithShape="0" blurRad="101600" dist="25400" dir="5400000">
+              <a:srgbClr val="4A3418">
+                <a:alpha val="16000"/>
+              </a:srgbClr>
+            </a:outerShdw>
+          </a:effectLst>
+        </p:spPr>
+      </p:sp>
+      <p:sp>
+        <p:nvSpPr>
+          <p:cNvPr id="13" name="Text 10"/>
+          <p:cNvSpPr txBox="1"/>
+          <p:nvPr/>
+        </p:nvSpPr>
+        <p:spPr>
+          <a:xfrm>
+            <a:off x="3474720" y="2368296"/>
+            <a:ext cx="329184" cy="329184"/>
+          </a:xfrm>
+          <a:prstGeom prst="ellipse">
+            <a:avLst/>
+          </a:prstGeom>
+          <a:solidFill>
+            <a:srgbClr val="A8432A"/>
+          </a:solidFill>
+          <a:ln>
+            <a:solidFill>
+              <a:srgbClr val="A8432A"/>
+            </a:solidFill>
+          </a:ln>
+        </p:spPr>
+        <p:txBody>
+          <a:bodyPr wrap="square" lIns="0" tIns="0" rIns="0" bIns="0" rtlCol="0" anchor="ctr"/>
+          <a:lstStyle/>
+          <a:p>
+            <a:pPr algn="ctr" indent="0" marL="0">
+              <a:buNone/>
+            </a:pPr>
+            <a:r>
+              <a:rPr lang="en-US" sz="1300" b="1" dirty="0">
+                <a:solidFill>
+                  <a:srgbClr val="FFFFFF"/>
+                </a:solidFill>
+                <a:latin typeface="Calibri" pitchFamily="34" charset="0"/>
+                <a:ea typeface="Calibri" pitchFamily="34" charset="-122"/>
+                <a:cs typeface="Calibri" pitchFamily="34" charset="-120"/>
+              </a:rPr>
+              <a:t>2</a:t>
+            </a:r>
+            <a:endParaRPr lang="en-US" sz="1300" dirty="0"/>
+          </a:p>
+        </p:txBody>
+      </p:sp>
+      <p:sp>
+        <p:nvSpPr>
+          <p:cNvPr id="14" name="Text 11"/>
+          <p:cNvSpPr txBox="1"/>
+          <p:nvPr/>
+        </p:nvSpPr>
+        <p:spPr>
+          <a:xfrm>
+            <a:off x="3931920" y="2331720"/>
+            <a:ext cx="4617720" cy="329184"/>
+          </a:xfrm>
+          <a:prstGeom prst="rect">
+            <a:avLst/>
+          </a:prstGeom>
+          <a:noFill/>
+          <a:ln/>
+        </p:spPr>
+        <p:txBody>
+          <a:bodyPr wrap="square" lIns="0" tIns="0" rIns="0" bIns="0" rtlCol="0" anchor="ctr"/>
+          <a:lstStyle/>
+          <a:p>
+            <a:pPr indent="0" marL="0">
+              <a:buNone/>
+            </a:pPr>
+            <a:r>
+              <a:rPr lang="en-US" sz="1250" b="1" dirty="0">
+                <a:solidFill>
+                  <a:srgbClr val="2A1E12"/>
+                </a:solidFill>
+                <a:latin typeface="Calibri" pitchFamily="34" charset="0"/>
+                <a:ea typeface="Calibri" pitchFamily="34" charset="-122"/>
+                <a:cs typeface="Calibri" pitchFamily="34" charset="-120"/>
+              </a:rPr>
+              <a:t>Какой высоты была пирамида Хеопса?</a:t>
+            </a:r>
+            <a:endParaRPr lang="en-US" sz="1250" dirty="0"/>
+          </a:p>
+        </p:txBody>
+      </p:sp>
+      <p:sp>
+        <p:nvSpPr>
+          <p:cNvPr id="15" name="ANS_2"/>
+          <p:cNvSpPr txBox="1"/>
+          <p:nvPr/>
+        </p:nvSpPr>
+        <p:spPr>
+          <a:xfrm>
+            <a:off x="3931920" y="2679192"/>
+            <a:ext cx="3158338" cy="274320"/>
+          </a:xfrm>
+          <a:prstGeom prst="roundRect">
+            <a:avLst>
+              <a:gd name="adj" fmla="val 50000"/>
+            </a:avLst>
+          </a:prstGeom>
+          <a:solidFill>
+            <a:srgbClr val="F6E6B8"/>
+          </a:solidFill>
+          <a:ln w="12700">
+            <a:solidFill>
+              <a:srgbClr val="D4A537"/>
+            </a:solidFill>
+          </a:ln>
+        </p:spPr>
+        <p:txBody>
+          <a:bodyPr wrap="square" lIns="0" tIns="0" rIns="0" bIns="0" rtlCol="0" anchor="ctr"/>
+          <a:lstStyle/>
+          <a:p>
+            <a:pPr algn="ctr" indent="0" marL="0">
+              <a:buNone/>
+            </a:pPr>
+            <a:r>
+              <a:rPr lang="en-US" sz="1150" b="1" dirty="0">
+                <a:solidFill>
+                  <a:srgbClr val="A8432A"/>
+                </a:solidFill>
+                <a:latin typeface="Calibri" pitchFamily="34" charset="0"/>
+                <a:ea typeface="Calibri" pitchFamily="34" charset="-122"/>
+                <a:cs typeface="Calibri" pitchFamily="34" charset="-120"/>
+              </a:rPr>
+              <a:t>146 метров (сейчас — около 138 м)</a:t>
+            </a:r>
+            <a:endParaRPr lang="en-US" sz="1150" dirty="0"/>
+          </a:p>
+        </p:txBody>
+      </p:sp>
+      <p:sp>
+        <p:nvSpPr>
+          <p:cNvPr id="16" name="Shape 13"/>
+          <p:cNvSpPr/>
+          <p:nvPr/>
+        </p:nvSpPr>
+        <p:spPr>
+          <a:xfrm>
+            <a:off x="3337560" y="3090672"/>
+            <a:ext cx="5349240" cy="731520"/>
+          </a:xfrm>
+          <a:prstGeom prst="roundRect">
+            <a:avLst>
+              <a:gd name="adj" fmla="val 12500"/>
+            </a:avLst>
+          </a:prstGeom>
+          <a:solidFill>
+            <a:srgbClr val="FFFCF6"/>
+          </a:solidFill>
+          <a:ln w="12700">
+            <a:solidFill>
+              <a:srgbClr val="FFFCF6"/>
+            </a:solidFill>
+            <a:prstDash val="solid"/>
+          </a:ln>
+          <a:effectLst>
+            <a:outerShdw sx="100000" sy="100000" kx="0" ky="0" algn="bl" rotWithShape="0" blurRad="101600" dist="25400" dir="5400000">
+              <a:srgbClr val="4A3418">
+                <a:alpha val="16000"/>
+              </a:srgbClr>
+            </a:outerShdw>
+          </a:effectLst>
+        </p:spPr>
+      </p:sp>
+      <p:sp>
+        <p:nvSpPr>
+          <p:cNvPr id="17" name="Text 14"/>
+          <p:cNvSpPr txBox="1"/>
+          <p:nvPr/>
+        </p:nvSpPr>
+        <p:spPr>
+          <a:xfrm>
+            <a:off x="3474720" y="3182112"/>
+            <a:ext cx="329184" cy="329184"/>
+          </a:xfrm>
+          <a:prstGeom prst="ellipse">
+            <a:avLst/>
+          </a:prstGeom>
+          <a:solidFill>
+            <a:srgbClr val="A8432A"/>
+          </a:solidFill>
+          <a:ln>
+            <a:solidFill>
+              <a:srgbClr val="A8432A"/>
+            </a:solidFill>
+          </a:ln>
+        </p:spPr>
+        <p:txBody>
+          <a:bodyPr wrap="square" lIns="0" tIns="0" rIns="0" bIns="0" rtlCol="0" anchor="ctr"/>
+          <a:lstStyle/>
+          <a:p>
+            <a:pPr algn="ctr" indent="0" marL="0">
+              <a:buNone/>
+            </a:pPr>
+            <a:r>
+              <a:rPr lang="en-US" sz="1300" b="1" dirty="0">
+                <a:solidFill>
+                  <a:srgbClr val="FFFFFF"/>
+                </a:solidFill>
+                <a:latin typeface="Calibri" pitchFamily="34" charset="0"/>
+                <a:ea typeface="Calibri" pitchFamily="34" charset="-122"/>
+                <a:cs typeface="Calibri" pitchFamily="34" charset="-120"/>
+              </a:rPr>
+              <a:t>3</a:t>
+            </a:r>
+            <a:endParaRPr lang="en-US" sz="1300" dirty="0"/>
+          </a:p>
+        </p:txBody>
+      </p:sp>
+      <p:sp>
+        <p:nvSpPr>
+          <p:cNvPr id="18" name="Text 15"/>
+          <p:cNvSpPr txBox="1"/>
+          <p:nvPr/>
+        </p:nvSpPr>
+        <p:spPr>
+          <a:xfrm>
+            <a:off x="3931920" y="3145536"/>
+            <a:ext cx="4617720" cy="329184"/>
+          </a:xfrm>
+          <a:prstGeom prst="rect">
+            <a:avLst/>
+          </a:prstGeom>
+          <a:noFill/>
+          <a:ln/>
+        </p:spPr>
+        <p:txBody>
+          <a:bodyPr wrap="square" lIns="0" tIns="0" rIns="0" bIns="0" rtlCol="0" anchor="ctr"/>
+          <a:lstStyle/>
+          <a:p>
+            <a:pPr indent="0" marL="0">
+              <a:buNone/>
+            </a:pPr>
+            <a:r>
+              <a:rPr lang="en-US" sz="1250" b="1" dirty="0">
+                <a:solidFill>
+                  <a:srgbClr val="2A1E12"/>
+                </a:solidFill>
+                <a:latin typeface="Calibri" pitchFamily="34" charset="0"/>
+                <a:ea typeface="Calibri" pitchFamily="34" charset="-122"/>
+                <a:cs typeface="Calibri" pitchFamily="34" charset="-120"/>
+              </a:rPr>
+              <a:t>Сколько всего было иероглифов?</a:t>
+            </a:r>
+            <a:endParaRPr lang="en-US" sz="1250" dirty="0"/>
+          </a:p>
+        </p:txBody>
+      </p:sp>
+      <p:sp>
+        <p:nvSpPr>
+          <p:cNvPr id="19" name="ANS_3"/>
+          <p:cNvSpPr txBox="1"/>
+          <p:nvPr/>
+        </p:nvSpPr>
+        <p:spPr>
+          <a:xfrm>
+            <a:off x="3931920" y="3493008"/>
+            <a:ext cx="1790395" cy="274320"/>
+          </a:xfrm>
+          <a:prstGeom prst="roundRect">
+            <a:avLst>
+              <a:gd name="adj" fmla="val 50000"/>
+            </a:avLst>
+          </a:prstGeom>
+          <a:solidFill>
+            <a:srgbClr val="F6E6B8"/>
+          </a:solidFill>
+          <a:ln w="12700">
+            <a:solidFill>
+              <a:srgbClr val="D4A537"/>
+            </a:solidFill>
+          </a:ln>
+        </p:spPr>
+        <p:txBody>
+          <a:bodyPr wrap="square" lIns="0" tIns="0" rIns="0" bIns="0" rtlCol="0" anchor="ctr"/>
+          <a:lstStyle/>
+          <a:p>
+            <a:pPr algn="ctr" indent="0" marL="0">
+              <a:buNone/>
+            </a:pPr>
+            <a:r>
+              <a:rPr lang="en-US" sz="1150" b="1" dirty="0">
+                <a:solidFill>
+                  <a:srgbClr val="A8432A"/>
+                </a:solidFill>
+                <a:latin typeface="Calibri" pitchFamily="34" charset="0"/>
+                <a:ea typeface="Calibri" pitchFamily="34" charset="-122"/>
+                <a:cs typeface="Calibri" pitchFamily="34" charset="-120"/>
+              </a:rPr>
+              <a:t>Более 700 знаков</a:t>
+            </a:r>
+            <a:endParaRPr lang="en-US" sz="1150" dirty="0"/>
+          </a:p>
+        </p:txBody>
+      </p:sp>
+      <p:sp>
+        <p:nvSpPr>
+          <p:cNvPr id="20" name="Shape 17"/>
+          <p:cNvSpPr/>
+          <p:nvPr/>
+        </p:nvSpPr>
+        <p:spPr>
+          <a:xfrm>
+            <a:off x="3337560" y="3904488"/>
+            <a:ext cx="5349240" cy="731520"/>
+          </a:xfrm>
+          <a:prstGeom prst="roundRect">
+            <a:avLst>
+              <a:gd name="adj" fmla="val 12500"/>
+            </a:avLst>
+          </a:prstGeom>
+          <a:solidFill>
+            <a:srgbClr val="FFFCF6"/>
+          </a:solidFill>
+          <a:ln w="12700">
+            <a:solidFill>
+              <a:srgbClr val="FFFCF6"/>
+            </a:solidFill>
+            <a:prstDash val="solid"/>
+          </a:ln>
+          <a:effectLst>
+            <a:outerShdw sx="100000" sy="100000" kx="0" ky="0" algn="bl" rotWithShape="0" blurRad="101600" dist="25400" dir="5400000">
+              <a:srgbClr val="4A3418">
+                <a:alpha val="16000"/>
+              </a:srgbClr>
+            </a:outerShdw>
+          </a:effectLst>
+        </p:spPr>
+      </p:sp>
+      <p:sp>
+        <p:nvSpPr>
+          <p:cNvPr id="21" name="Text 18"/>
+          <p:cNvSpPr txBox="1"/>
+          <p:nvPr/>
+        </p:nvSpPr>
+        <p:spPr>
+          <a:xfrm>
+            <a:off x="3474720" y="3995928"/>
+            <a:ext cx="329184" cy="329184"/>
+          </a:xfrm>
+          <a:prstGeom prst="ellipse">
+            <a:avLst/>
+          </a:prstGeom>
+          <a:solidFill>
+            <a:srgbClr val="A8432A"/>
+          </a:solidFill>
+          <a:ln>
+            <a:solidFill>
+              <a:srgbClr val="A8432A"/>
+            </a:solidFill>
+          </a:ln>
+        </p:spPr>
+        <p:txBody>
+          <a:bodyPr wrap="square" lIns="0" tIns="0" rIns="0" bIns="0" rtlCol="0" anchor="ctr"/>
+          <a:lstStyle/>
+          <a:p>
+            <a:pPr algn="ctr" indent="0" marL="0">
+              <a:buNone/>
+            </a:pPr>
+            <a:r>
+              <a:rPr lang="en-US" sz="1300" b="1" dirty="0">
+                <a:solidFill>
+                  <a:srgbClr val="FFFFFF"/>
+                </a:solidFill>
+                <a:latin typeface="Calibri" pitchFamily="34" charset="0"/>
+                <a:ea typeface="Calibri" pitchFamily="34" charset="-122"/>
+                <a:cs typeface="Calibri" pitchFamily="34" charset="-120"/>
+              </a:rPr>
+              <a:t>4</a:t>
+            </a:r>
+            <a:endParaRPr lang="en-US" sz="1300" dirty="0"/>
+          </a:p>
+        </p:txBody>
+      </p:sp>
+      <p:sp>
+        <p:nvSpPr>
+          <p:cNvPr id="22" name="Text 19"/>
+          <p:cNvSpPr txBox="1"/>
+          <p:nvPr/>
+        </p:nvSpPr>
+        <p:spPr>
+          <a:xfrm>
+            <a:off x="3931920" y="3959352"/>
+            <a:ext cx="4617720" cy="329184"/>
+          </a:xfrm>
+          <a:prstGeom prst="rect">
+            <a:avLst/>
+          </a:prstGeom>
+          <a:noFill/>
+          <a:ln/>
+        </p:spPr>
+        <p:txBody>
+          <a:bodyPr wrap="square" lIns="0" tIns="0" rIns="0" bIns="0" rtlCol="0" anchor="ctr"/>
+          <a:lstStyle/>
+          <a:p>
+            <a:pPr indent="0" marL="0">
+              <a:buNone/>
+            </a:pPr>
+            <a:r>
+              <a:rPr lang="en-US" sz="1250" b="1" dirty="0">
+                <a:solidFill>
+                  <a:srgbClr val="2A1E12"/>
+                </a:solidFill>
+                <a:latin typeface="Calibri" pitchFamily="34" charset="0"/>
+                <a:ea typeface="Calibri" pitchFamily="34" charset="-122"/>
+                <a:cs typeface="Calibri" pitchFamily="34" charset="-120"/>
+              </a:rPr>
+              <a:t>Перо какой богини лежало на весах вместе с сердцем?</a:t>
+            </a:r>
+            <a:endParaRPr lang="en-US" sz="1250" dirty="0"/>
+          </a:p>
+        </p:txBody>
+      </p:sp>
+      <p:sp>
+        <p:nvSpPr>
+          <p:cNvPr id="23" name="ANS_4"/>
+          <p:cNvSpPr txBox="1"/>
+          <p:nvPr/>
+        </p:nvSpPr>
+        <p:spPr>
+          <a:xfrm>
+            <a:off x="3931920" y="4306824"/>
+            <a:ext cx="2353666" cy="274320"/>
+          </a:xfrm>
+          <a:prstGeom prst="roundRect">
+            <a:avLst>
+              <a:gd name="adj" fmla="val 50000"/>
+            </a:avLst>
+          </a:prstGeom>
+          <a:solidFill>
+            <a:srgbClr val="F6E6B8"/>
+          </a:solidFill>
+          <a:ln w="12700">
+            <a:solidFill>
+              <a:srgbClr val="D4A537"/>
+            </a:solidFill>
+          </a:ln>
+        </p:spPr>
+        <p:txBody>
+          <a:bodyPr wrap="square" lIns="0" tIns="0" rIns="0" bIns="0" rtlCol="0" anchor="ctr"/>
+          <a:lstStyle/>
+          <a:p>
+            <a:pPr algn="ctr" indent="0" marL="0">
+              <a:buNone/>
+            </a:pPr>
+            <a:r>
+              <a:rPr lang="en-US" sz="1150" b="1" dirty="0">
+                <a:solidFill>
+                  <a:srgbClr val="A8432A"/>
+                </a:solidFill>
+                <a:latin typeface="Calibri" pitchFamily="34" charset="0"/>
+                <a:ea typeface="Calibri" pitchFamily="34" charset="-122"/>
+                <a:cs typeface="Calibri" pitchFamily="34" charset="-120"/>
+              </a:rPr>
+              <a:t>Перо богини правды Маат</a:t>
+            </a:r>
+            <a:endParaRPr lang="en-US" sz="1150" dirty="0"/>
+          </a:p>
+        </p:txBody>
+      </p:sp>
+      <p:sp>
+        <p:nvSpPr>
+          <p:cNvPr id="24" name="Text 21"/>
+          <p:cNvSpPr txBox="1"/>
+          <p:nvPr/>
+        </p:nvSpPr>
+        <p:spPr>
+          <a:xfrm>
+            <a:off x="320040" y="4846320"/>
+            <a:ext cx="3657600" cy="201168"/>
+          </a:xfrm>
+          <a:prstGeom prst="rect">
+            <a:avLst/>
+          </a:prstGeom>
+          <a:noFill/>
+          <a:ln/>
+        </p:spPr>
+        <p:txBody>
+          <a:bodyPr wrap="square" lIns="0" tIns="0" rIns="0" bIns="0" rtlCol="0" anchor="b"/>
+          <a:lstStyle/>
+          <a:p>
+            <a:pPr indent="0" marL="0">
+              <a:buNone/>
+            </a:pPr>
+            <a:r>
+              <a:rPr lang="en-US" sz="900" i="1" spc="100" kern="0" dirty="0">
+                <a:solidFill>
+                  <a:srgbClr val="8A7356"/>
+                </a:solidFill>
+                <a:latin typeface="Calibri" pitchFamily="34" charset="0"/>
+                <a:ea typeface="Calibri" pitchFamily="34" charset="-122"/>
+                <a:cs typeface="Calibri" pitchFamily="34" charset="-120"/>
+              </a:rPr>
+              <a:t>Made by Heinrich Studio</a:t>
+            </a:r>
+            <a:endParaRPr lang="en-US" sz="900" dirty="0"/>
+          </a:p>
+        </p:txBody>
+      </p:sp>
+    </p:spTree>
+  </p:cSld>
+  <p:clrMapOvr>
+    <a:masterClrMapping/>
+  </p:clrMapOvr>
+  <p:timing>
+    <p:tnLst>
+      <p:par>
+        <p:cTn id="1" dur="indefinite" restart="never" nodeType="tmRoot">
+          <p:childTnLst>
+            <p:seq concurrent="1" nextAc="seek">
+              <p:cTn id="2" dur="indefinite" nodeType="mainSeq">
+                <p:childTnLst>
+                  <p:par>
+                    <p:cTn id="6" fill="hold">
+                      <p:stCondLst>
+                        <p:cond delay="indefinite"/>
+                      </p:stCondLst>
+                      <p:childTnLst>
+                        <p:par>
+                          <p:cTn id="7" fill="hold">
+                            <p:stCondLst>
+                              <p:cond delay="0"/>
+                            </p:stCondLst>
+                            <p:childTnLst>
+                              <p:par>
+                                <p:cTn id="3" presetID="10" presetClass="entr" presetSubtype="0" fill="hold" grpId="0" nodeType="clickEffect">
+                                  <p:stCondLst>
+                                    <p:cond delay="0"/>
+                                  </p:stCondLst>
+                                  <p:childTnLst>
+                                    <p:set>
+                                      <p:cBhvr>
+                                        <p:cTn id="4" dur="1" fill="hold">
+                                          <p:stCondLst>
+                                            <p:cond delay="0"/>
+                                          </p:stCondLst>
+                                        </p:cTn>
+                                        <p:tgtEl>
+                                          <p:spTgt spid="11"/>
+                                        </p:tgtEl>
+                                        <p:attrNameLst>
+                                          <p:attrName>style.visibility</p:attrName>
+                                        </p:attrNameLst>
+                                      </p:cBhvr>
+                                      <p:to>
+                                        <p:strVal val="visible"/>
+                                      </p:to>
+                                    </p:set>
+                                    <p:animEffect transition="in" filter="fade">
+                                      <p:cBhvr>
+                                        <p:cTn id="5" dur="500"/>
+                                        <p:tgtEl>
+                                          <p:spTgt spid="11"/>
+                                        </p:tgtEl>
+                                      </p:cBhvr>
+                                    </p:animEffect>
+                                  </p:childTnLst>
+                                </p:cTn>
+                              </p:par>
+                            </p:childTnLst>
+                          </p:cTn>
+                        </p:par>
+                      </p:childTnLst>
+                    </p:cTn>
+                  </p:par>
+                  <p:par>
+                    <p:cTn id="11" fill="hold">
+                      <p:stCondLst>
+                        <p:cond delay="indefinite"/>
+                      </p:stCondLst>
+                      <p:childTnLst>
+                        <p:par>
+                          <p:cTn id="12" fill="hold">
+                            <p:stCondLst>
+                              <p:cond delay="0"/>
+                            </p:stCondLst>
+                            <p:childTnLst>
+                              <p:par>
+                                <p:cTn id="8" presetID="10" presetClass="entr" presetSubtype="0" fill="hold" grpId="0" nodeType="clickEffect">
+                                  <p:stCondLst>
+                                    <p:cond delay="0"/>
+                                  </p:stCondLst>
+                                  <p:childTnLst>
+                                    <p:set>
+                                      <p:cBhvr>
+                                        <p:cTn id="9" dur="1" fill="hold">
+                                          <p:stCondLst>
+                                            <p:cond delay="0"/>
+                                          </p:stCondLst>
+                                        </p:cTn>
+                                        <p:tgtEl>
+                                          <p:spTgt spid="15"/>
+                                        </p:tgtEl>
+                                        <p:attrNameLst>
+                                          <p:attrName>style.visibility</p:attrName>
+                                        </p:attrNameLst>
+                                      </p:cBhvr>
+                                      <p:to>
+                                        <p:strVal val="visible"/>
+                                      </p:to>
+                                    </p:set>
+                                    <p:animEffect transition="in" filter="fade">
+                                      <p:cBhvr>
+                                        <p:cTn id="10" dur="500"/>
+                                        <p:tgtEl>
+                                          <p:spTgt spid="15"/>
+                                        </p:tgtEl>
+                                      </p:cBhvr>
+                                    </p:animEffect>
+                                  </p:childTnLst>
+                                </p:cTn>
+                              </p:par>
+                            </p:childTnLst>
+                          </p:cTn>
+                        </p:par>
+                      </p:childTnLst>
+                    </p:cTn>
+                  </p:par>
+                  <p:par>
+                    <p:cTn id="16" fill="hold">
+                      <p:stCondLst>
+                        <p:cond delay="indefinite"/>
+                      </p:stCondLst>
+                      <p:childTnLst>
+                        <p:par>
+                          <p:cTn id="17" fill="hold">
+                            <p:stCondLst>
+                              <p:cond delay="0"/>
+                            </p:stCondLst>
+                            <p:childTnLst>
+                              <p:par>
+                                <p:cTn id="13" presetID="10" presetClass="entr" presetSubtype="0" fill="hold" grpId="0" nodeType="clickEffect">
+                                  <p:stCondLst>
+                                    <p:cond delay="0"/>
+                                  </p:stCondLst>
+                                  <p:childTnLst>
+                                    <p:set>
+                                      <p:cBhvr>
+                                        <p:cTn id="14" dur="1" fill="hold">
+                                          <p:stCondLst>
+                                            <p:cond delay="0"/>
+                                          </p:stCondLst>
+                                        </p:cTn>
+                                        <p:tgtEl>
+                                          <p:spTgt spid="19"/>
+                                        </p:tgtEl>
+                                        <p:attrNameLst>
+                                          <p:attrName>style.visibility</p:attrName>
+                                        </p:attrNameLst>
+                                      </p:cBhvr>
+                                      <p:to>
+                                        <p:strVal val="visible"/>
+                                      </p:to>
+                                    </p:set>
+                                    <p:animEffect transition="in" filter="fade">
+                                      <p:cBhvr>
+                                        <p:cTn id="15" dur="500"/>
+                                        <p:tgtEl>
+                                          <p:spTgt spid="19"/>
+                                        </p:tgtEl>
+                                      </p:cBhvr>
+                                    </p:animEffect>
+                                  </p:childTnLst>
+                                </p:cTn>
+                              </p:par>
+                            </p:childTnLst>
+                          </p:cTn>
+                        </p:par>
+                      </p:childTnLst>
+                    </p:cTn>
+                  </p:par>
+                  <p:par>
+                    <p:cTn id="21" fill="hold">
+                      <p:stCondLst>
+                        <p:cond delay="indefinite"/>
+                      </p:stCondLst>
+                      <p:childTnLst>
+                        <p:par>
+                          <p:cTn id="22" fill="hold">
+                            <p:stCondLst>
+                              <p:cond delay="0"/>
+                            </p:stCondLst>
+                            <p:childTnLst>
+                              <p:par>
+                                <p:cTn id="18" presetID="10" presetClass="entr" presetSubtype="0" fill="hold" grpId="0" nodeType="clickEffect">
+                                  <p:stCondLst>
+                                    <p:cond delay="0"/>
+                                  </p:stCondLst>
+                                  <p:childTnLst>
+                                    <p:set>
+                                      <p:cBhvr>
+                                        <p:cTn id="19" dur="1" fill="hold">
+                                          <p:stCondLst>
+                                            <p:cond delay="0"/>
+                                          </p:stCondLst>
+                                        </p:cTn>
+                                        <p:tgtEl>
+                                          <p:spTgt spid="23"/>
+                                        </p:tgtEl>
+                                        <p:attrNameLst>
+                                          <p:attrName>style.visibility</p:attrName>
+                                        </p:attrNameLst>
+                                      </p:cBhvr>
+                                      <p:to>
+                                        <p:strVal val="visible"/>
+                                      </p:to>
+                                    </p:set>
+                                    <p:animEffect transition="in" filter="fade">
+                                      <p:cBhvr>
+                                        <p:cTn id="20" dur="500"/>
+                                        <p:tgtEl>
+                                          <p:spTgt spid="23"/>
+                                        </p:tgtEl>
+                                      </p:cBhvr>
+                                    </p:animEffect>
+                                  </p:childTnLst>
+                                </p:cTn>
+                              </p:par>
+                            </p:childTnLst>
+                          </p:cTn>
+                        </p:par>
+                      </p:childTnLst>
+                    </p:cTn>
+                  </p:par>
+                </p:childTnLst>
+              </p:cTn>
+              <p:prevCondLst>
+                <p:cond evt="onPrev" delay="0">
+                  <p:tgtEl>
+                    <p:sldTgt/>
+                  </p:tgtEl>
+                </p:cond>
+              </p:prevCondLst>
+              <p:nextCondLst>
+                <p:cond evt="onNext" delay="0">
+                  <p:tgtEl>
+                    <p:sldTgt/>
+                  </p:tgtEl>
+                </p:cond>
+              </p:nextCondLst>
+            </p:seq>
+          </p:childTnLst>
+        </p:cTn>
+      </p:par>
+    </p:tnLst>
+    <p:bldLst>
+      <p:bldP spid="11" grpId="0" animBg="1"/>
+      <p:bldP spid="15" grpId="0" animBg="1"/>
+      <p:bldP spid="19" grpId="0" animBg="1"/>
+      <p:bldP spid="23" grpId="0" animBg="1"/>
+    </p:bldLst>
+  </p:timing>
+</p:sld>
+</file>
+
+<file path=ppt/slides/slide11.xml><?xml version="1.0" encoding="utf-8"?>
+<p:sld xmlns:a="http://schemas.openxmlformats.org/drawingml/2006/main" xmlns:r="http://schemas.openxmlformats.org/officeDocument/2006/relationships" xmlns:p="http://schemas.openxmlformats.org/presentationml/2006/main">
+  <p:cSld name="Slide 11">
+    <p:bg>
+      <p:bgPr>
+        <a:blipFill dpi="0" rotWithShape="1">
+          <a:blip r:embed="rId1">
+            <a:lum/>
+          </a:blip>
+          <a:srcRect/>
+          <a:stretch>
+            <a:fillRect/>
+          </a:stretch>
+        </a:blipFill>
+        <a:effectLst/>
+      </p:bgPr>
+    </p:bg>
+    <p:spTree>
+      <p:nvGrpSpPr>
+        <p:cNvPr id="1" name=""/>
+        <p:cNvGrpSpPr/>
+        <p:nvPr/>
+      </p:nvGrpSpPr>
+      <p:grpSpPr>
+        <a:xfrm>
+          <a:off x="0" y="0"/>
+          <a:ext cx="0" cy="0"/>
+          <a:chOff x="0" y="0"/>
+          <a:chExt cx="0" cy="0"/>
+        </a:xfrm>
+      </p:grpSpPr>
+      <p:sp>
+        <p:nvSpPr>
+          <p:cNvPr id="2" name="Shape 0"/>
+          <p:cNvSpPr/>
+          <p:nvPr/>
+        </p:nvSpPr>
+        <p:spPr>
+          <a:xfrm>
+            <a:off x="402336" y="402336"/>
+            <a:ext cx="2578608" cy="4315968"/>
+          </a:xfrm>
+          <a:prstGeom prst="rect">
+            <a:avLst/>
+          </a:prstGeom>
+          <a:solidFill>
+            <a:srgbClr val="D4A537"/>
+          </a:solidFill>
+          <a:ln w="12700">
+            <a:solidFill>
+              <a:srgbClr val="D4A537"/>
+            </a:solidFill>
+            <a:prstDash val="solid"/>
+          </a:ln>
+          <a:effectLst>
+            <a:outerShdw sx="100000" sy="100000" kx="0" ky="0" algn="bl" rotWithShape="0" blurRad="127000" dist="38100" dir="5400000">
+              <a:srgbClr val="000000">
+                <a:alpha val="30000"/>
+              </a:srgbClr>
+            </a:outerShdw>
+          </a:effectLst>
+        </p:spPr>
+      </p:sp>
+      <p:pic>
+        <p:nvPicPr>
+          <p:cNvPr id="3" name="Image 0" descr="/tmp/claude-0/-home-user-heinrich-mario/e7688653-8e48-5480-a009-7b18c0e4f8cc/scratchpad/egypt_build/assets/quiz_karnak.jpg">    </p:cNvPr>
+          <p:cNvPicPr>
+            <a:picLocks noChangeAspect="1"/>
+          </p:cNvPicPr>
+          <p:nvPr/>
+        </p:nvPicPr>
+        <p:blipFill>
+          <a:blip r:embed="rId2"/>
+          <a:stretch>
+            <a:fillRect/>
+          </a:stretch>
+        </p:blipFill>
+        <p:spPr>
+          <a:xfrm>
+            <a:off x="457200" y="457200"/>
+            <a:ext cx="2468880" cy="4206240"/>
+          </a:xfrm>
+          <a:prstGeom prst="rect">
+            <a:avLst/>
+          </a:prstGeom>
+        </p:spPr>
+      </p:pic>
+      <p:sp>
+        <p:nvSpPr>
+          <p:cNvPr id="4" name="Shape 1"/>
+          <p:cNvSpPr/>
+          <p:nvPr/>
+        </p:nvSpPr>
+        <p:spPr>
+          <a:xfrm>
+            <a:off x="3337560" y="457200"/>
+            <a:ext cx="2357323" cy="274320"/>
+          </a:xfrm>
+          <a:prstGeom prst="roundRect">
+            <a:avLst>
+              <a:gd name="adj" fmla="val 50000"/>
+            </a:avLst>
+          </a:prstGeom>
+          <a:solidFill>
+            <a:srgbClr val="FFFCF6"/>
+          </a:solidFill>
+          <a:ln w="15875">
+            <a:solidFill>
+              <a:srgbClr val="D4A537"/>
+            </a:solidFill>
+            <a:prstDash val="solid"/>
+          </a:ln>
+        </p:spPr>
+      </p:sp>
+      <p:sp>
+        <p:nvSpPr>
+          <p:cNvPr id="5" name="Shape 2"/>
+          <p:cNvSpPr/>
+          <p:nvPr/>
+        </p:nvSpPr>
+        <p:spPr>
+          <a:xfrm>
+            <a:off x="5740603" y="457200"/>
+            <a:ext cx="45720" cy="274320"/>
+          </a:xfrm>
+          <a:prstGeom prst="rect">
+            <a:avLst/>
+          </a:prstGeom>
+          <a:solidFill>
+            <a:srgbClr val="D4A537"/>
+          </a:solidFill>
+          <a:ln w="12700">
+            <a:solidFill>
+              <a:srgbClr val="D4A537"/>
+            </a:solidFill>
+            <a:prstDash val="solid"/>
+          </a:ln>
+        </p:spPr>
+      </p:sp>
+      <p:sp>
+        <p:nvSpPr>
+          <p:cNvPr id="6" name="Text 3"/>
+          <p:cNvSpPr txBox="1"/>
+          <p:nvPr/>
+        </p:nvSpPr>
+        <p:spPr>
+          <a:xfrm>
+            <a:off x="3337560" y="457200"/>
+            <a:ext cx="2357323" cy="274320"/>
+          </a:xfrm>
+          <a:prstGeom prst="rect">
+            <a:avLst/>
+          </a:prstGeom>
+          <a:noFill/>
+          <a:ln/>
+        </p:spPr>
+        <p:txBody>
+          <a:bodyPr wrap="square" lIns="0" tIns="0" rIns="0" bIns="0" rtlCol="0" anchor="ctr"/>
+          <a:lstStyle/>
+          <a:p>
+            <a:pPr algn="ctr" indent="0" marL="0">
+              <a:buNone/>
+            </a:pPr>
+            <a:r>
+              <a:rPr lang="en-US" sz="1000" b="1" spc="300" kern="0" dirty="0">
+                <a:solidFill>
+                  <a:srgbClr val="A8432A"/>
+                </a:solidFill>
+                <a:latin typeface="Calibri" pitchFamily="34" charset="0"/>
+                <a:ea typeface="Calibri" pitchFamily="34" charset="-122"/>
+                <a:cs typeface="Calibri" pitchFamily="34" charset="-120"/>
+              </a:rPr>
+              <a:t>ВИКТОРИНА · ЧАСТЬ 2</a:t>
+            </a:r>
+            <a:endParaRPr lang="en-US" sz="1000" dirty="0"/>
+          </a:p>
+        </p:txBody>
+      </p:sp>
+      <p:sp>
+        <p:nvSpPr>
+          <p:cNvPr id="7" name="Text 4"/>
+          <p:cNvSpPr txBox="1"/>
+          <p:nvPr/>
+        </p:nvSpPr>
+        <p:spPr>
+          <a:xfrm>
+            <a:off x="3337560" y="804672"/>
+            <a:ext cx="5349240" cy="594360"/>
+          </a:xfrm>
+          <a:prstGeom prst="rect">
+            <a:avLst/>
+          </a:prstGeom>
+          <a:noFill/>
+          <a:ln/>
+        </p:spPr>
+        <p:txBody>
+          <a:bodyPr wrap="square" lIns="0" tIns="0" rIns="0" bIns="0" rtlCol="0" anchor="ctr"/>
+          <a:lstStyle/>
+          <a:p>
+            <a:pPr indent="0" marL="0">
+              <a:buNone/>
+            </a:pPr>
+            <a:r>
+              <a:rPr lang="en-US" sz="2800" b="1" dirty="0">
+                <a:solidFill>
+                  <a:srgbClr val="2A1E12"/>
+                </a:solidFill>
+                <a:latin typeface="Cambria" pitchFamily="34" charset="0"/>
+                <a:ea typeface="Cambria" pitchFamily="34" charset="-122"/>
+                <a:cs typeface="Cambria" pitchFamily="34" charset="-120"/>
+              </a:rPr>
+              <a:t>Проверь себя!</a:t>
+            </a:r>
+            <a:endParaRPr lang="en-US" sz="2800" dirty="0"/>
+          </a:p>
+        </p:txBody>
+      </p:sp>
+      <p:sp>
+        <p:nvSpPr>
+          <p:cNvPr id="8" name="Shape 5"/>
+          <p:cNvSpPr/>
+          <p:nvPr/>
+        </p:nvSpPr>
+        <p:spPr>
+          <a:xfrm>
+            <a:off x="3337560" y="1463040"/>
+            <a:ext cx="5349240" cy="731520"/>
+          </a:xfrm>
+          <a:prstGeom prst="roundRect">
+            <a:avLst>
+              <a:gd name="adj" fmla="val 12500"/>
+            </a:avLst>
+          </a:prstGeom>
+          <a:solidFill>
+            <a:srgbClr val="FFFCF6"/>
+          </a:solidFill>
+          <a:ln w="12700">
+            <a:solidFill>
+              <a:srgbClr val="FFFCF6"/>
+            </a:solidFill>
+            <a:prstDash val="solid"/>
+          </a:ln>
+          <a:effectLst>
+            <a:outerShdw sx="100000" sy="100000" kx="0" ky="0" algn="bl" rotWithShape="0" blurRad="101600" dist="25400" dir="5400000">
+              <a:srgbClr val="4A3418">
+                <a:alpha val="16000"/>
+              </a:srgbClr>
+            </a:outerShdw>
+          </a:effectLst>
+        </p:spPr>
+      </p:sp>
+      <p:sp>
+        <p:nvSpPr>
+          <p:cNvPr id="9" name="Text 6"/>
+          <p:cNvSpPr txBox="1"/>
+          <p:nvPr/>
+        </p:nvSpPr>
+        <p:spPr>
+          <a:xfrm>
+            <a:off x="3474720" y="1554480"/>
+            <a:ext cx="329184" cy="329184"/>
+          </a:xfrm>
+          <a:prstGeom prst="ellipse">
+            <a:avLst/>
+          </a:prstGeom>
+          <a:solidFill>
+            <a:srgbClr val="A8432A"/>
+          </a:solidFill>
+          <a:ln>
+            <a:solidFill>
+              <a:srgbClr val="A8432A"/>
+            </a:solidFill>
+          </a:ln>
+        </p:spPr>
+        <p:txBody>
+          <a:bodyPr wrap="square" lIns="0" tIns="0" rIns="0" bIns="0" rtlCol="0" anchor="ctr"/>
+          <a:lstStyle/>
+          <a:p>
+            <a:pPr algn="ctr" indent="0" marL="0">
+              <a:buNone/>
+            </a:pPr>
+            <a:r>
+              <a:rPr lang="en-US" sz="1300" b="1" dirty="0">
+                <a:solidFill>
+                  <a:srgbClr val="FFFFFF"/>
+                </a:solidFill>
+                <a:latin typeface="Calibri" pitchFamily="34" charset="0"/>
+                <a:ea typeface="Calibri" pitchFamily="34" charset="-122"/>
+                <a:cs typeface="Calibri" pitchFamily="34" charset="-120"/>
+              </a:rPr>
+              <a:t>5</a:t>
+            </a:r>
+            <a:endParaRPr lang="en-US" sz="1300" dirty="0"/>
+          </a:p>
+        </p:txBody>
+      </p:sp>
+      <p:sp>
+        <p:nvSpPr>
+          <p:cNvPr id="10" name="Text 7"/>
+          <p:cNvSpPr txBox="1"/>
+          <p:nvPr/>
+        </p:nvSpPr>
+        <p:spPr>
+          <a:xfrm>
+            <a:off x="3931920" y="1517904"/>
+            <a:ext cx="4617720" cy="329184"/>
+          </a:xfrm>
+          <a:prstGeom prst="rect">
+            <a:avLst/>
+          </a:prstGeom>
+          <a:noFill/>
+          <a:ln/>
+        </p:spPr>
+        <p:txBody>
+          <a:bodyPr wrap="square" lIns="0" tIns="0" rIns="0" bIns="0" rtlCol="0" anchor="ctr"/>
+          <a:lstStyle/>
+          <a:p>
+            <a:pPr indent="0" marL="0">
+              <a:buNone/>
+            </a:pPr>
+            <a:r>
+              <a:rPr lang="en-US" sz="1250" b="1" dirty="0">
+                <a:solidFill>
+                  <a:srgbClr val="2A1E12"/>
+                </a:solidFill>
+                <a:latin typeface="Calibri" pitchFamily="34" charset="0"/>
+                <a:ea typeface="Calibri" pitchFamily="34" charset="-122"/>
+                <a:cs typeface="Calibri" pitchFamily="34" charset="-120"/>
+              </a:rPr>
+              <a:t>Сколько лет было Тутанхамону, когда он умер?</a:t>
+            </a:r>
+            <a:endParaRPr lang="en-US" sz="1250" dirty="0"/>
+          </a:p>
+        </p:txBody>
+      </p:sp>
+      <p:sp>
+        <p:nvSpPr>
+          <p:cNvPr id="11" name="ANS_1"/>
+          <p:cNvSpPr txBox="1"/>
+          <p:nvPr/>
+        </p:nvSpPr>
+        <p:spPr>
+          <a:xfrm>
+            <a:off x="3931920" y="1865376"/>
+            <a:ext cx="1468526" cy="274320"/>
+          </a:xfrm>
+          <a:prstGeom prst="roundRect">
+            <a:avLst>
+              <a:gd name="adj" fmla="val 50000"/>
+            </a:avLst>
+          </a:prstGeom>
+          <a:solidFill>
+            <a:srgbClr val="F6E6B8"/>
+          </a:solidFill>
+          <a:ln w="12700">
+            <a:solidFill>
+              <a:srgbClr val="D4A537"/>
+            </a:solidFill>
+          </a:ln>
+        </p:spPr>
+        <p:txBody>
+          <a:bodyPr wrap="square" lIns="0" tIns="0" rIns="0" bIns="0" rtlCol="0" anchor="ctr"/>
+          <a:lstStyle/>
+          <a:p>
+            <a:pPr algn="ctr" indent="0" marL="0">
+              <a:buNone/>
+            </a:pPr>
+            <a:r>
+              <a:rPr lang="en-US" sz="1150" b="1" dirty="0">
+                <a:solidFill>
+                  <a:srgbClr val="A8432A"/>
+                </a:solidFill>
+                <a:latin typeface="Calibri" pitchFamily="34" charset="0"/>
+                <a:ea typeface="Calibri" pitchFamily="34" charset="-122"/>
+                <a:cs typeface="Calibri" pitchFamily="34" charset="-120"/>
+              </a:rPr>
+              <a:t>Около 19 лет</a:t>
+            </a:r>
+            <a:endParaRPr lang="en-US" sz="1150" dirty="0"/>
+          </a:p>
+        </p:txBody>
+      </p:sp>
+      <p:sp>
+        <p:nvSpPr>
+          <p:cNvPr id="12" name="Shape 9"/>
+          <p:cNvSpPr/>
+          <p:nvPr/>
+        </p:nvSpPr>
+        <p:spPr>
+          <a:xfrm>
+            <a:off x="3337560" y="2276856"/>
+            <a:ext cx="5349240" cy="731520"/>
+          </a:xfrm>
+          <a:prstGeom prst="roundRect">
+            <a:avLst>
+              <a:gd name="adj" fmla="val 12500"/>
+            </a:avLst>
+          </a:prstGeom>
+          <a:solidFill>
+            <a:srgbClr val="FFFCF6"/>
+          </a:solidFill>
+          <a:ln w="12700">
+            <a:solidFill>
+              <a:srgbClr val="FFFCF6"/>
+            </a:solidFill>
+            <a:prstDash val="solid"/>
+          </a:ln>
+          <a:effectLst>
+            <a:outerShdw sx="100000" sy="100000" kx="0" ky="0" algn="bl" rotWithShape="0" blurRad="101600" dist="25400" dir="5400000">
+              <a:srgbClr val="4A3418">
+                <a:alpha val="16000"/>
+              </a:srgbClr>
+            </a:outerShdw>
+          </a:effectLst>
+        </p:spPr>
+      </p:sp>
+      <p:sp>
+        <p:nvSpPr>
+          <p:cNvPr id="13" name="Text 10"/>
+          <p:cNvSpPr txBox="1"/>
+          <p:nvPr/>
+        </p:nvSpPr>
+        <p:spPr>
+          <a:xfrm>
+            <a:off x="3474720" y="2368296"/>
+            <a:ext cx="329184" cy="329184"/>
+          </a:xfrm>
+          <a:prstGeom prst="ellipse">
+            <a:avLst/>
+          </a:prstGeom>
+          <a:solidFill>
+            <a:srgbClr val="A8432A"/>
+          </a:solidFill>
+          <a:ln>
+            <a:solidFill>
+              <a:srgbClr val="A8432A"/>
+            </a:solidFill>
+          </a:ln>
+        </p:spPr>
+        <p:txBody>
+          <a:bodyPr wrap="square" lIns="0" tIns="0" rIns="0" bIns="0" rtlCol="0" anchor="ctr"/>
+          <a:lstStyle/>
+          <a:p>
+            <a:pPr algn="ctr" indent="0" marL="0">
+              <a:buNone/>
+            </a:pPr>
+            <a:r>
+              <a:rPr lang="en-US" sz="1300" b="1" dirty="0">
+                <a:solidFill>
+                  <a:srgbClr val="FFFFFF"/>
+                </a:solidFill>
+                <a:latin typeface="Calibri" pitchFamily="34" charset="0"/>
+                <a:ea typeface="Calibri" pitchFamily="34" charset="-122"/>
+                <a:cs typeface="Calibri" pitchFamily="34" charset="-120"/>
+              </a:rPr>
+              <a:t>6</a:t>
+            </a:r>
+            <a:endParaRPr lang="en-US" sz="1300" dirty="0"/>
+          </a:p>
+        </p:txBody>
+      </p:sp>
+      <p:sp>
+        <p:nvSpPr>
+          <p:cNvPr id="14" name="Text 11"/>
+          <p:cNvSpPr txBox="1"/>
+          <p:nvPr/>
+        </p:nvSpPr>
+        <p:spPr>
+          <a:xfrm>
+            <a:off x="3931920" y="2331720"/>
+            <a:ext cx="4617720" cy="329184"/>
+          </a:xfrm>
+          <a:prstGeom prst="rect">
+            <a:avLst/>
+          </a:prstGeom>
+          <a:noFill/>
+          <a:ln/>
+        </p:spPr>
+        <p:txBody>
+          <a:bodyPr wrap="square" lIns="0" tIns="0" rIns="0" bIns="0" rtlCol="0" anchor="ctr"/>
+          <a:lstStyle/>
+          <a:p>
+            <a:pPr indent="0" marL="0">
+              <a:buNone/>
+            </a:pPr>
+            <a:r>
+              <a:rPr lang="en-US" sz="1250" b="1" dirty="0">
+                <a:solidFill>
+                  <a:srgbClr val="2A1E12"/>
+                </a:solidFill>
+                <a:latin typeface="Calibri" pitchFamily="34" charset="0"/>
+                <a:ea typeface="Calibri" pitchFamily="34" charset="-122"/>
+                <a:cs typeface="Calibri" pitchFamily="34" charset="-120"/>
+              </a:rPr>
+              <a:t>Чем кормили строителей пирамид?</a:t>
+            </a:r>
+            <a:endParaRPr lang="en-US" sz="1250" dirty="0"/>
+          </a:p>
+        </p:txBody>
+      </p:sp>
+      <p:sp>
+        <p:nvSpPr>
+          <p:cNvPr id="15" name="ANS_2"/>
+          <p:cNvSpPr txBox="1"/>
+          <p:nvPr/>
+        </p:nvSpPr>
+        <p:spPr>
+          <a:xfrm>
+            <a:off x="3931920" y="2679192"/>
+            <a:ext cx="2192731" cy="274320"/>
+          </a:xfrm>
+          <a:prstGeom prst="roundRect">
+            <a:avLst>
+              <a:gd name="adj" fmla="val 50000"/>
+            </a:avLst>
+          </a:prstGeom>
+          <a:solidFill>
+            <a:srgbClr val="F6E6B8"/>
+          </a:solidFill>
+          <a:ln w="12700">
+            <a:solidFill>
+              <a:srgbClr val="D4A537"/>
+            </a:solidFill>
+          </a:ln>
+        </p:spPr>
+        <p:txBody>
+          <a:bodyPr wrap="square" lIns="0" tIns="0" rIns="0" bIns="0" rtlCol="0" anchor="ctr"/>
+          <a:lstStyle/>
+          <a:p>
+            <a:pPr algn="ctr" indent="0" marL="0">
+              <a:buNone/>
+            </a:pPr>
+            <a:r>
+              <a:rPr lang="en-US" sz="1150" b="1" dirty="0">
+                <a:solidFill>
+                  <a:srgbClr val="A8432A"/>
+                </a:solidFill>
+                <a:latin typeface="Calibri" pitchFamily="34" charset="0"/>
+                <a:ea typeface="Calibri" pitchFamily="34" charset="-122"/>
+                <a:cs typeface="Calibri" pitchFamily="34" charset="-120"/>
+              </a:rPr>
+              <a:t>Хлебом, пивом и мясом</a:t>
+            </a:r>
+            <a:endParaRPr lang="en-US" sz="1150" dirty="0"/>
+          </a:p>
+        </p:txBody>
+      </p:sp>
+      <p:sp>
+        <p:nvSpPr>
+          <p:cNvPr id="16" name="Shape 13"/>
+          <p:cNvSpPr/>
+          <p:nvPr/>
+        </p:nvSpPr>
+        <p:spPr>
+          <a:xfrm>
+            <a:off x="3337560" y="3090672"/>
+            <a:ext cx="5349240" cy="731520"/>
+          </a:xfrm>
+          <a:prstGeom prst="roundRect">
+            <a:avLst>
+              <a:gd name="adj" fmla="val 12500"/>
+            </a:avLst>
+          </a:prstGeom>
+          <a:solidFill>
+            <a:srgbClr val="FFFCF6"/>
+          </a:solidFill>
+          <a:ln w="12700">
+            <a:solidFill>
+              <a:srgbClr val="FFFCF6"/>
+            </a:solidFill>
+            <a:prstDash val="solid"/>
+          </a:ln>
+          <a:effectLst>
+            <a:outerShdw sx="100000" sy="100000" kx="0" ky="0" algn="bl" rotWithShape="0" blurRad="101600" dist="25400" dir="5400000">
+              <a:srgbClr val="4A3418">
+                <a:alpha val="16000"/>
+              </a:srgbClr>
+            </a:outerShdw>
+          </a:effectLst>
+        </p:spPr>
+      </p:sp>
+      <p:sp>
+        <p:nvSpPr>
+          <p:cNvPr id="17" name="Text 14"/>
+          <p:cNvSpPr txBox="1"/>
+          <p:nvPr/>
+        </p:nvSpPr>
+        <p:spPr>
+          <a:xfrm>
+            <a:off x="3474720" y="3182112"/>
+            <a:ext cx="329184" cy="329184"/>
+          </a:xfrm>
+          <a:prstGeom prst="ellipse">
+            <a:avLst/>
+          </a:prstGeom>
+          <a:solidFill>
+            <a:srgbClr val="A8432A"/>
+          </a:solidFill>
+          <a:ln>
+            <a:solidFill>
+              <a:srgbClr val="A8432A"/>
+            </a:solidFill>
+          </a:ln>
+        </p:spPr>
+        <p:txBody>
+          <a:bodyPr wrap="square" lIns="0" tIns="0" rIns="0" bIns="0" rtlCol="0" anchor="ctr"/>
+          <a:lstStyle/>
+          <a:p>
+            <a:pPr algn="ctr" indent="0" marL="0">
+              <a:buNone/>
+            </a:pPr>
+            <a:r>
+              <a:rPr lang="en-US" sz="1300" b="1" dirty="0">
+                <a:solidFill>
+                  <a:srgbClr val="FFFFFF"/>
+                </a:solidFill>
+                <a:latin typeface="Calibri" pitchFamily="34" charset="0"/>
+                <a:ea typeface="Calibri" pitchFamily="34" charset="-122"/>
+                <a:cs typeface="Calibri" pitchFamily="34" charset="-120"/>
+              </a:rPr>
+              <a:t>7</a:t>
+            </a:r>
+            <a:endParaRPr lang="en-US" sz="1300" dirty="0"/>
+          </a:p>
+        </p:txBody>
+      </p:sp>
+      <p:sp>
+        <p:nvSpPr>
+          <p:cNvPr id="18" name="Text 15"/>
+          <p:cNvSpPr txBox="1"/>
+          <p:nvPr/>
+        </p:nvSpPr>
+        <p:spPr>
+          <a:xfrm>
+            <a:off x="3931920" y="3145536"/>
+            <a:ext cx="4617720" cy="329184"/>
+          </a:xfrm>
+          <a:prstGeom prst="rect">
+            <a:avLst/>
+          </a:prstGeom>
+          <a:noFill/>
+          <a:ln/>
+        </p:spPr>
+        <p:txBody>
+          <a:bodyPr wrap="square" lIns="0" tIns="0" rIns="0" bIns="0" rtlCol="0" anchor="ctr"/>
+          <a:lstStyle/>
+          <a:p>
+            <a:pPr indent="0" marL="0">
+              <a:buNone/>
+            </a:pPr>
+            <a:r>
+              <a:rPr lang="en-US" sz="1250" b="1" dirty="0">
+                <a:solidFill>
+                  <a:srgbClr val="2A1E12"/>
+                </a:solidFill>
+                <a:latin typeface="Calibri" pitchFamily="34" charset="0"/>
+                <a:ea typeface="Calibri" pitchFamily="34" charset="-122"/>
+                <a:cs typeface="Calibri" pitchFamily="34" charset="-120"/>
+              </a:rPr>
+              <a:t>Сколько дней длилась неделя в Египте?</a:t>
+            </a:r>
+            <a:endParaRPr lang="en-US" sz="1250" dirty="0"/>
+          </a:p>
+        </p:txBody>
+      </p:sp>
+      <p:sp>
+        <p:nvSpPr>
+          <p:cNvPr id="19" name="ANS_3"/>
+          <p:cNvSpPr txBox="1"/>
+          <p:nvPr/>
+        </p:nvSpPr>
+        <p:spPr>
+          <a:xfrm>
+            <a:off x="3931920" y="3493008"/>
+            <a:ext cx="1066190" cy="274320"/>
+          </a:xfrm>
+          <a:prstGeom prst="roundRect">
+            <a:avLst>
+              <a:gd name="adj" fmla="val 50000"/>
+            </a:avLst>
+          </a:prstGeom>
+          <a:solidFill>
+            <a:srgbClr val="F6E6B8"/>
+          </a:solidFill>
+          <a:ln w="12700">
+            <a:solidFill>
+              <a:srgbClr val="D4A537"/>
+            </a:solidFill>
+          </a:ln>
+        </p:spPr>
+        <p:txBody>
+          <a:bodyPr wrap="square" lIns="0" tIns="0" rIns="0" bIns="0" rtlCol="0" anchor="ctr"/>
+          <a:lstStyle/>
+          <a:p>
+            <a:pPr algn="ctr" indent="0" marL="0">
+              <a:buNone/>
+            </a:pPr>
+            <a:r>
+              <a:rPr lang="en-US" sz="1150" b="1" dirty="0">
+                <a:solidFill>
+                  <a:srgbClr val="A8432A"/>
+                </a:solidFill>
+                <a:latin typeface="Calibri" pitchFamily="34" charset="0"/>
+                <a:ea typeface="Calibri" pitchFamily="34" charset="-122"/>
+                <a:cs typeface="Calibri" pitchFamily="34" charset="-120"/>
+              </a:rPr>
+              <a:t>10 дней</a:t>
+            </a:r>
+            <a:endParaRPr lang="en-US" sz="1150" dirty="0"/>
+          </a:p>
+        </p:txBody>
+      </p:sp>
+      <p:sp>
+        <p:nvSpPr>
+          <p:cNvPr id="20" name="Shape 17"/>
+          <p:cNvSpPr/>
+          <p:nvPr/>
+        </p:nvSpPr>
+        <p:spPr>
+          <a:xfrm>
+            <a:off x="3337560" y="3904488"/>
+            <a:ext cx="5349240" cy="731520"/>
+          </a:xfrm>
+          <a:prstGeom prst="roundRect">
+            <a:avLst>
+              <a:gd name="adj" fmla="val 12500"/>
+            </a:avLst>
+          </a:prstGeom>
+          <a:solidFill>
+            <a:srgbClr val="FFFCF6"/>
+          </a:solidFill>
+          <a:ln w="12700">
+            <a:solidFill>
+              <a:srgbClr val="FFFCF6"/>
+            </a:solidFill>
+            <a:prstDash val="solid"/>
+          </a:ln>
+          <a:effectLst>
+            <a:outerShdw sx="100000" sy="100000" kx="0" ky="0" algn="bl" rotWithShape="0" blurRad="101600" dist="25400" dir="5400000">
+              <a:srgbClr val="4A3418">
+                <a:alpha val="16000"/>
+              </a:srgbClr>
+            </a:outerShdw>
+          </a:effectLst>
+        </p:spPr>
+      </p:sp>
+      <p:sp>
+        <p:nvSpPr>
+          <p:cNvPr id="21" name="Text 18"/>
+          <p:cNvSpPr txBox="1"/>
+          <p:nvPr/>
+        </p:nvSpPr>
+        <p:spPr>
+          <a:xfrm>
+            <a:off x="3474720" y="3995928"/>
+            <a:ext cx="329184" cy="329184"/>
+          </a:xfrm>
+          <a:prstGeom prst="ellipse">
+            <a:avLst/>
+          </a:prstGeom>
+          <a:solidFill>
+            <a:srgbClr val="A8432A"/>
+          </a:solidFill>
+          <a:ln>
+            <a:solidFill>
+              <a:srgbClr val="A8432A"/>
+            </a:solidFill>
+          </a:ln>
+        </p:spPr>
+        <p:txBody>
+          <a:bodyPr wrap="square" lIns="0" tIns="0" rIns="0" bIns="0" rtlCol="0" anchor="ctr"/>
+          <a:lstStyle/>
+          <a:p>
+            <a:pPr algn="ctr" indent="0" marL="0">
+              <a:buNone/>
+            </a:pPr>
+            <a:r>
+              <a:rPr lang="en-US" sz="1300" b="1" dirty="0">
+                <a:solidFill>
+                  <a:srgbClr val="FFFFFF"/>
+                </a:solidFill>
+                <a:latin typeface="Calibri" pitchFamily="34" charset="0"/>
+                <a:ea typeface="Calibri" pitchFamily="34" charset="-122"/>
+                <a:cs typeface="Calibri" pitchFamily="34" charset="-120"/>
+              </a:rPr>
+              <a:t>8</a:t>
+            </a:r>
+            <a:endParaRPr lang="en-US" sz="1300" dirty="0"/>
+          </a:p>
+        </p:txBody>
+      </p:sp>
+      <p:sp>
+        <p:nvSpPr>
+          <p:cNvPr id="22" name="Text 19"/>
+          <p:cNvSpPr txBox="1"/>
+          <p:nvPr/>
+        </p:nvSpPr>
+        <p:spPr>
+          <a:xfrm>
+            <a:off x="3931920" y="3959352"/>
+            <a:ext cx="4617720" cy="329184"/>
+          </a:xfrm>
+          <a:prstGeom prst="rect">
+            <a:avLst/>
+          </a:prstGeom>
+          <a:noFill/>
+          <a:ln/>
+        </p:spPr>
+        <p:txBody>
+          <a:bodyPr wrap="square" lIns="0" tIns="0" rIns="0" bIns="0" rtlCol="0" anchor="ctr"/>
+          <a:lstStyle/>
+          <a:p>
+            <a:pPr indent="0" marL="0">
+              <a:buNone/>
+            </a:pPr>
+            <a:r>
+              <a:rPr lang="en-US" sz="1250" b="1" dirty="0">
+                <a:solidFill>
+                  <a:srgbClr val="2A1E12"/>
+                </a:solidFill>
+                <a:latin typeface="Calibri" pitchFamily="34" charset="0"/>
+                <a:ea typeface="Calibri" pitchFamily="34" charset="-122"/>
+                <a:cs typeface="Calibri" pitchFamily="34" charset="-120"/>
+              </a:rPr>
+              <a:t>Что сделал Бёрн-Джонс, узнав, из чего краска «мумия»?</a:t>
+            </a:r>
+            <a:endParaRPr lang="en-US" sz="1250" dirty="0"/>
+          </a:p>
+        </p:txBody>
+      </p:sp>
+      <p:sp>
+        <p:nvSpPr>
+          <p:cNvPr id="23" name="ANS_4"/>
+          <p:cNvSpPr txBox="1"/>
+          <p:nvPr/>
+        </p:nvSpPr>
+        <p:spPr>
+          <a:xfrm>
+            <a:off x="3931920" y="4306824"/>
+            <a:ext cx="3319272" cy="274320"/>
+          </a:xfrm>
+          <a:prstGeom prst="roundRect">
+            <a:avLst>
+              <a:gd name="adj" fmla="val 50000"/>
+            </a:avLst>
+          </a:prstGeom>
+          <a:solidFill>
+            <a:srgbClr val="F6E6B8"/>
+          </a:solidFill>
+          <a:ln w="12700">
+            <a:solidFill>
+              <a:srgbClr val="D4A537"/>
+            </a:solidFill>
+          </a:ln>
+        </p:spPr>
+        <p:txBody>
+          <a:bodyPr wrap="square" lIns="0" tIns="0" rIns="0" bIns="0" rtlCol="0" anchor="ctr"/>
+          <a:lstStyle/>
+          <a:p>
+            <a:pPr algn="ctr" indent="0" marL="0">
+              <a:buNone/>
+            </a:pPr>
+            <a:r>
+              <a:rPr lang="en-US" sz="1150" b="1" dirty="0">
+                <a:solidFill>
+                  <a:srgbClr val="A8432A"/>
+                </a:solidFill>
+                <a:latin typeface="Calibri" pitchFamily="34" charset="0"/>
+                <a:ea typeface="Calibri" pitchFamily="34" charset="-122"/>
+                <a:cs typeface="Calibri" pitchFamily="34" charset="-120"/>
+              </a:rPr>
+              <a:t>Закопал свой тюбик с краской в саду</a:t>
+            </a:r>
+            <a:endParaRPr lang="en-US" sz="1150" dirty="0"/>
+          </a:p>
+        </p:txBody>
+      </p:sp>
+      <p:sp>
+        <p:nvSpPr>
+          <p:cNvPr id="24" name="Text 21"/>
+          <p:cNvSpPr txBox="1"/>
+          <p:nvPr/>
+        </p:nvSpPr>
+        <p:spPr>
+          <a:xfrm>
+            <a:off x="320040" y="4846320"/>
+            <a:ext cx="3657600" cy="201168"/>
+          </a:xfrm>
+          <a:prstGeom prst="rect">
+            <a:avLst/>
+          </a:prstGeom>
+          <a:noFill/>
+          <a:ln/>
+        </p:spPr>
+        <p:txBody>
+          <a:bodyPr wrap="square" lIns="0" tIns="0" rIns="0" bIns="0" rtlCol="0" anchor="b"/>
+          <a:lstStyle/>
+          <a:p>
+            <a:pPr indent="0" marL="0">
+              <a:buNone/>
+            </a:pPr>
+            <a:r>
+              <a:rPr lang="en-US" sz="900" i="1" spc="100" kern="0" dirty="0">
+                <a:solidFill>
+                  <a:srgbClr val="8A7356"/>
+                </a:solidFill>
+                <a:latin typeface="Calibri" pitchFamily="34" charset="0"/>
+                <a:ea typeface="Calibri" pitchFamily="34" charset="-122"/>
+                <a:cs typeface="Calibri" pitchFamily="34" charset="-120"/>
+              </a:rPr>
+              <a:t>Made by Heinrich Studio</a:t>
+            </a:r>
+            <a:endParaRPr lang="en-US" sz="900" dirty="0"/>
+          </a:p>
+        </p:txBody>
+      </p:sp>
+    </p:spTree>
+  </p:cSld>
+  <p:clrMapOvr>
+    <a:masterClrMapping/>
+  </p:clrMapOvr>
+  <p:timing>
+    <p:tnLst>
+      <p:par>
+        <p:cTn id="1" dur="indefinite" restart="never" nodeType="tmRoot">
+          <p:childTnLst>
+            <p:seq concurrent="1" nextAc="seek">
+              <p:cTn id="2" dur="indefinite" nodeType="mainSeq">
+                <p:childTnLst>
+                  <p:par>
+                    <p:cTn id="6" fill="hold">
+                      <p:stCondLst>
+                        <p:cond delay="indefinite"/>
+                      </p:stCondLst>
+                      <p:childTnLst>
+                        <p:par>
+                          <p:cTn id="7" fill="hold">
+                            <p:stCondLst>
+                              <p:cond delay="0"/>
+                            </p:stCondLst>
+                            <p:childTnLst>
+                              <p:par>
+                                <p:cTn id="3" presetID="10" presetClass="entr" presetSubtype="0" fill="hold" grpId="0" nodeType="clickEffect">
+                                  <p:stCondLst>
+                                    <p:cond delay="0"/>
+                                  </p:stCondLst>
+                                  <p:childTnLst>
+                                    <p:set>
+                                      <p:cBhvr>
+                                        <p:cTn id="4" dur="1" fill="hold">
+                                          <p:stCondLst>
+                                            <p:cond delay="0"/>
+                                          </p:stCondLst>
+                                        </p:cTn>
+                                        <p:tgtEl>
+                                          <p:spTgt spid="11"/>
+                                        </p:tgtEl>
+                                        <p:attrNameLst>
+                                          <p:attrName>style.visibility</p:attrName>
+                                        </p:attrNameLst>
+                                      </p:cBhvr>
+                                      <p:to>
+                                        <p:strVal val="visible"/>
+                                      </p:to>
+                                    </p:set>
+                                    <p:animEffect transition="in" filter="fade">
+                                      <p:cBhvr>
+                                        <p:cTn id="5" dur="500"/>
+                                        <p:tgtEl>
+                                          <p:spTgt spid="11"/>
+                                        </p:tgtEl>
+                                      </p:cBhvr>
+                                    </p:animEffect>
+                                  </p:childTnLst>
+                                </p:cTn>
+                              </p:par>
+                            </p:childTnLst>
+                          </p:cTn>
+                        </p:par>
+                      </p:childTnLst>
+                    </p:cTn>
+                  </p:par>
+                  <p:par>
+                    <p:cTn id="11" fill="hold">
+                      <p:stCondLst>
+                        <p:cond delay="indefinite"/>
+                      </p:stCondLst>
+                      <p:childTnLst>
+                        <p:par>
+                          <p:cTn id="12" fill="hold">
+                            <p:stCondLst>
+                              <p:cond delay="0"/>
+                            </p:stCondLst>
+                            <p:childTnLst>
+                              <p:par>
+                                <p:cTn id="8" presetID="10" presetClass="entr" presetSubtype="0" fill="hold" grpId="0" nodeType="clickEffect">
+                                  <p:stCondLst>
+                                    <p:cond delay="0"/>
+                                  </p:stCondLst>
+                                  <p:childTnLst>
+                                    <p:set>
+                                      <p:cBhvr>
+                                        <p:cTn id="9" dur="1" fill="hold">
+                                          <p:stCondLst>
+                                            <p:cond delay="0"/>
+                                          </p:stCondLst>
+                                        </p:cTn>
+                                        <p:tgtEl>
+                                          <p:spTgt spid="15"/>
+                                        </p:tgtEl>
+                                        <p:attrNameLst>
+                                          <p:attrName>style.visibility</p:attrName>
+                                        </p:attrNameLst>
+                                      </p:cBhvr>
+                                      <p:to>
+                                        <p:strVal val="visible"/>
+                                      </p:to>
+                                    </p:set>
+                                    <p:animEffect transition="in" filter="fade">
+                                      <p:cBhvr>
+                                        <p:cTn id="10" dur="500"/>
+                                        <p:tgtEl>
+                                          <p:spTgt spid="15"/>
+                                        </p:tgtEl>
+                                      </p:cBhvr>
+                                    </p:animEffect>
+                                  </p:childTnLst>
+                                </p:cTn>
+                              </p:par>
+                            </p:childTnLst>
+                          </p:cTn>
+                        </p:par>
+                      </p:childTnLst>
+                    </p:cTn>
+                  </p:par>
+                  <p:par>
+                    <p:cTn id="16" fill="hold">
+                      <p:stCondLst>
+                        <p:cond delay="indefinite"/>
+                      </p:stCondLst>
+                      <p:childTnLst>
+                        <p:par>
+                          <p:cTn id="17" fill="hold">
+                            <p:stCondLst>
+                              <p:cond delay="0"/>
+                            </p:stCondLst>
+                            <p:childTnLst>
+                              <p:par>
+                                <p:cTn id="13" presetID="10" presetClass="entr" presetSubtype="0" fill="hold" grpId="0" nodeType="clickEffect">
+                                  <p:stCondLst>
+                                    <p:cond delay="0"/>
+                                  </p:stCondLst>
+                                  <p:childTnLst>
+                                    <p:set>
+                                      <p:cBhvr>
+                                        <p:cTn id="14" dur="1" fill="hold">
+                                          <p:stCondLst>
+                                            <p:cond delay="0"/>
+                                          </p:stCondLst>
+                                        </p:cTn>
+                                        <p:tgtEl>
+                                          <p:spTgt spid="19"/>
+                                        </p:tgtEl>
+                                        <p:attrNameLst>
+                                          <p:attrName>style.visibility</p:attrName>
+                                        </p:attrNameLst>
+                                      </p:cBhvr>
+                                      <p:to>
+                                        <p:strVal val="visible"/>
+                                      </p:to>
+                                    </p:set>
+                                    <p:animEffect transition="in" filter="fade">
+                                      <p:cBhvr>
+                                        <p:cTn id="15" dur="500"/>
+                                        <p:tgtEl>
+                                          <p:spTgt spid="19"/>
+                                        </p:tgtEl>
+                                      </p:cBhvr>
+                                    </p:animEffect>
+                                  </p:childTnLst>
+                                </p:cTn>
+                              </p:par>
+                            </p:childTnLst>
+                          </p:cTn>
+                        </p:par>
+                      </p:childTnLst>
+                    </p:cTn>
+                  </p:par>
+                  <p:par>
+                    <p:cTn id="21" fill="hold">
+                      <p:stCondLst>
+                        <p:cond delay="indefinite"/>
+                      </p:stCondLst>
+                      <p:childTnLst>
+                        <p:par>
+                          <p:cTn id="22" fill="hold">
+                            <p:stCondLst>
+                              <p:cond delay="0"/>
+                            </p:stCondLst>
+                            <p:childTnLst>
+                              <p:par>
+                                <p:cTn id="18" presetID="10" presetClass="entr" presetSubtype="0" fill="hold" grpId="0" nodeType="clickEffect">
+                                  <p:stCondLst>
+                                    <p:cond delay="0"/>
+                                  </p:stCondLst>
+                                  <p:childTnLst>
+                                    <p:set>
+                                      <p:cBhvr>
+                                        <p:cTn id="19" dur="1" fill="hold">
+                                          <p:stCondLst>
+                                            <p:cond delay="0"/>
+                                          </p:stCondLst>
+                                        </p:cTn>
+                                        <p:tgtEl>
+                                          <p:spTgt spid="23"/>
+                                        </p:tgtEl>
+                                        <p:attrNameLst>
+                                          <p:attrName>style.visibility</p:attrName>
+                                        </p:attrNameLst>
+                                      </p:cBhvr>
+                                      <p:to>
+                                        <p:strVal val="visible"/>
+                                      </p:to>
+                                    </p:set>
+                                    <p:animEffect transition="in" filter="fade">
+                                      <p:cBhvr>
+                                        <p:cTn id="20" dur="500"/>
+                                        <p:tgtEl>
+                                          <p:spTgt spid="23"/>
+                                        </p:tgtEl>
+                                      </p:cBhvr>
+                                    </p:animEffect>
+                                  </p:childTnLst>
+                                </p:cTn>
+                              </p:par>
+                            </p:childTnLst>
+                          </p:cTn>
+                        </p:par>
+                      </p:childTnLst>
+                    </p:cTn>
+                  </p:par>
+                </p:childTnLst>
+              </p:cTn>
+              <p:prevCondLst>
+                <p:cond evt="onPrev" delay="0">
+                  <p:tgtEl>
+                    <p:sldTgt/>
+                  </p:tgtEl>
+                </p:cond>
+              </p:prevCondLst>
+              <p:nextCondLst>
+                <p:cond evt="onNext" delay="0">
+                  <p:tgtEl>
+                    <p:sldTgt/>
+                  </p:tgtEl>
+                </p:cond>
+              </p:nextCondLst>
+            </p:seq>
+          </p:childTnLst>
+        </p:cTn>
+      </p:par>
+    </p:tnLst>
+    <p:bldLst>
+      <p:bldP spid="11" grpId="0" animBg="1"/>
+      <p:bldP spid="15" grpId="0" animBg="1"/>
+      <p:bldP spid="19" grpId="0" animBg="1"/>
+      <p:bldP spid="23" grpId="0" animBg="1"/>
+    </p:bldLst>
+  </p:timing>
+</p:sld>
+</file>
+
+<file path=ppt/slides/slide12.xml><?xml version="1.0" encoding="utf-8"?>
+<p:sld xmlns:a="http://schemas.openxmlformats.org/drawingml/2006/main" xmlns:r="http://schemas.openxmlformats.org/officeDocument/2006/relationships" xmlns:p="http://schemas.openxmlformats.org/presentationml/2006/main">
+  <p:cSld name="Slide 12">
+    <p:bg>
+      <p:bgPr>
         <a:solidFill>
           <a:srgbClr val="0F1A2B"/>
         </a:solidFill>
@@ -7532,7 +10058,7 @@
         <p:spPr>
           <a:xfrm>
             <a:off x="3611880" y="457200"/>
-            <a:ext cx="2766974" cy="274320"/>
+            <a:ext cx="2254910" cy="274320"/>
           </a:xfrm>
           <a:prstGeom prst="roundRect">
             <a:avLst>
@@ -7558,7 +10084,7 @@
         </p:nvSpPr>
         <p:spPr>
           <a:xfrm>
-            <a:off x="6424574" y="457200"/>
+            <a:off x="5912510" y="457200"/>
             <a:ext cx="45720" cy="274320"/>
           </a:xfrm>
           <a:prstGeom prst="rect">
@@ -7584,7 +10110,7 @@
         <p:spPr>
           <a:xfrm>
             <a:off x="3611880" y="457200"/>
-            <a:ext cx="2766974" cy="274320"/>
+            <a:ext cx="2254910" cy="274320"/>
           </a:xfrm>
           <a:prstGeom prst="rect">
             <a:avLst/>
@@ -7608,7 +10134,7 @@
                 <a:ea typeface="Calibri" pitchFamily="34" charset="-122"/>
                 <a:cs typeface="Calibri" pitchFamily="34" charset="-120"/>
               </a:rPr>
-              <a:t>08 · УДИВИТЕЛЬНЫЕ ФАКТЫ</a:t>
+              <a:t>УДИВИТЕЛЬНЫЕ ФАКТЫ</a:t>
             </a:r>
             <a:endParaRPr lang="en-US" sz="1000" dirty="0"/>
           </a:p>

--- a/Древний_Египет.pptx
+++ b/Древний_Египет.pptx
@@ -512,11 +512,11 @@
           <a:lstStyle/>
           <a:p>
             <a:r>
-              <a:rPr lang="en-US" dirty="0"/>
+              <a:rPr lang="ru-RU" dirty="0"/>
               <a:t>Вступление. Древний Египет существовал около 3000 лет: примерно с 3100 г. до н. э. до 30 г. до н. э., когда страна стала римской провинцией.
 Фото: 2H Media, Unsplash.</a:t>
             </a:r>
-            <a:endParaRPr lang="en-US" dirty="0"/>
+            <a:endParaRPr lang="ru-RU" dirty="0"/>
           </a:p>
         </p:txBody>
       </p:sp>
@@ -539,7 +539,7 @@
               <a:rPr lang="en-US"/>
               <a:t>1</a:t>
             </a:fld>
-            <a:endParaRPr lang="en-US"/>
+            <a:endParaRPr lang="ru-RU"/>
           </a:p>
         </p:txBody>
       </p:sp>
@@ -601,12 +601,12 @@
           <a:lstStyle/>
           <a:p>
             <a:r>
-              <a:rPr lang="en-US" dirty="0"/>
+              <a:rPr lang="ru-RU" dirty="0"/>
               <a:t>Викторина. Задайте вопрос, дайте ответить, затем щёлкните мышью — появится правильный ответ. Каждый щелчок открывает ответ на следующий вопрос.
 Ответы: 1) Ахет — разлив, Перет — посев и всходы, Шему — урожай; 2) 146 метров (сейчас — около 138 м); 3) Более 700 знаков; 4) Перо богини правды Маат.
 Фото: Sandip Roy, Unsplash.</a:t>
             </a:r>
-            <a:endParaRPr lang="en-US" dirty="0"/>
+            <a:endParaRPr lang="ru-RU" dirty="0"/>
           </a:p>
         </p:txBody>
       </p:sp>
@@ -629,7 +629,7 @@
               <a:rPr lang="en-US"/>
               <a:t>10</a:t>
             </a:fld>
-            <a:endParaRPr lang="en-US"/>
+            <a:endParaRPr lang="ru-RU"/>
           </a:p>
         </p:txBody>
       </p:sp>
@@ -691,12 +691,12 @@
           <a:lstStyle/>
           <a:p>
             <a:r>
-              <a:rPr lang="en-US" dirty="0"/>
+              <a:rPr lang="ru-RU" dirty="0"/>
               <a:t>Викторина. Задайте вопрос, дайте ответить, затем щёлкните мышью — появится правильный ответ. Каждый щелчок открывает ответ на следующий вопрос.
 Ответы: 5) Около 19 лет; 6) Хлебом, пивом и мясом; 7) 10 дней; 8) Закопал свой тюбик с краской в саду.
 Фото: Fatih Beki, Unsplash.</a:t>
             </a:r>
-            <a:endParaRPr lang="en-US" dirty="0"/>
+            <a:endParaRPr lang="ru-RU" dirty="0"/>
           </a:p>
         </p:txBody>
       </p:sp>
@@ -719,7 +719,7 @@
               <a:rPr lang="en-US"/>
               <a:t>11</a:t>
             </a:fld>
-            <a:endParaRPr lang="en-US"/>
+            <a:endParaRPr lang="ru-RU"/>
           </a:p>
         </p:txBody>
       </p:sp>
@@ -781,11 +781,11 @@
           <a:lstStyle/>
           <a:p>
             <a:r>
-              <a:rPr lang="en-US" dirty="0"/>
+              <a:rPr lang="ru-RU" dirty="0"/>
               <a:t>Финал. На фото — храм Рамсеса II в Абу-Симбеле.
 Фото: Xiaoqian Shen, Unsplash.</a:t>
             </a:r>
-            <a:endParaRPr lang="en-US" dirty="0"/>
+            <a:endParaRPr lang="ru-RU" dirty="0"/>
           </a:p>
         </p:txBody>
       </p:sp>
@@ -808,7 +808,7 @@
               <a:rPr lang="en-US"/>
               <a:t>12</a:t>
             </a:fld>
-            <a:endParaRPr lang="en-US"/>
+            <a:endParaRPr lang="ru-RU"/>
           </a:p>
         </p:txBody>
       </p:sp>
@@ -870,11 +870,11 @@
           <a:lstStyle/>
           <a:p>
             <a:r>
-              <a:rPr lang="en-US" dirty="0"/>
+              <a:rPr lang="ru-RU" dirty="0"/>
               <a:t>Нил разливался каждое лето и оставлял на полях чёрный ил — отсюда название страны Кемет. По разливам египтяне создали календарь из 365 дней.
 Фото: Anthony Chen, Unsplash.</a:t>
             </a:r>
-            <a:endParaRPr lang="en-US" dirty="0"/>
+            <a:endParaRPr lang="ru-RU" dirty="0"/>
           </a:p>
         </p:txBody>
       </p:sp>
@@ -897,7 +897,7 @@
               <a:rPr lang="en-US"/>
               <a:t>2</a:t>
             </a:fld>
-            <a:endParaRPr lang="en-US"/>
+            <a:endParaRPr lang="ru-RU"/>
           </a:p>
         </p:txBody>
       </p:sp>
@@ -959,11 +959,11 @@
           <a:lstStyle/>
           <a:p>
             <a:r>
-              <a:rPr lang="en-US" dirty="0"/>
+              <a:rPr lang="ru-RU" dirty="0"/>
               <a:t>Пирамида Хеопса — самая большая из пирамид Гизы. Сейчас её высота около 138 м: верхушка и облицовка не сохранились. Самым высоким зданием мира она была почти 3800 лет, пока в 1311 году её не обогнал шпиль Линкольнского собора в Англии.
 Фото: Thomas K, Unsplash.</a:t>
             </a:r>
-            <a:endParaRPr lang="en-US" dirty="0"/>
+            <a:endParaRPr lang="ru-RU" dirty="0"/>
           </a:p>
         </p:txBody>
       </p:sp>
@@ -986,7 +986,7 @@
               <a:rPr lang="en-US"/>
               <a:t>3</a:t>
             </a:fld>
-            <a:endParaRPr lang="en-US"/>
+            <a:endParaRPr lang="ru-RU"/>
           </a:p>
         </p:txBody>
       </p:sp>
@@ -1048,11 +1048,11 @@
           <a:lstStyle/>
           <a:p>
             <a:r>
-              <a:rPr lang="en-US" dirty="0"/>
+              <a:rPr lang="ru-RU" dirty="0"/>
               <a:t>Розеттский камень нашли французские солдаты в 1799 году. На нём один и тот же указ 196 г. до н. э. записан иероглифами, демотическим письмом и по-гречески. Сравнивая тексты, Жан-Франсуа Шампольон в 1822 году расшифровал иероглифы.
 Фото: Jason Leung, Unsplash.</a:t>
             </a:r>
-            <a:endParaRPr lang="en-US" dirty="0"/>
+            <a:endParaRPr lang="ru-RU" dirty="0"/>
           </a:p>
         </p:txBody>
       </p:sp>
@@ -1075,7 +1075,7 @@
               <a:rPr lang="en-US"/>
               <a:t>4</a:t>
             </a:fld>
-            <a:endParaRPr lang="en-US"/>
+            <a:endParaRPr lang="ru-RU"/>
           </a:p>
         </p:txBody>
       </p:sp>
@@ -1137,12 +1137,12 @@
           <a:lstStyle/>
           <a:p>
             <a:r>
-              <a:rPr lang="en-US" dirty="0"/>
+              <a:rPr lang="ru-RU" dirty="0"/>
               <a:t>Мумифицировали не только людей, но и животных: кошек, ибисов, крокодилов — миллионы мумий.
-Осирис — бог загробного мира и судья умерших. Маат — богиня правды и порядка, её символ — страусиное перо. Амат (Аммит) — чудовище из «Книги мёртвых»: если сердце оказывалось тяжелее пера, Амат съедала его, и душа исчезала навсегда.
+Осирис — бог загробного мира и судья умерших; сердце на весах взвешивал бог Анубис, а результат записывал бог мудрости Тот. Маат — богиня правды и порядка, её символ — страусиное перо. Амат (Аммит) — чудовище из «Книги мёртвых»: если сердце оказывалось тяжелее пера, Амат съедала его, и душа исчезала навсегда.
 Фото: The Cleveland Museum of Art, Unsplash.</a:t>
             </a:r>
-            <a:endParaRPr lang="en-US" dirty="0"/>
+            <a:endParaRPr lang="ru-RU" dirty="0"/>
           </a:p>
         </p:txBody>
       </p:sp>
@@ -1165,7 +1165,7 @@
               <a:rPr lang="en-US"/>
               <a:t>5</a:t>
             </a:fld>
-            <a:endParaRPr lang="en-US"/>
+            <a:endParaRPr lang="ru-RU"/>
           </a:p>
         </p:txBody>
       </p:sp>
@@ -1227,11 +1227,11 @@
           <a:lstStyle/>
           <a:p>
             <a:r>
-              <a:rPr lang="en-US" dirty="0"/>
+              <a:rPr lang="ru-RU" dirty="0"/>
               <a:t>Тутанхамон правил около 1332–1323 гг. до н. э. Он вернул почитание старых богов, которых отменил его отец Эхнатон. Гробницу в Долине царей нашёл археолог Говард Картер в ноябре 1922 года: её вход скрывали обломки, оставшиеся после строительства соседней гробницы Рамсеса VI. Почти все остальные царские гробницы разграбили ещё в древности. Внутренний гроб фараона сделан из золота и весит около 110 кг.
 Фото: Suzi Kim, Unsplash.</a:t>
             </a:r>
-            <a:endParaRPr lang="en-US" dirty="0"/>
+            <a:endParaRPr lang="ru-RU" dirty="0"/>
           </a:p>
         </p:txBody>
       </p:sp>
@@ -1254,7 +1254,7 @@
               <a:rPr lang="en-US"/>
               <a:t>6</a:t>
             </a:fld>
-            <a:endParaRPr lang="en-US"/>
+            <a:endParaRPr lang="ru-RU"/>
           </a:p>
         </p:txBody>
       </p:sp>
@@ -1316,11 +1316,11 @@
           <a:lstStyle/>
           <a:p>
             <a:r>
-              <a:rPr lang="en-US" dirty="0"/>
+              <a:rPr lang="ru-RU" dirty="0"/>
               <a:t>Посёлок строителей пирамид раскопали археологи Марк Лернер и Захи Хавасс, кладбище рабочих нашли в 1990 году. «Дневник Мерера» обнаружил Пьер Талле в 2013 году в Вади-эль-Джарф на берегу Красного моря.
 Фото: Sayed Khalid, Unsplash.</a:t>
             </a:r>
-            <a:endParaRPr lang="en-US" dirty="0"/>
+            <a:endParaRPr lang="ru-RU" dirty="0"/>
           </a:p>
         </p:txBody>
       </p:sp>
@@ -1343,7 +1343,7 @@
               <a:rPr lang="en-US"/>
               <a:t>7</a:t>
             </a:fld>
-            <a:endParaRPr lang="en-US"/>
+            <a:endParaRPr lang="ru-RU"/>
           </a:p>
         </p:txBody>
       </p:sp>
@@ -1405,11 +1405,11 @@
           <a:lstStyle/>
           <a:p>
             <a:r>
-              <a:rPr lang="en-US" dirty="0"/>
+              <a:rPr lang="ru-RU" dirty="0"/>
               <a:t>Забастовка случилась на 29-м году правления фараона Рамсеса III; её описал писец Аменнахт в «Туринском папирусе о забастовке». Журнал прогулов — черепок-остракон из Британского музея времён Рамсеса II. На фото — гробница в Долине царей: именно такие гробницы строили рабочие Дейр-эль-Медины.
 Фото: Dmitrii Zhodzishskii, Unsplash.</a:t>
             </a:r>
-            <a:endParaRPr lang="en-US" dirty="0"/>
+            <a:endParaRPr lang="ru-RU" dirty="0"/>
           </a:p>
         </p:txBody>
       </p:sp>
@@ -1432,7 +1432,7 @@
               <a:rPr lang="en-US"/>
               <a:t>8</a:t>
             </a:fld>
-            <a:endParaRPr lang="en-US"/>
+            <a:endParaRPr lang="ru-RU"/>
           </a:p>
         </p:txBody>
       </p:sp>
@@ -1494,12 +1494,12 @@
           <a:lstStyle/>
           <a:p>
             <a:r>
-              <a:rPr lang="en-US" dirty="0"/>
+              <a:rPr lang="ru-RU" dirty="0"/>
               <a:t>Нос Сфинкса. Египетский историк аль-Макризи (XV век) писал, что в 1378 году лицо статуи изуродовал суфий Мухаммад Саим ад-Дахр: его возмущало, что крестьяне приносят Сфинксу дары, чтобы получить хороший урожай. Египтолог Марк Лернер нашёл на лице следы стержней и зубил, которыми нос отбивали намеренно.
 Краска «мумия» (Mummy brown). Её ценили за тёплый прозрачный коричневый оттенок. Художник Эдвард Бёрн-Джонс, узнав её происхождение, похоронил тюбик в саду — это видел его племянник, писатель Редьярд Киплинг. Лондонская фирма C. Roberson прекратила выпуск в 1960-х, когда у неё закончились мумии. Сейчас под этим названием продают синтетический пигмент.
 Фото: Dmitrii Zhodzishskii, Unsplash.</a:t>
             </a:r>
-            <a:endParaRPr lang="en-US" dirty="0"/>
+            <a:endParaRPr lang="ru-RU" dirty="0"/>
           </a:p>
         </p:txBody>
       </p:sp>
@@ -1522,7 +1522,7 @@
               <a:rPr lang="en-US"/>
               <a:t>9</a:t>
             </a:fld>
-            <a:endParaRPr lang="en-US"/>
+            <a:endParaRPr lang="ru-RU"/>
           </a:p>
         </p:txBody>
       </p:sp>
@@ -2021,7 +2021,7 @@
               <a:buNone/>
             </a:pPr>
             <a:r>
-              <a:rPr lang="en-US" sz="1000" b="1" spc="300" kern="0" dirty="0">
+              <a:rPr lang="ru-RU" sz="1000" b="1" spc="300" kern="0" dirty="0">
                 <a:solidFill>
                   <a:srgbClr val="E3BE5C"/>
                 </a:solidFill>
@@ -2031,7 +2031,7 @@
               </a:rPr>
               <a:t>ПУТЕШЕСТВИЕ В ПРОШЛОЕ</a:t>
             </a:r>
-            <a:endParaRPr lang="en-US" sz="1000" dirty="0"/>
+            <a:endParaRPr lang="ru-RU" sz="1000" dirty="0"/>
           </a:p>
         </p:txBody>
       </p:sp>
@@ -2067,7 +2067,7 @@
               <a:buNone/>
             </a:pPr>
             <a:r>
-              <a:rPr lang="en-US" sz="4800" b="1" dirty="0">
+              <a:rPr lang="ru-RU" sz="4800" b="1" dirty="0">
                 <a:solidFill>
                   <a:srgbClr val="FFFFFF"/>
                 </a:solidFill>
@@ -2077,7 +2077,7 @@
               </a:rPr>
               <a:t>Древний Египет</a:t>
             </a:r>
-            <a:endParaRPr lang="en-US" sz="4800" dirty="0"/>
+            <a:endParaRPr lang="ru-RU" sz="4800" dirty="0"/>
           </a:p>
         </p:txBody>
       </p:sp>
@@ -2113,7 +2113,7 @@
               <a:buNone/>
             </a:pPr>
             <a:r>
-              <a:rPr lang="en-US" sz="1800" dirty="0">
+              <a:rPr lang="ru-RU" sz="1800" dirty="0">
                 <a:solidFill>
                   <a:srgbClr val="EADFC6"/>
                 </a:solidFill>
@@ -2123,7 +2123,7 @@
               </a:rPr>
               <a:t>Пирамиды, мумии, иероглифы и удивительные факты о стране фараонов</a:t>
             </a:r>
-            <a:endParaRPr lang="en-US" sz="1800" dirty="0"/>
+            <a:endParaRPr lang="ru-RU" sz="1800" dirty="0"/>
           </a:p>
         </p:txBody>
       </p:sp>
@@ -2152,7 +2152,7 @@
               <a:buNone/>
             </a:pPr>
             <a:r>
-              <a:rPr lang="en-US" sz="1200" b="1" spc="100" kern="0" dirty="0">
+              <a:rPr lang="ru-RU" sz="1200" b="1" spc="100" kern="0" dirty="0">
                 <a:solidFill>
                   <a:srgbClr val="E3BE5C"/>
                 </a:solidFill>
@@ -2162,7 +2162,7 @@
               </a:rPr>
               <a:t>около 3000 лет истории  ·  30 династий фараонов</a:t>
             </a:r>
-            <a:endParaRPr lang="en-US" sz="1200" dirty="0"/>
+            <a:endParaRPr lang="ru-RU" sz="1200" dirty="0"/>
           </a:p>
         </p:txBody>
       </p:sp>
@@ -2208,7 +2208,7 @@
               </a:rPr>
               <a:t>Made by Heinrich Studio</a:t>
             </a:r>
-            <a:endParaRPr lang="en-US" sz="900" dirty="0"/>
+            <a:endParaRPr lang="ru-RU" sz="900" dirty="0"/>
           </a:p>
         </p:txBody>
       </p:sp>
@@ -2225,16 +2225,9 @@
   <p:cSld name="Slide 10">
     <p:bg>
       <p:bgPr>
-        <a:blipFill dpi="0" rotWithShape="1">
-          <a:blip r:embed="rId1">
-            <a:lum/>
-          </a:blip>
-          <a:srcRect/>
-          <a:stretch>
-            <a:fillRect/>
-          </a:stretch>
-        </a:blipFill>
-        <a:effectLst/>
+        <a:solidFill>
+          <a:srgbClr val="F5ECDA"/>
+        </a:solidFill>
       </p:bgPr>
     </p:bg>
     <p:spTree>
@@ -2292,7 +2285,7 @@
           <p:nvPr/>
         </p:nvPicPr>
         <p:blipFill>
-          <a:blip r:embed="rId2"/>
+          <a:blip r:embed="rId1"/>
           <a:stretch>
             <a:fillRect/>
           </a:stretch>
@@ -2384,7 +2377,7 @@
               <a:buNone/>
             </a:pPr>
             <a:r>
-              <a:rPr lang="en-US" sz="1000" b="1" spc="300" kern="0" dirty="0">
+              <a:rPr lang="ru-RU" sz="1000" b="1" spc="300" kern="0" dirty="0">
                 <a:solidFill>
                   <a:srgbClr val="A8432A"/>
                 </a:solidFill>
@@ -2394,7 +2387,7 @@
               </a:rPr>
               <a:t>ВИКТОРИНА · ЧАСТЬ 1</a:t>
             </a:r>
-            <a:endParaRPr lang="en-US" sz="1000" dirty="0"/>
+            <a:endParaRPr lang="ru-RU" sz="1000" dirty="0"/>
           </a:p>
         </p:txBody>
       </p:sp>
@@ -2423,7 +2416,7 @@
               <a:buNone/>
             </a:pPr>
             <a:r>
-              <a:rPr lang="en-US" sz="2800" b="1" dirty="0">
+              <a:rPr lang="ru-RU" sz="2800" b="1" dirty="0">
                 <a:solidFill>
                   <a:srgbClr val="2A1E12"/>
                 </a:solidFill>
@@ -2433,7 +2426,7 @@
               </a:rPr>
               <a:t>Проверь себя!</a:t>
             </a:r>
-            <a:endParaRPr lang="en-US" sz="2800" dirty="0"/>
+            <a:endParaRPr lang="ru-RU" sz="2800" dirty="0"/>
           </a:p>
         </p:txBody>
       </p:sp>
@@ -2502,7 +2495,7 @@
               <a:buNone/>
             </a:pPr>
             <a:r>
-              <a:rPr lang="en-US" sz="1300" b="1" dirty="0">
+              <a:rPr lang="ru-RU" sz="1300" b="1" dirty="0">
                 <a:solidFill>
                   <a:srgbClr val="FFFFFF"/>
                 </a:solidFill>
@@ -2512,7 +2505,7 @@
               </a:rPr>
               <a:t>1</a:t>
             </a:r>
-            <a:endParaRPr lang="en-US" sz="1300" dirty="0"/>
+            <a:endParaRPr lang="ru-RU" sz="1300" dirty="0"/>
           </a:p>
         </p:txBody>
       </p:sp>
@@ -2541,7 +2534,7 @@
               <a:buNone/>
             </a:pPr>
             <a:r>
-              <a:rPr lang="en-US" sz="1250" b="1" dirty="0">
+              <a:rPr lang="ru-RU" sz="1250" b="1" dirty="0">
                 <a:solidFill>
                   <a:srgbClr val="2A1E12"/>
                 </a:solidFill>
@@ -2551,7 +2544,7 @@
               </a:rPr>
               <a:t>Как назывались три времени года и что в них происходило?</a:t>
             </a:r>
-            <a:endParaRPr lang="en-US" sz="1250" dirty="0"/>
+            <a:endParaRPr lang="ru-RU" sz="1250" dirty="0"/>
           </a:p>
         </p:txBody>
       </p:sp>
@@ -2588,7 +2581,7 @@
               <a:buNone/>
             </a:pPr>
             <a:r>
-              <a:rPr lang="en-US" sz="1150" b="1" dirty="0">
+              <a:rPr lang="ru-RU" sz="1150" b="1" dirty="0">
                 <a:solidFill>
                   <a:srgbClr val="A8432A"/>
                 </a:solidFill>
@@ -2598,7 +2591,7 @@
               </a:rPr>
               <a:t>Ахет — разлив, Перет — посев и всходы, Шему — урожай</a:t>
             </a:r>
-            <a:endParaRPr lang="en-US" sz="1150" dirty="0"/>
+            <a:endParaRPr lang="ru-RU" sz="1150" dirty="0"/>
           </a:p>
         </p:txBody>
       </p:sp>
@@ -2667,7 +2660,7 @@
               <a:buNone/>
             </a:pPr>
             <a:r>
-              <a:rPr lang="en-US" sz="1300" b="1" dirty="0">
+              <a:rPr lang="ru-RU" sz="1300" b="1" dirty="0">
                 <a:solidFill>
                   <a:srgbClr val="FFFFFF"/>
                 </a:solidFill>
@@ -2677,7 +2670,7 @@
               </a:rPr>
               <a:t>2</a:t>
             </a:r>
-            <a:endParaRPr lang="en-US" sz="1300" dirty="0"/>
+            <a:endParaRPr lang="ru-RU" sz="1300" dirty="0"/>
           </a:p>
         </p:txBody>
       </p:sp>
@@ -2706,7 +2699,7 @@
               <a:buNone/>
             </a:pPr>
             <a:r>
-              <a:rPr lang="en-US" sz="1250" b="1" dirty="0">
+              <a:rPr lang="ru-RU" sz="1250" b="1" dirty="0">
                 <a:solidFill>
                   <a:srgbClr val="2A1E12"/>
                 </a:solidFill>
@@ -2716,7 +2709,7 @@
               </a:rPr>
               <a:t>Какой высоты была пирамида Хеопса?</a:t>
             </a:r>
-            <a:endParaRPr lang="en-US" sz="1250" dirty="0"/>
+            <a:endParaRPr lang="ru-RU" sz="1250" dirty="0"/>
           </a:p>
         </p:txBody>
       </p:sp>
@@ -2753,7 +2746,7 @@
               <a:buNone/>
             </a:pPr>
             <a:r>
-              <a:rPr lang="en-US" sz="1150" b="1" dirty="0">
+              <a:rPr lang="ru-RU" sz="1150" b="1" dirty="0">
                 <a:solidFill>
                   <a:srgbClr val="A8432A"/>
                 </a:solidFill>
@@ -2763,7 +2756,7 @@
               </a:rPr>
               <a:t>146 метров (сейчас — около 138 м)</a:t>
             </a:r>
-            <a:endParaRPr lang="en-US" sz="1150" dirty="0"/>
+            <a:endParaRPr lang="ru-RU" sz="1150" dirty="0"/>
           </a:p>
         </p:txBody>
       </p:sp>
@@ -2832,7 +2825,7 @@
               <a:buNone/>
             </a:pPr>
             <a:r>
-              <a:rPr lang="en-US" sz="1300" b="1" dirty="0">
+              <a:rPr lang="ru-RU" sz="1300" b="1" dirty="0">
                 <a:solidFill>
                   <a:srgbClr val="FFFFFF"/>
                 </a:solidFill>
@@ -2842,7 +2835,7 @@
               </a:rPr>
               <a:t>3</a:t>
             </a:r>
-            <a:endParaRPr lang="en-US" sz="1300" dirty="0"/>
+            <a:endParaRPr lang="ru-RU" sz="1300" dirty="0"/>
           </a:p>
         </p:txBody>
       </p:sp>
@@ -2871,7 +2864,7 @@
               <a:buNone/>
             </a:pPr>
             <a:r>
-              <a:rPr lang="en-US" sz="1250" b="1" dirty="0">
+              <a:rPr lang="ru-RU" sz="1250" b="1" dirty="0">
                 <a:solidFill>
                   <a:srgbClr val="2A1E12"/>
                 </a:solidFill>
@@ -2881,7 +2874,7 @@
               </a:rPr>
               <a:t>Сколько всего было иероглифов?</a:t>
             </a:r>
-            <a:endParaRPr lang="en-US" sz="1250" dirty="0"/>
+            <a:endParaRPr lang="ru-RU" sz="1250" dirty="0"/>
           </a:p>
         </p:txBody>
       </p:sp>
@@ -2918,7 +2911,7 @@
               <a:buNone/>
             </a:pPr>
             <a:r>
-              <a:rPr lang="en-US" sz="1150" b="1" dirty="0">
+              <a:rPr lang="ru-RU" sz="1150" b="1" dirty="0">
                 <a:solidFill>
                   <a:srgbClr val="A8432A"/>
                 </a:solidFill>
@@ -2928,7 +2921,7 @@
               </a:rPr>
               <a:t>Более 700 знаков</a:t>
             </a:r>
-            <a:endParaRPr lang="en-US" sz="1150" dirty="0"/>
+            <a:endParaRPr lang="ru-RU" sz="1150" dirty="0"/>
           </a:p>
         </p:txBody>
       </p:sp>
@@ -2997,7 +2990,7 @@
               <a:buNone/>
             </a:pPr>
             <a:r>
-              <a:rPr lang="en-US" sz="1300" b="1" dirty="0">
+              <a:rPr lang="ru-RU" sz="1300" b="1" dirty="0">
                 <a:solidFill>
                   <a:srgbClr val="FFFFFF"/>
                 </a:solidFill>
@@ -3007,7 +3000,7 @@
               </a:rPr>
               <a:t>4</a:t>
             </a:r>
-            <a:endParaRPr lang="en-US" sz="1300" dirty="0"/>
+            <a:endParaRPr lang="ru-RU" sz="1300" dirty="0"/>
           </a:p>
         </p:txBody>
       </p:sp>
@@ -3036,7 +3029,7 @@
               <a:buNone/>
             </a:pPr>
             <a:r>
-              <a:rPr lang="en-US" sz="1250" b="1" dirty="0">
+              <a:rPr lang="ru-RU" sz="1250" b="1" dirty="0">
                 <a:solidFill>
                   <a:srgbClr val="2A1E12"/>
                 </a:solidFill>
@@ -3046,7 +3039,7 @@
               </a:rPr>
               <a:t>Перо какой богини лежало на весах вместе с сердцем?</a:t>
             </a:r>
-            <a:endParaRPr lang="en-US" sz="1250" dirty="0"/>
+            <a:endParaRPr lang="ru-RU" sz="1250" dirty="0"/>
           </a:p>
         </p:txBody>
       </p:sp>
@@ -3083,7 +3076,7 @@
               <a:buNone/>
             </a:pPr>
             <a:r>
-              <a:rPr lang="en-US" sz="1150" b="1" dirty="0">
+              <a:rPr lang="ru-RU" sz="1150" b="1" dirty="0">
                 <a:solidFill>
                   <a:srgbClr val="A8432A"/>
                 </a:solidFill>
@@ -3093,7 +3086,7 @@
               </a:rPr>
               <a:t>Перо богини правды Маат</a:t>
             </a:r>
-            <a:endParaRPr lang="en-US" sz="1150" dirty="0"/>
+            <a:endParaRPr lang="ru-RU" sz="1150" dirty="0"/>
           </a:p>
         </p:txBody>
       </p:sp>
@@ -3132,7 +3125,7 @@
               </a:rPr>
               <a:t>Made by Heinrich Studio</a:t>
             </a:r>
-            <a:endParaRPr lang="en-US" sz="900" dirty="0"/>
+            <a:endParaRPr lang="ru-RU" sz="900" dirty="0"/>
           </a:p>
         </p:txBody>
       </p:sp>
@@ -3397,16 +3390,9 @@
   <p:cSld name="Slide 11">
     <p:bg>
       <p:bgPr>
-        <a:blipFill dpi="0" rotWithShape="1">
-          <a:blip r:embed="rId1">
-            <a:lum/>
-          </a:blip>
-          <a:srcRect/>
-          <a:stretch>
-            <a:fillRect/>
-          </a:stretch>
-        </a:blipFill>
-        <a:effectLst/>
+        <a:solidFill>
+          <a:srgbClr val="F5ECDA"/>
+        </a:solidFill>
       </p:bgPr>
     </p:bg>
     <p:spTree>
@@ -3464,7 +3450,7 @@
           <p:nvPr/>
         </p:nvPicPr>
         <p:blipFill>
-          <a:blip r:embed="rId2"/>
+          <a:blip r:embed="rId1"/>
           <a:stretch>
             <a:fillRect/>
           </a:stretch>
@@ -3556,7 +3542,7 @@
               <a:buNone/>
             </a:pPr>
             <a:r>
-              <a:rPr lang="en-US" sz="1000" b="1" spc="300" kern="0" dirty="0">
+              <a:rPr lang="ru-RU" sz="1000" b="1" spc="300" kern="0" dirty="0">
                 <a:solidFill>
                   <a:srgbClr val="A8432A"/>
                 </a:solidFill>
@@ -3566,58 +3552,19 @@
               </a:rPr>
               <a:t>ВИКТОРИНА · ЧАСТЬ 2</a:t>
             </a:r>
-            <a:endParaRPr lang="en-US" sz="1000" dirty="0"/>
-          </a:p>
-        </p:txBody>
-      </p:sp>
-      <p:sp>
-        <p:nvSpPr>
-          <p:cNvPr id="7" name="Text 4"/>
-          <p:cNvSpPr txBox="1"/>
-          <p:nvPr/>
-        </p:nvSpPr>
-        <p:spPr>
-          <a:xfrm>
-            <a:off x="3337560" y="804672"/>
-            <a:ext cx="5349240" cy="594360"/>
-          </a:xfrm>
-          <a:prstGeom prst="rect">
-            <a:avLst/>
-          </a:prstGeom>
-          <a:noFill/>
-          <a:ln/>
-        </p:spPr>
-        <p:txBody>
-          <a:bodyPr wrap="square" lIns="0" tIns="0" rIns="0" bIns="0" rtlCol="0" anchor="ctr"/>
-          <a:lstStyle/>
-          <a:p>
-            <a:pPr indent="0" marL="0">
-              <a:buNone/>
-            </a:pPr>
-            <a:r>
-              <a:rPr lang="en-US" sz="2800" b="1" dirty="0">
-                <a:solidFill>
-                  <a:srgbClr val="2A1E12"/>
-                </a:solidFill>
-                <a:latin typeface="Cambria" pitchFamily="34" charset="0"/>
-                <a:ea typeface="Cambria" pitchFamily="34" charset="-122"/>
-                <a:cs typeface="Cambria" pitchFamily="34" charset="-120"/>
-              </a:rPr>
-              <a:t>Проверь себя!</a:t>
-            </a:r>
-            <a:endParaRPr lang="en-US" sz="2800" dirty="0"/>
-          </a:p>
-        </p:txBody>
-      </p:sp>
-      <p:sp>
-        <p:nvSpPr>
-          <p:cNvPr id="8" name="Shape 5"/>
+            <a:endParaRPr lang="ru-RU" sz="1000" dirty="0"/>
+          </a:p>
+        </p:txBody>
+      </p:sp>
+      <p:sp>
+        <p:nvSpPr>
+          <p:cNvPr id="7" name="Shape 4"/>
           <p:cNvSpPr/>
           <p:nvPr/>
         </p:nvSpPr>
         <p:spPr>
           <a:xfrm>
-            <a:off x="3337560" y="1463040"/>
+            <a:off x="3337560" y="960120"/>
             <a:ext cx="5349240" cy="731520"/>
           </a:xfrm>
           <a:prstGeom prst="roundRect">
@@ -3645,13 +3592,13 @@
       </p:sp>
       <p:sp>
         <p:nvSpPr>
-          <p:cNvPr id="9" name="Text 6"/>
-          <p:cNvSpPr txBox="1"/>
-          <p:nvPr/>
-        </p:nvSpPr>
-        <p:spPr>
-          <a:xfrm>
-            <a:off x="3474720" y="1554480"/>
+          <p:cNvPr id="8" name="Text 5"/>
+          <p:cNvSpPr txBox="1"/>
+          <p:nvPr/>
+        </p:nvSpPr>
+        <p:spPr>
+          <a:xfrm>
+            <a:off x="3474720" y="1051560"/>
             <a:ext cx="329184" cy="329184"/>
           </a:xfrm>
           <a:prstGeom prst="ellipse">
@@ -3674,7 +3621,7 @@
               <a:buNone/>
             </a:pPr>
             <a:r>
-              <a:rPr lang="en-US" sz="1300" b="1" dirty="0">
+              <a:rPr lang="ru-RU" sz="1300" b="1" dirty="0">
                 <a:solidFill>
                   <a:srgbClr val="FFFFFF"/>
                 </a:solidFill>
@@ -3684,19 +3631,19 @@
               </a:rPr>
               <a:t>5</a:t>
             </a:r>
-            <a:endParaRPr lang="en-US" sz="1300" dirty="0"/>
-          </a:p>
-        </p:txBody>
-      </p:sp>
-      <p:sp>
-        <p:nvSpPr>
-          <p:cNvPr id="10" name="Text 7"/>
-          <p:cNvSpPr txBox="1"/>
-          <p:nvPr/>
-        </p:nvSpPr>
-        <p:spPr>
-          <a:xfrm>
-            <a:off x="3931920" y="1517904"/>
+            <a:endParaRPr lang="ru-RU" sz="1300" dirty="0"/>
+          </a:p>
+        </p:txBody>
+      </p:sp>
+      <p:sp>
+        <p:nvSpPr>
+          <p:cNvPr id="9" name="Text 6"/>
+          <p:cNvSpPr txBox="1"/>
+          <p:nvPr/>
+        </p:nvSpPr>
+        <p:spPr>
+          <a:xfrm>
+            <a:off x="3931920" y="1014984"/>
             <a:ext cx="4617720" cy="329184"/>
           </a:xfrm>
           <a:prstGeom prst="rect">
@@ -3713,7 +3660,7 @@
               <a:buNone/>
             </a:pPr>
             <a:r>
-              <a:rPr lang="en-US" sz="1250" b="1" dirty="0">
+              <a:rPr lang="ru-RU" sz="1250" b="1" dirty="0">
                 <a:solidFill>
                   <a:srgbClr val="2A1E12"/>
                 </a:solidFill>
@@ -3723,19 +3670,19 @@
               </a:rPr>
               <a:t>Сколько лет было Тутанхамону, когда он умер?</a:t>
             </a:r>
-            <a:endParaRPr lang="en-US" sz="1250" dirty="0"/>
-          </a:p>
-        </p:txBody>
-      </p:sp>
-      <p:sp>
-        <p:nvSpPr>
-          <p:cNvPr id="11" name="ANS_1"/>
-          <p:cNvSpPr txBox="1"/>
-          <p:nvPr/>
-        </p:nvSpPr>
-        <p:spPr>
-          <a:xfrm>
-            <a:off x="3931920" y="1865376"/>
+            <a:endParaRPr lang="ru-RU" sz="1250" dirty="0"/>
+          </a:p>
+        </p:txBody>
+      </p:sp>
+      <p:sp>
+        <p:nvSpPr>
+          <p:cNvPr id="10" name="ANS_1"/>
+          <p:cNvSpPr txBox="1"/>
+          <p:nvPr/>
+        </p:nvSpPr>
+        <p:spPr>
+          <a:xfrm>
+            <a:off x="3931920" y="1362456"/>
             <a:ext cx="1468526" cy="274320"/>
           </a:xfrm>
           <a:prstGeom prst="roundRect">
@@ -3760,7 +3707,7 @@
               <a:buNone/>
             </a:pPr>
             <a:r>
-              <a:rPr lang="en-US" sz="1150" b="1" dirty="0">
+              <a:rPr lang="ru-RU" sz="1150" b="1" dirty="0">
                 <a:solidFill>
                   <a:srgbClr val="A8432A"/>
                 </a:solidFill>
@@ -3770,19 +3717,19 @@
               </a:rPr>
               <a:t>Около 19 лет</a:t>
             </a:r>
-            <a:endParaRPr lang="en-US" sz="1150" dirty="0"/>
-          </a:p>
-        </p:txBody>
-      </p:sp>
-      <p:sp>
-        <p:nvSpPr>
-          <p:cNvPr id="12" name="Shape 9"/>
+            <a:endParaRPr lang="ru-RU" sz="1150" dirty="0"/>
+          </a:p>
+        </p:txBody>
+      </p:sp>
+      <p:sp>
+        <p:nvSpPr>
+          <p:cNvPr id="11" name="Shape 8"/>
           <p:cNvSpPr/>
           <p:nvPr/>
         </p:nvSpPr>
         <p:spPr>
           <a:xfrm>
-            <a:off x="3337560" y="2276856"/>
+            <a:off x="3337560" y="1901952"/>
             <a:ext cx="5349240" cy="731520"/>
           </a:xfrm>
           <a:prstGeom prst="roundRect">
@@ -3810,13 +3757,13 @@
       </p:sp>
       <p:sp>
         <p:nvSpPr>
-          <p:cNvPr id="13" name="Text 10"/>
-          <p:cNvSpPr txBox="1"/>
-          <p:nvPr/>
-        </p:nvSpPr>
-        <p:spPr>
-          <a:xfrm>
-            <a:off x="3474720" y="2368296"/>
+          <p:cNvPr id="12" name="Text 9"/>
+          <p:cNvSpPr txBox="1"/>
+          <p:nvPr/>
+        </p:nvSpPr>
+        <p:spPr>
+          <a:xfrm>
+            <a:off x="3474720" y="1993392"/>
             <a:ext cx="329184" cy="329184"/>
           </a:xfrm>
           <a:prstGeom prst="ellipse">
@@ -3839,7 +3786,7 @@
               <a:buNone/>
             </a:pPr>
             <a:r>
-              <a:rPr lang="en-US" sz="1300" b="1" dirty="0">
+              <a:rPr lang="ru-RU" sz="1300" b="1" dirty="0">
                 <a:solidFill>
                   <a:srgbClr val="FFFFFF"/>
                 </a:solidFill>
@@ -3849,19 +3796,19 @@
               </a:rPr>
               <a:t>6</a:t>
             </a:r>
-            <a:endParaRPr lang="en-US" sz="1300" dirty="0"/>
-          </a:p>
-        </p:txBody>
-      </p:sp>
-      <p:sp>
-        <p:nvSpPr>
-          <p:cNvPr id="14" name="Text 11"/>
-          <p:cNvSpPr txBox="1"/>
-          <p:nvPr/>
-        </p:nvSpPr>
-        <p:spPr>
-          <a:xfrm>
-            <a:off x="3931920" y="2331720"/>
+            <a:endParaRPr lang="ru-RU" sz="1300" dirty="0"/>
+          </a:p>
+        </p:txBody>
+      </p:sp>
+      <p:sp>
+        <p:nvSpPr>
+          <p:cNvPr id="13" name="Text 10"/>
+          <p:cNvSpPr txBox="1"/>
+          <p:nvPr/>
+        </p:nvSpPr>
+        <p:spPr>
+          <a:xfrm>
+            <a:off x="3931920" y="1956816"/>
             <a:ext cx="4617720" cy="329184"/>
           </a:xfrm>
           <a:prstGeom prst="rect">
@@ -3878,7 +3825,7 @@
               <a:buNone/>
             </a:pPr>
             <a:r>
-              <a:rPr lang="en-US" sz="1250" b="1" dirty="0">
+              <a:rPr lang="ru-RU" sz="1250" b="1" dirty="0">
                 <a:solidFill>
                   <a:srgbClr val="2A1E12"/>
                 </a:solidFill>
@@ -3888,19 +3835,19 @@
               </a:rPr>
               <a:t>Чем кормили строителей пирамид?</a:t>
             </a:r>
-            <a:endParaRPr lang="en-US" sz="1250" dirty="0"/>
-          </a:p>
-        </p:txBody>
-      </p:sp>
-      <p:sp>
-        <p:nvSpPr>
-          <p:cNvPr id="15" name="ANS_2"/>
-          <p:cNvSpPr txBox="1"/>
-          <p:nvPr/>
-        </p:nvSpPr>
-        <p:spPr>
-          <a:xfrm>
-            <a:off x="3931920" y="2679192"/>
+            <a:endParaRPr lang="ru-RU" sz="1250" dirty="0"/>
+          </a:p>
+        </p:txBody>
+      </p:sp>
+      <p:sp>
+        <p:nvSpPr>
+          <p:cNvPr id="14" name="ANS_2"/>
+          <p:cNvSpPr txBox="1"/>
+          <p:nvPr/>
+        </p:nvSpPr>
+        <p:spPr>
+          <a:xfrm>
+            <a:off x="3931920" y="2304288"/>
             <a:ext cx="2192731" cy="274320"/>
           </a:xfrm>
           <a:prstGeom prst="roundRect">
@@ -3925,7 +3872,7 @@
               <a:buNone/>
             </a:pPr>
             <a:r>
-              <a:rPr lang="en-US" sz="1150" b="1" dirty="0">
+              <a:rPr lang="ru-RU" sz="1150" b="1" dirty="0">
                 <a:solidFill>
                   <a:srgbClr val="A8432A"/>
                 </a:solidFill>
@@ -3935,19 +3882,19 @@
               </a:rPr>
               <a:t>Хлебом, пивом и мясом</a:t>
             </a:r>
-            <a:endParaRPr lang="en-US" sz="1150" dirty="0"/>
-          </a:p>
-        </p:txBody>
-      </p:sp>
-      <p:sp>
-        <p:nvSpPr>
-          <p:cNvPr id="16" name="Shape 13"/>
+            <a:endParaRPr lang="ru-RU" sz="1150" dirty="0"/>
+          </a:p>
+        </p:txBody>
+      </p:sp>
+      <p:sp>
+        <p:nvSpPr>
+          <p:cNvPr id="15" name="Shape 12"/>
           <p:cNvSpPr/>
           <p:nvPr/>
         </p:nvSpPr>
         <p:spPr>
           <a:xfrm>
-            <a:off x="3337560" y="3090672"/>
+            <a:off x="3337560" y="2843784"/>
             <a:ext cx="5349240" cy="731520"/>
           </a:xfrm>
           <a:prstGeom prst="roundRect">
@@ -3975,13 +3922,13 @@
       </p:sp>
       <p:sp>
         <p:nvSpPr>
-          <p:cNvPr id="17" name="Text 14"/>
-          <p:cNvSpPr txBox="1"/>
-          <p:nvPr/>
-        </p:nvSpPr>
-        <p:spPr>
-          <a:xfrm>
-            <a:off x="3474720" y="3182112"/>
+          <p:cNvPr id="16" name="Text 13"/>
+          <p:cNvSpPr txBox="1"/>
+          <p:nvPr/>
+        </p:nvSpPr>
+        <p:spPr>
+          <a:xfrm>
+            <a:off x="3474720" y="2935224"/>
             <a:ext cx="329184" cy="329184"/>
           </a:xfrm>
           <a:prstGeom prst="ellipse">
@@ -4004,7 +3951,7 @@
               <a:buNone/>
             </a:pPr>
             <a:r>
-              <a:rPr lang="en-US" sz="1300" b="1" dirty="0">
+              <a:rPr lang="ru-RU" sz="1300" b="1" dirty="0">
                 <a:solidFill>
                   <a:srgbClr val="FFFFFF"/>
                 </a:solidFill>
@@ -4014,19 +3961,19 @@
               </a:rPr>
               <a:t>7</a:t>
             </a:r>
-            <a:endParaRPr lang="en-US" sz="1300" dirty="0"/>
-          </a:p>
-        </p:txBody>
-      </p:sp>
-      <p:sp>
-        <p:nvSpPr>
-          <p:cNvPr id="18" name="Text 15"/>
-          <p:cNvSpPr txBox="1"/>
-          <p:nvPr/>
-        </p:nvSpPr>
-        <p:spPr>
-          <a:xfrm>
-            <a:off x="3931920" y="3145536"/>
+            <a:endParaRPr lang="ru-RU" sz="1300" dirty="0"/>
+          </a:p>
+        </p:txBody>
+      </p:sp>
+      <p:sp>
+        <p:nvSpPr>
+          <p:cNvPr id="17" name="Text 14"/>
+          <p:cNvSpPr txBox="1"/>
+          <p:nvPr/>
+        </p:nvSpPr>
+        <p:spPr>
+          <a:xfrm>
+            <a:off x="3931920" y="2898648"/>
             <a:ext cx="4617720" cy="329184"/>
           </a:xfrm>
           <a:prstGeom prst="rect">
@@ -4043,7 +3990,7 @@
               <a:buNone/>
             </a:pPr>
             <a:r>
-              <a:rPr lang="en-US" sz="1250" b="1" dirty="0">
+              <a:rPr lang="ru-RU" sz="1250" b="1" dirty="0">
                 <a:solidFill>
                   <a:srgbClr val="2A1E12"/>
                 </a:solidFill>
@@ -4053,19 +4000,19 @@
               </a:rPr>
               <a:t>Сколько дней длилась неделя в Египте?</a:t>
             </a:r>
-            <a:endParaRPr lang="en-US" sz="1250" dirty="0"/>
-          </a:p>
-        </p:txBody>
-      </p:sp>
-      <p:sp>
-        <p:nvSpPr>
-          <p:cNvPr id="19" name="ANS_3"/>
-          <p:cNvSpPr txBox="1"/>
-          <p:nvPr/>
-        </p:nvSpPr>
-        <p:spPr>
-          <a:xfrm>
-            <a:off x="3931920" y="3493008"/>
+            <a:endParaRPr lang="ru-RU" sz="1250" dirty="0"/>
+          </a:p>
+        </p:txBody>
+      </p:sp>
+      <p:sp>
+        <p:nvSpPr>
+          <p:cNvPr id="18" name="ANS_3"/>
+          <p:cNvSpPr txBox="1"/>
+          <p:nvPr/>
+        </p:nvSpPr>
+        <p:spPr>
+          <a:xfrm>
+            <a:off x="3931920" y="3246120"/>
             <a:ext cx="1066190" cy="274320"/>
           </a:xfrm>
           <a:prstGeom prst="roundRect">
@@ -4090,7 +4037,7 @@
               <a:buNone/>
             </a:pPr>
             <a:r>
-              <a:rPr lang="en-US" sz="1150" b="1" dirty="0">
+              <a:rPr lang="ru-RU" sz="1150" b="1" dirty="0">
                 <a:solidFill>
                   <a:srgbClr val="A8432A"/>
                 </a:solidFill>
@@ -4100,19 +4047,19 @@
               </a:rPr>
               <a:t>10 дней</a:t>
             </a:r>
-            <a:endParaRPr lang="en-US" sz="1150" dirty="0"/>
-          </a:p>
-        </p:txBody>
-      </p:sp>
-      <p:sp>
-        <p:nvSpPr>
-          <p:cNvPr id="20" name="Shape 17"/>
+            <a:endParaRPr lang="ru-RU" sz="1150" dirty="0"/>
+          </a:p>
+        </p:txBody>
+      </p:sp>
+      <p:sp>
+        <p:nvSpPr>
+          <p:cNvPr id="19" name="Shape 16"/>
           <p:cNvSpPr/>
           <p:nvPr/>
         </p:nvSpPr>
         <p:spPr>
           <a:xfrm>
-            <a:off x="3337560" y="3904488"/>
+            <a:off x="3337560" y="3785616"/>
             <a:ext cx="5349240" cy="731520"/>
           </a:xfrm>
           <a:prstGeom prst="roundRect">
@@ -4140,13 +4087,13 @@
       </p:sp>
       <p:sp>
         <p:nvSpPr>
-          <p:cNvPr id="21" name="Text 18"/>
-          <p:cNvSpPr txBox="1"/>
-          <p:nvPr/>
-        </p:nvSpPr>
-        <p:spPr>
-          <a:xfrm>
-            <a:off x="3474720" y="3995928"/>
+          <p:cNvPr id="20" name="Text 17"/>
+          <p:cNvSpPr txBox="1"/>
+          <p:nvPr/>
+        </p:nvSpPr>
+        <p:spPr>
+          <a:xfrm>
+            <a:off x="3474720" y="3877056"/>
             <a:ext cx="329184" cy="329184"/>
           </a:xfrm>
           <a:prstGeom prst="ellipse">
@@ -4169,7 +4116,7 @@
               <a:buNone/>
             </a:pPr>
             <a:r>
-              <a:rPr lang="en-US" sz="1300" b="1" dirty="0">
+              <a:rPr lang="ru-RU" sz="1300" b="1" dirty="0">
                 <a:solidFill>
                   <a:srgbClr val="FFFFFF"/>
                 </a:solidFill>
@@ -4179,19 +4126,19 @@
               </a:rPr>
               <a:t>8</a:t>
             </a:r>
-            <a:endParaRPr lang="en-US" sz="1300" dirty="0"/>
-          </a:p>
-        </p:txBody>
-      </p:sp>
-      <p:sp>
-        <p:nvSpPr>
-          <p:cNvPr id="22" name="Text 19"/>
-          <p:cNvSpPr txBox="1"/>
-          <p:nvPr/>
-        </p:nvSpPr>
-        <p:spPr>
-          <a:xfrm>
-            <a:off x="3931920" y="3959352"/>
+            <a:endParaRPr lang="ru-RU" sz="1300" dirty="0"/>
+          </a:p>
+        </p:txBody>
+      </p:sp>
+      <p:sp>
+        <p:nvSpPr>
+          <p:cNvPr id="21" name="Text 18"/>
+          <p:cNvSpPr txBox="1"/>
+          <p:nvPr/>
+        </p:nvSpPr>
+        <p:spPr>
+          <a:xfrm>
+            <a:off x="3931920" y="3840480"/>
             <a:ext cx="4617720" cy="329184"/>
           </a:xfrm>
           <a:prstGeom prst="rect">
@@ -4208,7 +4155,7 @@
               <a:buNone/>
             </a:pPr>
             <a:r>
-              <a:rPr lang="en-US" sz="1250" b="1" dirty="0">
+              <a:rPr lang="ru-RU" sz="1250" b="1" dirty="0">
                 <a:solidFill>
                   <a:srgbClr val="2A1E12"/>
                 </a:solidFill>
@@ -4216,21 +4163,21 @@
                 <a:ea typeface="Calibri" pitchFamily="34" charset="-122"/>
                 <a:cs typeface="Calibri" pitchFamily="34" charset="-120"/>
               </a:rPr>
-              <a:t>Что сделал Бёрн-Джонс, узнав, из чего краска «мумия»?</a:t>
-            </a:r>
-            <a:endParaRPr lang="en-US" sz="1250" dirty="0"/>
-          </a:p>
-        </p:txBody>
-      </p:sp>
-      <p:sp>
-        <p:nvSpPr>
-          <p:cNvPr id="23" name="ANS_4"/>
-          <p:cNvSpPr txBox="1"/>
-          <p:nvPr/>
-        </p:nvSpPr>
-        <p:spPr>
-          <a:xfrm>
-            <a:off x="3931920" y="4306824"/>
+              <a:t>Что сделал Бёрн-Джонс, узнав состав краски «мумия»?</a:t>
+            </a:r>
+            <a:endParaRPr lang="ru-RU" sz="1250" dirty="0"/>
+          </a:p>
+        </p:txBody>
+      </p:sp>
+      <p:sp>
+        <p:nvSpPr>
+          <p:cNvPr id="22" name="ANS_4"/>
+          <p:cNvSpPr txBox="1"/>
+          <p:nvPr/>
+        </p:nvSpPr>
+        <p:spPr>
+          <a:xfrm>
+            <a:off x="3931920" y="4187952"/>
             <a:ext cx="3319272" cy="274320"/>
           </a:xfrm>
           <a:prstGeom prst="roundRect">
@@ -4255,7 +4202,7 @@
               <a:buNone/>
             </a:pPr>
             <a:r>
-              <a:rPr lang="en-US" sz="1150" b="1" dirty="0">
+              <a:rPr lang="ru-RU" sz="1150" b="1" dirty="0">
                 <a:solidFill>
                   <a:srgbClr val="A8432A"/>
                 </a:solidFill>
@@ -4265,13 +4212,13 @@
               </a:rPr>
               <a:t>Закопал свой тюбик с краской в саду</a:t>
             </a:r>
-            <a:endParaRPr lang="en-US" sz="1150" dirty="0"/>
-          </a:p>
-        </p:txBody>
-      </p:sp>
-      <p:sp>
-        <p:nvSpPr>
-          <p:cNvPr id="24" name="Text 21"/>
+            <a:endParaRPr lang="ru-RU" sz="1150" dirty="0"/>
+          </a:p>
+        </p:txBody>
+      </p:sp>
+      <p:sp>
+        <p:nvSpPr>
+          <p:cNvPr id="23" name="Text 20"/>
           <p:cNvSpPr txBox="1"/>
           <p:nvPr/>
         </p:nvSpPr>
@@ -4304,7 +4251,7 @@
               </a:rPr>
               <a:t>Made by Heinrich Studio</a:t>
             </a:r>
-            <a:endParaRPr lang="en-US" sz="900" dirty="0"/>
+            <a:endParaRPr lang="ru-RU" sz="900" dirty="0"/>
           </a:p>
         </p:txBody>
       </p:sp>
@@ -4347,7 +4294,7 @@
                                           </p:stCondLst>
                                         </p:cTn>
                                         <p:tgtEl>
-                                          <p:spTgt spid="11"/>
+                                          <p:spTgt spid="10"/>
                                         </p:tgtEl>
                                         <p:attrNameLst>
                                           <p:attrName>style.visibility</p:attrName>
@@ -4361,7 +4308,7 @@
                                       <p:cBhvr>
                                         <p:cTn id="5" dur="500"/>
                                         <p:tgtEl>
-                                          <p:spTgt spid="11"/>
+                                          <p:spTgt spid="10"/>
                                         </p:tgtEl>
                                       </p:cBhvr>
                                     </p:animEffect>
@@ -4400,7 +4347,7 @@
                                           </p:stCondLst>
                                         </p:cTn>
                                         <p:tgtEl>
-                                          <p:spTgt spid="15"/>
+                                          <p:spTgt spid="14"/>
                                         </p:tgtEl>
                                         <p:attrNameLst>
                                           <p:attrName>style.visibility</p:attrName>
@@ -4414,7 +4361,7 @@
                                       <p:cBhvr>
                                         <p:cTn id="10" dur="500"/>
                                         <p:tgtEl>
-                                          <p:spTgt spid="15"/>
+                                          <p:spTgt spid="14"/>
                                         </p:tgtEl>
                                       </p:cBhvr>
                                     </p:animEffect>
@@ -4453,7 +4400,7 @@
                                           </p:stCondLst>
                                         </p:cTn>
                                         <p:tgtEl>
-                                          <p:spTgt spid="19"/>
+                                          <p:spTgt spid="18"/>
                                         </p:tgtEl>
                                         <p:attrNameLst>
                                           <p:attrName>style.visibility</p:attrName>
@@ -4467,7 +4414,7 @@
                                       <p:cBhvr>
                                         <p:cTn id="15" dur="500"/>
                                         <p:tgtEl>
-                                          <p:spTgt spid="19"/>
+                                          <p:spTgt spid="18"/>
                                         </p:tgtEl>
                                       </p:cBhvr>
                                     </p:animEffect>
@@ -4506,7 +4453,7 @@
                                           </p:stCondLst>
                                         </p:cTn>
                                         <p:tgtEl>
-                                          <p:spTgt spid="23"/>
+                                          <p:spTgt spid="22"/>
                                         </p:tgtEl>
                                         <p:attrNameLst>
                                           <p:attrName>style.visibility</p:attrName>
@@ -4520,7 +4467,7 @@
                                       <p:cBhvr>
                                         <p:cTn id="20" dur="500"/>
                                         <p:tgtEl>
-                                          <p:spTgt spid="23"/>
+                                          <p:spTgt spid="22"/>
                                         </p:tgtEl>
                                       </p:cBhvr>
                                     </p:animEffect>
@@ -4555,10 +4502,10 @@
       </p:par>
     </p:tnLst>
     <p:bldLst>
-      <p:bldP spid="11" grpId="0" animBg="1"/>
-      <p:bldP spid="15" grpId="0" animBg="1"/>
-      <p:bldP spid="19" grpId="0" animBg="1"/>
-      <p:bldP spid="23" grpId="0" animBg="1"/>
+      <p:bldP spid="10" grpId="0" animBg="1"/>
+      <p:bldP spid="14" grpId="0" animBg="1"/>
+      <p:bldP spid="18" grpId="0" animBg="1"/>
+      <p:bldP spid="22" grpId="0" animBg="1"/>
     </p:bldLst>
   </p:timing>
 </p:sld>
@@ -4692,7 +4639,7 @@
               <a:buNone/>
             </a:pPr>
             <a:r>
-              <a:rPr lang="en-US" sz="4400" b="1" dirty="0">
+              <a:rPr lang="ru-RU" sz="4400" b="1" dirty="0">
                 <a:solidFill>
                   <a:srgbClr val="FFFFFF"/>
                 </a:solidFill>
@@ -4702,7 +4649,7 @@
               </a:rPr>
               <a:t>Спасибо за внимание!</a:t>
             </a:r>
-            <a:endParaRPr lang="en-US" sz="4400" dirty="0"/>
+            <a:endParaRPr lang="ru-RU" sz="4400" dirty="0"/>
           </a:p>
         </p:txBody>
       </p:sp>
@@ -4738,7 +4685,7 @@
               <a:buNone/>
             </a:pPr>
             <a:r>
-              <a:rPr lang="en-US" sz="1800" dirty="0">
+              <a:rPr lang="ru-RU" sz="1800" dirty="0">
                 <a:solidFill>
                   <a:srgbClr val="EADFC6"/>
                 </a:solidFill>
@@ -4748,7 +4695,7 @@
               </a:rPr>
               <a:t>Древний Египет хранит ещё тысячи тайн — ищите их сами!</a:t>
             </a:r>
-            <a:endParaRPr lang="en-US" sz="1800" dirty="0"/>
+            <a:endParaRPr lang="ru-RU" sz="1800" dirty="0"/>
           </a:p>
         </p:txBody>
       </p:sp>
@@ -4765,16 +4712,9 @@
   <p:cSld name="Slide 2">
     <p:bg>
       <p:bgPr>
-        <a:blipFill dpi="0" rotWithShape="1">
-          <a:blip r:embed="rId1">
-            <a:lum/>
-          </a:blip>
-          <a:srcRect/>
-          <a:stretch>
-            <a:fillRect/>
-          </a:stretch>
-        </a:blipFill>
-        <a:effectLst/>
+        <a:solidFill>
+          <a:srgbClr val="F5ECDA"/>
+        </a:solidFill>
       </p:bgPr>
     </p:bg>
     <p:spTree>
@@ -4832,7 +4772,7 @@
           <p:nvPr/>
         </p:nvPicPr>
         <p:blipFill>
-          <a:blip r:embed="rId2"/>
+          <a:blip r:embed="rId1"/>
           <a:stretch>
             <a:fillRect/>
           </a:stretch>
@@ -4924,7 +4864,7 @@
               <a:buNone/>
             </a:pPr>
             <a:r>
-              <a:rPr lang="en-US" sz="1000" b="1" spc="300" kern="0" dirty="0">
+              <a:rPr lang="ru-RU" sz="1000" b="1" spc="300" kern="0" dirty="0">
                 <a:solidFill>
                   <a:srgbClr val="A8432A"/>
                 </a:solidFill>
@@ -4934,7 +4874,7 @@
               </a:rPr>
               <a:t>01 · ДАР НИЛА</a:t>
             </a:r>
-            <a:endParaRPr lang="en-US" sz="1000" dirty="0"/>
+            <a:endParaRPr lang="ru-RU" sz="1000" dirty="0"/>
           </a:p>
         </p:txBody>
       </p:sp>
@@ -4963,7 +4903,7 @@
               <a:buNone/>
             </a:pPr>
             <a:r>
-              <a:rPr lang="en-US" sz="2700" b="1" dirty="0">
+              <a:rPr lang="ru-RU" sz="2700" b="1" dirty="0">
                 <a:solidFill>
                   <a:srgbClr val="2A1E12"/>
                 </a:solidFill>
@@ -4973,7 +4913,7 @@
               </a:rPr>
               <a:t>Египет — дар Нила</a:t>
             </a:r>
-            <a:endParaRPr lang="en-US" sz="2700" dirty="0"/>
+            <a:endParaRPr lang="ru-RU" sz="2700" dirty="0"/>
           </a:p>
         </p:txBody>
       </p:sp>
@@ -5002,7 +4942,7 @@
               <a:buNone/>
             </a:pPr>
             <a:r>
-              <a:rPr lang="en-US" sz="1300" dirty="0">
+              <a:rPr lang="ru-RU" sz="1300" dirty="0">
                 <a:solidFill>
                   <a:srgbClr val="2A1E12"/>
                 </a:solidFill>
@@ -5012,7 +4952,7 @@
               </a:rPr>
               <a:t>Так сказал древнегреческий историк Геродот. Вокруг — пустыня, и только вдоль реки тянется полоса плодородной земли.</a:t>
             </a:r>
-            <a:endParaRPr lang="en-US" sz="1300" dirty="0"/>
+            <a:endParaRPr lang="ru-RU" sz="1300" dirty="0"/>
           </a:p>
         </p:txBody>
       </p:sp>
@@ -5041,7 +4981,7 @@
               <a:buNone/>
             </a:pPr>
             <a:r>
-              <a:rPr lang="en-US" sz="1000" b="1" spc="200" kern="0" dirty="0">
+              <a:rPr lang="ru-RU" sz="1000" b="1" spc="200" kern="0" dirty="0">
                 <a:solidFill>
                   <a:srgbClr val="6E5B45"/>
                 </a:solidFill>
@@ -5051,7 +4991,7 @@
               </a:rPr>
               <a:t>ТРИ ВРЕМЕНИ ГОДА</a:t>
             </a:r>
-            <a:endParaRPr lang="en-US" sz="1000" dirty="0"/>
+            <a:endParaRPr lang="ru-RU" sz="1000" dirty="0"/>
           </a:p>
         </p:txBody>
       </p:sp>
@@ -5098,7 +5038,7 @@
           <p:nvPr/>
         </p:nvPicPr>
         <p:blipFill>
-          <a:blip r:embed="rId3"/>
+          <a:blip r:embed="rId2"/>
           <a:stretch>
             <a:fillRect/>
           </a:stretch>
@@ -5138,7 +5078,7 @@
               <a:buNone/>
             </a:pPr>
             <a:r>
-              <a:rPr lang="en-US" sz="1400" b="1" dirty="0">
+              <a:rPr lang="ru-RU" sz="1400" b="1" dirty="0">
                 <a:solidFill>
                   <a:srgbClr val="A8432A"/>
                 </a:solidFill>
@@ -5148,7 +5088,7 @@
               </a:rPr>
               <a:t>Ахет</a:t>
             </a:r>
-            <a:endParaRPr lang="en-US" sz="1400" dirty="0"/>
+            <a:endParaRPr lang="ru-RU" sz="1400" dirty="0"/>
           </a:p>
         </p:txBody>
       </p:sp>
@@ -5177,7 +5117,7 @@
               <a:buNone/>
             </a:pPr>
             <a:r>
-              <a:rPr lang="en-US" sz="1050" dirty="0">
+              <a:rPr lang="ru-RU" sz="1050" dirty="0">
                 <a:solidFill>
                   <a:srgbClr val="2A1E12"/>
                 </a:solidFill>
@@ -5185,9 +5125,9 @@
                 <a:ea typeface="Calibri" pitchFamily="34" charset="-122"/>
                 <a:cs typeface="Calibri" pitchFamily="34" charset="-120"/>
               </a:rPr>
-              <a:t>разлив: вода несёт плодородный ил</a:t>
-            </a:r>
-            <a:endParaRPr lang="en-US" sz="1050" dirty="0"/>
+              <a:t>разлив Нила, вода несёт ил</a:t>
+            </a:r>
+            <a:endParaRPr lang="ru-RU" sz="1050" dirty="0"/>
           </a:p>
         </p:txBody>
       </p:sp>
@@ -5234,7 +5174,7 @@
           <p:nvPr/>
         </p:nvPicPr>
         <p:blipFill>
-          <a:blip r:embed="rId4"/>
+          <a:blip r:embed="rId3"/>
           <a:stretch>
             <a:fillRect/>
           </a:stretch>
@@ -5274,7 +5214,7 @@
               <a:buNone/>
             </a:pPr>
             <a:r>
-              <a:rPr lang="en-US" sz="1400" b="1" dirty="0">
+              <a:rPr lang="ru-RU" sz="1400" b="1" dirty="0">
                 <a:solidFill>
                   <a:srgbClr val="A8432A"/>
                 </a:solidFill>
@@ -5284,7 +5224,7 @@
               </a:rPr>
               <a:t>Перет</a:t>
             </a:r>
-            <a:endParaRPr lang="en-US" sz="1400" dirty="0"/>
+            <a:endParaRPr lang="ru-RU" sz="1400" dirty="0"/>
           </a:p>
         </p:txBody>
       </p:sp>
@@ -5313,7 +5253,7 @@
               <a:buNone/>
             </a:pPr>
             <a:r>
-              <a:rPr lang="en-US" sz="1050" dirty="0">
+              <a:rPr lang="ru-RU" sz="1050" dirty="0">
                 <a:solidFill>
                   <a:srgbClr val="2A1E12"/>
                 </a:solidFill>
@@ -5323,7 +5263,7 @@
               </a:rPr>
               <a:t>посев и всходы</a:t>
             </a:r>
-            <a:endParaRPr lang="en-US" sz="1050" dirty="0"/>
+            <a:endParaRPr lang="ru-RU" sz="1050" dirty="0"/>
           </a:p>
         </p:txBody>
       </p:sp>
@@ -5370,7 +5310,7 @@
           <p:nvPr/>
         </p:nvPicPr>
         <p:blipFill>
-          <a:blip r:embed="rId5"/>
+          <a:blip r:embed="rId4"/>
           <a:stretch>
             <a:fillRect/>
           </a:stretch>
@@ -5410,7 +5350,7 @@
               <a:buNone/>
             </a:pPr>
             <a:r>
-              <a:rPr lang="en-US" sz="1400" b="1" dirty="0">
+              <a:rPr lang="ru-RU" sz="1400" b="1" dirty="0">
                 <a:solidFill>
                   <a:srgbClr val="A8432A"/>
                 </a:solidFill>
@@ -5420,7 +5360,7 @@
               </a:rPr>
               <a:t>Шему</a:t>
             </a:r>
-            <a:endParaRPr lang="en-US" sz="1400" dirty="0"/>
+            <a:endParaRPr lang="ru-RU" sz="1400" dirty="0"/>
           </a:p>
         </p:txBody>
       </p:sp>
@@ -5449,7 +5389,7 @@
               <a:buNone/>
             </a:pPr>
             <a:r>
-              <a:rPr lang="en-US" sz="1050" dirty="0">
+              <a:rPr lang="ru-RU" sz="1050" dirty="0">
                 <a:solidFill>
                   <a:srgbClr val="2A1E12"/>
                 </a:solidFill>
@@ -5459,7 +5399,7 @@
               </a:rPr>
               <a:t>сбор урожая</a:t>
             </a:r>
-            <a:endParaRPr lang="en-US" sz="1050" dirty="0"/>
+            <a:endParaRPr lang="ru-RU" sz="1050" dirty="0"/>
           </a:p>
         </p:txBody>
       </p:sp>
@@ -5497,7 +5437,7 @@
           <p:nvPr/>
         </p:nvPicPr>
         <p:blipFill>
-          <a:blip r:embed="rId6"/>
+          <a:blip r:embed="rId5"/>
           <a:stretch>
             <a:fillRect/>
           </a:stretch>
@@ -5537,7 +5477,7 @@
               <a:buNone/>
             </a:pPr>
             <a:r>
-              <a:rPr lang="en-US" sz="1200" dirty="0">
+              <a:rPr lang="ru-RU" sz="1200" dirty="0">
                 <a:solidFill>
                   <a:srgbClr val="2A1E12"/>
                 </a:solidFill>
@@ -5545,9 +5485,9 @@
                 <a:ea typeface="Calibri" pitchFamily="34" charset="-122"/>
                 <a:cs typeface="Calibri" pitchFamily="34" charset="-120"/>
               </a:rPr>
-              <a:t>Сами египтяне называли страну Кемет — «Чёрная земля» — по цвету нильского ила.</a:t>
-            </a:r>
-            <a:endParaRPr lang="en-US" sz="1200" dirty="0"/>
+              <a:t>Египтяне называли свою страну Кемет — «Чёрная земля» — по цвету нильского ила.</a:t>
+            </a:r>
+            <a:endParaRPr lang="ru-RU" sz="1200" dirty="0"/>
           </a:p>
         </p:txBody>
       </p:sp>
@@ -5585,7 +5525,7 @@
           <p:nvPr/>
         </p:nvPicPr>
         <p:blipFill>
-          <a:blip r:embed="rId7"/>
+          <a:blip r:embed="rId6"/>
           <a:stretch>
             <a:fillRect/>
           </a:stretch>
@@ -5625,7 +5565,7 @@
               <a:buNone/>
             </a:pPr>
             <a:r>
-              <a:rPr lang="en-US" sz="1200" dirty="0">
+              <a:rPr lang="ru-RU" sz="1200" dirty="0">
                 <a:solidFill>
                   <a:srgbClr val="2A1E12"/>
                 </a:solidFill>
@@ -5635,7 +5575,7 @@
               </a:rPr>
               <a:t>Год: 12 месяцев по 30 дней и ещё 5 праздничных — всего 365 дней.</a:t>
             </a:r>
-            <a:endParaRPr lang="en-US" sz="1200" dirty="0"/>
+            <a:endParaRPr lang="ru-RU" sz="1200" dirty="0"/>
           </a:p>
         </p:txBody>
       </p:sp>
@@ -5674,7 +5614,7 @@
               </a:rPr>
               <a:t>Made by Heinrich Studio</a:t>
             </a:r>
-            <a:endParaRPr lang="en-US" sz="900" dirty="0"/>
+            <a:endParaRPr lang="ru-RU" sz="900" dirty="0"/>
           </a:p>
         </p:txBody>
       </p:sp>
@@ -5691,16 +5631,9 @@
   <p:cSld name="Slide 3">
     <p:bg>
       <p:bgPr>
-        <a:blipFill dpi="0" rotWithShape="1">
-          <a:blip r:embed="rId1">
-            <a:lum/>
-          </a:blip>
-          <a:srcRect/>
-          <a:stretch>
-            <a:fillRect/>
-          </a:stretch>
-        </a:blipFill>
-        <a:effectLst/>
+        <a:solidFill>
+          <a:srgbClr val="F5ECDA"/>
+        </a:solidFill>
       </p:bgPr>
     </p:bg>
     <p:spTree>
@@ -5726,7 +5659,7 @@
           <p:nvPr/>
         </p:nvPicPr>
         <p:blipFill>
-          <a:blip r:embed="rId2"/>
+          <a:blip r:embed="rId1"/>
           <a:stretch>
             <a:fillRect/>
           </a:stretch>
@@ -5818,7 +5751,7 @@
               <a:buNone/>
             </a:pPr>
             <a:r>
-              <a:rPr lang="en-US" sz="1000" b="1" spc="300" kern="0" dirty="0">
+              <a:rPr lang="ru-RU" sz="1000" b="1" spc="300" kern="0" dirty="0">
                 <a:solidFill>
                   <a:srgbClr val="A8432A"/>
                 </a:solidFill>
@@ -5828,7 +5761,7 @@
               </a:rPr>
               <a:t>02 · ПИРАМИДЫ</a:t>
             </a:r>
-            <a:endParaRPr lang="en-US" sz="1000" dirty="0"/>
+            <a:endParaRPr lang="ru-RU" sz="1000" dirty="0"/>
           </a:p>
         </p:txBody>
       </p:sp>
@@ -5857,7 +5790,7 @@
               <a:buNone/>
             </a:pPr>
             <a:r>
-              <a:rPr lang="en-US" sz="2700" b="1" dirty="0">
+              <a:rPr lang="ru-RU" sz="2700" b="1" dirty="0">
                 <a:solidFill>
                   <a:srgbClr val="2A1E12"/>
                 </a:solidFill>
@@ -5867,7 +5800,7 @@
               </a:rPr>
               <a:t>Пирамида Хеопса</a:t>
             </a:r>
-            <a:endParaRPr lang="en-US" sz="2700" dirty="0"/>
+            <a:endParaRPr lang="ru-RU" sz="2700" dirty="0"/>
           </a:p>
         </p:txBody>
       </p:sp>
@@ -5896,7 +5829,7 @@
               <a:buNone/>
             </a:pPr>
             <a:r>
-              <a:rPr lang="en-US" sz="1300" dirty="0">
+              <a:rPr lang="ru-RU" sz="1300" dirty="0">
                 <a:solidFill>
                   <a:srgbClr val="2A1E12"/>
                 </a:solidFill>
@@ -5906,7 +5839,7 @@
               </a:rPr>
               <a:t>Построена около 2560 г. до н. э. для фараона Хуфу (Хеопса). Единственное из семи чудес света, дожившее до наших дней.</a:t>
             </a:r>
-            <a:endParaRPr lang="en-US" sz="1300" dirty="0"/>
+            <a:endParaRPr lang="ru-RU" sz="1300" dirty="0"/>
           </a:p>
         </p:txBody>
       </p:sp>
@@ -5935,7 +5868,7 @@
               <a:buNone/>
             </a:pPr>
             <a:r>
-              <a:rPr lang="en-US" sz="3000" b="1" dirty="0">
+              <a:rPr lang="ru-RU" sz="3000" b="1" dirty="0">
                 <a:solidFill>
                   <a:srgbClr val="A8432A"/>
                 </a:solidFill>
@@ -5945,7 +5878,7 @@
               </a:rPr>
               <a:t>146 м</a:t>
             </a:r>
-            <a:endParaRPr lang="en-US" sz="3000" dirty="0"/>
+            <a:endParaRPr lang="ru-RU" sz="3000" dirty="0"/>
           </a:p>
         </p:txBody>
       </p:sp>
@@ -5974,7 +5907,7 @@
               <a:buNone/>
             </a:pPr>
             <a:r>
-              <a:rPr lang="en-US" sz="1250" dirty="0">
+              <a:rPr lang="ru-RU" sz="1250" dirty="0">
                 <a:solidFill>
                   <a:srgbClr val="2A1E12"/>
                 </a:solidFill>
@@ -5984,7 +5917,7 @@
               </a:rPr>
               <a:t>высота при постройке — почти как 50-этажный дом</a:t>
             </a:r>
-            <a:endParaRPr lang="en-US" sz="1250" dirty="0"/>
+            <a:endParaRPr lang="ru-RU" sz="1250" dirty="0"/>
           </a:p>
         </p:txBody>
       </p:sp>
@@ -6013,7 +5946,7 @@
               <a:buNone/>
             </a:pPr>
             <a:r>
-              <a:rPr lang="en-US" sz="3000" b="1" dirty="0">
+              <a:rPr lang="ru-RU" sz="3000" b="1" dirty="0">
                 <a:solidFill>
                   <a:srgbClr val="A8432A"/>
                 </a:solidFill>
@@ -6023,7 +5956,7 @@
               </a:rPr>
               <a:t>2,3 млн</a:t>
             </a:r>
-            <a:endParaRPr lang="en-US" sz="3000" dirty="0"/>
+            <a:endParaRPr lang="ru-RU" sz="3000" dirty="0"/>
           </a:p>
         </p:txBody>
       </p:sp>
@@ -6052,7 +5985,7 @@
               <a:buNone/>
             </a:pPr>
             <a:r>
-              <a:rPr lang="en-US" sz="1250" dirty="0">
+              <a:rPr lang="ru-RU" sz="1250" dirty="0">
                 <a:solidFill>
                   <a:srgbClr val="2A1E12"/>
                 </a:solidFill>
@@ -6062,7 +5995,7 @@
               </a:rPr>
               <a:t>каменных блоков, в среднем по 2,5 тонны</a:t>
             </a:r>
-            <a:endParaRPr lang="en-US" sz="1250" dirty="0"/>
+            <a:endParaRPr lang="ru-RU" sz="1250" dirty="0"/>
           </a:p>
         </p:txBody>
       </p:sp>
@@ -6091,7 +6024,7 @@
               <a:buNone/>
             </a:pPr>
             <a:r>
-              <a:rPr lang="en-US" sz="3000" b="1" dirty="0">
+              <a:rPr lang="ru-RU" sz="3000" b="1" dirty="0">
                 <a:solidFill>
                   <a:srgbClr val="A8432A"/>
                 </a:solidFill>
@@ -6101,7 +6034,7 @@
               </a:rPr>
               <a:t>3800 лет</a:t>
             </a:r>
-            <a:endParaRPr lang="en-US" sz="3000" dirty="0"/>
+            <a:endParaRPr lang="ru-RU" sz="3000" dirty="0"/>
           </a:p>
         </p:txBody>
       </p:sp>
@@ -6130,7 +6063,7 @@
               <a:buNone/>
             </a:pPr>
             <a:r>
-              <a:rPr lang="en-US" sz="1250" dirty="0">
+              <a:rPr lang="ru-RU" sz="1250" dirty="0">
                 <a:solidFill>
                   <a:srgbClr val="2A1E12"/>
                 </a:solidFill>
@@ -6140,7 +6073,7 @@
               </a:rPr>
               <a:t>оставалась самым высоким зданием на Земле</a:t>
             </a:r>
-            <a:endParaRPr lang="en-US" sz="1250" dirty="0"/>
+            <a:endParaRPr lang="ru-RU" sz="1250" dirty="0"/>
           </a:p>
         </p:txBody>
       </p:sp>
@@ -6179,7 +6112,7 @@
               </a:rPr>
               <a:t>Made by Heinrich Studio</a:t>
             </a:r>
-            <a:endParaRPr lang="en-US" sz="900" dirty="0"/>
+            <a:endParaRPr lang="ru-RU" sz="900" dirty="0"/>
           </a:p>
         </p:txBody>
       </p:sp>
@@ -6196,16 +6129,9 @@
   <p:cSld name="Slide 4">
     <p:bg>
       <p:bgPr>
-        <a:blipFill dpi="0" rotWithShape="1">
-          <a:blip r:embed="rId1">
-            <a:lum/>
-          </a:blip>
-          <a:srcRect/>
-          <a:stretch>
-            <a:fillRect/>
-          </a:stretch>
-        </a:blipFill>
-        <a:effectLst/>
+        <a:solidFill>
+          <a:srgbClr val="F5ECDA"/>
+        </a:solidFill>
       </p:bgPr>
     </p:bg>
     <p:spTree>
@@ -6263,7 +6189,7 @@
           <p:nvPr/>
         </p:nvPicPr>
         <p:blipFill>
-          <a:blip r:embed="rId2"/>
+          <a:blip r:embed="rId1"/>
           <a:stretch>
             <a:fillRect/>
           </a:stretch>
@@ -6355,7 +6281,7 @@
               <a:buNone/>
             </a:pPr>
             <a:r>
-              <a:rPr lang="en-US" sz="1000" b="1" spc="300" kern="0" dirty="0">
+              <a:rPr lang="ru-RU" sz="1000" b="1" spc="300" kern="0" dirty="0">
                 <a:solidFill>
                   <a:srgbClr val="A8432A"/>
                 </a:solidFill>
@@ -6365,7 +6291,7 @@
               </a:rPr>
               <a:t>03 · ИЕРОГЛИФЫ</a:t>
             </a:r>
-            <a:endParaRPr lang="en-US" sz="1000" dirty="0"/>
+            <a:endParaRPr lang="ru-RU" sz="1000" dirty="0"/>
           </a:p>
         </p:txBody>
       </p:sp>
@@ -6394,7 +6320,7 @@
               <a:buNone/>
             </a:pPr>
             <a:r>
-              <a:rPr lang="en-US" sz="3000" b="1" dirty="0">
+              <a:rPr lang="ru-RU" sz="3000" b="1" dirty="0">
                 <a:solidFill>
                   <a:srgbClr val="2A1E12"/>
                 </a:solidFill>
@@ -6404,7 +6330,7 @@
               </a:rPr>
               <a:t>Священные знаки</a:t>
             </a:r>
-            <a:endParaRPr lang="en-US" sz="3000" dirty="0"/>
+            <a:endParaRPr lang="ru-RU" sz="3000" dirty="0"/>
           </a:p>
         </p:txBody>
       </p:sp>
@@ -6433,7 +6359,7 @@
               <a:buNone/>
             </a:pPr>
             <a:r>
-              <a:rPr lang="en-US" sz="1300" i="1" dirty="0">
+              <a:rPr lang="ru-RU" sz="1300" i="1" dirty="0">
                 <a:solidFill>
                   <a:srgbClr val="6E5B45"/>
                 </a:solidFill>
@@ -6443,7 +6369,7 @@
               </a:rPr>
               <a:t>Сами египтяне называли иероглифы «словами бога».</a:t>
             </a:r>
-            <a:endParaRPr lang="en-US" sz="1300" dirty="0"/>
+            <a:endParaRPr lang="ru-RU" sz="1300" dirty="0"/>
           </a:p>
         </p:txBody>
       </p:sp>
@@ -6481,7 +6407,7 @@
           <p:nvPr/>
         </p:nvPicPr>
         <p:blipFill>
-          <a:blip r:embed="rId3"/>
+          <a:blip r:embed="rId2"/>
           <a:stretch>
             <a:fillRect/>
           </a:stretch>
@@ -6521,7 +6447,7 @@
               <a:buNone/>
             </a:pPr>
             <a:r>
-              <a:rPr lang="en-US" sz="1250" dirty="0">
+              <a:rPr lang="ru-RU" sz="1250" dirty="0">
                 <a:solidFill>
                   <a:srgbClr val="2A1E12"/>
                 </a:solidFill>
@@ -6531,7 +6457,7 @@
               </a:rPr>
               <a:t>Более 700 знаков: одни обозначали звуки, другие — целые слова.</a:t>
             </a:r>
-            <a:endParaRPr lang="en-US" sz="1250" dirty="0"/>
+            <a:endParaRPr lang="ru-RU" sz="1250" dirty="0"/>
           </a:p>
         </p:txBody>
       </p:sp>
@@ -6569,7 +6495,7 @@
           <p:nvPr/>
         </p:nvPicPr>
         <p:blipFill>
-          <a:blip r:embed="rId4"/>
+          <a:blip r:embed="rId3"/>
           <a:stretch>
             <a:fillRect/>
           </a:stretch>
@@ -6609,7 +6535,7 @@
               <a:buNone/>
             </a:pPr>
             <a:r>
-              <a:rPr lang="en-US" sz="1250" dirty="0">
+              <a:rPr lang="ru-RU" sz="1250" dirty="0">
                 <a:solidFill>
                   <a:srgbClr val="2A1E12"/>
                 </a:solidFill>
@@ -6619,7 +6545,7 @@
               </a:rPr>
               <a:t>Писали справа налево, слева направо и столбиком. Читать нужно навстречу лицам людей и птиц.</a:t>
             </a:r>
-            <a:endParaRPr lang="en-US" sz="1250" dirty="0"/>
+            <a:endParaRPr lang="ru-RU" sz="1250" dirty="0"/>
           </a:p>
         </p:txBody>
       </p:sp>
@@ -6657,7 +6583,7 @@
           <p:nvPr/>
         </p:nvPicPr>
         <p:blipFill>
-          <a:blip r:embed="rId5"/>
+          <a:blip r:embed="rId4"/>
           <a:stretch>
             <a:fillRect/>
           </a:stretch>
@@ -6697,7 +6623,7 @@
               <a:buNone/>
             </a:pPr>
             <a:r>
-              <a:rPr lang="en-US" sz="1250" dirty="0">
+              <a:rPr lang="ru-RU" sz="1250" dirty="0">
                 <a:solidFill>
                   <a:srgbClr val="2A1E12"/>
                 </a:solidFill>
@@ -6707,7 +6633,7 @@
               </a:rPr>
               <a:t>Имена фараонов обводили овалом — картушем. Он должен был защищать имя от зла.</a:t>
             </a:r>
-            <a:endParaRPr lang="en-US" sz="1250" dirty="0"/>
+            <a:endParaRPr lang="ru-RU" sz="1250" dirty="0"/>
           </a:p>
         </p:txBody>
       </p:sp>
@@ -6745,7 +6671,7 @@
           <p:nvPr/>
         </p:nvPicPr>
         <p:blipFill>
-          <a:blip r:embed="rId6"/>
+          <a:blip r:embed="rId5"/>
           <a:stretch>
             <a:fillRect/>
           </a:stretch>
@@ -6785,7 +6711,7 @@
               <a:buNone/>
             </a:pPr>
             <a:r>
-              <a:rPr lang="en-US" sz="1250" dirty="0">
+              <a:rPr lang="ru-RU" sz="1250" dirty="0">
                 <a:solidFill>
                   <a:srgbClr val="2A1E12"/>
                 </a:solidFill>
@@ -6793,9 +6719,9 @@
                 <a:ea typeface="Calibri" pitchFamily="34" charset="-122"/>
                 <a:cs typeface="Calibri" pitchFamily="34" charset="-120"/>
               </a:rPr>
-              <a:t>Розеттский камень с одним текстом на трёх письменностях помог Шампольону прочитать иероглифы в 1822 году.</a:t>
-            </a:r>
-            <a:endParaRPr lang="en-US" sz="1250" dirty="0"/>
+              <a:t>Розеттский камень, где один текст записан тремя видами письма, помог Шампольону прочитать иероглифы в 1822 году.</a:t>
+            </a:r>
+            <a:endParaRPr lang="ru-RU" sz="1250" dirty="0"/>
           </a:p>
         </p:txBody>
       </p:sp>
@@ -6834,7 +6760,7 @@
               </a:rPr>
               <a:t>Made by Heinrich Studio</a:t>
             </a:r>
-            <a:endParaRPr lang="en-US" sz="900" dirty="0"/>
+            <a:endParaRPr lang="ru-RU" sz="900" dirty="0"/>
           </a:p>
         </p:txBody>
       </p:sp>
@@ -6851,16 +6777,9 @@
   <p:cSld name="Slide 5">
     <p:bg>
       <p:bgPr>
-        <a:blipFill dpi="0" rotWithShape="1">
-          <a:blip r:embed="rId1">
-            <a:lum/>
-          </a:blip>
-          <a:srcRect/>
-          <a:stretch>
-            <a:fillRect/>
-          </a:stretch>
-        </a:blipFill>
-        <a:effectLst/>
+        <a:solidFill>
+          <a:srgbClr val="F5ECDA"/>
+        </a:solidFill>
       </p:bgPr>
     </p:bg>
     <p:spTree>
@@ -6918,7 +6837,7 @@
           <p:nvPr/>
         </p:nvPicPr>
         <p:blipFill>
-          <a:blip r:embed="rId2"/>
+          <a:blip r:embed="rId1"/>
           <a:stretch>
             <a:fillRect/>
           </a:stretch>
@@ -7010,7 +6929,7 @@
               <a:buNone/>
             </a:pPr>
             <a:r>
-              <a:rPr lang="en-US" sz="1000" b="1" spc="300" kern="0" dirty="0">
+              <a:rPr lang="ru-RU" sz="1000" b="1" spc="300" kern="0" dirty="0">
                 <a:solidFill>
                   <a:srgbClr val="A8432A"/>
                 </a:solidFill>
@@ -7020,7 +6939,7 @@
               </a:rPr>
               <a:t>04 · МУМИИ</a:t>
             </a:r>
-            <a:endParaRPr lang="en-US" sz="1000" dirty="0"/>
+            <a:endParaRPr lang="ru-RU" sz="1000" dirty="0"/>
           </a:p>
         </p:txBody>
       </p:sp>
@@ -7049,7 +6968,7 @@
               <a:buNone/>
             </a:pPr>
             <a:r>
-              <a:rPr lang="en-US" sz="2500" b="1" dirty="0">
+              <a:rPr lang="ru-RU" sz="2500" b="1" dirty="0">
                 <a:solidFill>
                   <a:srgbClr val="2A1E12"/>
                 </a:solidFill>
@@ -7059,7 +6978,7 @@
               </a:rPr>
               <a:t>Путь в вечность за 70 дней</a:t>
             </a:r>
-            <a:endParaRPr lang="en-US" sz="2500" dirty="0"/>
+            <a:endParaRPr lang="ru-RU" sz="2500" dirty="0"/>
           </a:p>
         </p:txBody>
       </p:sp>
@@ -7094,7 +7013,7 @@
               <a:buNone/>
             </a:pPr>
             <a:r>
-              <a:rPr lang="en-US" sz="1250" b="1" dirty="0">
+              <a:rPr lang="ru-RU" sz="1250" b="1" dirty="0">
                 <a:solidFill>
                   <a:srgbClr val="FFFFFF"/>
                 </a:solidFill>
@@ -7104,7 +7023,7 @@
               </a:rPr>
               <a:t>1</a:t>
             </a:r>
-            <a:endParaRPr lang="en-US" sz="1250" dirty="0"/>
+            <a:endParaRPr lang="ru-RU" sz="1250" dirty="0"/>
           </a:p>
         </p:txBody>
       </p:sp>
@@ -7133,7 +7052,7 @@
               <a:buNone/>
             </a:pPr>
             <a:r>
-              <a:rPr lang="en-US" sz="1200" dirty="0">
+              <a:rPr lang="ru-RU" sz="1200" dirty="0">
                 <a:solidFill>
                   <a:srgbClr val="2A1E12"/>
                 </a:solidFill>
@@ -7143,7 +7062,7 @@
               </a:rPr>
               <a:t>Мозг доставали через нос длинным крючком — его считали ненужным.</a:t>
             </a:r>
-            <a:endParaRPr lang="en-US" sz="1200" dirty="0"/>
+            <a:endParaRPr lang="ru-RU" sz="1200" dirty="0"/>
           </a:p>
         </p:txBody>
       </p:sp>
@@ -7178,7 +7097,7 @@
               <a:buNone/>
             </a:pPr>
             <a:r>
-              <a:rPr lang="en-US" sz="1250" b="1" dirty="0">
+              <a:rPr lang="ru-RU" sz="1250" b="1" dirty="0">
                 <a:solidFill>
                   <a:srgbClr val="FFFFFF"/>
                 </a:solidFill>
@@ -7188,7 +7107,7 @@
               </a:rPr>
               <a:t>2</a:t>
             </a:r>
-            <a:endParaRPr lang="en-US" sz="1250" dirty="0"/>
+            <a:endParaRPr lang="ru-RU" sz="1250" dirty="0"/>
           </a:p>
         </p:txBody>
       </p:sp>
@@ -7217,7 +7136,7 @@
               <a:buNone/>
             </a:pPr>
             <a:r>
-              <a:rPr lang="en-US" sz="1200" dirty="0">
+              <a:rPr lang="ru-RU" sz="1200" dirty="0">
                 <a:solidFill>
                   <a:srgbClr val="2A1E12"/>
                 </a:solidFill>
@@ -7227,7 +7146,7 @@
               </a:rPr>
               <a:t>Печень, лёгкие, желудок и кишечник клали в 4 сосуда-канопы. Сердце оставляли в теле.</a:t>
             </a:r>
-            <a:endParaRPr lang="en-US" sz="1200" dirty="0"/>
+            <a:endParaRPr lang="ru-RU" sz="1200" dirty="0"/>
           </a:p>
         </p:txBody>
       </p:sp>
@@ -7262,7 +7181,7 @@
               <a:buNone/>
             </a:pPr>
             <a:r>
-              <a:rPr lang="en-US" sz="1250" b="1" dirty="0">
+              <a:rPr lang="ru-RU" sz="1250" b="1" dirty="0">
                 <a:solidFill>
                   <a:srgbClr val="FFFFFF"/>
                 </a:solidFill>
@@ -7272,7 +7191,7 @@
               </a:rPr>
               <a:t>3</a:t>
             </a:r>
-            <a:endParaRPr lang="en-US" sz="1250" dirty="0"/>
+            <a:endParaRPr lang="ru-RU" sz="1250" dirty="0"/>
           </a:p>
         </p:txBody>
       </p:sp>
@@ -7301,7 +7220,7 @@
               <a:buNone/>
             </a:pPr>
             <a:r>
-              <a:rPr lang="en-US" sz="1200" dirty="0">
+              <a:rPr lang="ru-RU" sz="1200" dirty="0">
                 <a:solidFill>
                   <a:srgbClr val="2A1E12"/>
                 </a:solidFill>
@@ -7309,9 +7228,9 @@
                 <a:ea typeface="Calibri" pitchFamily="34" charset="-122"/>
                 <a:cs typeface="Calibri" pitchFamily="34" charset="-120"/>
               </a:rPr>
-              <a:t>40 дней тело сушили в соли натрон.</a:t>
-            </a:r>
-            <a:endParaRPr lang="en-US" sz="1200" dirty="0"/>
+              <a:t>40 дней тело сушили в особой соли — натроне.</a:t>
+            </a:r>
+            <a:endParaRPr lang="ru-RU" sz="1200" dirty="0"/>
           </a:p>
         </p:txBody>
       </p:sp>
@@ -7346,7 +7265,7 @@
               <a:buNone/>
             </a:pPr>
             <a:r>
-              <a:rPr lang="en-US" sz="1250" b="1" dirty="0">
+              <a:rPr lang="ru-RU" sz="1250" b="1" dirty="0">
                 <a:solidFill>
                   <a:srgbClr val="FFFFFF"/>
                 </a:solidFill>
@@ -7356,7 +7275,7 @@
               </a:rPr>
               <a:t>4</a:t>
             </a:r>
-            <a:endParaRPr lang="en-US" sz="1250" dirty="0"/>
+            <a:endParaRPr lang="ru-RU" sz="1250" dirty="0"/>
           </a:p>
         </p:txBody>
       </p:sp>
@@ -7385,7 +7304,7 @@
               <a:buNone/>
             </a:pPr>
             <a:r>
-              <a:rPr lang="en-US" sz="1200" dirty="0">
+              <a:rPr lang="ru-RU" sz="1200" dirty="0">
                 <a:solidFill>
                   <a:srgbClr val="2A1E12"/>
                 </a:solidFill>
@@ -7395,7 +7314,7 @@
               </a:rPr>
               <a:t>Обматывали льняными бинтами, а между слоями клали амулеты.</a:t>
             </a:r>
-            <a:endParaRPr lang="en-US" sz="1200" dirty="0"/>
+            <a:endParaRPr lang="ru-RU" sz="1200" dirty="0"/>
           </a:p>
         </p:txBody>
       </p:sp>
@@ -7442,7 +7361,7 @@
           <p:nvPr/>
         </p:nvPicPr>
         <p:blipFill>
-          <a:blip r:embed="rId3"/>
+          <a:blip r:embed="rId2"/>
           <a:stretch>
             <a:fillRect/>
           </a:stretch>
@@ -7482,7 +7401,7 @@
               <a:buNone/>
             </a:pPr>
             <a:r>
-              <a:rPr lang="en-US" sz="1150" b="1" dirty="0">
+              <a:rPr lang="ru-RU" sz="1100" b="1" dirty="0">
                 <a:solidFill>
                   <a:srgbClr val="E3BE5C"/>
                 </a:solidFill>
@@ -7496,7 +7415,7 @@
               <a:buNone/>
             </a:pPr>
             <a:r>
-              <a:rPr lang="en-US" sz="1150" dirty="0">
+              <a:rPr lang="ru-RU" sz="1100" dirty="0">
                 <a:solidFill>
                   <a:srgbClr val="F3E9D6"/>
                 </a:solidFill>
@@ -7504,9 +7423,9 @@
                 <a:ea typeface="Calibri" pitchFamily="34" charset="-122"/>
                 <a:cs typeface="Calibri" pitchFamily="34" charset="-120"/>
               </a:rPr>
-              <a:t>Бог загробного мира Осирис взвешивал сердце умершего против пера богини правды Маат. Если сердце было лёгким, человек попадал в загробный рай.</a:t>
-            </a:r>
-            <a:endParaRPr lang="en-US" sz="1150" dirty="0"/>
+              <a:t>На суде бога загробного мира Осириса сердце умершего взвешивали против пера богини правды Маат. Если сердце было лёгким, человек попадал в загробный рай.</a:t>
+            </a:r>
+            <a:endParaRPr lang="ru-RU" sz="1100" dirty="0"/>
           </a:p>
         </p:txBody>
       </p:sp>
@@ -7519,7 +7438,7 @@
           <p:nvPr/>
         </p:nvPicPr>
         <p:blipFill>
-          <a:blip r:embed="rId4"/>
+          <a:blip r:embed="rId3"/>
           <a:stretch>
             <a:fillRect/>
           </a:stretch>
@@ -7542,7 +7461,7 @@
         </p:nvSpPr>
         <p:spPr>
           <a:xfrm>
-            <a:off x="4343400" y="4059936"/>
+            <a:off x="4343400" y="4041648"/>
             <a:ext cx="4206240" cy="566928"/>
           </a:xfrm>
           <a:prstGeom prst="rect">
@@ -7559,7 +7478,7 @@
               <a:buNone/>
             </a:pPr>
             <a:r>
-              <a:rPr lang="en-US" sz="1150" b="1" dirty="0">
+              <a:rPr lang="ru-RU" sz="1100" b="1" dirty="0">
                 <a:solidFill>
                   <a:srgbClr val="E3BE5C"/>
                 </a:solidFill>
@@ -7573,7 +7492,7 @@
               <a:buNone/>
             </a:pPr>
             <a:r>
-              <a:rPr lang="en-US" sz="1150" dirty="0">
+              <a:rPr lang="ru-RU" sz="1100" dirty="0">
                 <a:solidFill>
                   <a:srgbClr val="F3E9D6"/>
                 </a:solidFill>
@@ -7583,7 +7502,7 @@
               </a:rPr>
               <a:t> — чудовище «пожирательница мёртвых»: пасть крокодила, тело льва и задние ноги бегемота. Тяжёлое сердце грешника она съедала.</a:t>
             </a:r>
-            <a:endParaRPr lang="en-US" sz="1150" dirty="0"/>
+            <a:endParaRPr lang="ru-RU" sz="1100" dirty="0"/>
           </a:p>
         </p:txBody>
       </p:sp>
@@ -7622,7 +7541,7 @@
               </a:rPr>
               <a:t>Made by Heinrich Studio</a:t>
             </a:r>
-            <a:endParaRPr lang="en-US" sz="900" dirty="0"/>
+            <a:endParaRPr lang="ru-RU" sz="900" dirty="0"/>
           </a:p>
         </p:txBody>
       </p:sp>
@@ -7639,16 +7558,9 @@
   <p:cSld name="Slide 6">
     <p:bg>
       <p:bgPr>
-        <a:blipFill dpi="0" rotWithShape="1">
-          <a:blip r:embed="rId1">
-            <a:lum/>
-          </a:blip>
-          <a:srcRect/>
-          <a:stretch>
-            <a:fillRect/>
-          </a:stretch>
-        </a:blipFill>
-        <a:effectLst/>
+        <a:solidFill>
+          <a:srgbClr val="F5ECDA"/>
+        </a:solidFill>
       </p:bgPr>
     </p:bg>
     <p:spTree>
@@ -7706,7 +7618,7 @@
           <p:nvPr/>
         </p:nvPicPr>
         <p:blipFill>
-          <a:blip r:embed="rId2"/>
+          <a:blip r:embed="rId1"/>
           <a:stretch>
             <a:fillRect/>
           </a:stretch>
@@ -7773,7 +7685,7 @@
               <a:buNone/>
             </a:pPr>
             <a:r>
-              <a:rPr lang="en-US" sz="1100" b="1" dirty="0">
+              <a:rPr lang="ru-RU" sz="1100" b="1" dirty="0">
                 <a:solidFill>
                   <a:srgbClr val="E3BE5C"/>
                 </a:solidFill>
@@ -7787,7 +7699,7 @@
               <a:buNone/>
             </a:pPr>
             <a:r>
-              <a:rPr lang="en-US" sz="1100" dirty="0">
+              <a:rPr lang="ru-RU" sz="1100" dirty="0">
                 <a:solidFill>
                   <a:srgbClr val="F3E9D6"/>
                 </a:solidFill>
@@ -7797,7 +7709,7 @@
               </a:rPr>
               <a:t>золотая погребальная маска Тутанхамона. Большой Египетский музей, Каир.</a:t>
             </a:r>
-            <a:endParaRPr lang="en-US" sz="1100" dirty="0"/>
+            <a:endParaRPr lang="ru-RU" sz="1100" dirty="0"/>
           </a:p>
         </p:txBody>
       </p:sp>
@@ -7878,7 +7790,7 @@
               <a:buNone/>
             </a:pPr>
             <a:r>
-              <a:rPr lang="en-US" sz="1000" b="1" spc="300" kern="0" dirty="0">
+              <a:rPr lang="ru-RU" sz="1000" b="1" spc="300" kern="0" dirty="0">
                 <a:solidFill>
                   <a:srgbClr val="A8432A"/>
                 </a:solidFill>
@@ -7888,7 +7800,7 @@
               </a:rPr>
               <a:t>05 · ТУТАНХАМОН</a:t>
             </a:r>
-            <a:endParaRPr lang="en-US" sz="1000" dirty="0"/>
+            <a:endParaRPr lang="ru-RU" sz="1000" dirty="0"/>
           </a:p>
         </p:txBody>
       </p:sp>
@@ -7917,7 +7829,7 @@
               <a:buNone/>
             </a:pPr>
             <a:r>
-              <a:rPr lang="en-US" sz="3000" b="1" dirty="0">
+              <a:rPr lang="ru-RU" sz="3000" b="1" dirty="0">
                 <a:solidFill>
                   <a:srgbClr val="2A1E12"/>
                 </a:solidFill>
@@ -7927,7 +7839,7 @@
               </a:rPr>
               <a:t>Мальчик-фараон</a:t>
             </a:r>
-            <a:endParaRPr lang="en-US" sz="3000" dirty="0"/>
+            <a:endParaRPr lang="ru-RU" sz="3000" dirty="0"/>
           </a:p>
         </p:txBody>
       </p:sp>
@@ -7965,7 +7877,7 @@
           <p:nvPr/>
         </p:nvPicPr>
         <p:blipFill>
-          <a:blip r:embed="rId3"/>
+          <a:blip r:embed="rId2"/>
           <a:stretch>
             <a:fillRect/>
           </a:stretch>
@@ -8005,7 +7917,7 @@
               <a:buNone/>
             </a:pPr>
             <a:r>
-              <a:rPr lang="en-US" sz="1200" dirty="0">
+              <a:rPr lang="ru-RU" sz="1200" dirty="0">
                 <a:solidFill>
                   <a:srgbClr val="2A1E12"/>
                 </a:solidFill>
@@ -8015,7 +7927,7 @@
               </a:rPr>
               <a:t>Стал фараоном примерно в 9 лет, поэтому страной за него правили советники.</a:t>
             </a:r>
-            <a:endParaRPr lang="en-US" sz="1200" dirty="0"/>
+            <a:endParaRPr lang="ru-RU" sz="1200" dirty="0"/>
           </a:p>
         </p:txBody>
       </p:sp>
@@ -8053,7 +7965,7 @@
           <p:nvPr/>
         </p:nvPicPr>
         <p:blipFill>
-          <a:blip r:embed="rId4"/>
+          <a:blip r:embed="rId3"/>
           <a:stretch>
             <a:fillRect/>
           </a:stretch>
@@ -8093,7 +8005,7 @@
               <a:buNone/>
             </a:pPr>
             <a:r>
-              <a:rPr lang="en-US" sz="1200" dirty="0">
+              <a:rPr lang="ru-RU" sz="1200" dirty="0">
                 <a:solidFill>
                   <a:srgbClr val="2A1E12"/>
                 </a:solidFill>
@@ -8103,7 +8015,7 @@
               </a:rPr>
               <a:t>Умер около 19 лет. Почему так рано, учёные спорят до сих пор.</a:t>
             </a:r>
-            <a:endParaRPr lang="en-US" sz="1200" dirty="0"/>
+            <a:endParaRPr lang="ru-RU" sz="1200" dirty="0"/>
           </a:p>
         </p:txBody>
       </p:sp>
@@ -8141,7 +8053,7 @@
           <p:nvPr/>
         </p:nvPicPr>
         <p:blipFill>
-          <a:blip r:embed="rId5"/>
+          <a:blip r:embed="rId4"/>
           <a:stretch>
             <a:fillRect/>
           </a:stretch>
@@ -8181,7 +8093,7 @@
               <a:buNone/>
             </a:pPr>
             <a:r>
-              <a:rPr lang="en-US" sz="1200" dirty="0">
+              <a:rPr lang="ru-RU" sz="1200" dirty="0">
                 <a:solidFill>
                   <a:srgbClr val="2A1E12"/>
                 </a:solidFill>
@@ -8189,9 +8101,9 @@
                 <a:ea typeface="Calibri" pitchFamily="34" charset="-122"/>
                 <a:cs typeface="Calibri" pitchFamily="34" charset="-120"/>
               </a:rPr>
-              <a:t>Вход в гробницу завалило камнями при строительстве соседней — поэтому грабители её не нашли.</a:t>
-            </a:r>
-            <a:endParaRPr lang="en-US" sz="1200" dirty="0"/>
+              <a:t>Вход в гробницу завалило камнями при строительстве соседней гробницы — поэтому грабители её не нашли.</a:t>
+            </a:r>
+            <a:endParaRPr lang="ru-RU" sz="1200" dirty="0"/>
           </a:p>
         </p:txBody>
       </p:sp>
@@ -8254,7 +8166,7 @@
               <a:buNone/>
             </a:pPr>
             <a:r>
-              <a:rPr lang="en-US" sz="2100" b="1" dirty="0">
+              <a:rPr lang="ru-RU" sz="2100" b="1" dirty="0">
                 <a:solidFill>
                   <a:srgbClr val="A8432A"/>
                 </a:solidFill>
@@ -8264,7 +8176,7 @@
               </a:rPr>
               <a:t>1922</a:t>
             </a:r>
-            <a:endParaRPr lang="en-US" sz="2100" dirty="0"/>
+            <a:endParaRPr lang="ru-RU" sz="2100" dirty="0"/>
           </a:p>
         </p:txBody>
       </p:sp>
@@ -8293,7 +8205,7 @@
               <a:buNone/>
             </a:pPr>
             <a:r>
-              <a:rPr lang="en-US" sz="1050" dirty="0">
+              <a:rPr lang="ru-RU" sz="1050" dirty="0">
                 <a:solidFill>
                   <a:srgbClr val="6E5B45"/>
                 </a:solidFill>
@@ -8303,7 +8215,7 @@
               </a:rPr>
               <a:t>Говард Картер открыл гробницу</a:t>
             </a:r>
-            <a:endParaRPr lang="en-US" sz="1050" dirty="0"/>
+            <a:endParaRPr lang="ru-RU" sz="1050" dirty="0"/>
           </a:p>
         </p:txBody>
       </p:sp>
@@ -8366,7 +8278,7 @@
               <a:buNone/>
             </a:pPr>
             <a:r>
-              <a:rPr lang="en-US" sz="2100" b="1" dirty="0">
+              <a:rPr lang="ru-RU" sz="2100" b="1" dirty="0">
                 <a:solidFill>
                   <a:srgbClr val="A8432A"/>
                 </a:solidFill>
@@ -8376,7 +8288,7 @@
               </a:rPr>
               <a:t>5000+</a:t>
             </a:r>
-            <a:endParaRPr lang="en-US" sz="2100" dirty="0"/>
+            <a:endParaRPr lang="ru-RU" sz="2100" dirty="0"/>
           </a:p>
         </p:txBody>
       </p:sp>
@@ -8405,7 +8317,7 @@
               <a:buNone/>
             </a:pPr>
             <a:r>
-              <a:rPr lang="en-US" sz="1050" dirty="0">
+              <a:rPr lang="ru-RU" sz="1050" dirty="0">
                 <a:solidFill>
                   <a:srgbClr val="6E5B45"/>
                 </a:solidFill>
@@ -8415,7 +8327,7 @@
               </a:rPr>
               <a:t>предметов нашли внутри</a:t>
             </a:r>
-            <a:endParaRPr lang="en-US" sz="1050" dirty="0"/>
+            <a:endParaRPr lang="ru-RU" sz="1050" dirty="0"/>
           </a:p>
         </p:txBody>
       </p:sp>
@@ -8478,7 +8390,7 @@
               <a:buNone/>
             </a:pPr>
             <a:r>
-              <a:rPr lang="en-US" sz="2100" b="1" dirty="0">
+              <a:rPr lang="ru-RU" sz="2100" b="1" dirty="0">
                 <a:solidFill>
                   <a:srgbClr val="A8432A"/>
                 </a:solidFill>
@@ -8488,7 +8400,7 @@
               </a:rPr>
               <a:t>10 кг</a:t>
             </a:r>
-            <a:endParaRPr lang="en-US" sz="2100" dirty="0"/>
+            <a:endParaRPr lang="ru-RU" sz="2100" dirty="0"/>
           </a:p>
         </p:txBody>
       </p:sp>
@@ -8517,7 +8429,7 @@
               <a:buNone/>
             </a:pPr>
             <a:r>
-              <a:rPr lang="en-US" sz="1050" dirty="0">
+              <a:rPr lang="ru-RU" sz="1050" dirty="0">
                 <a:solidFill>
                   <a:srgbClr val="6E5B45"/>
                 </a:solidFill>
@@ -8527,7 +8439,7 @@
               </a:rPr>
               <a:t>золота в этой маске</a:t>
             </a:r>
-            <a:endParaRPr lang="en-US" sz="1050" dirty="0"/>
+            <a:endParaRPr lang="ru-RU" sz="1050" dirty="0"/>
           </a:p>
         </p:txBody>
       </p:sp>
@@ -8566,7 +8478,7 @@
               </a:rPr>
               <a:t>Made by Heinrich Studio</a:t>
             </a:r>
-            <a:endParaRPr lang="en-US" sz="900" dirty="0"/>
+            <a:endParaRPr lang="ru-RU" sz="900" dirty="0"/>
           </a:p>
         </p:txBody>
       </p:sp>
@@ -8583,16 +8495,9 @@
   <p:cSld name="Slide 7">
     <p:bg>
       <p:bgPr>
-        <a:blipFill dpi="0" rotWithShape="1">
-          <a:blip r:embed="rId1">
-            <a:lum/>
-          </a:blip>
-          <a:srcRect/>
-          <a:stretch>
-            <a:fillRect/>
-          </a:stretch>
-        </a:blipFill>
-        <a:effectLst/>
+        <a:solidFill>
+          <a:srgbClr val="F5ECDA"/>
+        </a:solidFill>
       </p:bgPr>
     </p:bg>
     <p:spTree>
@@ -8618,7 +8523,7 @@
           <p:nvPr/>
         </p:nvPicPr>
         <p:blipFill>
-          <a:blip r:embed="rId2"/>
+          <a:blip r:embed="rId1"/>
           <a:stretch>
             <a:fillRect/>
           </a:stretch>
@@ -8710,7 +8615,7 @@
               <a:buNone/>
             </a:pPr>
             <a:r>
-              <a:rPr lang="en-US" sz="1000" b="1" spc="300" kern="0" dirty="0">
+              <a:rPr lang="ru-RU" sz="1000" b="1" spc="300" kern="0" dirty="0">
                 <a:solidFill>
                   <a:srgbClr val="A8432A"/>
                 </a:solidFill>
@@ -8720,7 +8625,7 @@
               </a:rPr>
               <a:t>06 · СТРОИТЕЛИ ПИРАМИД</a:t>
             </a:r>
-            <a:endParaRPr lang="en-US" sz="1000" dirty="0"/>
+            <a:endParaRPr lang="ru-RU" sz="1000" dirty="0"/>
           </a:p>
         </p:txBody>
       </p:sp>
@@ -8752,7 +8657,7 @@
               <a:buNone/>
             </a:pPr>
             <a:r>
-              <a:rPr lang="en-US" sz="2600" b="1" dirty="0">
+              <a:rPr lang="ru-RU" sz="2600" b="1" dirty="0">
                 <a:solidFill>
                   <a:srgbClr val="2A1E12"/>
                 </a:solidFill>
@@ -8762,7 +8667,7 @@
               </a:rPr>
               <a:t>Пирамиды строили</a:t>
             </a:r>
-            <a:endParaRPr lang="en-US" sz="2600" dirty="0"/>
+            <a:endParaRPr lang="ru-RU" sz="2600" dirty="0"/>
           </a:p>
           <a:p>
             <a:pPr indent="0" marL="0">
@@ -8772,7 +8677,7 @@
               <a:buNone/>
             </a:pPr>
             <a:r>
-              <a:rPr lang="en-US" sz="2600" b="1" dirty="0">
+              <a:rPr lang="ru-RU" sz="2600" b="1" dirty="0">
                 <a:solidFill>
                   <a:srgbClr val="2A1E12"/>
                 </a:solidFill>
@@ -8782,7 +8687,7 @@
               </a:rPr>
               <a:t>не рабы</a:t>
             </a:r>
-            <a:endParaRPr lang="en-US" sz="2600" dirty="0"/>
+            <a:endParaRPr lang="ru-RU" sz="2600" dirty="0"/>
           </a:p>
         </p:txBody>
       </p:sp>
@@ -8820,7 +8725,7 @@
           <p:nvPr/>
         </p:nvPicPr>
         <p:blipFill>
-          <a:blip r:embed="rId3"/>
+          <a:blip r:embed="rId2"/>
           <a:stretch>
             <a:fillRect/>
           </a:stretch>
@@ -8860,7 +8765,7 @@
               <a:buNone/>
             </a:pPr>
             <a:r>
-              <a:rPr lang="en-US" sz="1200" dirty="0">
+              <a:rPr lang="ru-RU" sz="1200" dirty="0">
                 <a:solidFill>
                   <a:srgbClr val="2A1E12"/>
                 </a:solidFill>
@@ -8870,7 +8775,7 @@
               </a:rPr>
               <a:t>У пирамид нашли посёлок строителей: пекарни, пивоварни и кладбище. Рабов вряд ли похоронили бы рядом с фараоном.</a:t>
             </a:r>
-            <a:endParaRPr lang="en-US" sz="1200" dirty="0"/>
+            <a:endParaRPr lang="ru-RU" sz="1200" dirty="0"/>
           </a:p>
         </p:txBody>
       </p:sp>
@@ -8908,7 +8813,7 @@
           <p:nvPr/>
         </p:nvPicPr>
         <p:blipFill>
-          <a:blip r:embed="rId4"/>
+          <a:blip r:embed="rId3"/>
           <a:stretch>
             <a:fillRect/>
           </a:stretch>
@@ -8948,7 +8853,7 @@
               <a:buNone/>
             </a:pPr>
             <a:r>
-              <a:rPr lang="en-US" sz="1200" dirty="0">
+              <a:rPr lang="ru-RU" sz="1200" dirty="0">
                 <a:solidFill>
                   <a:srgbClr val="2A1E12"/>
                 </a:solidFill>
@@ -8958,7 +8863,7 @@
               </a:rPr>
               <a:t>Рабочих кормили хлебом, пивом и мясом. На скелетах видны сросшиеся переломы — их лечили врачи.</a:t>
             </a:r>
-            <a:endParaRPr lang="en-US" sz="1200" dirty="0"/>
+            <a:endParaRPr lang="ru-RU" sz="1200" dirty="0"/>
           </a:p>
         </p:txBody>
       </p:sp>
@@ -8996,7 +8901,7 @@
           <p:nvPr/>
         </p:nvPicPr>
         <p:blipFill>
-          <a:blip r:embed="rId5"/>
+          <a:blip r:embed="rId4"/>
           <a:stretch>
             <a:fillRect/>
           </a:stretch>
@@ -9036,7 +8941,7 @@
               <a:buNone/>
             </a:pPr>
             <a:r>
-              <a:rPr lang="en-US" sz="1200" dirty="0">
+              <a:rPr lang="ru-RU" sz="1200" dirty="0">
                 <a:solidFill>
                   <a:srgbClr val="2A1E12"/>
                 </a:solidFill>
@@ -9046,7 +8951,7 @@
               </a:rPr>
               <a:t>Бригады носили весёлые имена: «Друзья Хуфу», «Пьяницы Менкаура».</a:t>
             </a:r>
-            <a:endParaRPr lang="en-US" sz="1200" dirty="0"/>
+            <a:endParaRPr lang="ru-RU" sz="1200" dirty="0"/>
           </a:p>
         </p:txBody>
       </p:sp>
@@ -9084,7 +8989,7 @@
           <p:nvPr/>
         </p:nvPicPr>
         <p:blipFill>
-          <a:blip r:embed="rId6"/>
+          <a:blip r:embed="rId5"/>
           <a:stretch>
             <a:fillRect/>
           </a:stretch>
@@ -9124,7 +9029,7 @@
               <a:buNone/>
             </a:pPr>
             <a:r>
-              <a:rPr lang="en-US" sz="1200" dirty="0">
+              <a:rPr lang="ru-RU" sz="1200" dirty="0">
                 <a:solidFill>
                   <a:srgbClr val="2A1E12"/>
                 </a:solidFill>
@@ -9132,9 +9037,9 @@
                 <a:ea typeface="Calibri" pitchFamily="34" charset="-122"/>
                 <a:cs typeface="Calibri" pitchFamily="34" charset="-120"/>
               </a:rPr>
-              <a:t>В 2013 году нашли «дневник Мерера» — старейший папирус в мире. Это журнал бригады, возившей камень для пирамиды Хеопса.</a:t>
-            </a:r>
-            <a:endParaRPr lang="en-US" sz="1200" dirty="0"/>
+              <a:t>В 2013 году нашли «дневник Мерера» — старейший папирус с текстом. Это журнал бригады, возившей камень для пирамиды Хеопса.</a:t>
+            </a:r>
+            <a:endParaRPr lang="ru-RU" sz="1200" dirty="0"/>
           </a:p>
         </p:txBody>
       </p:sp>
@@ -9173,7 +9078,7 @@
               </a:rPr>
               <a:t>Made by Heinrich Studio</a:t>
             </a:r>
-            <a:endParaRPr lang="en-US" sz="900" dirty="0"/>
+            <a:endParaRPr lang="ru-RU" sz="900" dirty="0"/>
           </a:p>
         </p:txBody>
       </p:sp>
@@ -9190,16 +9095,9 @@
   <p:cSld name="Slide 8">
     <p:bg>
       <p:bgPr>
-        <a:blipFill dpi="0" rotWithShape="1">
-          <a:blip r:embed="rId1">
-            <a:lum/>
-          </a:blip>
-          <a:srcRect/>
-          <a:stretch>
-            <a:fillRect/>
-          </a:stretch>
-        </a:blipFill>
-        <a:effectLst/>
+        <a:solidFill>
+          <a:srgbClr val="F5ECDA"/>
+        </a:solidFill>
       </p:bgPr>
     </p:bg>
     <p:spTree>
@@ -9225,7 +9123,7 @@
           <p:nvPr/>
         </p:nvPicPr>
         <p:blipFill>
-          <a:blip r:embed="rId2"/>
+          <a:blip r:embed="rId1"/>
           <a:stretch>
             <a:fillRect/>
           </a:stretch>
@@ -9317,7 +9215,7 @@
               <a:buNone/>
             </a:pPr>
             <a:r>
-              <a:rPr lang="en-US" sz="1000" b="1" spc="300" kern="0" dirty="0">
+              <a:rPr lang="ru-RU" sz="1000" b="1" spc="300" kern="0" dirty="0">
                 <a:solidFill>
                   <a:srgbClr val="A8432A"/>
                 </a:solidFill>
@@ -9327,7 +9225,7 @@
               </a:rPr>
               <a:t>07 · СТРОИТЕЛИ ГРОБНИЦ</a:t>
             </a:r>
-            <a:endParaRPr lang="en-US" sz="1000" dirty="0"/>
+            <a:endParaRPr lang="ru-RU" sz="1000" dirty="0"/>
           </a:p>
         </p:txBody>
       </p:sp>
@@ -9359,7 +9257,7 @@
               <a:buNone/>
             </a:pPr>
             <a:r>
-              <a:rPr lang="en-US" sz="2600" b="1" dirty="0">
+              <a:rPr lang="ru-RU" sz="2600" b="1" dirty="0">
                 <a:solidFill>
                   <a:srgbClr val="2A1E12"/>
                 </a:solidFill>
@@ -9369,7 +9267,7 @@
               </a:rPr>
               <a:t>Первая забастовка</a:t>
             </a:r>
-            <a:endParaRPr lang="en-US" sz="2600" dirty="0"/>
+            <a:endParaRPr lang="ru-RU" sz="2600" dirty="0"/>
           </a:p>
           <a:p>
             <a:pPr indent="0" marL="0">
@@ -9379,7 +9277,7 @@
               <a:buNone/>
             </a:pPr>
             <a:r>
-              <a:rPr lang="en-US" sz="2600" b="1" dirty="0">
+              <a:rPr lang="ru-RU" sz="2600" b="1" dirty="0">
                 <a:solidFill>
                   <a:srgbClr val="2A1E12"/>
                 </a:solidFill>
@@ -9389,7 +9287,7 @@
               </a:rPr>
               <a:t>в истории</a:t>
             </a:r>
-            <a:endParaRPr lang="en-US" sz="2600" dirty="0"/>
+            <a:endParaRPr lang="ru-RU" sz="2600" dirty="0"/>
           </a:p>
         </p:txBody>
       </p:sp>
@@ -9418,7 +9316,7 @@
               <a:buNone/>
             </a:pPr>
             <a:r>
-              <a:rPr lang="en-US" sz="1250" b="1" dirty="0">
+              <a:rPr lang="ru-RU" sz="1250" b="1" dirty="0">
                 <a:solidFill>
                   <a:srgbClr val="A8432A"/>
                 </a:solidFill>
@@ -9432,7 +9330,7 @@
               <a:buNone/>
             </a:pPr>
             <a:r>
-              <a:rPr lang="en-US" sz="1250" dirty="0">
+              <a:rPr lang="ru-RU" sz="1250" dirty="0">
                 <a:solidFill>
                   <a:srgbClr val="2A1E12"/>
                 </a:solidFill>
@@ -9442,7 +9340,7 @@
               </a:rPr>
               <a:t>строителям царских гробниц из посёлка Дейр-эль-Медина вовремя не выдали зерно — их зарплату. Они бросили работу, сели у храма и заявили: «Мы голодны!»</a:t>
             </a:r>
-            <a:endParaRPr lang="en-US" sz="1250" dirty="0"/>
+            <a:endParaRPr lang="ru-RU" sz="1250" dirty="0"/>
           </a:p>
         </p:txBody>
       </p:sp>
@@ -9471,7 +9369,7 @@
               <a:buNone/>
             </a:pPr>
             <a:r>
-              <a:rPr lang="en-US" sz="1000" b="1" spc="200" kern="0" dirty="0">
+              <a:rPr lang="ru-RU" sz="1000" b="1" spc="200" kern="0" dirty="0">
                 <a:solidFill>
                   <a:srgbClr val="6E5B45"/>
                 </a:solidFill>
@@ -9481,7 +9379,7 @@
               </a:rPr>
               <a:t>ЖУРНАЛ ПРОГУЛОВ: УВАЖИТЕЛЬНЫЕ ПРИЧИНЫ</a:t>
             </a:r>
-            <a:endParaRPr lang="en-US" sz="1000" dirty="0"/>
+            <a:endParaRPr lang="ru-RU" sz="1000" dirty="0"/>
           </a:p>
         </p:txBody>
       </p:sp>
@@ -9521,7 +9419,7 @@
           <p:nvPr/>
         </p:nvPicPr>
         <p:blipFill>
-          <a:blip r:embed="rId3"/>
+          <a:blip r:embed="rId2"/>
           <a:stretch>
             <a:fillRect/>
           </a:stretch>
@@ -9561,7 +9459,7 @@
               <a:buNone/>
             </a:pPr>
             <a:r>
-              <a:rPr lang="en-US" sz="1150" i="1" dirty="0">
+              <a:rPr lang="ru-RU" sz="1150" i="1" dirty="0">
                 <a:solidFill>
                   <a:srgbClr val="2A1E12"/>
                 </a:solidFill>
@@ -9571,7 +9469,7 @@
               </a:rPr>
               <a:t>«варил пиво»</a:t>
             </a:r>
-            <a:endParaRPr lang="en-US" sz="1150" dirty="0"/>
+            <a:endParaRPr lang="ru-RU" sz="1150" dirty="0"/>
           </a:p>
         </p:txBody>
       </p:sp>
@@ -9611,7 +9509,7 @@
           <p:nvPr/>
         </p:nvPicPr>
         <p:blipFill>
-          <a:blip r:embed="rId4"/>
+          <a:blip r:embed="rId3"/>
           <a:stretch>
             <a:fillRect/>
           </a:stretch>
@@ -9651,7 +9549,7 @@
               <a:buNone/>
             </a:pPr>
             <a:r>
-              <a:rPr lang="en-US" sz="1150" i="1" dirty="0">
+              <a:rPr lang="ru-RU" sz="1150" i="1" dirty="0">
                 <a:solidFill>
                   <a:srgbClr val="2A1E12"/>
                 </a:solidFill>
@@ -9661,7 +9559,7 @@
               </a:rPr>
               <a:t>«ужалил скорпион»</a:t>
             </a:r>
-            <a:endParaRPr lang="en-US" sz="1150" dirty="0"/>
+            <a:endParaRPr lang="ru-RU" sz="1150" dirty="0"/>
           </a:p>
         </p:txBody>
       </p:sp>
@@ -9701,7 +9599,7 @@
           <p:nvPr/>
         </p:nvPicPr>
         <p:blipFill>
-          <a:blip r:embed="rId5"/>
+          <a:blip r:embed="rId4"/>
           <a:stretch>
             <a:fillRect/>
           </a:stretch>
@@ -9741,7 +9639,7 @@
               <a:buNone/>
             </a:pPr>
             <a:r>
-              <a:rPr lang="en-US" sz="1150" i="1" dirty="0">
+              <a:rPr lang="ru-RU" sz="1150" i="1" dirty="0">
                 <a:solidFill>
                   <a:srgbClr val="2A1E12"/>
                 </a:solidFill>
@@ -9751,7 +9649,7 @@
               </a:rPr>
               <a:t>«болели глаза»</a:t>
             </a:r>
-            <a:endParaRPr lang="en-US" sz="1150" dirty="0"/>
+            <a:endParaRPr lang="ru-RU" sz="1150" dirty="0"/>
           </a:p>
         </p:txBody>
       </p:sp>
@@ -9791,7 +9689,7 @@
           <p:nvPr/>
         </p:nvPicPr>
         <p:blipFill>
-          <a:blip r:embed="rId6"/>
+          <a:blip r:embed="rId5"/>
           <a:stretch>
             <a:fillRect/>
           </a:stretch>
@@ -9831,7 +9729,7 @@
               <a:buNone/>
             </a:pPr>
             <a:r>
-              <a:rPr lang="en-US" sz="1150" i="1" dirty="0">
+              <a:rPr lang="ru-RU" sz="1150" i="1" dirty="0">
                 <a:solidFill>
                   <a:srgbClr val="2A1E12"/>
                 </a:solidFill>
@@ -9841,7 +9739,7 @@
               </a:rPr>
               <a:t>«бальзамировал брата»</a:t>
             </a:r>
-            <a:endParaRPr lang="en-US" sz="1150" dirty="0"/>
+            <a:endParaRPr lang="ru-RU" sz="1150" dirty="0"/>
           </a:p>
         </p:txBody>
       </p:sp>
@@ -9854,7 +9752,7 @@
           <p:nvPr/>
         </p:nvPicPr>
         <p:blipFill>
-          <a:blip r:embed="rId7"/>
+          <a:blip r:embed="rId6"/>
           <a:stretch>
             <a:fillRect/>
           </a:stretch>
@@ -9894,7 +9792,7 @@
               <a:buNone/>
             </a:pPr>
             <a:r>
-              <a:rPr lang="en-US" sz="1250" dirty="0">
+              <a:rPr lang="ru-RU" sz="1250" dirty="0">
                 <a:solidFill>
                   <a:srgbClr val="2A1E12"/>
                 </a:solidFill>
@@ -9904,7 +9802,7 @@
               </a:rPr>
               <a:t>А ещё неделя у египтян длилась 10 дней.</a:t>
             </a:r>
-            <a:endParaRPr lang="en-US" sz="1250" dirty="0"/>
+            <a:endParaRPr lang="ru-RU" sz="1250" dirty="0"/>
           </a:p>
         </p:txBody>
       </p:sp>
@@ -9950,7 +9848,7 @@
               </a:rPr>
               <a:t>Made by Heinrich Studio</a:t>
             </a:r>
-            <a:endParaRPr lang="en-US" sz="900" dirty="0"/>
+            <a:endParaRPr lang="ru-RU" sz="900" dirty="0"/>
           </a:p>
         </p:txBody>
       </p:sp>
@@ -9967,16 +9865,9 @@
   <p:cSld name="Slide 9">
     <p:bg>
       <p:bgPr>
-        <a:blipFill dpi="0" rotWithShape="1">
-          <a:blip r:embed="rId1">
-            <a:lum/>
-          </a:blip>
-          <a:srcRect/>
-          <a:stretch>
-            <a:fillRect/>
-          </a:stretch>
-        </a:blipFill>
-        <a:effectLst/>
+        <a:solidFill>
+          <a:srgbClr val="F5ECDA"/>
+        </a:solidFill>
       </p:bgPr>
     </p:bg>
     <p:spTree>
@@ -10034,7 +9925,7 @@
           <p:nvPr/>
         </p:nvPicPr>
         <p:blipFill>
-          <a:blip r:embed="rId2"/>
+          <a:blip r:embed="rId1"/>
           <a:stretch>
             <a:fillRect/>
           </a:stretch>
@@ -10126,7 +10017,7 @@
               <a:buNone/>
             </a:pPr>
             <a:r>
-              <a:rPr lang="en-US" sz="1000" b="1" spc="300" kern="0" dirty="0">
+              <a:rPr lang="ru-RU" sz="1000" b="1" spc="300" kern="0" dirty="0">
                 <a:solidFill>
                   <a:srgbClr val="A8432A"/>
                 </a:solidFill>
@@ -10136,7 +10027,7 @@
               </a:rPr>
               <a:t>УДИВИТЕЛЬНЫЕ ФАКТЫ</a:t>
             </a:r>
-            <a:endParaRPr lang="en-US" sz="1000" dirty="0"/>
+            <a:endParaRPr lang="ru-RU" sz="1000" dirty="0"/>
           </a:p>
         </p:txBody>
       </p:sp>
@@ -10165,7 +10056,7 @@
               <a:buNone/>
             </a:pPr>
             <a:r>
-              <a:rPr lang="en-US" sz="2600" b="1" dirty="0">
+              <a:rPr lang="ru-RU" sz="2600" b="1" dirty="0">
                 <a:solidFill>
                   <a:srgbClr val="2A1E12"/>
                 </a:solidFill>
@@ -10175,7 +10066,7 @@
               </a:rPr>
               <a:t>Кто отбил нос Сфинксу?</a:t>
             </a:r>
-            <a:endParaRPr lang="en-US" sz="2600" dirty="0"/>
+            <a:endParaRPr lang="ru-RU" sz="2600" dirty="0"/>
           </a:p>
         </p:txBody>
       </p:sp>
@@ -10222,7 +10113,7 @@
           <p:nvPr/>
         </p:nvPicPr>
         <p:blipFill>
-          <a:blip r:embed="rId3"/>
+          <a:blip r:embed="rId2"/>
           <a:stretch>
             <a:fillRect/>
           </a:stretch>
@@ -10262,7 +10153,7 @@
               <a:buNone/>
             </a:pPr>
             <a:r>
-              <a:rPr lang="en-US" sz="1150" b="1" dirty="0">
+              <a:rPr lang="ru-RU" sz="1150" b="1" dirty="0">
                 <a:solidFill>
                   <a:srgbClr val="A8432A"/>
                 </a:solidFill>
@@ -10276,7 +10167,7 @@
               <a:buNone/>
             </a:pPr>
             <a:r>
-              <a:rPr lang="en-US" sz="1150" dirty="0">
+              <a:rPr lang="ru-RU" sz="1150" dirty="0">
                 <a:solidFill>
                   <a:srgbClr val="2A1E12"/>
                 </a:solidFill>
@@ -10286,7 +10177,7 @@
               </a:rPr>
               <a:t>лицо статуи изуродовал фанатик Мухаммад Саим ад-Дахр — так писал историк аль-Макризи. Фанатика злило, что Сфинксу приносили дары. Следы зубил видны до сих пор.</a:t>
             </a:r>
-            <a:endParaRPr lang="en-US" sz="1150" dirty="0"/>
+            <a:endParaRPr lang="ru-RU" sz="1150" dirty="0"/>
           </a:p>
         </p:txBody>
       </p:sp>
@@ -10298,12 +10189,12 @@
         </p:nvSpPr>
         <p:spPr>
           <a:xfrm>
-            <a:off x="3611880" y="2542032"/>
-            <a:ext cx="5074920" cy="2121408"/>
+            <a:off x="3611880" y="2505456"/>
+            <a:ext cx="5074920" cy="2176272"/>
           </a:xfrm>
           <a:prstGeom prst="roundRect">
             <a:avLst>
-              <a:gd name="adj" fmla="val 4310"/>
+              <a:gd name="adj" fmla="val 4202"/>
             </a:avLst>
           </a:prstGeom>
           <a:solidFill>
@@ -10333,14 +10224,14 @@
           <p:nvPr/>
         </p:nvPicPr>
         <p:blipFill>
-          <a:blip r:embed="rId4"/>
+          <a:blip r:embed="rId3"/>
           <a:stretch>
             <a:fillRect/>
           </a:stretch>
         </p:blipFill>
         <p:spPr>
           <a:xfrm>
-            <a:off x="3758184" y="2660904"/>
+            <a:off x="3758184" y="2624328"/>
             <a:ext cx="329184" cy="329184"/>
           </a:xfrm>
           <a:prstGeom prst="rect">
@@ -10356,7 +10247,7 @@
         </p:nvSpPr>
         <p:spPr>
           <a:xfrm>
-            <a:off x="4178808" y="2651760"/>
+            <a:off x="4178808" y="2615184"/>
             <a:ext cx="4389120" cy="347472"/>
           </a:xfrm>
           <a:prstGeom prst="rect">
@@ -10373,7 +10264,7 @@
               <a:buNone/>
             </a:pPr>
             <a:r>
-              <a:rPr lang="en-US" sz="1350" b="1" dirty="0">
+              <a:rPr lang="ru-RU" sz="1350" b="1" dirty="0">
                 <a:solidFill>
                   <a:srgbClr val="A8432A"/>
                 </a:solidFill>
@@ -10383,7 +10274,7 @@
               </a:rPr>
               <a:t>Краска из мумий</a:t>
             </a:r>
-            <a:endParaRPr lang="en-US" sz="1350" dirty="0"/>
+            <a:endParaRPr lang="ru-RU" sz="1350" dirty="0"/>
           </a:p>
         </p:txBody>
       </p:sp>
@@ -10395,8 +10286,8 @@
         </p:nvSpPr>
         <p:spPr>
           <a:xfrm>
-            <a:off x="3794760" y="3108960"/>
-            <a:ext cx="4709160" cy="1435608"/>
+            <a:off x="3794760" y="3054096"/>
+            <a:ext cx="4709160" cy="1517904"/>
           </a:xfrm>
           <a:prstGeom prst="rect">
             <a:avLst/>
@@ -10416,7 +10307,7 @@
               <a:buChar char="•"/>
             </a:pPr>
             <a:r>
-              <a:rPr lang="en-US" sz="1200" dirty="0">
+              <a:rPr lang="ru-RU" sz="1150" dirty="0">
                 <a:solidFill>
                   <a:srgbClr val="2A1E12"/>
                 </a:solidFill>
@@ -10424,9 +10315,9 @@
                 <a:ea typeface="Calibri" pitchFamily="34" charset="-122"/>
                 <a:cs typeface="Calibri" pitchFamily="34" charset="-120"/>
               </a:rPr>
-              <a:t>С XVI–XVII века художники Европы писали картины коричневой краской «мумия».</a:t>
-            </a:r>
-            <a:endParaRPr lang="en-US" sz="1200" dirty="0"/>
+              <a:t>С XVI–XVII веков художники Европы писали картины коричневой краской «мумия».</a:t>
+            </a:r>
+            <a:endParaRPr lang="ru-RU" sz="1150" dirty="0"/>
           </a:p>
           <a:p>
             <a:pPr marL="152400" indent="-152400">
@@ -10437,7 +10328,7 @@
               <a:buChar char="•"/>
             </a:pPr>
             <a:r>
-              <a:rPr lang="en-US" sz="1200" dirty="0">
+              <a:rPr lang="ru-RU" sz="1150" dirty="0">
                 <a:solidFill>
                   <a:srgbClr val="2A1E12"/>
                 </a:solidFill>
@@ -10447,7 +10338,7 @@
               </a:rPr>
               <a:t>Её делали из перемолотых египетских мумий, смешанных со смолой и миррой.</a:t>
             </a:r>
-            <a:endParaRPr lang="en-US" sz="1200" dirty="0"/>
+            <a:endParaRPr lang="ru-RU" sz="1150" dirty="0"/>
           </a:p>
           <a:p>
             <a:pPr marL="152400" indent="-152400">
@@ -10458,7 +10349,7 @@
               <a:buChar char="•"/>
             </a:pPr>
             <a:r>
-              <a:rPr lang="en-US" sz="1200" dirty="0">
+              <a:rPr lang="ru-RU" sz="1150" dirty="0">
                 <a:solidFill>
                   <a:srgbClr val="2A1E12"/>
                 </a:solidFill>
@@ -10468,7 +10359,7 @@
               </a:rPr>
               <a:t>Художник Бёрн-Джонс, узнав об этом, закопал свой тюбик в саду.</a:t>
             </a:r>
-            <a:endParaRPr lang="en-US" sz="1200" dirty="0"/>
+            <a:endParaRPr lang="ru-RU" sz="1150" dirty="0"/>
           </a:p>
           <a:p>
             <a:pPr marL="152400" indent="-152400">
@@ -10479,7 +10370,7 @@
               <a:buChar char="•"/>
             </a:pPr>
             <a:r>
-              <a:rPr lang="en-US" sz="1200" dirty="0">
+              <a:rPr lang="ru-RU" sz="1150" dirty="0">
                 <a:solidFill>
                   <a:srgbClr val="2A1E12"/>
                 </a:solidFill>
@@ -10489,7 +10380,7 @@
               </a:rPr>
               <a:t>Последняя фирма перестала её выпускать в 1960-х годах: кончились мумии.</a:t>
             </a:r>
-            <a:endParaRPr lang="en-US" sz="1200" dirty="0"/>
+            <a:endParaRPr lang="ru-RU" sz="1150" dirty="0"/>
           </a:p>
         </p:txBody>
       </p:sp>
@@ -10528,7 +10419,7 @@
               </a:rPr>
               <a:t>Made by Heinrich Studio</a:t>
             </a:r>
-            <a:endParaRPr lang="en-US" sz="900" dirty="0"/>
+            <a:endParaRPr lang="ru-RU" sz="900" dirty="0"/>
           </a:p>
         </p:txBody>
       </p:sp>
